--- a/examples/investor_deck.pptx
+++ b/examples/investor_deck.pptx
@@ -3106,8 +3106,60 @@
           <a:prstGeom prst="rect">
             <a:avLst/>
           </a:prstGeom>
+          <a:gradFill rotWithShape="1">
+            <a:gsLst>
+              <a:gs pos="0">
+                <a:srgbClr val="08070E"/>
+              </a:gs>
+              <a:gs pos="100000">
+                <a:srgbClr val="11101B"/>
+              </a:gs>
+            </a:gsLst>
+            <a:lin ang="9600000" scaled="0"/>
+          </a:gradFill>
+          <a:ln>
+            <a:noFill/>
+          </a:ln>
+          <a:effectLst/>
+        </p:spPr>
+        <p:style>
+          <a:lnRef idx="1">
+            <a:schemeClr val="accent1"/>
+          </a:lnRef>
+          <a:fillRef idx="3">
+            <a:schemeClr val="accent1"/>
+          </a:fillRef>
+          <a:effectRef idx="2">
+            <a:schemeClr val="accent1"/>
+          </a:effectRef>
+          <a:fontRef idx="minor">
+            <a:schemeClr val="lt1"/>
+          </a:fontRef>
+        </p:style>
+        <p:txBody>
+          <a:bodyPr rtlCol="0" anchor="ctr"/>
+          <a:lstStyle/>
+          <a:p>
+            <a:pPr algn="ctr"/>
+          </a:p>
+        </p:txBody>
+      </p:sp>
+      <p:sp>
+        <p:nvSpPr>
+          <p:cNvPr id="3" name="Rectangle 2"/>
+          <p:cNvSpPr/>
+          <p:nvPr/>
+        </p:nvSpPr>
+        <p:spPr>
+          <a:xfrm>
+            <a:off x="0" y="0"/>
+            <a:ext cx="6096000" cy="19050"/>
+          </a:xfrm>
+          <a:prstGeom prst="rect">
+            <a:avLst/>
+          </a:prstGeom>
           <a:solidFill>
-            <a:srgbClr val="EEE9DE"/>
+            <a:srgbClr val="8B5CF6"/>
           </a:solidFill>
           <a:ln>
             <a:noFill/>
@@ -3138,90 +3190,20 @@
       </p:sp>
       <p:sp>
         <p:nvSpPr>
-          <p:cNvPr id="3" name="TextBox 2"/>
-          <p:cNvSpPr txBox="1"/>
+          <p:cNvPr id="4" name="Rectangle 3"/>
+          <p:cNvSpPr/>
           <p:nvPr/>
         </p:nvSpPr>
         <p:spPr>
           <a:xfrm>
-            <a:off x="685800" y="514350"/>
-            <a:ext cx="2000250" cy="133350"/>
+            <a:off x="6096000" y="0"/>
+            <a:ext cx="6096000" cy="19050"/>
           </a:xfrm>
           <a:prstGeom prst="rect">
             <a:avLst/>
           </a:prstGeom>
-          <a:noFill/>
-        </p:spPr>
-        <p:txBody>
-          <a:bodyPr wrap="none" anchor="t" lIns="0" rIns="0" tIns="0" bIns="0">
-            <a:noAutofit/>
-          </a:bodyPr>
-          <a:lstStyle/>
-          <a:p>
-            <a:pPr algn="l"/>
-            <a:r>
-              <a:rPr sz="1200" b="1" i="0">
-                <a:solidFill>
-                  <a:srgbClr val="F45A3A"/>
-                </a:solidFill>
-                <a:latin typeface="Pretendard"/>
-              </a:rPr>
-              <a:t>MOA  /  SEED ROUND</a:t>
-            </a:r>
-          </a:p>
-        </p:txBody>
-      </p:sp>
-      <p:sp>
-        <p:nvSpPr>
-          <p:cNvPr id="4" name="TextBox 3"/>
-          <p:cNvSpPr txBox="1"/>
-          <p:nvPr/>
-        </p:nvSpPr>
-        <p:spPr>
-          <a:xfrm>
-            <a:off x="10744200" y="514350"/>
-            <a:ext cx="762000" cy="104775"/>
-          </a:xfrm>
-          <a:prstGeom prst="rect">
-            <a:avLst/>
-          </a:prstGeom>
-          <a:noFill/>
-        </p:spPr>
-        <p:txBody>
-          <a:bodyPr wrap="none" anchor="t" lIns="0" rIns="0" tIns="0" bIns="0">
-            <a:noAutofit/>
-          </a:bodyPr>
-          <a:lstStyle/>
-          <a:p>
-            <a:pPr algn="r"/>
-            <a:r>
-              <a:rPr sz="1125" b="1" i="0">
-                <a:solidFill>
-                  <a:srgbClr val="68716C"/>
-                </a:solidFill>
-                <a:latin typeface="Pretendard"/>
-              </a:rPr>
-              <a:t>2026. 07</a:t>
-            </a:r>
-          </a:p>
-        </p:txBody>
-      </p:sp>
-      <p:sp>
-        <p:nvSpPr>
-          <p:cNvPr id="5" name="Oval 4"/>
-          <p:cNvSpPr/>
-          <p:nvPr/>
-        </p:nvSpPr>
-        <p:spPr>
-          <a:xfrm>
-            <a:off x="7477125" y="1304925"/>
-            <a:ext cx="4095750" cy="4095750"/>
-          </a:xfrm>
-          <a:prstGeom prst="ellipse">
-            <a:avLst/>
-          </a:prstGeom>
           <a:solidFill>
-            <a:srgbClr val="1D4A3C"/>
+            <a:srgbClr val="22D3EE"/>
           </a:solidFill>
           <a:ln>
             <a:noFill/>
@@ -3252,171 +3234,21 @@
       </p:sp>
       <p:sp>
         <p:nvSpPr>
-          <p:cNvPr id="6" name="Oval 5"/>
+          <p:cNvPr id="5" name="Oval 4"/>
           <p:cNvSpPr/>
           <p:nvPr/>
         </p:nvSpPr>
         <p:spPr>
           <a:xfrm>
-            <a:off x="8620125" y="2447925"/>
-            <a:ext cx="1809750" cy="1809750"/>
+            <a:off x="8543925" y="-1714500"/>
+            <a:ext cx="5334000" cy="5334000"/>
           </a:xfrm>
           <a:prstGeom prst="ellipse">
             <a:avLst/>
           </a:prstGeom>
           <a:solidFill>
-            <a:srgbClr val="F45A3A"/>
-          </a:solidFill>
-          <a:ln>
-            <a:noFill/>
-          </a:ln>
-          <a:effectLst/>
-        </p:spPr>
-        <p:style>
-          <a:lnRef idx="1">
-            <a:schemeClr val="accent1"/>
-          </a:lnRef>
-          <a:fillRef idx="3">
-            <a:schemeClr val="accent1"/>
-          </a:fillRef>
-          <a:effectRef idx="2">
-            <a:schemeClr val="accent1"/>
-          </a:effectRef>
-          <a:fontRef idx="minor">
-            <a:schemeClr val="lt1"/>
-          </a:fontRef>
-        </p:style>
-        <p:txBody>
-          <a:bodyPr rtlCol="0" anchor="ctr"/>
-          <a:lstStyle/>
-          <a:p>
-            <a:pPr algn="ctr"/>
-          </a:p>
-        </p:txBody>
-      </p:sp>
-      <p:sp>
-        <p:nvSpPr>
-          <p:cNvPr id="7" name="TextBox 6"/>
-          <p:cNvSpPr txBox="1"/>
-          <p:nvPr/>
-        </p:nvSpPr>
-        <p:spPr>
-          <a:xfrm>
-            <a:off x="685800" y="1447800"/>
-            <a:ext cx="5353050" cy="2228850"/>
-          </a:xfrm>
-          <a:prstGeom prst="rect">
-            <a:avLst/>
-          </a:prstGeom>
-          <a:noFill/>
-        </p:spPr>
-        <p:txBody>
-          <a:bodyPr wrap="none" anchor="t" lIns="0" rIns="0" tIns="0" bIns="0">
-            <a:noAutofit/>
-          </a:bodyPr>
-          <a:lstStyle/>
-          <a:p>
-            <a:pPr algn="l">
-              <a:lnSpc>
-                <a:spcPts val="6075"/>
-              </a:lnSpc>
-            </a:pPr>
-            <a:r>
-              <a:rPr sz="6000" b="1" i="0">
-                <a:solidFill>
-                  <a:srgbClr val="17211D"/>
-                </a:solidFill>
-                <a:latin typeface="Pretendard"/>
-              </a:rPr>
-              <a:t>돈을 관리하는 일이</a:t>
-            </a:r>
-          </a:p>
-          <a:p>
-            <a:pPr algn="l">
-              <a:lnSpc>
-                <a:spcPts val="6075"/>
-              </a:lnSpc>
-            </a:pPr>
-            <a:r>
-              <a:rPr sz="6000" b="1" i="0">
-                <a:solidFill>
-                  <a:srgbClr val="17211D"/>
-                </a:solidFill>
-                <a:latin typeface="Pretendard"/>
-              </a:rPr>
-              <a:t>삶을 미루는 일이</a:t>
-            </a:r>
-          </a:p>
-          <a:p>
-            <a:pPr algn="l">
-              <a:lnSpc>
-                <a:spcPts val="6075"/>
-              </a:lnSpc>
-            </a:pPr>
-            <a:r>
-              <a:rPr sz="6000" b="1" i="0">
-                <a:solidFill>
-                  <a:srgbClr val="17211D"/>
-                </a:solidFill>
-                <a:latin typeface="Pretendard"/>
-              </a:rPr>
-              <a:t>되지 않도록</a:t>
-            </a:r>
-          </a:p>
-        </p:txBody>
-      </p:sp>
-      <p:sp>
-        <p:nvSpPr>
-          <p:cNvPr id="8" name="TextBox 7"/>
-          <p:cNvSpPr txBox="1"/>
-          <p:nvPr/>
-        </p:nvSpPr>
-        <p:spPr>
-          <a:xfrm>
-            <a:off x="723900" y="4895850"/>
-            <a:ext cx="5638800" cy="219075"/>
-          </a:xfrm>
-          <a:prstGeom prst="rect">
-            <a:avLst/>
-          </a:prstGeom>
-          <a:noFill/>
-        </p:spPr>
-        <p:txBody>
-          <a:bodyPr wrap="none" anchor="t" lIns="0" rIns="0" tIns="0" bIns="0">
-            <a:noAutofit/>
-          </a:bodyPr>
-          <a:lstStyle/>
-          <a:p>
-            <a:pPr algn="l"/>
-            <a:r>
-              <a:rPr sz="1875" b="0" i="0">
-                <a:solidFill>
-                  <a:srgbClr val="68716C"/>
-                </a:solidFill>
-                <a:latin typeface="Pretendard"/>
-              </a:rPr>
-              <a:t>생활비 데이터를 오늘의 선택으로 바꾸는 개인 금융 코파일럿</a:t>
-            </a:r>
-          </a:p>
-        </p:txBody>
-      </p:sp>
-      <p:sp>
-        <p:nvSpPr>
-          <p:cNvPr id="9" name="Rectangle 8"/>
-          <p:cNvSpPr/>
-          <p:nvPr/>
-        </p:nvSpPr>
-        <p:spPr>
-          <a:xfrm>
-            <a:off x="685800" y="6057900"/>
-            <a:ext cx="10820400" cy="9525"/>
-          </a:xfrm>
-          <a:prstGeom prst="rect">
-            <a:avLst/>
-          </a:prstGeom>
-          <a:solidFill>
-            <a:srgbClr val="17211D">
-              <a:alpha val="20000"/>
+            <a:srgbClr val="8B5CF6">
+              <a:alpha val="6666"/>
             </a:srgbClr>
           </a:solidFill>
           <a:ln>
@@ -3448,14 +3280,60 @@
       </p:sp>
       <p:sp>
         <p:nvSpPr>
-          <p:cNvPr id="10" name="TextBox 9"/>
+          <p:cNvPr id="6" name="Oval 5"/>
+          <p:cNvSpPr/>
+          <p:nvPr/>
+        </p:nvSpPr>
+        <p:spPr>
+          <a:xfrm>
+            <a:off x="-1038225" y="4648200"/>
+            <a:ext cx="3048000" cy="3048000"/>
+          </a:xfrm>
+          <a:prstGeom prst="ellipse">
+            <a:avLst/>
+          </a:prstGeom>
+          <a:solidFill>
+            <a:srgbClr val="22D3EE">
+              <a:alpha val="5882"/>
+            </a:srgbClr>
+          </a:solidFill>
+          <a:ln>
+            <a:noFill/>
+          </a:ln>
+          <a:effectLst/>
+        </p:spPr>
+        <p:style>
+          <a:lnRef idx="1">
+            <a:schemeClr val="accent1"/>
+          </a:lnRef>
+          <a:fillRef idx="3">
+            <a:schemeClr val="accent1"/>
+          </a:fillRef>
+          <a:effectRef idx="2">
+            <a:schemeClr val="accent1"/>
+          </a:effectRef>
+          <a:fontRef idx="minor">
+            <a:schemeClr val="lt1"/>
+          </a:fontRef>
+        </p:style>
+        <p:txBody>
+          <a:bodyPr rtlCol="0" anchor="ctr"/>
+          <a:lstStyle/>
+          <a:p>
+            <a:pPr algn="ctr"/>
+          </a:p>
+        </p:txBody>
+      </p:sp>
+      <p:sp>
+        <p:nvSpPr>
+          <p:cNvPr id="7" name="TextBox 6"/>
           <p:cNvSpPr txBox="1"/>
           <p:nvPr/>
         </p:nvSpPr>
         <p:spPr>
           <a:xfrm>
-            <a:off x="10210800" y="6324600"/>
-            <a:ext cx="1295400" cy="104775"/>
+            <a:off x="1219200" y="581025"/>
+            <a:ext cx="542925" cy="123825"/>
           </a:xfrm>
           <a:prstGeom prst="rect">
             <a:avLst/>
@@ -3468,15 +3346,300 @@
           </a:bodyPr>
           <a:lstStyle/>
           <a:p>
+            <a:pPr algn="l"/>
+            <a:r>
+              <a:rPr sz="1350" b="1" i="0">
+                <a:solidFill>
+                  <a:srgbClr val="8B5CF6"/>
+                </a:solidFill>
+                <a:latin typeface="Roboto"/>
+              </a:rPr>
+              <a:t>VELA</a:t>
+            </a:r>
+          </a:p>
+        </p:txBody>
+      </p:sp>
+      <p:sp>
+        <p:nvSpPr>
+          <p:cNvPr id="8" name="TextBox 7"/>
+          <p:cNvSpPr txBox="1"/>
+          <p:nvPr/>
+        </p:nvSpPr>
+        <p:spPr>
+          <a:xfrm>
+            <a:off x="1219200" y="1200150"/>
+            <a:ext cx="4143375" cy="133350"/>
+          </a:xfrm>
+          <a:prstGeom prst="rect">
+            <a:avLst/>
+          </a:prstGeom>
+          <a:noFill/>
+        </p:spPr>
+        <p:txBody>
+          <a:bodyPr wrap="none" anchor="t" lIns="0" rIns="0" tIns="0" bIns="0">
+            <a:noAutofit/>
+          </a:bodyPr>
+          <a:lstStyle/>
+          <a:p>
+            <a:pPr algn="l"/>
+            <a:r>
+              <a:rPr sz="1425" b="0" i="0">
+                <a:solidFill>
+                  <a:srgbClr val="64748B"/>
+                </a:solidFill>
+                <a:latin typeface="Roboto"/>
+              </a:rPr>
+              <a:t>SERIES A  ·  INVESTOR PRESENTATION</a:t>
+            </a:r>
+          </a:p>
+        </p:txBody>
+      </p:sp>
+      <p:sp>
+        <p:nvSpPr>
+          <p:cNvPr id="9" name="TextBox 8"/>
+          <p:cNvSpPr txBox="1"/>
+          <p:nvPr/>
+        </p:nvSpPr>
+        <p:spPr>
+          <a:xfrm>
+            <a:off x="1219200" y="1847850"/>
+            <a:ext cx="6648450" cy="2886075"/>
+          </a:xfrm>
+          <a:prstGeom prst="rect">
+            <a:avLst/>
+          </a:prstGeom>
+          <a:noFill/>
+        </p:spPr>
+        <p:txBody>
+          <a:bodyPr wrap="none" anchor="t" lIns="0" rIns="0" tIns="0" bIns="0">
+            <a:noAutofit/>
+          </a:bodyPr>
+          <a:lstStyle/>
+          <a:p>
+            <a:pPr algn="l">
+              <a:lnSpc>
+                <a:spcPts val="8175"/>
+              </a:lnSpc>
+            </a:pPr>
+            <a:r>
+              <a:rPr sz="8100" b="1" i="0">
+                <a:gradFill rotWithShape="1">
+                  <a:gsLst>
+                    <a:gs pos="0">
+                      <a:srgbClr val="6B7FF3"/>
+                    </a:gs>
+                    <a:gs pos="100000">
+                      <a:srgbClr val="41AFF0"/>
+                    </a:gs>
+                  </a:gsLst>
+                  <a:lin ang="5400000" scaled="0"/>
+                </a:gradFill>
+                <a:effectLst>
+                  <a:outerShdw blurRad="342900" dist="57150" dir="5400000" rotWithShape="0">
+                    <a:srgbClr val="000000">
+                      <a:alpha val="46666"/>
+                    </a:srgbClr>
+                  </a:outerShdw>
+                </a:effectLst>
+                <a:latin typeface="Noto Serif"/>
+              </a:rPr>
+              <a:t>Make better</a:t>
+            </a:r>
+          </a:p>
+          <a:p>
+            <a:pPr algn="l">
+              <a:lnSpc>
+                <a:spcPts val="8175"/>
+              </a:lnSpc>
+            </a:pPr>
+            <a:r>
+              <a:rPr sz="8100" b="1" i="0">
+                <a:gradFill rotWithShape="1">
+                  <a:gsLst>
+                    <a:gs pos="0">
+                      <a:srgbClr val="6B7FF3"/>
+                    </a:gs>
+                    <a:gs pos="100000">
+                      <a:srgbClr val="41AFF0"/>
+                    </a:gs>
+                  </a:gsLst>
+                  <a:lin ang="5400000" scaled="0"/>
+                </a:gradFill>
+                <a:effectLst>
+                  <a:outerShdw blurRad="342900" dist="57150" dir="5400000" rotWithShape="0">
+                    <a:srgbClr val="000000">
+                      <a:alpha val="46666"/>
+                    </a:srgbClr>
+                  </a:outerShdw>
+                </a:effectLst>
+                <a:latin typeface="Noto Serif"/>
+              </a:rPr>
+              <a:t>decisions,</a:t>
+            </a:r>
+          </a:p>
+          <a:p>
+            <a:pPr algn="l">
+              <a:lnSpc>
+                <a:spcPts val="8175"/>
+              </a:lnSpc>
+            </a:pPr>
+            <a:r>
+              <a:rPr sz="8100" b="1" i="0">
+                <a:gradFill rotWithShape="1">
+                  <a:gsLst>
+                    <a:gs pos="0">
+                      <a:srgbClr val="6B7FF3"/>
+                    </a:gs>
+                    <a:gs pos="100000">
+                      <a:srgbClr val="41AFF0"/>
+                    </a:gs>
+                  </a:gsLst>
+                  <a:lin ang="5400000" scaled="0"/>
+                </a:gradFill>
+                <a:effectLst>
+                  <a:outerShdw blurRad="342900" dist="57150" dir="5400000" rotWithShape="0">
+                    <a:srgbClr val="000000">
+                      <a:alpha val="46666"/>
+                    </a:srgbClr>
+                  </a:outerShdw>
+                </a:effectLst>
+                <a:latin typeface="Noto Serif"/>
+              </a:rPr>
+              <a:t>faster.</a:t>
+            </a:r>
+          </a:p>
+        </p:txBody>
+      </p:sp>
+      <p:sp>
+        <p:nvSpPr>
+          <p:cNvPr id="10" name="Rectangle 9"/>
+          <p:cNvSpPr/>
+          <p:nvPr/>
+        </p:nvSpPr>
+        <p:spPr>
+          <a:xfrm>
+            <a:off x="1219200" y="5276850"/>
+            <a:ext cx="9144000" cy="9525"/>
+          </a:xfrm>
+          <a:prstGeom prst="rect">
+            <a:avLst/>
+          </a:prstGeom>
+          <a:solidFill>
+            <a:srgbClr val="1E1D2F"/>
+          </a:solidFill>
+          <a:ln>
+            <a:noFill/>
+          </a:ln>
+          <a:effectLst/>
+        </p:spPr>
+        <p:style>
+          <a:lnRef idx="1">
+            <a:schemeClr val="accent1"/>
+          </a:lnRef>
+          <a:fillRef idx="3">
+            <a:schemeClr val="accent1"/>
+          </a:fillRef>
+          <a:effectRef idx="2">
+            <a:schemeClr val="accent1"/>
+          </a:effectRef>
+          <a:fontRef idx="minor">
+            <a:schemeClr val="lt1"/>
+          </a:fontRef>
+        </p:style>
+        <p:txBody>
+          <a:bodyPr rtlCol="0" anchor="ctr"/>
+          <a:lstStyle/>
+          <a:p>
+            <a:pPr algn="ctr"/>
+          </a:p>
+        </p:txBody>
+      </p:sp>
+      <p:sp>
+        <p:nvSpPr>
+          <p:cNvPr id="11" name="TextBox 10"/>
+          <p:cNvSpPr txBox="1"/>
+          <p:nvPr/>
+        </p:nvSpPr>
+        <p:spPr>
+          <a:xfrm>
+            <a:off x="1219200" y="5553075"/>
+            <a:ext cx="7439025" cy="638175"/>
+          </a:xfrm>
+          <a:prstGeom prst="rect">
+            <a:avLst/>
+          </a:prstGeom>
+          <a:noFill/>
+        </p:spPr>
+        <p:txBody>
+          <a:bodyPr wrap="none" anchor="t" lIns="0" rIns="0" tIns="0" bIns="0">
+            <a:noAutofit/>
+          </a:bodyPr>
+          <a:lstStyle/>
+          <a:p>
+            <a:pPr algn="l">
+              <a:lnSpc>
+                <a:spcPts val="3075"/>
+              </a:lnSpc>
+            </a:pPr>
+            <a:r>
+              <a:rPr sz="2025" b="0" i="0">
+                <a:solidFill>
+                  <a:srgbClr val="C4C4D4"/>
+                </a:solidFill>
+                <a:latin typeface="Roboto"/>
+              </a:rPr>
+              <a:t>Vela surfaces the signals that matter in your product data</a:t>
+            </a:r>
+          </a:p>
+          <a:p>
+            <a:pPr algn="l">
+              <a:lnSpc>
+                <a:spcPts val="3075"/>
+              </a:lnSpc>
+            </a:pPr>
+            <a:r>
+              <a:rPr sz="2025" b="0" i="0">
+                <a:solidFill>
+                  <a:srgbClr val="C4C4D4"/>
+                </a:solidFill>
+                <a:latin typeface="Roboto"/>
+              </a:rPr>
+              <a:t>so your team stops guessing and starts shipping with confidence.</a:t>
+            </a:r>
+          </a:p>
+        </p:txBody>
+      </p:sp>
+      <p:sp>
+        <p:nvSpPr>
+          <p:cNvPr id="12" name="TextBox 11"/>
+          <p:cNvSpPr txBox="1"/>
+          <p:nvPr/>
+        </p:nvSpPr>
+        <p:spPr>
+          <a:xfrm>
+            <a:off x="10125075" y="6372225"/>
+            <a:ext cx="847725" cy="123825"/>
+          </a:xfrm>
+          <a:prstGeom prst="rect">
+            <a:avLst/>
+          </a:prstGeom>
+          <a:noFill/>
+        </p:spPr>
+        <p:txBody>
+          <a:bodyPr wrap="none" anchor="t" lIns="0" rIns="0" tIns="0" bIns="0">
+            <a:noAutofit/>
+          </a:bodyPr>
+          <a:lstStyle/>
+          <a:p>
             <a:pPr algn="r"/>
             <a:r>
-              <a:rPr sz="1050" b="1" i="0">
+              <a:rPr sz="1275" b="0" i="0">
                 <a:solidFill>
-                  <a:srgbClr val="68716C"/>
+                  <a:srgbClr val="64748B"/>
                 </a:solidFill>
-                <a:latin typeface="Pretendard"/>
+                <a:latin typeface="Roboto"/>
               </a:rPr>
-              <a:t>CONFIDENTIAL</a:t>
+              <a:t>Confidential</a:t>
             </a:r>
           </a:p>
         </p:txBody>
@@ -3507,7 +3670,7 @@
                             </p:stCondLst>
                             <p:childTnLst>
                               <p:par>
-                                <p:cTn id="10" presetID="8" presetClass="entr" presetSubtype="0" fill="hold" grpId="0" nodeType="clickEffect">
+                                <p:cTn id="10" presetID="10" presetClass="entr" presetSubtype="0" fill="hold" grpId="0" nodeType="clickEffect">
                                   <p:stCondLst>
                                     <p:cond delay="0"/>
                                   </p:stCondLst>
@@ -3515,129 +3678,6 @@
                                     <p:set>
                                       <p:cBhvr>
                                         <p:cTn id="11" dur="1" fill="hold">
-                                          <p:stCondLst>
-                                            <p:cond delay="0"/>
-                                          </p:stCondLst>
-                                        </p:cTn>
-                                        <p:tgtEl>
-                                          <p:spTgt spid="5"/>
-                                        </p:tgtEl>
-                                        <p:attrNameLst>
-                                          <p:attrName>style.visibility</p:attrName>
-                                        </p:attrNameLst>
-                                      </p:cBhvr>
-                                      <p:to>
-                                        <p:strVal val="visible"/>
-                                      </p:to>
-                                    </p:set>
-                                    <p:animEffect transition="in" filter="box(in)">
-                                      <p:cBhvr>
-                                        <p:cTn id="12" dur="550"/>
-                                        <p:tgtEl>
-                                          <p:spTgt spid="5"/>
-                                        </p:tgtEl>
-                                      </p:cBhvr>
-                                    </p:animEffect>
-                                  </p:childTnLst>
-                                </p:cTn>
-                              </p:par>
-                              <p:par>
-                                <p:cTn id="13" presetID="10" presetClass="entr" presetSubtype="0" fill="hold" grpId="0" nodeType="afterEffect">
-                                  <p:stCondLst>
-                                    <p:cond delay="0"/>
-                                  </p:stCondLst>
-                                  <p:childTnLst>
-                                    <p:set>
-                                      <p:cBhvr>
-                                        <p:cTn id="14" dur="1" fill="hold">
-                                          <p:stCondLst>
-                                            <p:cond delay="0"/>
-                                          </p:stCondLst>
-                                        </p:cTn>
-                                        <p:tgtEl>
-                                          <p:spTgt spid="6"/>
-                                        </p:tgtEl>
-                                        <p:attrNameLst>
-                                          <p:attrName>style.visibility</p:attrName>
-                                        </p:attrNameLst>
-                                      </p:cBhvr>
-                                      <p:to>
-                                        <p:strVal val="visible"/>
-                                      </p:to>
-                                    </p:set>
-                                    <p:animEffect transition="in" filter="fade">
-                                      <p:cBhvr>
-                                        <p:cTn id="15" dur="400"/>
-                                        <p:tgtEl>
-                                          <p:spTgt spid="6"/>
-                                        </p:tgtEl>
-                                      </p:cBhvr>
-                                    </p:animEffect>
-                                  </p:childTnLst>
-                                </p:cTn>
-                              </p:par>
-                            </p:childTnLst>
-                          </p:cTn>
-                        </p:par>
-                      </p:childTnLst>
-                    </p:cTn>
-                  </p:par>
-                  <p:par>
-                    <p:cTn id="16" fill="hold">
-                      <p:stCondLst>
-                        <p:cond delay="indefinite"/>
-                      </p:stCondLst>
-                      <p:childTnLst>
-                        <p:par>
-                          <p:cTn id="17" fill="hold">
-                            <p:stCondLst>
-                              <p:cond delay="0"/>
-                            </p:stCondLst>
-                            <p:childTnLst>
-                              <p:par>
-                                <p:cTn id="18" presetID="22" presetClass="entr" presetSubtype="0" fill="hold" grpId="0" nodeType="clickEffect">
-                                  <p:stCondLst>
-                                    <p:cond delay="0"/>
-                                  </p:stCondLst>
-                                  <p:childTnLst>
-                                    <p:set>
-                                      <p:cBhvr>
-                                        <p:cTn id="19" dur="1" fill="hold">
-                                          <p:stCondLst>
-                                            <p:cond delay="0"/>
-                                          </p:stCondLst>
-                                        </p:cTn>
-                                        <p:tgtEl>
-                                          <p:spTgt spid="7"/>
-                                        </p:tgtEl>
-                                        <p:attrNameLst>
-                                          <p:attrName>style.visibility</p:attrName>
-                                        </p:attrNameLst>
-                                      </p:cBhvr>
-                                      <p:to>
-                                        <p:strVal val="visible"/>
-                                      </p:to>
-                                    </p:set>
-                                    <p:animEffect transition="in" filter="wipe(up)">
-                                      <p:cBhvr>
-                                        <p:cTn id="20" dur="550"/>
-                                        <p:tgtEl>
-                                          <p:spTgt spid="7"/>
-                                        </p:tgtEl>
-                                      </p:cBhvr>
-                                    </p:animEffect>
-                                  </p:childTnLst>
-                                </p:cTn>
-                              </p:par>
-                              <p:par>
-                                <p:cTn id="21" presetID="10" presetClass="entr" presetSubtype="0" fill="hold" grpId="0" nodeType="afterEffect">
-                                  <p:stCondLst>
-                                    <p:cond delay="0"/>
-                                  </p:stCondLst>
-                                  <p:childTnLst>
-                                    <p:set>
-                                      <p:cBhvr>
-                                        <p:cTn id="22" dur="1" fill="hold">
                                           <p:stCondLst>
                                             <p:cond delay="0"/>
                                           </p:stCondLst>
@@ -3655,9 +3695,114 @@
                                     </p:set>
                                     <p:animEffect transition="in" filter="fade">
                                       <p:cBhvr>
-                                        <p:cTn id="23" dur="400"/>
+                                        <p:cTn id="12" dur="450"/>
                                         <p:tgtEl>
                                           <p:spTgt spid="8"/>
+                                        </p:tgtEl>
+                                      </p:cBhvr>
+                                    </p:animEffect>
+                                  </p:childTnLst>
+                                </p:cTn>
+                              </p:par>
+                              <p:par>
+                                <p:cTn id="13" presetID="8" presetClass="entr" presetSubtype="0" fill="hold" grpId="0" nodeType="afterEffect">
+                                  <p:stCondLst>
+                                    <p:cond delay="0"/>
+                                  </p:stCondLst>
+                                  <p:childTnLst>
+                                    <p:set>
+                                      <p:cBhvr>
+                                        <p:cTn id="14" dur="1" fill="hold">
+                                          <p:stCondLst>
+                                            <p:cond delay="0"/>
+                                          </p:stCondLst>
+                                        </p:cTn>
+                                        <p:tgtEl>
+                                          <p:spTgt spid="9"/>
+                                        </p:tgtEl>
+                                        <p:attrNameLst>
+                                          <p:attrName>style.visibility</p:attrName>
+                                        </p:attrNameLst>
+                                      </p:cBhvr>
+                                      <p:to>
+                                        <p:strVal val="visible"/>
+                                      </p:to>
+                                    </p:set>
+                                    <p:animEffect transition="in" filter="box(in)">
+                                      <p:cBhvr>
+                                        <p:cTn id="15" dur="550"/>
+                                        <p:tgtEl>
+                                          <p:spTgt spid="9"/>
+                                        </p:tgtEl>
+                                      </p:cBhvr>
+                                    </p:animEffect>
+                                  </p:childTnLst>
+                                </p:cTn>
+                              </p:par>
+                              <p:par>
+                                <p:cTn id="16" presetID="22" presetClass="entr" presetSubtype="0" fill="hold" grpId="0" nodeType="afterEffect">
+                                  <p:stCondLst>
+                                    <p:cond delay="0"/>
+                                  </p:stCondLst>
+                                  <p:childTnLst>
+                                    <p:set>
+                                      <p:cBhvr>
+                                        <p:cTn id="17" dur="1" fill="hold">
+                                          <p:stCondLst>
+                                            <p:cond delay="0"/>
+                                          </p:stCondLst>
+                                        </p:cTn>
+                                        <p:tgtEl>
+                                          <p:spTgt spid="10"/>
+                                        </p:tgtEl>
+                                        <p:attrNameLst>
+                                          <p:attrName>style.visibility</p:attrName>
+                                        </p:attrNameLst>
+                                      </p:cBhvr>
+                                      <p:to>
+                                        <p:strVal val="visible"/>
+                                      </p:to>
+                                    </p:set>
+                                    <p:animEffect transition="in" filter="wipe(right)">
+                                      <p:cBhvr>
+                                        <p:cTn id="18" dur="400"/>
+                                        <p:tgtEl>
+                                          <p:spTgt spid="10"/>
+                                        </p:tgtEl>
+                                      </p:cBhvr>
+                                    </p:animEffect>
+                                  </p:childTnLst>
+                                </p:cTn>
+                              </p:par>
+                              <p:par>
+                                <p:cTn id="19" presetID="10" presetClass="entr" presetSubtype="0" fill="hold" grpId="0" nodeType="afterEffect">
+                                  <p:stCondLst>
+                                    <p:cond delay="0"/>
+                                  </p:stCondLst>
+                                  <p:childTnLst>
+                                    <p:set>
+                                      <p:cBhvr>
+                                        <p:cTn id="20" dur="1" fill="hold">
+                                          <p:stCondLst>
+                                            <p:cond delay="0"/>
+                                          </p:stCondLst>
+                                        </p:cTn>
+                                        <p:tgtEl>
+                                          <p:spTgt spid="11"/>
+                                        </p:tgtEl>
+                                        <p:attrNameLst>
+                                          <p:attrName>style.visibility</p:attrName>
+                                        </p:attrNameLst>
+                                      </p:cBhvr>
+                                      <p:to>
+                                        <p:strVal val="visible"/>
+                                      </p:to>
+                                    </p:set>
+                                    <p:animEffect transition="in" filter="fade">
+                                      <p:cBhvr>
+                                        <p:cTn id="21" dur="450"/>
+                                        <p:tgtEl>
+                                          <p:spTgt spid="11"/>
                                         </p:tgtEl>
                                       </p:cBhvr>
                                     </p:animEffect>
@@ -3701,7 +3846,7 @@
                         </p:stCondLst>
                       </p:cTn>
                       <p:tgtEl>
-                        <p:spTgt spid="5"/>
+                        <p:spTgt spid="8"/>
                       </p:tgtEl>
                       <p:attrNameLst>
                         <p:attrName>style.visibility</p:attrName>
@@ -3719,7 +3864,7 @@
                         </p:stCondLst>
                       </p:cTn>
                       <p:tgtEl>
-                        <p:spTgt spid="6"/>
+                        <p:spTgt spid="9"/>
                       </p:tgtEl>
                       <p:attrNameLst>
                         <p:attrName>style.visibility</p:attrName>
@@ -3737,7 +3882,7 @@
                         </p:stCondLst>
                       </p:cTn>
                       <p:tgtEl>
-                        <p:spTgt spid="7"/>
+                        <p:spTgt spid="10"/>
                       </p:tgtEl>
                       <p:attrNameLst>
                         <p:attrName>style.visibility</p:attrName>
@@ -3755,7 +3900,7 @@
                         </p:stCondLst>
                       </p:cTn>
                       <p:tgtEl>
-                        <p:spTgt spid="8"/>
+                        <p:spTgt spid="11"/>
                       </p:tgtEl>
                       <p:attrNameLst>
                         <p:attrName>style.visibility</p:attrName>
@@ -3800,8 +3945,60 @@
           <a:prstGeom prst="rect">
             <a:avLst/>
           </a:prstGeom>
+          <a:gradFill rotWithShape="1">
+            <a:gsLst>
+              <a:gs pos="0">
+                <a:srgbClr val="08070E"/>
+              </a:gs>
+              <a:gs pos="100000">
+                <a:srgbClr val="11101B"/>
+              </a:gs>
+            </a:gsLst>
+            <a:lin ang="9600000" scaled="0"/>
+          </a:gradFill>
+          <a:ln>
+            <a:noFill/>
+          </a:ln>
+          <a:effectLst/>
+        </p:spPr>
+        <p:style>
+          <a:lnRef idx="1">
+            <a:schemeClr val="accent1"/>
+          </a:lnRef>
+          <a:fillRef idx="3">
+            <a:schemeClr val="accent1"/>
+          </a:fillRef>
+          <a:effectRef idx="2">
+            <a:schemeClr val="accent1"/>
+          </a:effectRef>
+          <a:fontRef idx="minor">
+            <a:schemeClr val="lt1"/>
+          </a:fontRef>
+        </p:style>
+        <p:txBody>
+          <a:bodyPr rtlCol="0" anchor="ctr"/>
+          <a:lstStyle/>
+          <a:p>
+            <a:pPr algn="ctr"/>
+          </a:p>
+        </p:txBody>
+      </p:sp>
+      <p:sp>
+        <p:nvSpPr>
+          <p:cNvPr id="3" name="Rectangle 2"/>
+          <p:cNvSpPr/>
+          <p:nvPr/>
+        </p:nvSpPr>
+        <p:spPr>
+          <a:xfrm>
+            <a:off x="0" y="0"/>
+            <a:ext cx="6096000" cy="19050"/>
+          </a:xfrm>
+          <a:prstGeom prst="rect">
+            <a:avLst/>
+          </a:prstGeom>
           <a:solidFill>
-            <a:srgbClr val="17211D"/>
+            <a:srgbClr val="8B5CF6"/>
           </a:solidFill>
           <a:ln>
             <a:noFill/>
@@ -3832,237 +4029,20 @@
       </p:sp>
       <p:sp>
         <p:nvSpPr>
-          <p:cNvPr id="3" name="TextBox 2"/>
-          <p:cNvSpPr txBox="1"/>
+          <p:cNvPr id="4" name="Rectangle 3"/>
+          <p:cNvSpPr/>
           <p:nvPr/>
         </p:nvSpPr>
         <p:spPr>
           <a:xfrm>
-            <a:off x="685800" y="514350"/>
-            <a:ext cx="1857375" cy="133350"/>
-          </a:xfrm>
-          <a:prstGeom prst="rect">
-            <a:avLst/>
-          </a:prstGeom>
-          <a:noFill/>
-        </p:spPr>
-        <p:txBody>
-          <a:bodyPr wrap="none" anchor="t" lIns="0" rIns="0" tIns="0" bIns="0">
-            <a:noAutofit/>
-          </a:bodyPr>
-          <a:lstStyle/>
-          <a:p>
-            <a:pPr algn="l"/>
-            <a:r>
-              <a:rPr sz="1200" b="1" i="0">
-                <a:solidFill>
-                  <a:srgbClr val="F45A3A"/>
-                </a:solidFill>
-                <a:latin typeface="Pretendard"/>
-              </a:rPr>
-              <a:t>01  /  THE TENSION</a:t>
-            </a:r>
-          </a:p>
-        </p:txBody>
-      </p:sp>
-      <p:sp>
-        <p:nvSpPr>
-          <p:cNvPr id="4" name="TextBox 3"/>
-          <p:cNvSpPr txBox="1"/>
-          <p:nvPr/>
-        </p:nvSpPr>
-        <p:spPr>
-          <a:xfrm>
-            <a:off x="11296650" y="514350"/>
-            <a:ext cx="209550" cy="104775"/>
-          </a:xfrm>
-          <a:prstGeom prst="rect">
-            <a:avLst/>
-          </a:prstGeom>
-          <a:noFill/>
-        </p:spPr>
-        <p:txBody>
-          <a:bodyPr wrap="none" anchor="t" lIns="0" rIns="0" tIns="0" bIns="0">
-            <a:noAutofit/>
-          </a:bodyPr>
-          <a:lstStyle/>
-          <a:p>
-            <a:pPr algn="r"/>
-            <a:r>
-              <a:rPr sz="1125" b="1" i="0">
-                <a:solidFill>
-                  <a:srgbClr val="68716C"/>
-                </a:solidFill>
-                <a:latin typeface="Pretendard"/>
-              </a:rPr>
-              <a:t>02</a:t>
-            </a:r>
-          </a:p>
-        </p:txBody>
-      </p:sp>
-      <p:sp>
-        <p:nvSpPr>
-          <p:cNvPr id="5" name="TextBox 4"/>
-          <p:cNvSpPr txBox="1"/>
-          <p:nvPr/>
-        </p:nvSpPr>
-        <p:spPr>
-          <a:xfrm>
-            <a:off x="685800" y="1238250"/>
-            <a:ext cx="5048250" cy="1371600"/>
-          </a:xfrm>
-          <a:prstGeom prst="rect">
-            <a:avLst/>
-          </a:prstGeom>
-          <a:noFill/>
-        </p:spPr>
-        <p:txBody>
-          <a:bodyPr wrap="none" anchor="t" lIns="0" rIns="0" tIns="0" bIns="0">
-            <a:noAutofit/>
-          </a:bodyPr>
-          <a:lstStyle/>
-          <a:p>
-            <a:pPr algn="l">
-              <a:lnSpc>
-                <a:spcPts val="5775"/>
-              </a:lnSpc>
-            </a:pPr>
-            <a:r>
-              <a:rPr sz="5625" b="1" i="0">
-                <a:solidFill>
-                  <a:srgbClr val="FFFDF7"/>
-                </a:solidFill>
-                <a:latin typeface="Pretendard"/>
-              </a:rPr>
-              <a:t>월급은 숫자인데,</a:t>
-            </a:r>
-          </a:p>
-          <a:p>
-            <a:pPr algn="l">
-              <a:lnSpc>
-                <a:spcPts val="5775"/>
-              </a:lnSpc>
-            </a:pPr>
-            <a:r>
-              <a:rPr sz="5625" b="1" i="0">
-                <a:solidFill>
-                  <a:srgbClr val="FFFDF7"/>
-                </a:solidFill>
-                <a:latin typeface="Pretendard"/>
-              </a:rPr>
-              <a:t>불안은 감각입니다.</a:t>
-            </a:r>
-          </a:p>
-        </p:txBody>
-      </p:sp>
-      <p:sp>
-        <p:nvSpPr>
-          <p:cNvPr id="6" name="TextBox 5"/>
-          <p:cNvSpPr txBox="1"/>
-          <p:nvPr/>
-        </p:nvSpPr>
-        <p:spPr>
-          <a:xfrm>
-            <a:off x="8020050" y="1352550"/>
-            <a:ext cx="3686175" cy="1247775"/>
-          </a:xfrm>
-          <a:prstGeom prst="rect">
-            <a:avLst/>
-          </a:prstGeom>
-          <a:noFill/>
-        </p:spPr>
-        <p:txBody>
-          <a:bodyPr wrap="none" anchor="t" lIns="0" rIns="0" tIns="0" bIns="0">
-            <a:noAutofit/>
-          </a:bodyPr>
-          <a:lstStyle/>
-          <a:p>
-            <a:pPr algn="l"/>
-            <a:r>
-              <a:rPr sz="12900" b="1" i="0">
-                <a:solidFill>
-                  <a:srgbClr val="F45A3A"/>
-                </a:solidFill>
-                <a:latin typeface="Pretendard"/>
-              </a:rPr>
-              <a:t>68%</a:t>
-            </a:r>
-          </a:p>
-        </p:txBody>
-      </p:sp>
-      <p:sp>
-        <p:nvSpPr>
-          <p:cNvPr id="7" name="TextBox 6"/>
-          <p:cNvSpPr txBox="1"/>
-          <p:nvPr/>
-        </p:nvSpPr>
-        <p:spPr>
-          <a:xfrm>
-            <a:off x="8172450" y="3162300"/>
-            <a:ext cx="2019300" cy="466725"/>
-          </a:xfrm>
-          <a:prstGeom prst="rect">
-            <a:avLst/>
-          </a:prstGeom>
-          <a:noFill/>
-        </p:spPr>
-        <p:txBody>
-          <a:bodyPr wrap="none" anchor="t" lIns="0" rIns="0" tIns="0" bIns="0">
-            <a:noAutofit/>
-          </a:bodyPr>
-          <a:lstStyle/>
-          <a:p>
-            <a:pPr algn="l">
-              <a:lnSpc>
-                <a:spcPts val="2100"/>
-              </a:lnSpc>
-            </a:pPr>
-            <a:r>
-              <a:rPr sz="1725" b="0" i="0">
-                <a:solidFill>
-                  <a:srgbClr val="B9D9C8"/>
-                </a:solidFill>
-                <a:latin typeface="Pretendard"/>
-              </a:rPr>
-              <a:t>다음 달 지출을 정확히</a:t>
-            </a:r>
-          </a:p>
-          <a:p>
-            <a:pPr algn="l">
-              <a:lnSpc>
-                <a:spcPts val="2100"/>
-              </a:lnSpc>
-            </a:pPr>
-            <a:r>
-              <a:rPr sz="1725" b="0" i="0">
-                <a:solidFill>
-                  <a:srgbClr val="B9D9C8"/>
-                </a:solidFill>
-                <a:latin typeface="Pretendard"/>
-              </a:rPr>
-              <a:t>예상하지 못하는 직장인</a:t>
-            </a:r>
-          </a:p>
-        </p:txBody>
-      </p:sp>
-      <p:sp>
-        <p:nvSpPr>
-          <p:cNvPr id="8" name="Rectangle 7"/>
-          <p:cNvSpPr/>
-          <p:nvPr/>
-        </p:nvSpPr>
-        <p:spPr>
-          <a:xfrm>
-            <a:off x="685800" y="4762500"/>
-            <a:ext cx="3314700" cy="9525"/>
+            <a:off x="6096000" y="0"/>
+            <a:ext cx="6096000" cy="19050"/>
           </a:xfrm>
           <a:prstGeom prst="rect">
             <a:avLst/>
           </a:prstGeom>
           <a:solidFill>
-            <a:srgbClr val="FFFFFF">
-              <a:alpha val="20000"/>
-            </a:srgbClr>
+            <a:srgbClr val="22D3EE"/>
           </a:solidFill>
           <a:ln>
             <a:noFill/>
@@ -4093,14 +4073,14 @@
       </p:sp>
       <p:sp>
         <p:nvSpPr>
-          <p:cNvPr id="9" name="TextBox 8"/>
+          <p:cNvPr id="5" name="TextBox 4"/>
           <p:cNvSpPr txBox="1"/>
           <p:nvPr/>
         </p:nvSpPr>
         <p:spPr>
           <a:xfrm>
-            <a:off x="685800" y="5067300"/>
-            <a:ext cx="171450" cy="114300"/>
+            <a:off x="1219200" y="581025"/>
+            <a:ext cx="542925" cy="123825"/>
           </a:xfrm>
           <a:prstGeom prst="rect">
             <a:avLst/>
@@ -4115,27 +4095,27 @@
           <a:p>
             <a:pPr algn="l"/>
             <a:r>
-              <a:rPr sz="1200" b="1" i="0">
+              <a:rPr sz="1350" b="1" i="0">
                 <a:solidFill>
-                  <a:srgbClr val="F45A3A"/>
+                  <a:srgbClr val="8B5CF6"/>
                 </a:solidFill>
-                <a:latin typeface="Pretendard"/>
+                <a:latin typeface="Roboto"/>
               </a:rPr>
-              <a:t>01</a:t>
-            </a:r>
-          </a:p>
-        </p:txBody>
-      </p:sp>
-      <p:sp>
-        <p:nvSpPr>
-          <p:cNvPr id="10" name="TextBox 9"/>
+              <a:t>VELA</a:t>
+            </a:r>
+          </a:p>
+        </p:txBody>
+      </p:sp>
+      <p:sp>
+        <p:nvSpPr>
+          <p:cNvPr id="6" name="TextBox 5"/>
           <p:cNvSpPr txBox="1"/>
           <p:nvPr/>
         </p:nvSpPr>
         <p:spPr>
           <a:xfrm>
-            <a:off x="1181100" y="5010150"/>
-            <a:ext cx="1104900" cy="238125"/>
+            <a:off x="6096000" y="581025"/>
+            <a:ext cx="1504950" cy="133350"/>
           </a:xfrm>
           <a:prstGeom prst="rect">
             <a:avLst/>
@@ -4150,27 +4130,27 @@
           <a:p>
             <a:pPr algn="l"/>
             <a:r>
-              <a:rPr sz="1950" b="1" i="0">
+              <a:rPr sz="1425" b="0" i="0">
                 <a:solidFill>
-                  <a:srgbClr val="FFFDF7"/>
+                  <a:srgbClr val="64748B"/>
                 </a:solidFill>
-                <a:latin typeface="Pretendard"/>
+                <a:latin typeface="Roboto"/>
               </a:rPr>
-              <a:t>흩어진 기록</a:t>
-            </a:r>
-          </a:p>
-        </p:txBody>
-      </p:sp>
-      <p:sp>
-        <p:nvSpPr>
-          <p:cNvPr id="11" name="TextBox 10"/>
+              <a:t>THE PROBLEM</a:t>
+            </a:r>
+          </a:p>
+        </p:txBody>
+      </p:sp>
+      <p:sp>
+        <p:nvSpPr>
+          <p:cNvPr id="7" name="TextBox 6"/>
           <p:cNvSpPr txBox="1"/>
           <p:nvPr/>
         </p:nvSpPr>
         <p:spPr>
           <a:xfrm>
-            <a:off x="1181100" y="5467350"/>
-            <a:ext cx="1657350" cy="400050"/>
+            <a:off x="4048125" y="962025"/>
+            <a:ext cx="4095750" cy="1485900"/>
           </a:xfrm>
           <a:prstGeom prst="rect">
             <a:avLst/>
@@ -4183,57 +4163,85 @@
           </a:bodyPr>
           <a:lstStyle/>
           <a:p>
-            <a:pPr algn="l">
-              <a:lnSpc>
-                <a:spcPts val="1800"/>
-              </a:lnSpc>
-            </a:pPr>
-            <a:r>
-              <a:rPr sz="1425" b="0" i="0">
+            <a:pPr algn="ctr"/>
+            <a:r>
+              <a:rPr sz="15750" b="1" i="0">
+                <a:gradFill rotWithShape="1">
+                  <a:gsLst>
+                    <a:gs pos="0">
+                      <a:srgbClr val="6883F3"/>
+                    </a:gs>
+                    <a:gs pos="100000">
+                      <a:srgbClr val="44ABF0"/>
+                    </a:gs>
+                  </a:gsLst>
+                  <a:lin ang="5400000" scaled="0"/>
+                </a:gradFill>
+                <a:effectLst>
+                  <a:outerShdw blurRad="342900" dist="57150" dir="5400000" rotWithShape="0">
+                    <a:srgbClr val="000000">
+                      <a:alpha val="46666"/>
+                    </a:srgbClr>
+                  </a:outerShdw>
+                </a:effectLst>
+                <a:latin typeface="Noto Serif"/>
+              </a:rPr>
+              <a:t>73%</a:t>
+            </a:r>
+          </a:p>
+        </p:txBody>
+      </p:sp>
+      <p:sp>
+        <p:nvSpPr>
+          <p:cNvPr id="8" name="TextBox 7"/>
+          <p:cNvSpPr txBox="1"/>
+          <p:nvPr/>
+        </p:nvSpPr>
+        <p:spPr>
+          <a:xfrm>
+            <a:off x="2838450" y="4876800"/>
+            <a:ext cx="6505575" cy="276225"/>
+          </a:xfrm>
+          <a:prstGeom prst="rect">
+            <a:avLst/>
+          </a:prstGeom>
+          <a:noFill/>
+        </p:spPr>
+        <p:txBody>
+          <a:bodyPr wrap="none" anchor="t" lIns="0" rIns="0" tIns="0" bIns="0">
+            <a:noAutofit/>
+          </a:bodyPr>
+          <a:lstStyle/>
+          <a:p>
+            <a:pPr algn="ctr"/>
+            <a:r>
+              <a:rPr sz="2250" b="0" i="0">
                 <a:solidFill>
-                  <a:srgbClr val="C7D0CB"/>
+                  <a:srgbClr val="C4C4D4"/>
                 </a:solidFill>
-                <a:latin typeface="Pretendard"/>
+                <a:latin typeface="Roboto"/>
               </a:rPr>
-              <a:t>카드, 계좌, 메모에</a:t>
-            </a:r>
-          </a:p>
-          <a:p>
-            <a:pPr algn="l">
-              <a:lnSpc>
-                <a:spcPts val="1800"/>
-              </a:lnSpc>
-            </a:pPr>
-            <a:r>
-              <a:rPr sz="1425" b="0" i="0">
-                <a:solidFill>
-                  <a:srgbClr val="C7D0CB"/>
-                </a:solidFill>
-                <a:latin typeface="Pretendard"/>
-              </a:rPr>
-              <a:t>생활의 맥락이 나뉩니다.</a:t>
-            </a:r>
-          </a:p>
-        </p:txBody>
-      </p:sp>
-      <p:sp>
-        <p:nvSpPr>
-          <p:cNvPr id="12" name="Rectangle 11"/>
+              <a:t>of product decisions are made without reliable data.</a:t>
+            </a:r>
+          </a:p>
+        </p:txBody>
+      </p:sp>
+      <p:sp>
+        <p:nvSpPr>
+          <p:cNvPr id="9" name="Rectangle 8"/>
           <p:cNvSpPr/>
           <p:nvPr/>
         </p:nvSpPr>
         <p:spPr>
           <a:xfrm>
-            <a:off x="4362450" y="4762500"/>
-            <a:ext cx="3314700" cy="9525"/>
+            <a:off x="6096000" y="5581650"/>
+            <a:ext cx="7620000" cy="9525"/>
           </a:xfrm>
           <a:prstGeom prst="rect">
             <a:avLst/>
           </a:prstGeom>
           <a:solidFill>
-            <a:srgbClr val="FFFFFF">
-              <a:alpha val="20000"/>
-            </a:srgbClr>
+            <a:srgbClr val="1E1D2F"/>
           </a:solidFill>
           <a:ln>
             <a:noFill/>
@@ -4264,14 +4272,14 @@
       </p:sp>
       <p:sp>
         <p:nvSpPr>
-          <p:cNvPr id="13" name="TextBox 12"/>
+          <p:cNvPr id="10" name="TextBox 9"/>
           <p:cNvSpPr txBox="1"/>
           <p:nvPr/>
         </p:nvSpPr>
         <p:spPr>
           <a:xfrm>
-            <a:off x="4362450" y="5067300"/>
-            <a:ext cx="200025" cy="114300"/>
+            <a:off x="3181350" y="5981700"/>
+            <a:ext cx="1819275" cy="171450"/>
           </a:xfrm>
           <a:prstGeom prst="rect">
             <a:avLst/>
@@ -4286,27 +4294,27 @@
           <a:p>
             <a:pPr algn="l"/>
             <a:r>
-              <a:rPr sz="1200" b="1" i="0">
+              <a:rPr sz="1800" b="0" i="0">
                 <a:solidFill>
-                  <a:srgbClr val="F45A3A"/>
+                  <a:srgbClr val="64748B"/>
                 </a:solidFill>
-                <a:latin typeface="Pretendard"/>
+                <a:latin typeface="Roboto"/>
               </a:rPr>
-              <a:t>02</a:t>
-            </a:r>
-          </a:p>
-        </p:txBody>
-      </p:sp>
-      <p:sp>
-        <p:nvSpPr>
-          <p:cNvPr id="14" name="TextBox 13"/>
+              <a:t>Siloed dashboards</a:t>
+            </a:r>
+          </a:p>
+        </p:txBody>
+      </p:sp>
+      <p:sp>
+        <p:nvSpPr>
+          <p:cNvPr id="11" name="TextBox 10"/>
           <p:cNvSpPr txBox="1"/>
           <p:nvPr/>
         </p:nvSpPr>
         <p:spPr>
           <a:xfrm>
-            <a:off x="4857750" y="5010150"/>
-            <a:ext cx="895350" cy="228600"/>
+            <a:off x="5305425" y="6019800"/>
+            <a:ext cx="57150" cy="95250"/>
           </a:xfrm>
           <a:prstGeom prst="rect">
             <a:avLst/>
@@ -4321,27 +4329,27 @@
           <a:p>
             <a:pPr algn="l"/>
             <a:r>
-              <a:rPr sz="1950" b="1" i="0">
+              <a:rPr sz="1800" b="0" i="0">
                 <a:solidFill>
-                  <a:srgbClr val="FFFDF7"/>
+                  <a:srgbClr val="1E1D2F"/>
                 </a:solidFill>
-                <a:latin typeface="Pretendard"/>
+                <a:latin typeface="Roboto"/>
               </a:rPr>
-              <a:t>늦은 알림</a:t>
-            </a:r>
-          </a:p>
-        </p:txBody>
-      </p:sp>
-      <p:sp>
-        <p:nvSpPr>
-          <p:cNvPr id="15" name="TextBox 14"/>
+              <a:t>·</a:t>
+            </a:r>
+          </a:p>
+        </p:txBody>
+      </p:sp>
+      <p:sp>
+        <p:nvSpPr>
+          <p:cNvPr id="12" name="TextBox 11"/>
           <p:cNvSpPr txBox="1"/>
           <p:nvPr/>
         </p:nvSpPr>
         <p:spPr>
           <a:xfrm>
-            <a:off x="4857750" y="5467350"/>
-            <a:ext cx="1704975" cy="390525"/>
+            <a:off x="5667375" y="5962650"/>
+            <a:ext cx="1200150" cy="219075"/>
           </a:xfrm>
           <a:prstGeom prst="rect">
             <a:avLst/>
@@ -4354,95 +4362,29 @@
           </a:bodyPr>
           <a:lstStyle/>
           <a:p>
-            <a:pPr algn="l">
-              <a:lnSpc>
-                <a:spcPts val="1800"/>
-              </a:lnSpc>
-            </a:pPr>
-            <a:r>
-              <a:rPr sz="1425" b="0" i="0">
+            <a:pPr algn="l"/>
+            <a:r>
+              <a:rPr sz="1800" b="0" i="0">
                 <a:solidFill>
-                  <a:srgbClr val="C7D0CB"/>
+                  <a:srgbClr val="64748B"/>
                 </a:solidFill>
-                <a:latin typeface="Pretendard"/>
+                <a:latin typeface="Roboto"/>
               </a:rPr>
-              <a:t>이미 쓴 뒤에야</a:t>
-            </a:r>
-          </a:p>
-          <a:p>
-            <a:pPr algn="l">
-              <a:lnSpc>
-                <a:spcPts val="1800"/>
-              </a:lnSpc>
-            </a:pPr>
-            <a:r>
-              <a:rPr sz="1425" b="0" i="0">
-                <a:solidFill>
-                  <a:srgbClr val="C7D0CB"/>
-                </a:solidFill>
-                <a:latin typeface="Pretendard"/>
-              </a:rPr>
-              <a:t>예산 초과를 알게 됩니다.</a:t>
-            </a:r>
-          </a:p>
-        </p:txBody>
-      </p:sp>
-      <p:sp>
-        <p:nvSpPr>
-          <p:cNvPr id="16" name="Rectangle 15"/>
-          <p:cNvSpPr/>
+              <a:t>Alert fatigue</a:t>
+            </a:r>
+          </a:p>
+        </p:txBody>
+      </p:sp>
+      <p:sp>
+        <p:nvSpPr>
+          <p:cNvPr id="13" name="TextBox 12"/>
+          <p:cNvSpPr txBox="1"/>
           <p:nvPr/>
         </p:nvSpPr>
         <p:spPr>
           <a:xfrm>
-            <a:off x="8039100" y="4762500"/>
-            <a:ext cx="3314700" cy="9525"/>
-          </a:xfrm>
-          <a:prstGeom prst="rect">
-            <a:avLst/>
-          </a:prstGeom>
-          <a:solidFill>
-            <a:srgbClr val="FFFFFF">
-              <a:alpha val="20000"/>
-            </a:srgbClr>
-          </a:solidFill>
-          <a:ln>
-            <a:noFill/>
-          </a:ln>
-          <a:effectLst/>
-        </p:spPr>
-        <p:style>
-          <a:lnRef idx="1">
-            <a:schemeClr val="accent1"/>
-          </a:lnRef>
-          <a:fillRef idx="3">
-            <a:schemeClr val="accent1"/>
-          </a:fillRef>
-          <a:effectRef idx="2">
-            <a:schemeClr val="accent1"/>
-          </a:effectRef>
-          <a:fontRef idx="minor">
-            <a:schemeClr val="lt1"/>
-          </a:fontRef>
-        </p:style>
-        <p:txBody>
-          <a:bodyPr rtlCol="0" anchor="ctr"/>
-          <a:lstStyle/>
-          <a:p>
-            <a:pPr algn="ctr"/>
-          </a:p>
-        </p:txBody>
-      </p:sp>
-      <p:sp>
-        <p:nvSpPr>
-          <p:cNvPr id="17" name="TextBox 16"/>
-          <p:cNvSpPr txBox="1"/>
-          <p:nvPr/>
-        </p:nvSpPr>
-        <p:spPr>
-          <a:xfrm>
-            <a:off x="8039100" y="5067300"/>
-            <a:ext cx="200025" cy="114300"/>
+            <a:off x="7172325" y="6019800"/>
+            <a:ext cx="57150" cy="95250"/>
           </a:xfrm>
           <a:prstGeom prst="rect">
             <a:avLst/>
@@ -4457,27 +4399,27 @@
           <a:p>
             <a:pPr algn="l"/>
             <a:r>
-              <a:rPr sz="1200" b="1" i="0">
+              <a:rPr sz="1800" b="0" i="0">
                 <a:solidFill>
-                  <a:srgbClr val="F45A3A"/>
+                  <a:srgbClr val="1E1D2F"/>
                 </a:solidFill>
-                <a:latin typeface="Pretendard"/>
+                <a:latin typeface="Roboto"/>
               </a:rPr>
-              <a:t>03</a:t>
-            </a:r>
-          </a:p>
-        </p:txBody>
-      </p:sp>
-      <p:sp>
-        <p:nvSpPr>
-          <p:cNvPr id="18" name="TextBox 17"/>
+              <a:t>·</a:t>
+            </a:r>
+          </a:p>
+        </p:txBody>
+      </p:sp>
+      <p:sp>
+        <p:nvSpPr>
+          <p:cNvPr id="14" name="TextBox 13"/>
           <p:cNvSpPr txBox="1"/>
           <p:nvPr/>
         </p:nvSpPr>
         <p:spPr>
           <a:xfrm>
-            <a:off x="8534400" y="5010150"/>
-            <a:ext cx="1104900" cy="238125"/>
+            <a:off x="7534275" y="5981700"/>
+            <a:ext cx="1485900" cy="171450"/>
           </a:xfrm>
           <a:prstGeom prst="rect">
             <a:avLst/>
@@ -4492,68 +4434,13 @@
           <a:p>
             <a:pPr algn="l"/>
             <a:r>
-              <a:rPr sz="1950" b="1" i="0">
+              <a:rPr sz="1800" b="0" i="0">
                 <a:solidFill>
-                  <a:srgbClr val="FFFDF7"/>
+                  <a:srgbClr val="64748B"/>
                 </a:solidFill>
-                <a:latin typeface="Pretendard"/>
+                <a:latin typeface="Roboto"/>
               </a:rPr>
-              <a:t>막연한 조언</a:t>
-            </a:r>
-          </a:p>
-        </p:txBody>
-      </p:sp>
-      <p:sp>
-        <p:nvSpPr>
-          <p:cNvPr id="19" name="TextBox 18"/>
-          <p:cNvSpPr txBox="1"/>
-          <p:nvPr/>
-        </p:nvSpPr>
-        <p:spPr>
-          <a:xfrm>
-            <a:off x="8534400" y="5467350"/>
-            <a:ext cx="1304925" cy="390525"/>
-          </a:xfrm>
-          <a:prstGeom prst="rect">
-            <a:avLst/>
-          </a:prstGeom>
-          <a:noFill/>
-        </p:spPr>
-        <p:txBody>
-          <a:bodyPr wrap="none" anchor="t" lIns="0" rIns="0" tIns="0" bIns="0">
-            <a:noAutofit/>
-          </a:bodyPr>
-          <a:lstStyle/>
-          <a:p>
-            <a:pPr algn="l">
-              <a:lnSpc>
-                <a:spcPts val="1800"/>
-              </a:lnSpc>
-            </a:pPr>
-            <a:r>
-              <a:rPr sz="1425" b="0" i="0">
-                <a:solidFill>
-                  <a:srgbClr val="C7D0CB"/>
-                </a:solidFill>
-                <a:latin typeface="Pretendard"/>
-              </a:rPr>
-              <a:t>내 일상과 무관한</a:t>
-            </a:r>
-          </a:p>
-          <a:p>
-            <a:pPr algn="l">
-              <a:lnSpc>
-                <a:spcPts val="1800"/>
-              </a:lnSpc>
-            </a:pPr>
-            <a:r>
-              <a:rPr sz="1425" b="0" i="0">
-                <a:solidFill>
-                  <a:srgbClr val="C7D0CB"/>
-                </a:solidFill>
-                <a:latin typeface="Pretendard"/>
-              </a:rPr>
-              <a:t>평균만 돌아옵니다.</a:t>
+              <a:t>No clear owner</a:t>
             </a:r>
           </a:p>
         </p:txBody>
@@ -4574,59 +4461,6 @@
             <p:seq concurrent="1" nextAc="seek">
               <p:cTn id="2" dur="indefinite" nodeType="mainSeq">
                 <p:childTnLst>
-                  <p:par>
-                    <p:cTn id="7" fill="hold">
-                      <p:stCondLst>
-                        <p:cond delay="indefinite"/>
-                      </p:stCondLst>
-                      <p:childTnLst>
-                        <p:par>
-                          <p:cTn id="8" fill="hold">
-                            <p:stCondLst>
-                              <p:cond delay="0"/>
-                            </p:stCondLst>
-                            <p:childTnLst>
-                              <p:par>
-                                <p:cTn id="9" presetID="22" presetClass="entr" presetSubtype="0" fill="hold" grpId="0" nodeType="clickEffect">
-                                  <p:stCondLst>
-                                    <p:cond delay="0"/>
-                                  </p:stCondLst>
-                                  <p:childTnLst>
-                                    <p:set>
-                                      <p:cBhvr>
-                                        <p:cTn id="10" dur="1" fill="hold">
-                                          <p:stCondLst>
-                                            <p:cond delay="0"/>
-                                          </p:stCondLst>
-                                        </p:cTn>
-                                        <p:tgtEl>
-                                          <p:spTgt spid="5"/>
-                                        </p:tgtEl>
-                                        <p:attrNameLst>
-                                          <p:attrName>style.visibility</p:attrName>
-                                        </p:attrNameLst>
-                                      </p:cBhvr>
-                                      <p:to>
-                                        <p:strVal val="visible"/>
-                                      </p:to>
-                                    </p:set>
-                                    <p:animEffect transition="in" filter="wipe(up)">
-                                      <p:cBhvr>
-                                        <p:cTn id="11" dur="500"/>
-                                        <p:tgtEl>
-                                          <p:spTgt spid="5"/>
-                                        </p:tgtEl>
-                                      </p:cBhvr>
-                                    </p:animEffect>
-                                  </p:childTnLst>
-                                </p:cTn>
-                              </p:par>
-                            </p:childTnLst>
-                          </p:cTn>
-                        </p:par>
-                      </p:childTnLst>
-                    </p:cTn>
-                  </p:par>
                   <p:par>
                     <p:cTn id="12" fill="hold">
                       <p:stCondLst>
@@ -4653,7 +4487,7 @@
                                           </p:stCondLst>
                                         </p:cTn>
                                         <p:tgtEl>
-                                          <p:spTgt spid="6"/>
+                                          <p:spTgt spid="7"/>
                                         </p:tgtEl>
                                         <p:attrNameLst>
                                           <p:attrName>style.visibility</p:attrName>
@@ -4665,9 +4499,9 @@
                                     </p:set>
                                     <p:animEffect transition="in" filter="box(in)">
                                       <p:cBhvr>
-                                        <p:cTn id="16" dur="500"/>
+                                        <p:cTn id="16" dur="600"/>
                                         <p:tgtEl>
-                                          <p:spTgt spid="6"/>
+                                          <p:spTgt spid="7"/>
                                         </p:tgtEl>
                                       </p:cBhvr>
                                     </p:animEffect>
@@ -4688,7 +4522,7 @@
                                           </p:stCondLst>
                                         </p:cTn>
                                         <p:tgtEl>
-                                          <p:spTgt spid="7"/>
+                                          <p:spTgt spid="8"/>
                                         </p:tgtEl>
                                         <p:attrNameLst>
                                           <p:attrName>style.visibility</p:attrName>
@@ -4700,9 +4534,219 @@
                                     </p:set>
                                     <p:animEffect transition="in" filter="fade">
                                       <p:cBhvr>
-                                        <p:cTn id="19" dur="350"/>
+                                        <p:cTn id="19" dur="400"/>
                                         <p:tgtEl>
-                                          <p:spTgt spid="7"/>
+                                          <p:spTgt spid="8"/>
+                                        </p:tgtEl>
+                                      </p:cBhvr>
+                                    </p:animEffect>
+                                  </p:childTnLst>
+                                </p:cTn>
+                              </p:par>
+                              <p:par>
+                                <p:cTn id="20" presetID="22" presetClass="entr" presetSubtype="0" fill="hold" grpId="0" nodeType="afterEffect">
+                                  <p:stCondLst>
+                                    <p:cond delay="0"/>
+                                  </p:stCondLst>
+                                  <p:childTnLst>
+                                    <p:set>
+                                      <p:cBhvr>
+                                        <p:cTn id="21" dur="1" fill="hold">
+                                          <p:stCondLst>
+                                            <p:cond delay="0"/>
+                                          </p:stCondLst>
+                                        </p:cTn>
+                                        <p:tgtEl>
+                                          <p:spTgt spid="9"/>
+                                        </p:tgtEl>
+                                        <p:attrNameLst>
+                                          <p:attrName>style.visibility</p:attrName>
+                                        </p:attrNameLst>
+                                      </p:cBhvr>
+                                      <p:to>
+                                        <p:strVal val="visible"/>
+                                      </p:to>
+                                    </p:set>
+                                    <p:animEffect transition="in" filter="wipe(left)">
+                                      <p:cBhvr>
+                                        <p:cTn id="22" dur="350"/>
+                                        <p:tgtEl>
+                                          <p:spTgt spid="9"/>
+                                        </p:tgtEl>
+                                      </p:cBhvr>
+                                    </p:animEffect>
+                                  </p:childTnLst>
+                                </p:cTn>
+                              </p:par>
+                              <p:par>
+                                <p:cTn id="23" presetID="10" presetClass="entr" presetSubtype="0" fill="hold" grpId="0" nodeType="afterEffect">
+                                  <p:stCondLst>
+                                    <p:cond delay="0"/>
+                                  </p:stCondLst>
+                                  <p:childTnLst>
+                                    <p:set>
+                                      <p:cBhvr>
+                                        <p:cTn id="24" dur="1" fill="hold">
+                                          <p:stCondLst>
+                                            <p:cond delay="0"/>
+                                          </p:stCondLst>
+                                        </p:cTn>
+                                        <p:tgtEl>
+                                          <p:spTgt spid="10"/>
+                                        </p:tgtEl>
+                                        <p:attrNameLst>
+                                          <p:attrName>style.visibility</p:attrName>
+                                        </p:attrNameLst>
+                                      </p:cBhvr>
+                                      <p:to>
+                                        <p:strVal val="visible"/>
+                                      </p:to>
+                                    </p:set>
+                                    <p:animEffect transition="in" filter="fade">
+                                      <p:cBhvr>
+                                        <p:cTn id="25" dur="400"/>
+                                        <p:tgtEl>
+                                          <p:spTgt spid="10"/>
+                                        </p:tgtEl>
+                                      </p:cBhvr>
+                                    </p:animEffect>
+                                  </p:childTnLst>
+                                </p:cTn>
+                              </p:par>
+                              <p:par>
+                                <p:cTn id="26" presetID="10" presetClass="entr" presetSubtype="0" fill="hold" grpId="0" nodeType="withEffect">
+                                  <p:stCondLst>
+                                    <p:cond delay="0"/>
+                                  </p:stCondLst>
+                                  <p:childTnLst>
+                                    <p:set>
+                                      <p:cBhvr>
+                                        <p:cTn id="27" dur="1" fill="hold">
+                                          <p:stCondLst>
+                                            <p:cond delay="0"/>
+                                          </p:stCondLst>
+                                        </p:cTn>
+                                        <p:tgtEl>
+                                          <p:spTgt spid="11"/>
+                                        </p:tgtEl>
+                                        <p:attrNameLst>
+                                          <p:attrName>style.visibility</p:attrName>
+                                        </p:attrNameLst>
+                                      </p:cBhvr>
+                                      <p:to>
+                                        <p:strVal val="visible"/>
+                                      </p:to>
+                                    </p:set>
+                                    <p:animEffect transition="in" filter="fade">
+                                      <p:cBhvr>
+                                        <p:cTn id="28" dur="400"/>
+                                        <p:tgtEl>
+                                          <p:spTgt spid="11"/>
+                                        </p:tgtEl>
+                                      </p:cBhvr>
+                                    </p:animEffect>
+                                  </p:childTnLst>
+                                </p:cTn>
+                              </p:par>
+                              <p:par>
+                                <p:cTn id="29" presetID="10" presetClass="entr" presetSubtype="0" fill="hold" grpId="0" nodeType="withEffect">
+                                  <p:stCondLst>
+                                    <p:cond delay="0"/>
+                                  </p:stCondLst>
+                                  <p:childTnLst>
+                                    <p:set>
+                                      <p:cBhvr>
+                                        <p:cTn id="30" dur="1" fill="hold">
+                                          <p:stCondLst>
+                                            <p:cond delay="0"/>
+                                          </p:stCondLst>
+                                        </p:cTn>
+                                        <p:tgtEl>
+                                          <p:spTgt spid="12"/>
+                                        </p:tgtEl>
+                                        <p:attrNameLst>
+                                          <p:attrName>style.visibility</p:attrName>
+                                        </p:attrNameLst>
+                                      </p:cBhvr>
+                                      <p:to>
+                                        <p:strVal val="visible"/>
+                                      </p:to>
+                                    </p:set>
+                                    <p:animEffect transition="in" filter="fade">
+                                      <p:cBhvr>
+                                        <p:cTn id="31" dur="400"/>
+                                        <p:tgtEl>
+                                          <p:spTgt spid="12"/>
+                                        </p:tgtEl>
+                                      </p:cBhvr>
+                                    </p:animEffect>
+                                  </p:childTnLst>
+                                </p:cTn>
+                              </p:par>
+                              <p:par>
+                                <p:cTn id="32" presetID="10" presetClass="entr" presetSubtype="0" fill="hold" grpId="0" nodeType="withEffect">
+                                  <p:stCondLst>
+                                    <p:cond delay="0"/>
+                                  </p:stCondLst>
+                                  <p:childTnLst>
+                                    <p:set>
+                                      <p:cBhvr>
+                                        <p:cTn id="33" dur="1" fill="hold">
+                                          <p:stCondLst>
+                                            <p:cond delay="0"/>
+                                          </p:stCondLst>
+                                        </p:cTn>
+                                        <p:tgtEl>
+                                          <p:spTgt spid="13"/>
+                                        </p:tgtEl>
+                                        <p:attrNameLst>
+                                          <p:attrName>style.visibility</p:attrName>
+                                        </p:attrNameLst>
+                                      </p:cBhvr>
+                                      <p:to>
+                                        <p:strVal val="visible"/>
+                                      </p:to>
+                                    </p:set>
+                                    <p:animEffect transition="in" filter="fade">
+                                      <p:cBhvr>
+                                        <p:cTn id="34" dur="400"/>
+                                        <p:tgtEl>
+                                          <p:spTgt spid="13"/>
+                                        </p:tgtEl>
+                                      </p:cBhvr>
+                                    </p:animEffect>
+                                  </p:childTnLst>
+                                </p:cTn>
+                              </p:par>
+                              <p:par>
+                                <p:cTn id="35" presetID="10" presetClass="entr" presetSubtype="0" fill="hold" grpId="0" nodeType="withEffect">
+                                  <p:stCondLst>
+                                    <p:cond delay="0"/>
+                                  </p:stCondLst>
+                                  <p:childTnLst>
+                                    <p:set>
+                                      <p:cBhvr>
+                                        <p:cTn id="36" dur="1" fill="hold">
+                                          <p:stCondLst>
+                                            <p:cond delay="0"/>
+                                          </p:stCondLst>
+                                        </p:cTn>
+                                        <p:tgtEl>
+                                          <p:spTgt spid="14"/>
+                                        </p:tgtEl>
+                                        <p:attrNameLst>
+                                          <p:attrName>style.visibility</p:attrName>
+                                        </p:attrNameLst>
+                                      </p:cBhvr>
+                                      <p:to>
+                                        <p:strVal val="visible"/>
+                                      </p:to>
+                                    </p:set>
+                                    <p:animEffect transition="in" filter="fade">
+                                      <p:cBhvr>
+                                        <p:cTn id="37" dur="400"/>
+                                        <p:tgtEl>
+                                          <p:spTgt spid="14"/>
                                         </p:tgtEl>
                                       </p:cBhvr>
                                     </p:animEffect>
@@ -4746,7 +4790,7 @@
                         </p:stCondLst>
                       </p:cTn>
                       <p:tgtEl>
-                        <p:spTgt spid="5"/>
+                        <p:spTgt spid="7"/>
                       </p:tgtEl>
                       <p:attrNameLst>
                         <p:attrName>style.visibility</p:attrName>
@@ -4764,7 +4808,7 @@
                         </p:stCondLst>
                       </p:cTn>
                       <p:tgtEl>
-                        <p:spTgt spid="6"/>
+                        <p:spTgt spid="8"/>
                       </p:tgtEl>
                       <p:attrNameLst>
                         <p:attrName>style.visibility</p:attrName>
@@ -4782,7 +4826,97 @@
                         </p:stCondLst>
                       </p:cTn>
                       <p:tgtEl>
-                        <p:spTgt spid="7"/>
+                        <p:spTgt spid="9"/>
+                      </p:tgtEl>
+                      <p:attrNameLst>
+                        <p:attrName>style.visibility</p:attrName>
+                      </p:attrNameLst>
+                    </p:cBhvr>
+                    <p:to>
+                      <p:strVal val="hidden"/>
+                    </p:to>
+                  </p:set>
+                  <p:set>
+                    <p:cBhvr>
+                      <p:cTn id="7" dur="1" fill="hold">
+                        <p:stCondLst>
+                          <p:cond delay="0"/>
+                        </p:stCondLst>
+                      </p:cTn>
+                      <p:tgtEl>
+                        <p:spTgt spid="10"/>
+                      </p:tgtEl>
+                      <p:attrNameLst>
+                        <p:attrName>style.visibility</p:attrName>
+                      </p:attrNameLst>
+                    </p:cBhvr>
+                    <p:to>
+                      <p:strVal val="hidden"/>
+                    </p:to>
+                  </p:set>
+                  <p:set>
+                    <p:cBhvr>
+                      <p:cTn id="8" dur="1" fill="hold">
+                        <p:stCondLst>
+                          <p:cond delay="0"/>
+                        </p:stCondLst>
+                      </p:cTn>
+                      <p:tgtEl>
+                        <p:spTgt spid="11"/>
+                      </p:tgtEl>
+                      <p:attrNameLst>
+                        <p:attrName>style.visibility</p:attrName>
+                      </p:attrNameLst>
+                    </p:cBhvr>
+                    <p:to>
+                      <p:strVal val="hidden"/>
+                    </p:to>
+                  </p:set>
+                  <p:set>
+                    <p:cBhvr>
+                      <p:cTn id="9" dur="1" fill="hold">
+                        <p:stCondLst>
+                          <p:cond delay="0"/>
+                        </p:stCondLst>
+                      </p:cTn>
+                      <p:tgtEl>
+                        <p:spTgt spid="12"/>
+                      </p:tgtEl>
+                      <p:attrNameLst>
+                        <p:attrName>style.visibility</p:attrName>
+                      </p:attrNameLst>
+                    </p:cBhvr>
+                    <p:to>
+                      <p:strVal val="hidden"/>
+                    </p:to>
+                  </p:set>
+                  <p:set>
+                    <p:cBhvr>
+                      <p:cTn id="10" dur="1" fill="hold">
+                        <p:stCondLst>
+                          <p:cond delay="0"/>
+                        </p:stCondLst>
+                      </p:cTn>
+                      <p:tgtEl>
+                        <p:spTgt spid="13"/>
+                      </p:tgtEl>
+                      <p:attrNameLst>
+                        <p:attrName>style.visibility</p:attrName>
+                      </p:attrNameLst>
+                    </p:cBhvr>
+                    <p:to>
+                      <p:strVal val="hidden"/>
+                    </p:to>
+                  </p:set>
+                  <p:set>
+                    <p:cBhvr>
+                      <p:cTn id="11" dur="1" fill="hold">
+                        <p:stCondLst>
+                          <p:cond delay="0"/>
+                        </p:stCondLst>
+                      </p:cTn>
+                      <p:tgtEl>
+                        <p:spTgt spid="14"/>
                       </p:tgtEl>
                       <p:attrNameLst>
                         <p:attrName>style.visibility</p:attrName>
@@ -4827,8 +4961,60 @@
           <a:prstGeom prst="rect">
             <a:avLst/>
           </a:prstGeom>
+          <a:gradFill rotWithShape="1">
+            <a:gsLst>
+              <a:gs pos="0">
+                <a:srgbClr val="08070E"/>
+              </a:gs>
+              <a:gs pos="100000">
+                <a:srgbClr val="11101B"/>
+              </a:gs>
+            </a:gsLst>
+            <a:lin ang="9600000" scaled="0"/>
+          </a:gradFill>
+          <a:ln>
+            <a:noFill/>
+          </a:ln>
+          <a:effectLst/>
+        </p:spPr>
+        <p:style>
+          <a:lnRef idx="1">
+            <a:schemeClr val="accent1"/>
+          </a:lnRef>
+          <a:fillRef idx="3">
+            <a:schemeClr val="accent1"/>
+          </a:fillRef>
+          <a:effectRef idx="2">
+            <a:schemeClr val="accent1"/>
+          </a:effectRef>
+          <a:fontRef idx="minor">
+            <a:schemeClr val="lt1"/>
+          </a:fontRef>
+        </p:style>
+        <p:txBody>
+          <a:bodyPr rtlCol="0" anchor="ctr"/>
+          <a:lstStyle/>
+          <a:p>
+            <a:pPr algn="ctr"/>
+          </a:p>
+        </p:txBody>
+      </p:sp>
+      <p:sp>
+        <p:nvSpPr>
+          <p:cNvPr id="3" name="Rectangle 2"/>
+          <p:cNvSpPr/>
+          <p:nvPr/>
+        </p:nvSpPr>
+        <p:spPr>
+          <a:xfrm>
+            <a:off x="0" y="0"/>
+            <a:ext cx="6096000" cy="19050"/>
+          </a:xfrm>
+          <a:prstGeom prst="rect">
+            <a:avLst/>
+          </a:prstGeom>
           <a:solidFill>
-            <a:srgbClr val="EEE9DE"/>
+            <a:srgbClr val="8B5CF6"/>
           </a:solidFill>
           <a:ln>
             <a:noFill/>
@@ -4859,252 +5045,20 @@
       </p:sp>
       <p:sp>
         <p:nvSpPr>
-          <p:cNvPr id="3" name="TextBox 2"/>
-          <p:cNvSpPr txBox="1"/>
+          <p:cNvPr id="4" name="Rectangle 3"/>
+          <p:cNvSpPr/>
           <p:nvPr/>
         </p:nvSpPr>
         <p:spPr>
           <a:xfrm>
-            <a:off x="685800" y="514350"/>
-            <a:ext cx="1962150" cy="133350"/>
+            <a:off x="6096000" y="0"/>
+            <a:ext cx="6096000" cy="19050"/>
           </a:xfrm>
           <a:prstGeom prst="rect">
             <a:avLst/>
           </a:prstGeom>
-          <a:noFill/>
-        </p:spPr>
-        <p:txBody>
-          <a:bodyPr wrap="none" anchor="t" lIns="0" rIns="0" tIns="0" bIns="0">
-            <a:noAutofit/>
-          </a:bodyPr>
-          <a:lstStyle/>
-          <a:p>
-            <a:pPr algn="l"/>
-            <a:r>
-              <a:rPr sz="1200" b="1" i="0">
-                <a:solidFill>
-                  <a:srgbClr val="F45A3A"/>
-                </a:solidFill>
-                <a:latin typeface="Pretendard"/>
-              </a:rPr>
-              <a:t>02  /  THE PRODUCT</a:t>
-            </a:r>
-          </a:p>
-        </p:txBody>
-      </p:sp>
-      <p:sp>
-        <p:nvSpPr>
-          <p:cNvPr id="4" name="TextBox 3"/>
-          <p:cNvSpPr txBox="1"/>
-          <p:nvPr/>
-        </p:nvSpPr>
-        <p:spPr>
-          <a:xfrm>
-            <a:off x="11296650" y="514350"/>
-            <a:ext cx="209550" cy="104775"/>
-          </a:xfrm>
-          <a:prstGeom prst="rect">
-            <a:avLst/>
-          </a:prstGeom>
-          <a:noFill/>
-        </p:spPr>
-        <p:txBody>
-          <a:bodyPr wrap="none" anchor="t" lIns="0" rIns="0" tIns="0" bIns="0">
-            <a:noAutofit/>
-          </a:bodyPr>
-          <a:lstStyle/>
-          <a:p>
-            <a:pPr algn="r"/>
-            <a:r>
-              <a:rPr sz="1125" b="1" i="0">
-                <a:solidFill>
-                  <a:srgbClr val="68716C"/>
-                </a:solidFill>
-                <a:latin typeface="Pretendard"/>
-              </a:rPr>
-              <a:t>03</a:t>
-            </a:r>
-          </a:p>
-        </p:txBody>
-      </p:sp>
-      <p:sp>
-        <p:nvSpPr>
-          <p:cNvPr id="5" name="TextBox 4"/>
-          <p:cNvSpPr txBox="1"/>
-          <p:nvPr/>
-        </p:nvSpPr>
-        <p:spPr>
-          <a:xfrm>
-            <a:off x="685800" y="1162050"/>
-            <a:ext cx="5638800" cy="1114425"/>
-          </a:xfrm>
-          <a:prstGeom prst="rect">
-            <a:avLst/>
-          </a:prstGeom>
-          <a:noFill/>
-        </p:spPr>
-        <p:txBody>
-          <a:bodyPr wrap="none" anchor="t" lIns="0" rIns="0" tIns="0" bIns="0">
-            <a:noAutofit/>
-          </a:bodyPr>
-          <a:lstStyle/>
-          <a:p>
-            <a:pPr algn="l">
-              <a:lnSpc>
-                <a:spcPts val="4725"/>
-              </a:lnSpc>
-            </a:pPr>
-            <a:r>
-              <a:rPr sz="4425" b="1" i="0">
-                <a:solidFill>
-                  <a:srgbClr val="17211D"/>
-                </a:solidFill>
-                <a:latin typeface="Pretendard"/>
-              </a:rPr>
-              <a:t>기록에서 행동까지,</a:t>
-            </a:r>
-          </a:p>
-          <a:p>
-            <a:pPr algn="l">
-              <a:lnSpc>
-                <a:spcPts val="4725"/>
-              </a:lnSpc>
-            </a:pPr>
-            <a:r>
-              <a:rPr sz="4425" b="1" i="0">
-                <a:solidFill>
-                  <a:srgbClr val="17211D"/>
-                </a:solidFill>
-                <a:latin typeface="Pretendard"/>
-              </a:rPr>
-              <a:t>하루 한 번이면 충분합니다.</a:t>
-            </a:r>
-          </a:p>
-        </p:txBody>
-      </p:sp>
-      <p:sp>
-        <p:nvSpPr>
-          <p:cNvPr id="6" name="TextBox 5"/>
-          <p:cNvSpPr txBox="1"/>
-          <p:nvPr/>
-        </p:nvSpPr>
-        <p:spPr>
-          <a:xfrm>
-            <a:off x="7524750" y="1390650"/>
-            <a:ext cx="3438525" cy="485775"/>
-          </a:xfrm>
-          <a:prstGeom prst="rect">
-            <a:avLst/>
-          </a:prstGeom>
-          <a:noFill/>
-        </p:spPr>
-        <p:txBody>
-          <a:bodyPr wrap="none" anchor="t" lIns="0" rIns="0" tIns="0" bIns="0">
-            <a:noAutofit/>
-          </a:bodyPr>
-          <a:lstStyle/>
-          <a:p>
-            <a:pPr algn="l">
-              <a:lnSpc>
-                <a:spcPts val="2250"/>
-              </a:lnSpc>
-            </a:pPr>
-            <a:r>
-              <a:rPr sz="1725" b="0" i="0">
-                <a:solidFill>
-                  <a:srgbClr val="68716C"/>
-                </a:solidFill>
-                <a:latin typeface="Pretendard"/>
-              </a:rPr>
-              <a:t>모아는 거래 내역을 보여주는 대신</a:t>
-            </a:r>
-          </a:p>
-          <a:p>
-            <a:pPr algn="l">
-              <a:lnSpc>
-                <a:spcPts val="2250"/>
-              </a:lnSpc>
-            </a:pPr>
-            <a:r>
-              <a:rPr sz="1725" b="0" i="0">
-                <a:solidFill>
-                  <a:srgbClr val="68716C"/>
-                </a:solidFill>
-                <a:latin typeface="Pretendard"/>
-              </a:rPr>
-              <a:t>오늘 바꿀 수 있는 한 가지를 제안합니다.</a:t>
-            </a:r>
-          </a:p>
-        </p:txBody>
-      </p:sp>
-      <p:sp>
-        <p:nvSpPr>
-          <p:cNvPr id="7" name="Rounded Rectangle 6"/>
-          <p:cNvSpPr/>
-          <p:nvPr/>
-        </p:nvSpPr>
-        <p:spPr>
-          <a:xfrm>
-            <a:off x="685800" y="3638550"/>
-            <a:ext cx="3314700" cy="2247900"/>
-          </a:xfrm>
-          <a:prstGeom prst="roundRect">
-            <a:avLst>
-              <a:gd name="adj" fmla="val 3389"/>
-            </a:avLst>
-          </a:prstGeom>
           <a:solidFill>
-            <a:srgbClr val="FFFDF7"/>
-          </a:solidFill>
-          <a:ln>
-            <a:noFill/>
-          </a:ln>
-          <a:effectLst>
-            <a:outerShdw blurRad="533400" dist="152400" dir="5400000" rotWithShape="0">
-              <a:srgbClr val="0B1712">
-                <a:alpha val="25098"/>
-              </a:srgbClr>
-            </a:outerShdw>
-          </a:effectLst>
-        </p:spPr>
-        <p:style>
-          <a:lnRef idx="1">
-            <a:schemeClr val="accent1"/>
-          </a:lnRef>
-          <a:fillRef idx="3">
-            <a:schemeClr val="accent1"/>
-          </a:fillRef>
-          <a:effectRef idx="2">
-            <a:schemeClr val="accent1"/>
-          </a:effectRef>
-          <a:fontRef idx="minor">
-            <a:schemeClr val="lt1"/>
-          </a:fontRef>
-        </p:style>
-        <p:txBody>
-          <a:bodyPr rtlCol="0" anchor="ctr"/>
-          <a:lstStyle/>
-          <a:p>
-            <a:pPr algn="ctr"/>
-          </a:p>
-        </p:txBody>
-      </p:sp>
-      <p:sp>
-        <p:nvSpPr>
-          <p:cNvPr id="8" name="Oval 7"/>
-          <p:cNvSpPr/>
-          <p:nvPr/>
-        </p:nvSpPr>
-        <p:spPr>
-          <a:xfrm>
-            <a:off x="876300" y="3829050"/>
-            <a:ext cx="533400" cy="533400"/>
-          </a:xfrm>
-          <a:prstGeom prst="ellipse">
-            <a:avLst/>
-          </a:prstGeom>
-          <a:solidFill>
-            <a:srgbClr val="1D4A3C"/>
+            <a:srgbClr val="22D3EE"/>
           </a:solidFill>
           <a:ln>
             <a:noFill/>
@@ -5135,14 +5089,14 @@
       </p:sp>
       <p:sp>
         <p:nvSpPr>
-          <p:cNvPr id="9" name="TextBox 8"/>
+          <p:cNvPr id="5" name="TextBox 4"/>
           <p:cNvSpPr txBox="1"/>
           <p:nvPr/>
         </p:nvSpPr>
         <p:spPr>
           <a:xfrm>
-            <a:off x="1057275" y="4038600"/>
-            <a:ext cx="171450" cy="114300"/>
+            <a:off x="1219200" y="581025"/>
+            <a:ext cx="542925" cy="123825"/>
           </a:xfrm>
           <a:prstGeom prst="rect">
             <a:avLst/>
@@ -5155,29 +5109,29 @@
           </a:bodyPr>
           <a:lstStyle/>
           <a:p>
-            <a:pPr algn="ctr"/>
-            <a:r>
-              <a:rPr sz="1200" b="1" i="0">
+            <a:pPr algn="l"/>
+            <a:r>
+              <a:rPr sz="1350" b="1" i="0">
                 <a:solidFill>
-                  <a:srgbClr val="FFFDF7"/>
+                  <a:srgbClr val="8B5CF6"/>
                 </a:solidFill>
-                <a:latin typeface="Pretendard"/>
+                <a:latin typeface="Roboto"/>
               </a:rPr>
-              <a:t>01</a:t>
-            </a:r>
-          </a:p>
-        </p:txBody>
-      </p:sp>
-      <p:sp>
-        <p:nvSpPr>
-          <p:cNvPr id="10" name="TextBox 9"/>
+              <a:t>VELA</a:t>
+            </a:r>
+          </a:p>
+        </p:txBody>
+      </p:sp>
+      <p:sp>
+        <p:nvSpPr>
+          <p:cNvPr id="6" name="TextBox 5"/>
           <p:cNvSpPr txBox="1"/>
           <p:nvPr/>
         </p:nvSpPr>
         <p:spPr>
           <a:xfrm>
-            <a:off x="952500" y="4705350"/>
-            <a:ext cx="800100" cy="238125"/>
+            <a:off x="6096000" y="581025"/>
+            <a:ext cx="1476375" cy="133350"/>
           </a:xfrm>
           <a:prstGeom prst="rect">
             <a:avLst/>
@@ -5192,27 +5146,27 @@
           <a:p>
             <a:pPr algn="l"/>
             <a:r>
-              <a:rPr sz="2400" b="1" i="0">
+              <a:rPr sz="1425" b="0" i="0">
                 <a:solidFill>
-                  <a:srgbClr val="17211D"/>
+                  <a:srgbClr val="64748B"/>
                 </a:solidFill>
-                <a:latin typeface="Pretendard"/>
+                <a:latin typeface="Roboto"/>
               </a:rPr>
-              <a:t>모으고</a:t>
-            </a:r>
-          </a:p>
-        </p:txBody>
-      </p:sp>
-      <p:sp>
-        <p:nvSpPr>
-          <p:cNvPr id="11" name="TextBox 10"/>
+              <a:t>THE PRODUCT</a:t>
+            </a:r>
+          </a:p>
+        </p:txBody>
+      </p:sp>
+      <p:sp>
+        <p:nvSpPr>
+          <p:cNvPr id="7" name="TextBox 6"/>
           <p:cNvSpPr txBox="1"/>
           <p:nvPr/>
         </p:nvSpPr>
         <p:spPr>
           <a:xfrm>
-            <a:off x="952500" y="5257800"/>
-            <a:ext cx="1247775" cy="180975"/>
+            <a:off x="1666875" y="1133475"/>
+            <a:ext cx="8858250" cy="619125"/>
           </a:xfrm>
           <a:prstGeom prst="rect">
             <a:avLst/>
@@ -5225,87 +5179,50 @@
           </a:bodyPr>
           <a:lstStyle/>
           <a:p>
-            <a:pPr algn="l"/>
-            <a:r>
-              <a:rPr sz="1575" b="0" i="0">
-                <a:solidFill>
-                  <a:srgbClr val="68716C"/>
-                </a:solidFill>
-                <a:latin typeface="Pretendard"/>
+            <a:pPr algn="ctr"/>
+            <a:r>
+              <a:rPr sz="4800" b="1" i="0">
+                <a:gradFill rotWithShape="1">
+                  <a:gsLst>
+                    <a:gs pos="0">
+                      <a:srgbClr val="41AFF0"/>
+                    </a:gs>
+                    <a:gs pos="100000">
+                      <a:srgbClr val="6B7FF3"/>
+                    </a:gs>
+                  </a:gsLst>
+                  <a:lin ang="6600000" scaled="0"/>
+                </a:gradFill>
+                <a:effectLst>
+                  <a:outerShdw blurRad="342900" dist="57150" dir="5400000" rotWithShape="0">
+                    <a:srgbClr val="000000">
+                      <a:alpha val="46666"/>
+                    </a:srgbClr>
+                  </a:outerShdw>
+                </a:effectLst>
+                <a:latin typeface="Noto Serif"/>
               </a:rPr>
-              <a:t>자동으로 맥락화</a:t>
-            </a:r>
-          </a:p>
-        </p:txBody>
-      </p:sp>
-      <p:sp>
-        <p:nvSpPr>
-          <p:cNvPr id="12" name="Rounded Rectangle 11"/>
+              <a:t>One platform. Every signal.</a:t>
+            </a:r>
+          </a:p>
+        </p:txBody>
+      </p:sp>
+      <p:sp>
+        <p:nvSpPr>
+          <p:cNvPr id="8" name="Rectangle 7"/>
           <p:cNvSpPr/>
           <p:nvPr/>
         </p:nvSpPr>
         <p:spPr>
           <a:xfrm>
-            <a:off x="4362450" y="3638550"/>
-            <a:ext cx="3314700" cy="2247900"/>
+            <a:off x="6096000" y="2400300"/>
+            <a:ext cx="9906000" cy="9525"/>
           </a:xfrm>
-          <a:prstGeom prst="roundRect">
-            <a:avLst>
-              <a:gd name="adj" fmla="val 3389"/>
-            </a:avLst>
-          </a:prstGeom>
-          <a:solidFill>
-            <a:srgbClr val="FFFDF7"/>
-          </a:solidFill>
-          <a:ln>
-            <a:noFill/>
-          </a:ln>
-          <a:effectLst>
-            <a:outerShdw blurRad="533400" dist="152400" dir="5400000" rotWithShape="0">
-              <a:srgbClr val="0B1712">
-                <a:alpha val="25098"/>
-              </a:srgbClr>
-            </a:outerShdw>
-          </a:effectLst>
-        </p:spPr>
-        <p:style>
-          <a:lnRef idx="1">
-            <a:schemeClr val="accent1"/>
-          </a:lnRef>
-          <a:fillRef idx="3">
-            <a:schemeClr val="accent1"/>
-          </a:fillRef>
-          <a:effectRef idx="2">
-            <a:schemeClr val="accent1"/>
-          </a:effectRef>
-          <a:fontRef idx="minor">
-            <a:schemeClr val="lt1"/>
-          </a:fontRef>
-        </p:style>
-        <p:txBody>
-          <a:bodyPr rtlCol="0" anchor="ctr"/>
-          <a:lstStyle/>
-          <a:p>
-            <a:pPr algn="ctr"/>
-          </a:p>
-        </p:txBody>
-      </p:sp>
-      <p:sp>
-        <p:nvSpPr>
-          <p:cNvPr id="13" name="Oval 12"/>
-          <p:cNvSpPr/>
-          <p:nvPr/>
-        </p:nvSpPr>
-        <p:spPr>
-          <a:xfrm>
-            <a:off x="4552950" y="3829050"/>
-            <a:ext cx="533400" cy="533400"/>
-          </a:xfrm>
-          <a:prstGeom prst="ellipse">
+          <a:prstGeom prst="rect">
             <a:avLst/>
           </a:prstGeom>
           <a:solidFill>
-            <a:srgbClr val="F45A3A"/>
+            <a:srgbClr val="1E1D2F"/>
           </a:solidFill>
           <a:ln>
             <a:noFill/>
@@ -5336,177 +5253,22 @@
       </p:sp>
       <p:sp>
         <p:nvSpPr>
-          <p:cNvPr id="14" name="TextBox 13"/>
-          <p:cNvSpPr txBox="1"/>
+          <p:cNvPr id="9" name="Oval 8"/>
+          <p:cNvSpPr/>
           <p:nvPr/>
         </p:nvSpPr>
         <p:spPr>
           <a:xfrm>
-            <a:off x="4714875" y="4038600"/>
-            <a:ext cx="200025" cy="114300"/>
-          </a:xfrm>
-          <a:prstGeom prst="rect">
-            <a:avLst/>
-          </a:prstGeom>
-          <a:noFill/>
-        </p:spPr>
-        <p:txBody>
-          <a:bodyPr wrap="none" anchor="t" lIns="0" rIns="0" tIns="0" bIns="0">
-            <a:noAutofit/>
-          </a:bodyPr>
-          <a:lstStyle/>
-          <a:p>
-            <a:pPr algn="ctr"/>
-            <a:r>
-              <a:rPr sz="1200" b="1" i="0">
-                <a:solidFill>
-                  <a:srgbClr val="FFFDF7"/>
-                </a:solidFill>
-                <a:latin typeface="Pretendard"/>
-              </a:rPr>
-              <a:t>02</a:t>
-            </a:r>
-          </a:p>
-        </p:txBody>
-      </p:sp>
-      <p:sp>
-        <p:nvSpPr>
-          <p:cNvPr id="15" name="TextBox 14"/>
-          <p:cNvSpPr txBox="1"/>
-          <p:nvPr/>
-        </p:nvSpPr>
-        <p:spPr>
-          <a:xfrm>
-            <a:off x="4629150" y="4705350"/>
-            <a:ext cx="1066800" cy="276225"/>
-          </a:xfrm>
-          <a:prstGeom prst="rect">
-            <a:avLst/>
-          </a:prstGeom>
-          <a:noFill/>
-        </p:spPr>
-        <p:txBody>
-          <a:bodyPr wrap="none" anchor="t" lIns="0" rIns="0" tIns="0" bIns="0">
-            <a:noAutofit/>
-          </a:bodyPr>
-          <a:lstStyle/>
-          <a:p>
-            <a:pPr algn="l"/>
-            <a:r>
-              <a:rPr sz="2400" b="1" i="0">
-                <a:solidFill>
-                  <a:srgbClr val="17211D"/>
-                </a:solidFill>
-                <a:latin typeface="Pretendard"/>
-              </a:rPr>
-              <a:t>내다보고</a:t>
-            </a:r>
-          </a:p>
-        </p:txBody>
-      </p:sp>
-      <p:sp>
-        <p:nvSpPr>
-          <p:cNvPr id="16" name="TextBox 15"/>
-          <p:cNvSpPr txBox="1"/>
-          <p:nvPr/>
-        </p:nvSpPr>
-        <p:spPr>
-          <a:xfrm>
-            <a:off x="4629150" y="5257800"/>
-            <a:ext cx="1066800" cy="180975"/>
-          </a:xfrm>
-          <a:prstGeom prst="rect">
-            <a:avLst/>
-          </a:prstGeom>
-          <a:noFill/>
-        </p:spPr>
-        <p:txBody>
-          <a:bodyPr wrap="none" anchor="t" lIns="0" rIns="0" tIns="0" bIns="0">
-            <a:noAutofit/>
-          </a:bodyPr>
-          <a:lstStyle/>
-          <a:p>
-            <a:pPr algn="l"/>
-            <a:r>
-              <a:rPr sz="1575" b="0" i="0">
-                <a:solidFill>
-                  <a:srgbClr val="68716C"/>
-                </a:solidFill>
-                <a:latin typeface="Pretendard"/>
-              </a:rPr>
-              <a:t>7일 뒤를 예측</a:t>
-            </a:r>
-          </a:p>
-        </p:txBody>
-      </p:sp>
-      <p:sp>
-        <p:nvSpPr>
-          <p:cNvPr id="17" name="Rounded Rectangle 16"/>
-          <p:cNvSpPr/>
-          <p:nvPr/>
-        </p:nvSpPr>
-        <p:spPr>
-          <a:xfrm>
-            <a:off x="8039100" y="3638550"/>
-            <a:ext cx="3314700" cy="2247900"/>
-          </a:xfrm>
-          <a:prstGeom prst="roundRect">
-            <a:avLst>
-              <a:gd name="adj" fmla="val 3389"/>
-            </a:avLst>
-          </a:prstGeom>
-          <a:solidFill>
-            <a:srgbClr val="FFFDF7"/>
-          </a:solidFill>
-          <a:ln>
-            <a:noFill/>
-          </a:ln>
-          <a:effectLst>
-            <a:outerShdw blurRad="533400" dist="152400" dir="5400000" rotWithShape="0">
-              <a:srgbClr val="0B1712">
-                <a:alpha val="25098"/>
-              </a:srgbClr>
-            </a:outerShdw>
-          </a:effectLst>
-        </p:spPr>
-        <p:style>
-          <a:lnRef idx="1">
-            <a:schemeClr val="accent1"/>
-          </a:lnRef>
-          <a:fillRef idx="3">
-            <a:schemeClr val="accent1"/>
-          </a:fillRef>
-          <a:effectRef idx="2">
-            <a:schemeClr val="accent1"/>
-          </a:effectRef>
-          <a:fontRef idx="minor">
-            <a:schemeClr val="lt1"/>
-          </a:fontRef>
-        </p:style>
-        <p:txBody>
-          <a:bodyPr rtlCol="0" anchor="ctr"/>
-          <a:lstStyle/>
-          <a:p>
-            <a:pPr algn="ctr"/>
-          </a:p>
-        </p:txBody>
-      </p:sp>
-      <p:sp>
-        <p:nvSpPr>
-          <p:cNvPr id="18" name="Oval 17"/>
-          <p:cNvSpPr/>
-          <p:nvPr/>
-        </p:nvSpPr>
-        <p:spPr>
-          <a:xfrm>
-            <a:off x="8229600" y="3829050"/>
+            <a:off x="3143250" y="2743200"/>
             <a:ext cx="533400" cy="533400"/>
           </a:xfrm>
           <a:prstGeom prst="ellipse">
             <a:avLst/>
           </a:prstGeom>
           <a:solidFill>
-            <a:srgbClr val="1D4A3C"/>
+            <a:srgbClr val="8B5CF6">
+              <a:alpha val="14901"/>
+            </a:srgbClr>
           </a:solidFill>
           <a:ln>
             <a:noFill/>
@@ -5537,14 +5299,64 @@
       </p:sp>
       <p:sp>
         <p:nvSpPr>
-          <p:cNvPr id="19" name="TextBox 18"/>
+          <p:cNvPr id="10" name="Oval 9"/>
+          <p:cNvSpPr/>
+          <p:nvPr/>
+        </p:nvSpPr>
+        <p:spPr>
+          <a:xfrm>
+            <a:off x="3295650" y="2895600"/>
+            <a:ext cx="228600" cy="228600"/>
+          </a:xfrm>
+          <a:prstGeom prst="ellipse">
+            <a:avLst/>
+          </a:prstGeom>
+          <a:solidFill>
+            <a:srgbClr val="8B5CF6"/>
+          </a:solidFill>
+          <a:ln>
+            <a:noFill/>
+          </a:ln>
+          <a:effectLst>
+            <a:glow rad="171450">
+              <a:srgbClr val="8B5CF6">
+                <a:alpha val="29803"/>
+              </a:srgbClr>
+            </a:glow>
+          </a:effectLst>
+        </p:spPr>
+        <p:style>
+          <a:lnRef idx="1">
+            <a:schemeClr val="accent1"/>
+          </a:lnRef>
+          <a:fillRef idx="3">
+            <a:schemeClr val="accent1"/>
+          </a:fillRef>
+          <a:effectRef idx="2">
+            <a:schemeClr val="accent1"/>
+          </a:effectRef>
+          <a:fontRef idx="minor">
+            <a:schemeClr val="lt1"/>
+          </a:fontRef>
+        </p:style>
+        <p:txBody>
+          <a:bodyPr rtlCol="0" anchor="ctr"/>
+          <a:lstStyle/>
+          <a:p>
+            <a:pPr algn="ctr"/>
+          </a:p>
+        </p:txBody>
+      </p:sp>
+      <p:sp>
+        <p:nvSpPr>
+          <p:cNvPr id="11" name="TextBox 10"/>
           <p:cNvSpPr txBox="1"/>
           <p:nvPr/>
         </p:nvSpPr>
         <p:spPr>
           <a:xfrm>
-            <a:off x="8391525" y="4038600"/>
-            <a:ext cx="200025" cy="114300"/>
+            <a:off x="2628900" y="3248025"/>
+            <a:ext cx="1571625" cy="657225"/>
           </a:xfrm>
           <a:prstGeom prst="rect">
             <a:avLst/>
@@ -5557,29 +5369,65 @@
           </a:bodyPr>
           <a:lstStyle/>
           <a:p>
-            <a:pPr algn="ctr"/>
-            <a:r>
-              <a:rPr sz="1200" b="1" i="0">
-                <a:solidFill>
-                  <a:srgbClr val="FFFDF7"/>
-                </a:solidFill>
-                <a:latin typeface="Pretendard"/>
+            <a:pPr algn="ctr">
+              <a:lnSpc>
+                <a:spcPts val="3000"/>
+              </a:lnSpc>
+            </a:pPr>
+            <a:r>
+              <a:rPr sz="2850" b="1" i="0">
+                <a:gradFill rotWithShape="1">
+                  <a:gsLst>
+                    <a:gs pos="0">
+                      <a:srgbClr val="A886F8"/>
+                    </a:gs>
+                    <a:gs pos="100000">
+                      <a:srgbClr val="EDE9FE"/>
+                    </a:gs>
+                  </a:gsLst>
+                  <a:lin ang="6000000" scaled="0"/>
+                </a:gradFill>
+                <a:latin typeface="Roboto"/>
               </a:rPr>
-              <a:t>03</a:t>
-            </a:r>
-          </a:p>
-        </p:txBody>
-      </p:sp>
-      <p:sp>
-        <p:nvSpPr>
-          <p:cNvPr id="20" name="TextBox 19"/>
+              <a:t>Signal</a:t>
+            </a:r>
+          </a:p>
+          <a:p>
+            <a:pPr algn="ctr">
+              <a:lnSpc>
+                <a:spcPts val="3000"/>
+              </a:lnSpc>
+            </a:pPr>
+            <a:r>
+              <a:rPr sz="2850" b="1" i="0">
+                <a:gradFill rotWithShape="1">
+                  <a:gsLst>
+                    <a:gs pos="0">
+                      <a:srgbClr val="A886F8"/>
+                    </a:gs>
+                    <a:gs pos="100000">
+                      <a:srgbClr val="EDE9FE"/>
+                    </a:gs>
+                  </a:gsLst>
+                  <a:lin ang="6000000" scaled="0"/>
+                </a:gradFill>
+                <a:latin typeface="Roboto"/>
+              </a:rPr>
+              <a:t>Detection</a:t>
+            </a:r>
+          </a:p>
+        </p:txBody>
+      </p:sp>
+      <p:sp>
+        <p:nvSpPr>
+          <p:cNvPr id="12" name="TextBox 11"/>
           <p:cNvSpPr txBox="1"/>
           <p:nvPr/>
         </p:nvSpPr>
         <p:spPr>
           <a:xfrm>
-            <a:off x="8305800" y="4705350"/>
-            <a:ext cx="1066800" cy="276225"/>
+            <a:off x="2066925" y="4333875"/>
+            <a:ext cx="2695575" cy="828675"/>
           </a:xfrm>
           <a:prstGeom prst="rect">
             <a:avLst/>
@@ -5592,29 +5440,161 @@
           </a:bodyPr>
           <a:lstStyle/>
           <a:p>
-            <a:pPr algn="l"/>
-            <a:r>
-              <a:rPr sz="2400" b="1" i="0">
+            <a:pPr algn="ctr">
+              <a:lnSpc>
+                <a:spcPts val="2475"/>
+              </a:lnSpc>
+            </a:pPr>
+            <a:r>
+              <a:rPr sz="1650" b="0" i="0">
                 <a:solidFill>
-                  <a:srgbClr val="17211D"/>
+                  <a:srgbClr val="C4C4D4"/>
                 </a:solidFill>
-                <a:latin typeface="Pretendard"/>
+                <a:latin typeface="Roboto"/>
               </a:rPr>
-              <a:t>바꿉니다</a:t>
-            </a:r>
-          </a:p>
-        </p:txBody>
-      </p:sp>
-      <p:sp>
-        <p:nvSpPr>
-          <p:cNvPr id="21" name="TextBox 20"/>
+              <a:t>Automatically surfaces</a:t>
+            </a:r>
+          </a:p>
+          <a:p>
+            <a:pPr algn="ctr">
+              <a:lnSpc>
+                <a:spcPts val="2475"/>
+              </a:lnSpc>
+            </a:pPr>
+            <a:r>
+              <a:rPr sz="1650" b="0" i="0">
+                <a:solidFill>
+                  <a:srgbClr val="C4C4D4"/>
+                </a:solidFill>
+                <a:latin typeface="Roboto"/>
+              </a:rPr>
+              <a:t>anomalies and trends</a:t>
+            </a:r>
+          </a:p>
+          <a:p>
+            <a:pPr algn="ctr">
+              <a:lnSpc>
+                <a:spcPts val="2475"/>
+              </a:lnSpc>
+            </a:pPr>
+            <a:r>
+              <a:rPr sz="1650" b="0" i="0">
+                <a:solidFill>
+                  <a:srgbClr val="C4C4D4"/>
+                </a:solidFill>
+                <a:latin typeface="Roboto"/>
+              </a:rPr>
+              <a:t>before they become incidents.</a:t>
+            </a:r>
+          </a:p>
+        </p:txBody>
+      </p:sp>
+      <p:sp>
+        <p:nvSpPr>
+          <p:cNvPr id="13" name="Oval 12"/>
+          <p:cNvSpPr/>
+          <p:nvPr/>
+        </p:nvSpPr>
+        <p:spPr>
+          <a:xfrm>
+            <a:off x="5829300" y="2743200"/>
+            <a:ext cx="533400" cy="533400"/>
+          </a:xfrm>
+          <a:prstGeom prst="ellipse">
+            <a:avLst/>
+          </a:prstGeom>
+          <a:solidFill>
+            <a:srgbClr val="22D3EE">
+              <a:alpha val="14901"/>
+            </a:srgbClr>
+          </a:solidFill>
+          <a:ln>
+            <a:noFill/>
+          </a:ln>
+          <a:effectLst/>
+        </p:spPr>
+        <p:style>
+          <a:lnRef idx="1">
+            <a:schemeClr val="accent1"/>
+          </a:lnRef>
+          <a:fillRef idx="3">
+            <a:schemeClr val="accent1"/>
+          </a:fillRef>
+          <a:effectRef idx="2">
+            <a:schemeClr val="accent1"/>
+          </a:effectRef>
+          <a:fontRef idx="minor">
+            <a:schemeClr val="lt1"/>
+          </a:fontRef>
+        </p:style>
+        <p:txBody>
+          <a:bodyPr rtlCol="0" anchor="ctr"/>
+          <a:lstStyle/>
+          <a:p>
+            <a:pPr algn="ctr"/>
+          </a:p>
+        </p:txBody>
+      </p:sp>
+      <p:sp>
+        <p:nvSpPr>
+          <p:cNvPr id="14" name="Oval 13"/>
+          <p:cNvSpPr/>
+          <p:nvPr/>
+        </p:nvSpPr>
+        <p:spPr>
+          <a:xfrm>
+            <a:off x="5981700" y="2895600"/>
+            <a:ext cx="228600" cy="228600"/>
+          </a:xfrm>
+          <a:prstGeom prst="ellipse">
+            <a:avLst/>
+          </a:prstGeom>
+          <a:solidFill>
+            <a:srgbClr val="22D3EE"/>
+          </a:solidFill>
+          <a:ln>
+            <a:noFill/>
+          </a:ln>
+          <a:effectLst>
+            <a:glow rad="171450">
+              <a:srgbClr val="22D3EE">
+                <a:alpha val="29803"/>
+              </a:srgbClr>
+            </a:glow>
+          </a:effectLst>
+        </p:spPr>
+        <p:style>
+          <a:lnRef idx="1">
+            <a:schemeClr val="accent1"/>
+          </a:lnRef>
+          <a:fillRef idx="3">
+            <a:schemeClr val="accent1"/>
+          </a:fillRef>
+          <a:effectRef idx="2">
+            <a:schemeClr val="accent1"/>
+          </a:effectRef>
+          <a:fontRef idx="minor">
+            <a:schemeClr val="lt1"/>
+          </a:fontRef>
+        </p:style>
+        <p:txBody>
+          <a:bodyPr rtlCol="0" anchor="ctr"/>
+          <a:lstStyle/>
+          <a:p>
+            <a:pPr algn="ctr"/>
+          </a:p>
+        </p:txBody>
+      </p:sp>
+      <p:sp>
+        <p:nvSpPr>
+          <p:cNvPr id="15" name="TextBox 14"/>
           <p:cNvSpPr txBox="1"/>
           <p:nvPr/>
         </p:nvSpPr>
         <p:spPr>
           <a:xfrm>
-            <a:off x="8305800" y="5257800"/>
-            <a:ext cx="1343025" cy="180975"/>
+            <a:off x="5600700" y="3248025"/>
+            <a:ext cx="990600" cy="657225"/>
           </a:xfrm>
           <a:prstGeom prst="rect">
             <a:avLst/>
@@ -5627,15 +5607,366 @@
           </a:bodyPr>
           <a:lstStyle/>
           <a:p>
-            <a:pPr algn="l"/>
-            <a:r>
-              <a:rPr sz="1575" b="0" i="0">
+            <a:pPr algn="ctr">
+              <a:lnSpc>
+                <a:spcPts val="3000"/>
+              </a:lnSpc>
+            </a:pPr>
+            <a:r>
+              <a:rPr sz="2850" b="1" i="0">
+                <a:gradFill rotWithShape="1">
+                  <a:gsLst>
+                    <a:gs pos="0">
+                      <a:srgbClr val="49D9F1"/>
+                    </a:gs>
+                    <a:gs pos="100000">
+                      <a:srgbClr val="F6F7FE"/>
+                    </a:gs>
+                  </a:gsLst>
+                  <a:lin ang="6000000" scaled="0"/>
+                </a:gradFill>
+                <a:latin typeface="Roboto"/>
+              </a:rPr>
+              <a:t>Smart</a:t>
+            </a:r>
+          </a:p>
+          <a:p>
+            <a:pPr algn="ctr">
+              <a:lnSpc>
+                <a:spcPts val="3000"/>
+              </a:lnSpc>
+            </a:pPr>
+            <a:r>
+              <a:rPr sz="2850" b="1" i="0">
+                <a:gradFill rotWithShape="1">
+                  <a:gsLst>
+                    <a:gs pos="0">
+                      <a:srgbClr val="49D9F1"/>
+                    </a:gs>
+                    <a:gs pos="100000">
+                      <a:srgbClr val="F6F7FE"/>
+                    </a:gs>
+                  </a:gsLst>
+                  <a:lin ang="6000000" scaled="0"/>
+                </a:gradFill>
+                <a:latin typeface="Roboto"/>
+              </a:rPr>
+              <a:t>Alerts</a:t>
+            </a:r>
+          </a:p>
+        </p:txBody>
+      </p:sp>
+      <p:sp>
+        <p:nvSpPr>
+          <p:cNvPr id="16" name="TextBox 15"/>
+          <p:cNvSpPr txBox="1"/>
+          <p:nvPr/>
+        </p:nvSpPr>
+        <p:spPr>
+          <a:xfrm>
+            <a:off x="4848225" y="4333875"/>
+            <a:ext cx="2495550" cy="828675"/>
+          </a:xfrm>
+          <a:prstGeom prst="rect">
+            <a:avLst/>
+          </a:prstGeom>
+          <a:noFill/>
+        </p:spPr>
+        <p:txBody>
+          <a:bodyPr wrap="none" anchor="t" lIns="0" rIns="0" tIns="0" bIns="0">
+            <a:noAutofit/>
+          </a:bodyPr>
+          <a:lstStyle/>
+          <a:p>
+            <a:pPr algn="ctr">
+              <a:lnSpc>
+                <a:spcPts val="2475"/>
+              </a:lnSpc>
+            </a:pPr>
+            <a:r>
+              <a:rPr sz="1650" b="0" i="0">
                 <a:solidFill>
-                  <a:srgbClr val="68716C"/>
+                  <a:srgbClr val="C4C4D4"/>
                 </a:solidFill>
-                <a:latin typeface="Pretendard"/>
+                <a:latin typeface="Roboto"/>
               </a:rPr>
-              <a:t>한 가지 행동 제안</a:t>
+              <a:t>Context-aware notifications</a:t>
+            </a:r>
+          </a:p>
+          <a:p>
+            <a:pPr algn="ctr">
+              <a:lnSpc>
+                <a:spcPts val="2475"/>
+              </a:lnSpc>
+            </a:pPr>
+            <a:r>
+              <a:rPr sz="1650" b="0" i="0">
+                <a:solidFill>
+                  <a:srgbClr val="C4C4D4"/>
+                </a:solidFill>
+                <a:latin typeface="Roboto"/>
+              </a:rPr>
+              <a:t>that cut through noise and</a:t>
+            </a:r>
+          </a:p>
+          <a:p>
+            <a:pPr algn="ctr">
+              <a:lnSpc>
+                <a:spcPts val="2475"/>
+              </a:lnSpc>
+            </a:pPr>
+            <a:r>
+              <a:rPr sz="1650" b="0" i="0">
+                <a:solidFill>
+                  <a:srgbClr val="C4C4D4"/>
+                </a:solidFill>
+                <a:latin typeface="Roboto"/>
+              </a:rPr>
+              <a:t>reach the right person.</a:t>
+            </a:r>
+          </a:p>
+        </p:txBody>
+      </p:sp>
+      <p:sp>
+        <p:nvSpPr>
+          <p:cNvPr id="17" name="Oval 16"/>
+          <p:cNvSpPr/>
+          <p:nvPr/>
+        </p:nvSpPr>
+        <p:spPr>
+          <a:xfrm>
+            <a:off x="8505825" y="2743200"/>
+            <a:ext cx="533400" cy="533400"/>
+          </a:xfrm>
+          <a:prstGeom prst="ellipse">
+            <a:avLst/>
+          </a:prstGeom>
+          <a:solidFill>
+            <a:srgbClr val="10B981">
+              <a:alpha val="14901"/>
+            </a:srgbClr>
+          </a:solidFill>
+          <a:ln>
+            <a:noFill/>
+          </a:ln>
+          <a:effectLst/>
+        </p:spPr>
+        <p:style>
+          <a:lnRef idx="1">
+            <a:schemeClr val="accent1"/>
+          </a:lnRef>
+          <a:fillRef idx="3">
+            <a:schemeClr val="accent1"/>
+          </a:fillRef>
+          <a:effectRef idx="2">
+            <a:schemeClr val="accent1"/>
+          </a:effectRef>
+          <a:fontRef idx="minor">
+            <a:schemeClr val="lt1"/>
+          </a:fontRef>
+        </p:style>
+        <p:txBody>
+          <a:bodyPr rtlCol="0" anchor="ctr"/>
+          <a:lstStyle/>
+          <a:p>
+            <a:pPr algn="ctr"/>
+          </a:p>
+        </p:txBody>
+      </p:sp>
+      <p:sp>
+        <p:nvSpPr>
+          <p:cNvPr id="18" name="Oval 17"/>
+          <p:cNvSpPr/>
+          <p:nvPr/>
+        </p:nvSpPr>
+        <p:spPr>
+          <a:xfrm>
+            <a:off x="8658225" y="2895600"/>
+            <a:ext cx="228600" cy="228600"/>
+          </a:xfrm>
+          <a:prstGeom prst="ellipse">
+            <a:avLst/>
+          </a:prstGeom>
+          <a:solidFill>
+            <a:srgbClr val="10B981"/>
+          </a:solidFill>
+          <a:ln>
+            <a:noFill/>
+          </a:ln>
+          <a:effectLst>
+            <a:glow rad="171450">
+              <a:srgbClr val="10B981">
+                <a:alpha val="29803"/>
+              </a:srgbClr>
+            </a:glow>
+          </a:effectLst>
+        </p:spPr>
+        <p:style>
+          <a:lnRef idx="1">
+            <a:schemeClr val="accent1"/>
+          </a:lnRef>
+          <a:fillRef idx="3">
+            <a:schemeClr val="accent1"/>
+          </a:fillRef>
+          <a:effectRef idx="2">
+            <a:schemeClr val="accent1"/>
+          </a:effectRef>
+          <a:fontRef idx="minor">
+            <a:schemeClr val="lt1"/>
+          </a:fontRef>
+        </p:style>
+        <p:txBody>
+          <a:bodyPr rtlCol="0" anchor="ctr"/>
+          <a:lstStyle/>
+          <a:p>
+            <a:pPr algn="ctr"/>
+          </a:p>
+        </p:txBody>
+      </p:sp>
+      <p:sp>
+        <p:nvSpPr>
+          <p:cNvPr id="19" name="TextBox 18"/>
+          <p:cNvSpPr txBox="1"/>
+          <p:nvPr/>
+        </p:nvSpPr>
+        <p:spPr>
+          <a:xfrm>
+            <a:off x="8305800" y="3248025"/>
+            <a:ext cx="933450" cy="714375"/>
+          </a:xfrm>
+          <a:prstGeom prst="rect">
+            <a:avLst/>
+          </a:prstGeom>
+          <a:noFill/>
+        </p:spPr>
+        <p:txBody>
+          <a:bodyPr wrap="none" anchor="t" lIns="0" rIns="0" tIns="0" bIns="0">
+            <a:noAutofit/>
+          </a:bodyPr>
+          <a:lstStyle/>
+          <a:p>
+            <a:pPr algn="ctr">
+              <a:lnSpc>
+                <a:spcPts val="3000"/>
+              </a:lnSpc>
+            </a:pPr>
+            <a:r>
+              <a:rPr sz="2850" b="1" i="0">
+                <a:gradFill rotWithShape="1">
+                  <a:gsLst>
+                    <a:gs pos="0">
+                      <a:srgbClr val="34C294"/>
+                    </a:gs>
+                    <a:gs pos="97756">
+                      <a:srgbClr val="F8F8FF"/>
+                    </a:gs>
+                    <a:gs pos="100000">
+                      <a:srgbClr val="F8F8FF"/>
+                    </a:gs>
+                  </a:gsLst>
+                  <a:lin ang="6000000" scaled="0"/>
+                </a:gradFill>
+                <a:latin typeface="Roboto"/>
+              </a:rPr>
+              <a:t>Team</a:t>
+            </a:r>
+          </a:p>
+          <a:p>
+            <a:pPr algn="ctr">
+              <a:lnSpc>
+                <a:spcPts val="3000"/>
+              </a:lnSpc>
+            </a:pPr>
+            <a:r>
+              <a:rPr sz="2850" b="1" i="0">
+                <a:gradFill rotWithShape="1">
+                  <a:gsLst>
+                    <a:gs pos="0">
+                      <a:srgbClr val="34C294"/>
+                    </a:gs>
+                    <a:gs pos="97756">
+                      <a:srgbClr val="F8F8FF"/>
+                    </a:gs>
+                    <a:gs pos="100000">
+                      <a:srgbClr val="F8F8FF"/>
+                    </a:gs>
+                  </a:gsLst>
+                  <a:lin ang="6000000" scaled="0"/>
+                </a:gradFill>
+                <a:latin typeface="Roboto"/>
+              </a:rPr>
+              <a:t>Sync</a:t>
+            </a:r>
+          </a:p>
+        </p:txBody>
+      </p:sp>
+      <p:sp>
+        <p:nvSpPr>
+          <p:cNvPr id="20" name="TextBox 19"/>
+          <p:cNvSpPr txBox="1"/>
+          <p:nvPr/>
+        </p:nvSpPr>
+        <p:spPr>
+          <a:xfrm>
+            <a:off x="7743825" y="4333875"/>
+            <a:ext cx="2066925" cy="828675"/>
+          </a:xfrm>
+          <a:prstGeom prst="rect">
+            <a:avLst/>
+          </a:prstGeom>
+          <a:noFill/>
+        </p:spPr>
+        <p:txBody>
+          <a:bodyPr wrap="none" anchor="t" lIns="0" rIns="0" tIns="0" bIns="0">
+            <a:noAutofit/>
+          </a:bodyPr>
+          <a:lstStyle/>
+          <a:p>
+            <a:pPr algn="ctr">
+              <a:lnSpc>
+                <a:spcPts val="2475"/>
+              </a:lnSpc>
+            </a:pPr>
+            <a:r>
+              <a:rPr sz="1650" b="0" i="0">
+                <a:solidFill>
+                  <a:srgbClr val="C4C4D4"/>
+                </a:solidFill>
+                <a:latin typeface="Roboto"/>
+              </a:rPr>
+              <a:t>One-click shared views</a:t>
+            </a:r>
+          </a:p>
+          <a:p>
+            <a:pPr algn="ctr">
+              <a:lnSpc>
+                <a:spcPts val="2475"/>
+              </a:lnSpc>
+            </a:pPr>
+            <a:r>
+              <a:rPr sz="1650" b="0" i="0">
+                <a:solidFill>
+                  <a:srgbClr val="C4C4D4"/>
+                </a:solidFill>
+                <a:latin typeface="Roboto"/>
+              </a:rPr>
+              <a:t>that turn findings into</a:t>
+            </a:r>
+          </a:p>
+          <a:p>
+            <a:pPr algn="ctr">
+              <a:lnSpc>
+                <a:spcPts val="2475"/>
+              </a:lnSpc>
+            </a:pPr>
+            <a:r>
+              <a:rPr sz="1650" b="0" i="0">
+                <a:solidFill>
+                  <a:srgbClr val="C4C4D4"/>
+                </a:solidFill>
+                <a:latin typeface="Roboto"/>
+              </a:rPr>
+              <a:t>aligned decisions fast.</a:t>
             </a:r>
           </a:p>
         </p:txBody>
@@ -5657,79 +5988,26 @@
               <p:cTn id="2" dur="indefinite" nodeType="mainSeq">
                 <p:childTnLst>
                   <p:par>
-                    <p:cTn id="8" fill="hold">
+                    <p:cTn id="18" fill="hold">
                       <p:stCondLst>
                         <p:cond delay="indefinite"/>
                       </p:stCondLst>
                       <p:childTnLst>
                         <p:par>
-                          <p:cTn id="9" fill="hold">
+                          <p:cTn id="19" fill="hold">
                             <p:stCondLst>
                               <p:cond delay="0"/>
                             </p:stCondLst>
                             <p:childTnLst>
                               <p:par>
-                                <p:cTn id="10" presetID="10" presetClass="entr" presetSubtype="0" fill="hold" grpId="0" nodeType="clickEffect">
+                                <p:cTn id="20" presetID="10" presetClass="entr" presetSubtype="0" fill="hold" grpId="0" nodeType="clickEffect">
                                   <p:stCondLst>
                                     <p:cond delay="0"/>
                                   </p:stCondLst>
                                   <p:childTnLst>
                                     <p:set>
                                       <p:cBhvr>
-                                        <p:cTn id="11" dur="1" fill="hold">
-                                          <p:stCondLst>
-                                            <p:cond delay="0"/>
-                                          </p:stCondLst>
-                                        </p:cTn>
-                                        <p:tgtEl>
-                                          <p:spTgt spid="5"/>
-                                        </p:tgtEl>
-                                        <p:attrNameLst>
-                                          <p:attrName>style.visibility</p:attrName>
-                                        </p:attrNameLst>
-                                      </p:cBhvr>
-                                      <p:to>
-                                        <p:strVal val="visible"/>
-                                      </p:to>
-                                    </p:set>
-                                    <p:animEffect transition="in" filter="fade">
-                                      <p:cBhvr>
-                                        <p:cTn id="12" dur="450"/>
-                                        <p:tgtEl>
-                                          <p:spTgt spid="5"/>
-                                        </p:tgtEl>
-                                      </p:cBhvr>
-                                    </p:animEffect>
-                                  </p:childTnLst>
-                                </p:cTn>
-                              </p:par>
-                            </p:childTnLst>
-                          </p:cTn>
-                        </p:par>
-                      </p:childTnLst>
-                    </p:cTn>
-                  </p:par>
-                  <p:par>
-                    <p:cTn id="13" fill="hold">
-                      <p:stCondLst>
-                        <p:cond delay="indefinite"/>
-                      </p:stCondLst>
-                      <p:childTnLst>
-                        <p:par>
-                          <p:cTn id="14" fill="hold">
-                            <p:stCondLst>
-                              <p:cond delay="0"/>
-                            </p:stCondLst>
-                            <p:childTnLst>
-                              <p:par>
-                                <p:cTn id="15" presetID="8" presetClass="entr" presetSubtype="0" fill="hold" grpId="0" nodeType="clickEffect">
-                                  <p:stCondLst>
-                                    <p:cond delay="0"/>
-                                  </p:stCondLst>
-                                  <p:childTnLst>
-                                    <p:set>
-                                      <p:cBhvr>
-                                        <p:cTn id="16" dur="1" fill="hold">
+                                        <p:cTn id="21" dur="1" fill="hold">
                                           <p:stCondLst>
                                             <p:cond delay="0"/>
                                           </p:stCondLst>
@@ -5745,11 +6023,46 @@
                                         <p:strVal val="visible"/>
                                       </p:to>
                                     </p:set>
-                                    <p:animEffect transition="in" filter="box(in)">
+                                    <p:animEffect transition="in" filter="fade">
                                       <p:cBhvr>
-                                        <p:cTn id="17" dur="400"/>
+                                        <p:cTn id="22" dur="500"/>
                                         <p:tgtEl>
                                           <p:spTgt spid="7"/>
+                                        </p:tgtEl>
+                                      </p:cBhvr>
+                                    </p:animEffect>
+                                  </p:childTnLst>
+                                </p:cTn>
+                              </p:par>
+                              <p:par>
+                                <p:cTn id="23" presetID="22" presetClass="entr" presetSubtype="0" fill="hold" grpId="0" nodeType="afterEffect">
+                                  <p:stCondLst>
+                                    <p:cond delay="0"/>
+                                  </p:stCondLst>
+                                  <p:childTnLst>
+                                    <p:set>
+                                      <p:cBhvr>
+                                        <p:cTn id="24" dur="1" fill="hold">
+                                          <p:stCondLst>
+                                            <p:cond delay="0"/>
+                                          </p:stCondLst>
+                                        </p:cTn>
+                                        <p:tgtEl>
+                                          <p:spTgt spid="8"/>
+                                        </p:tgtEl>
+                                        <p:attrNameLst>
+                                          <p:attrName>style.visibility</p:attrName>
+                                        </p:attrNameLst>
+                                      </p:cBhvr>
+                                      <p:to>
+                                        <p:strVal val="visible"/>
+                                      </p:to>
+                                    </p:set>
+                                    <p:animEffect transition="in" filter="wipe(right)">
+                                      <p:cBhvr>
+                                        <p:cTn id="25" dur="400"/>
+                                        <p:tgtEl>
+                                          <p:spTgt spid="8"/>
                                         </p:tgtEl>
                                       </p:cBhvr>
                                     </p:animEffect>
@@ -5763,26 +6076,131 @@
                     </p:cTn>
                   </p:par>
                   <p:par>
-                    <p:cTn id="18" fill="hold">
+                    <p:cTn id="26" fill="hold">
                       <p:stCondLst>
                         <p:cond delay="indefinite"/>
                       </p:stCondLst>
                       <p:childTnLst>
                         <p:par>
-                          <p:cTn id="19" fill="hold">
+                          <p:cTn id="27" fill="hold">
                             <p:stCondLst>
                               <p:cond delay="0"/>
                             </p:stCondLst>
                             <p:childTnLst>
                               <p:par>
-                                <p:cTn id="20" presetID="8" presetClass="entr" presetSubtype="0" fill="hold" grpId="0" nodeType="clickEffect">
+                                <p:cTn id="28" presetID="10" presetClass="entr" presetSubtype="0" fill="hold" grpId="0" nodeType="clickEffect">
                                   <p:stCondLst>
                                     <p:cond delay="0"/>
                                   </p:stCondLst>
                                   <p:childTnLst>
                                     <p:set>
                                       <p:cBhvr>
-                                        <p:cTn id="21" dur="1" fill="hold">
+                                        <p:cTn id="29" dur="1" fill="hold">
+                                          <p:stCondLst>
+                                            <p:cond delay="0"/>
+                                          </p:stCondLst>
+                                        </p:cTn>
+                                        <p:tgtEl>
+                                          <p:spTgt spid="9"/>
+                                        </p:tgtEl>
+                                        <p:attrNameLst>
+                                          <p:attrName>style.visibility</p:attrName>
+                                        </p:attrNameLst>
+                                      </p:cBhvr>
+                                      <p:to>
+                                        <p:strVal val="visible"/>
+                                      </p:to>
+                                    </p:set>
+                                    <p:animEffect transition="in" filter="fade">
+                                      <p:cBhvr>
+                                        <p:cTn id="30" dur="400"/>
+                                        <p:tgtEl>
+                                          <p:spTgt spid="9"/>
+                                        </p:tgtEl>
+                                      </p:cBhvr>
+                                    </p:animEffect>
+                                  </p:childTnLst>
+                                </p:cTn>
+                              </p:par>
+                              <p:par>
+                                <p:cTn id="31" presetID="10" presetClass="entr" presetSubtype="0" fill="hold" grpId="0" nodeType="withEffect">
+                                  <p:stCondLst>
+                                    <p:cond delay="0"/>
+                                  </p:stCondLst>
+                                  <p:childTnLst>
+                                    <p:set>
+                                      <p:cBhvr>
+                                        <p:cTn id="32" dur="1" fill="hold">
+                                          <p:stCondLst>
+                                            <p:cond delay="0"/>
+                                          </p:stCondLst>
+                                        </p:cTn>
+                                        <p:tgtEl>
+                                          <p:spTgt spid="10"/>
+                                        </p:tgtEl>
+                                        <p:attrNameLst>
+                                          <p:attrName>style.visibility</p:attrName>
+                                        </p:attrNameLst>
+                                      </p:cBhvr>
+                                      <p:to>
+                                        <p:strVal val="visible"/>
+                                      </p:to>
+                                    </p:set>
+                                    <p:animEffect transition="in" filter="fade">
+                                      <p:cBhvr>
+                                        <p:cTn id="33" dur="400"/>
+                                        <p:tgtEl>
+                                          <p:spTgt spid="10"/>
+                                        </p:tgtEl>
+                                      </p:cBhvr>
+                                    </p:animEffect>
+                                  </p:childTnLst>
+                                </p:cTn>
+                              </p:par>
+                              <p:par>
+                                <p:cTn id="34" presetID="22" presetClass="entr" presetSubtype="0" fill="hold" grpId="0" nodeType="withEffect">
+                                  <p:stCondLst>
+                                    <p:cond delay="0"/>
+                                  </p:stCondLst>
+                                  <p:childTnLst>
+                                    <p:set>
+                                      <p:cBhvr>
+                                        <p:cTn id="35" dur="1" fill="hold">
+                                          <p:stCondLst>
+                                            <p:cond delay="0"/>
+                                          </p:stCondLst>
+                                        </p:cTn>
+                                        <p:tgtEl>
+                                          <p:spTgt spid="11"/>
+                                        </p:tgtEl>
+                                        <p:attrNameLst>
+                                          <p:attrName>style.visibility</p:attrName>
+                                        </p:attrNameLst>
+                                      </p:cBhvr>
+                                      <p:to>
+                                        <p:strVal val="visible"/>
+                                      </p:to>
+                                    </p:set>
+                                    <p:animEffect transition="in" filter="wipe(up)">
+                                      <p:cBhvr>
+                                        <p:cTn id="36" dur="350"/>
+                                        <p:tgtEl>
+                                          <p:spTgt spid="11"/>
+                                        </p:tgtEl>
+                                      </p:cBhvr>
+                                    </p:animEffect>
+                                  </p:childTnLst>
+                                </p:cTn>
+                              </p:par>
+                              <p:par>
+                                <p:cTn id="37" presetID="10" presetClass="entr" presetSubtype="0" fill="hold" grpId="0" nodeType="withEffect">
+                                  <p:stCondLst>
+                                    <p:cond delay="0"/>
+                                  </p:stCondLst>
+                                  <p:childTnLst>
+                                    <p:set>
+                                      <p:cBhvr>
+                                        <p:cTn id="38" dur="1" fill="hold">
                                           <p:stCondLst>
                                             <p:cond delay="0"/>
                                           </p:stCondLst>
@@ -5798,9 +6216,9 @@
                                         <p:strVal val="visible"/>
                                       </p:to>
                                     </p:set>
-                                    <p:animEffect transition="in" filter="box(in)">
+                                    <p:animEffect transition="in" filter="fade">
                                       <p:cBhvr>
-                                        <p:cTn id="22" dur="400"/>
+                                        <p:cTn id="39" dur="350"/>
                                         <p:tgtEl>
                                           <p:spTgt spid="12"/>
                                         </p:tgtEl>
@@ -5816,26 +6234,184 @@
                     </p:cTn>
                   </p:par>
                   <p:par>
-                    <p:cTn id="23" fill="hold">
+                    <p:cTn id="40" fill="hold">
                       <p:stCondLst>
                         <p:cond delay="indefinite"/>
                       </p:stCondLst>
                       <p:childTnLst>
                         <p:par>
-                          <p:cTn id="24" fill="hold">
+                          <p:cTn id="41" fill="hold">
                             <p:stCondLst>
                               <p:cond delay="0"/>
                             </p:stCondLst>
                             <p:childTnLst>
                               <p:par>
-                                <p:cTn id="25" presetID="8" presetClass="entr" presetSubtype="0" fill="hold" grpId="0" nodeType="clickEffect">
+                                <p:cTn id="42" presetID="10" presetClass="entr" presetSubtype="0" fill="hold" grpId="0" nodeType="clickEffect">
                                   <p:stCondLst>
                                     <p:cond delay="0"/>
                                   </p:stCondLst>
                                   <p:childTnLst>
                                     <p:set>
                                       <p:cBhvr>
-                                        <p:cTn id="26" dur="1" fill="hold">
+                                        <p:cTn id="43" dur="1" fill="hold">
+                                          <p:stCondLst>
+                                            <p:cond delay="0"/>
+                                          </p:stCondLst>
+                                        </p:cTn>
+                                        <p:tgtEl>
+                                          <p:spTgt spid="13"/>
+                                        </p:tgtEl>
+                                        <p:attrNameLst>
+                                          <p:attrName>style.visibility</p:attrName>
+                                        </p:attrNameLst>
+                                      </p:cBhvr>
+                                      <p:to>
+                                        <p:strVal val="visible"/>
+                                      </p:to>
+                                    </p:set>
+                                    <p:animEffect transition="in" filter="fade">
+                                      <p:cBhvr>
+                                        <p:cTn id="44" dur="400"/>
+                                        <p:tgtEl>
+                                          <p:spTgt spid="13"/>
+                                        </p:tgtEl>
+                                      </p:cBhvr>
+                                    </p:animEffect>
+                                  </p:childTnLst>
+                                </p:cTn>
+                              </p:par>
+                              <p:par>
+                                <p:cTn id="45" presetID="10" presetClass="entr" presetSubtype="0" fill="hold" grpId="0" nodeType="withEffect">
+                                  <p:stCondLst>
+                                    <p:cond delay="0"/>
+                                  </p:stCondLst>
+                                  <p:childTnLst>
+                                    <p:set>
+                                      <p:cBhvr>
+                                        <p:cTn id="46" dur="1" fill="hold">
+                                          <p:stCondLst>
+                                            <p:cond delay="0"/>
+                                          </p:stCondLst>
+                                        </p:cTn>
+                                        <p:tgtEl>
+                                          <p:spTgt spid="14"/>
+                                        </p:tgtEl>
+                                        <p:attrNameLst>
+                                          <p:attrName>style.visibility</p:attrName>
+                                        </p:attrNameLst>
+                                      </p:cBhvr>
+                                      <p:to>
+                                        <p:strVal val="visible"/>
+                                      </p:to>
+                                    </p:set>
+                                    <p:animEffect transition="in" filter="fade">
+                                      <p:cBhvr>
+                                        <p:cTn id="47" dur="400"/>
+                                        <p:tgtEl>
+                                          <p:spTgt spid="14"/>
+                                        </p:tgtEl>
+                                      </p:cBhvr>
+                                    </p:animEffect>
+                                  </p:childTnLst>
+                                </p:cTn>
+                              </p:par>
+                              <p:par>
+                                <p:cTn id="48" presetID="22" presetClass="entr" presetSubtype="0" fill="hold" grpId="0" nodeType="withEffect">
+                                  <p:stCondLst>
+                                    <p:cond delay="0"/>
+                                  </p:stCondLst>
+                                  <p:childTnLst>
+                                    <p:set>
+                                      <p:cBhvr>
+                                        <p:cTn id="49" dur="1" fill="hold">
+                                          <p:stCondLst>
+                                            <p:cond delay="0"/>
+                                          </p:stCondLst>
+                                        </p:cTn>
+                                        <p:tgtEl>
+                                          <p:spTgt spid="15"/>
+                                        </p:tgtEl>
+                                        <p:attrNameLst>
+                                          <p:attrName>style.visibility</p:attrName>
+                                        </p:attrNameLst>
+                                      </p:cBhvr>
+                                      <p:to>
+                                        <p:strVal val="visible"/>
+                                      </p:to>
+                                    </p:set>
+                                    <p:animEffect transition="in" filter="wipe(up)">
+                                      <p:cBhvr>
+                                        <p:cTn id="50" dur="350"/>
+                                        <p:tgtEl>
+                                          <p:spTgt spid="15"/>
+                                        </p:tgtEl>
+                                      </p:cBhvr>
+                                    </p:animEffect>
+                                  </p:childTnLst>
+                                </p:cTn>
+                              </p:par>
+                              <p:par>
+                                <p:cTn id="51" presetID="10" presetClass="entr" presetSubtype="0" fill="hold" grpId="0" nodeType="withEffect">
+                                  <p:stCondLst>
+                                    <p:cond delay="0"/>
+                                  </p:stCondLst>
+                                  <p:childTnLst>
+                                    <p:set>
+                                      <p:cBhvr>
+                                        <p:cTn id="52" dur="1" fill="hold">
+                                          <p:stCondLst>
+                                            <p:cond delay="0"/>
+                                          </p:stCondLst>
+                                        </p:cTn>
+                                        <p:tgtEl>
+                                          <p:spTgt spid="16"/>
+                                        </p:tgtEl>
+                                        <p:attrNameLst>
+                                          <p:attrName>style.visibility</p:attrName>
+                                        </p:attrNameLst>
+                                      </p:cBhvr>
+                                      <p:to>
+                                        <p:strVal val="visible"/>
+                                      </p:to>
+                                    </p:set>
+                                    <p:animEffect transition="in" filter="fade">
+                                      <p:cBhvr>
+                                        <p:cTn id="53" dur="350"/>
+                                        <p:tgtEl>
+                                          <p:spTgt spid="16"/>
+                                        </p:tgtEl>
+                                      </p:cBhvr>
+                                    </p:animEffect>
+                                  </p:childTnLst>
+                                </p:cTn>
+                              </p:par>
+                            </p:childTnLst>
+                          </p:cTn>
+                        </p:par>
+                      </p:childTnLst>
+                    </p:cTn>
+                  </p:par>
+                  <p:par>
+                    <p:cTn id="54" fill="hold">
+                      <p:stCondLst>
+                        <p:cond delay="indefinite"/>
+                      </p:stCondLst>
+                      <p:childTnLst>
+                        <p:par>
+                          <p:cTn id="55" fill="hold">
+                            <p:stCondLst>
+                              <p:cond delay="0"/>
+                            </p:stCondLst>
+                            <p:childTnLst>
+                              <p:par>
+                                <p:cTn id="56" presetID="10" presetClass="entr" presetSubtype="0" fill="hold" grpId="0" nodeType="clickEffect">
+                                  <p:stCondLst>
+                                    <p:cond delay="0"/>
+                                  </p:stCondLst>
+                                  <p:childTnLst>
+                                    <p:set>
+                                      <p:cBhvr>
+                                        <p:cTn id="57" dur="1" fill="hold">
                                           <p:stCondLst>
                                             <p:cond delay="0"/>
                                           </p:stCondLst>
@@ -5851,11 +6427,116 @@
                                         <p:strVal val="visible"/>
                                       </p:to>
                                     </p:set>
-                                    <p:animEffect transition="in" filter="box(in)">
+                                    <p:animEffect transition="in" filter="fade">
                                       <p:cBhvr>
-                                        <p:cTn id="27" dur="400"/>
+                                        <p:cTn id="58" dur="400"/>
                                         <p:tgtEl>
                                           <p:spTgt spid="17"/>
+                                        </p:tgtEl>
+                                      </p:cBhvr>
+                                    </p:animEffect>
+                                  </p:childTnLst>
+                                </p:cTn>
+                              </p:par>
+                              <p:par>
+                                <p:cTn id="59" presetID="10" presetClass="entr" presetSubtype="0" fill="hold" grpId="0" nodeType="withEffect">
+                                  <p:stCondLst>
+                                    <p:cond delay="0"/>
+                                  </p:stCondLst>
+                                  <p:childTnLst>
+                                    <p:set>
+                                      <p:cBhvr>
+                                        <p:cTn id="60" dur="1" fill="hold">
+                                          <p:stCondLst>
+                                            <p:cond delay="0"/>
+                                          </p:stCondLst>
+                                        </p:cTn>
+                                        <p:tgtEl>
+                                          <p:spTgt spid="18"/>
+                                        </p:tgtEl>
+                                        <p:attrNameLst>
+                                          <p:attrName>style.visibility</p:attrName>
+                                        </p:attrNameLst>
+                                      </p:cBhvr>
+                                      <p:to>
+                                        <p:strVal val="visible"/>
+                                      </p:to>
+                                    </p:set>
+                                    <p:animEffect transition="in" filter="fade">
+                                      <p:cBhvr>
+                                        <p:cTn id="61" dur="400"/>
+                                        <p:tgtEl>
+                                          <p:spTgt spid="18"/>
+                                        </p:tgtEl>
+                                      </p:cBhvr>
+                                    </p:animEffect>
+                                  </p:childTnLst>
+                                </p:cTn>
+                              </p:par>
+                              <p:par>
+                                <p:cTn id="62" presetID="22" presetClass="entr" presetSubtype="0" fill="hold" grpId="0" nodeType="withEffect">
+                                  <p:stCondLst>
+                                    <p:cond delay="0"/>
+                                  </p:stCondLst>
+                                  <p:childTnLst>
+                                    <p:set>
+                                      <p:cBhvr>
+                                        <p:cTn id="63" dur="1" fill="hold">
+                                          <p:stCondLst>
+                                            <p:cond delay="0"/>
+                                          </p:stCondLst>
+                                        </p:cTn>
+                                        <p:tgtEl>
+                                          <p:spTgt spid="19"/>
+                                        </p:tgtEl>
+                                        <p:attrNameLst>
+                                          <p:attrName>style.visibility</p:attrName>
+                                        </p:attrNameLst>
+                                      </p:cBhvr>
+                                      <p:to>
+                                        <p:strVal val="visible"/>
+                                      </p:to>
+                                    </p:set>
+                                    <p:animEffect transition="in" filter="wipe(up)">
+                                      <p:cBhvr>
+                                        <p:cTn id="64" dur="350"/>
+                                        <p:tgtEl>
+                                          <p:spTgt spid="19"/>
+                                        </p:tgtEl>
+                                      </p:cBhvr>
+                                    </p:animEffect>
+                                  </p:childTnLst>
+                                </p:cTn>
+                              </p:par>
+                              <p:par>
+                                <p:cTn id="65" presetID="10" presetClass="entr" presetSubtype="0" fill="hold" grpId="0" nodeType="withEffect">
+                                  <p:stCondLst>
+                                    <p:cond delay="0"/>
+                                  </p:stCondLst>
+                                  <p:childTnLst>
+                                    <p:set>
+                                      <p:cBhvr>
+                                        <p:cTn id="66" dur="1" fill="hold">
+                                          <p:stCondLst>
+                                            <p:cond delay="0"/>
+                                          </p:stCondLst>
+                                        </p:cTn>
+                                        <p:tgtEl>
+                                          <p:spTgt spid="20"/>
+                                        </p:tgtEl>
+                                        <p:attrNameLst>
+                                          <p:attrName>style.visibility</p:attrName>
+                                        </p:attrNameLst>
+                                      </p:cBhvr>
+                                      <p:to>
+                                        <p:strVal val="visible"/>
+                                      </p:to>
+                                    </p:set>
+                                    <p:animEffect transition="in" filter="fade">
+                                      <p:cBhvr>
+                                        <p:cTn id="67" dur="350"/>
+                                        <p:tgtEl>
+                                          <p:spTgt spid="20"/>
                                         </p:tgtEl>
                                       </p:cBhvr>
                                     </p:animEffect>
@@ -5899,7 +6580,7 @@
                         </p:stCondLst>
                       </p:cTn>
                       <p:tgtEl>
-                        <p:spTgt spid="5"/>
+                        <p:spTgt spid="7"/>
                       </p:tgtEl>
                       <p:attrNameLst>
                         <p:attrName>style.visibility</p:attrName>
@@ -5917,7 +6598,7 @@
                         </p:stCondLst>
                       </p:cTn>
                       <p:tgtEl>
-                        <p:spTgt spid="7"/>
+                        <p:spTgt spid="8"/>
                       </p:tgtEl>
                       <p:attrNameLst>
                         <p:attrName>style.visibility</p:attrName>
@@ -5935,7 +6616,7 @@
                         </p:stCondLst>
                       </p:cTn>
                       <p:tgtEl>
-                        <p:spTgt spid="12"/>
+                        <p:spTgt spid="9"/>
                       </p:tgtEl>
                       <p:attrNameLst>
                         <p:attrName>style.visibility</p:attrName>
@@ -5953,7 +6634,187 @@
                         </p:stCondLst>
                       </p:cTn>
                       <p:tgtEl>
+                        <p:spTgt spid="10"/>
+                      </p:tgtEl>
+                      <p:attrNameLst>
+                        <p:attrName>style.visibility</p:attrName>
+                      </p:attrNameLst>
+                    </p:cBhvr>
+                    <p:to>
+                      <p:strVal val="hidden"/>
+                    </p:to>
+                  </p:set>
+                  <p:set>
+                    <p:cBhvr>
+                      <p:cTn id="8" dur="1" fill="hold">
+                        <p:stCondLst>
+                          <p:cond delay="0"/>
+                        </p:stCondLst>
+                      </p:cTn>
+                      <p:tgtEl>
+                        <p:spTgt spid="11"/>
+                      </p:tgtEl>
+                      <p:attrNameLst>
+                        <p:attrName>style.visibility</p:attrName>
+                      </p:attrNameLst>
+                    </p:cBhvr>
+                    <p:to>
+                      <p:strVal val="hidden"/>
+                    </p:to>
+                  </p:set>
+                  <p:set>
+                    <p:cBhvr>
+                      <p:cTn id="9" dur="1" fill="hold">
+                        <p:stCondLst>
+                          <p:cond delay="0"/>
+                        </p:stCondLst>
+                      </p:cTn>
+                      <p:tgtEl>
+                        <p:spTgt spid="12"/>
+                      </p:tgtEl>
+                      <p:attrNameLst>
+                        <p:attrName>style.visibility</p:attrName>
+                      </p:attrNameLst>
+                    </p:cBhvr>
+                    <p:to>
+                      <p:strVal val="hidden"/>
+                    </p:to>
+                  </p:set>
+                  <p:set>
+                    <p:cBhvr>
+                      <p:cTn id="10" dur="1" fill="hold">
+                        <p:stCondLst>
+                          <p:cond delay="0"/>
+                        </p:stCondLst>
+                      </p:cTn>
+                      <p:tgtEl>
+                        <p:spTgt spid="13"/>
+                      </p:tgtEl>
+                      <p:attrNameLst>
+                        <p:attrName>style.visibility</p:attrName>
+                      </p:attrNameLst>
+                    </p:cBhvr>
+                    <p:to>
+                      <p:strVal val="hidden"/>
+                    </p:to>
+                  </p:set>
+                  <p:set>
+                    <p:cBhvr>
+                      <p:cTn id="11" dur="1" fill="hold">
+                        <p:stCondLst>
+                          <p:cond delay="0"/>
+                        </p:stCondLst>
+                      </p:cTn>
+                      <p:tgtEl>
+                        <p:spTgt spid="14"/>
+                      </p:tgtEl>
+                      <p:attrNameLst>
+                        <p:attrName>style.visibility</p:attrName>
+                      </p:attrNameLst>
+                    </p:cBhvr>
+                    <p:to>
+                      <p:strVal val="hidden"/>
+                    </p:to>
+                  </p:set>
+                  <p:set>
+                    <p:cBhvr>
+                      <p:cTn id="12" dur="1" fill="hold">
+                        <p:stCondLst>
+                          <p:cond delay="0"/>
+                        </p:stCondLst>
+                      </p:cTn>
+                      <p:tgtEl>
+                        <p:spTgt spid="15"/>
+                      </p:tgtEl>
+                      <p:attrNameLst>
+                        <p:attrName>style.visibility</p:attrName>
+                      </p:attrNameLst>
+                    </p:cBhvr>
+                    <p:to>
+                      <p:strVal val="hidden"/>
+                    </p:to>
+                  </p:set>
+                  <p:set>
+                    <p:cBhvr>
+                      <p:cTn id="13" dur="1" fill="hold">
+                        <p:stCondLst>
+                          <p:cond delay="0"/>
+                        </p:stCondLst>
+                      </p:cTn>
+                      <p:tgtEl>
+                        <p:spTgt spid="16"/>
+                      </p:tgtEl>
+                      <p:attrNameLst>
+                        <p:attrName>style.visibility</p:attrName>
+                      </p:attrNameLst>
+                    </p:cBhvr>
+                    <p:to>
+                      <p:strVal val="hidden"/>
+                    </p:to>
+                  </p:set>
+                  <p:set>
+                    <p:cBhvr>
+                      <p:cTn id="14" dur="1" fill="hold">
+                        <p:stCondLst>
+                          <p:cond delay="0"/>
+                        </p:stCondLst>
+                      </p:cTn>
+                      <p:tgtEl>
                         <p:spTgt spid="17"/>
+                      </p:tgtEl>
+                      <p:attrNameLst>
+                        <p:attrName>style.visibility</p:attrName>
+                      </p:attrNameLst>
+                    </p:cBhvr>
+                    <p:to>
+                      <p:strVal val="hidden"/>
+                    </p:to>
+                  </p:set>
+                  <p:set>
+                    <p:cBhvr>
+                      <p:cTn id="15" dur="1" fill="hold">
+                        <p:stCondLst>
+                          <p:cond delay="0"/>
+                        </p:stCondLst>
+                      </p:cTn>
+                      <p:tgtEl>
+                        <p:spTgt spid="18"/>
+                      </p:tgtEl>
+                      <p:attrNameLst>
+                        <p:attrName>style.visibility</p:attrName>
+                      </p:attrNameLst>
+                    </p:cBhvr>
+                    <p:to>
+                      <p:strVal val="hidden"/>
+                    </p:to>
+                  </p:set>
+                  <p:set>
+                    <p:cBhvr>
+                      <p:cTn id="16" dur="1" fill="hold">
+                        <p:stCondLst>
+                          <p:cond delay="0"/>
+                        </p:stCondLst>
+                      </p:cTn>
+                      <p:tgtEl>
+                        <p:spTgt spid="19"/>
+                      </p:tgtEl>
+                      <p:attrNameLst>
+                        <p:attrName>style.visibility</p:attrName>
+                      </p:attrNameLst>
+                    </p:cBhvr>
+                    <p:to>
+                      <p:strVal val="hidden"/>
+                    </p:to>
+                  </p:set>
+                  <p:set>
+                    <p:cBhvr>
+                      <p:cTn id="17" dur="1" fill="hold">
+                        <p:stCondLst>
+                          <p:cond delay="0"/>
+                        </p:stCondLst>
+                      </p:cTn>
+                      <p:tgtEl>
+                        <p:spTgt spid="20"/>
                       </p:tgtEl>
                       <p:attrNameLst>
                         <p:attrName>style.visibility</p:attrName>
@@ -5998,8 +6859,60 @@
           <a:prstGeom prst="rect">
             <a:avLst/>
           </a:prstGeom>
+          <a:gradFill rotWithShape="1">
+            <a:gsLst>
+              <a:gs pos="0">
+                <a:srgbClr val="08070E"/>
+              </a:gs>
+              <a:gs pos="100000">
+                <a:srgbClr val="11101B"/>
+              </a:gs>
+            </a:gsLst>
+            <a:lin ang="9600000" scaled="0"/>
+          </a:gradFill>
+          <a:ln>
+            <a:noFill/>
+          </a:ln>
+          <a:effectLst/>
+        </p:spPr>
+        <p:style>
+          <a:lnRef idx="1">
+            <a:schemeClr val="accent1"/>
+          </a:lnRef>
+          <a:fillRef idx="3">
+            <a:schemeClr val="accent1"/>
+          </a:fillRef>
+          <a:effectRef idx="2">
+            <a:schemeClr val="accent1"/>
+          </a:effectRef>
+          <a:fontRef idx="minor">
+            <a:schemeClr val="lt1"/>
+          </a:fontRef>
+        </p:style>
+        <p:txBody>
+          <a:bodyPr rtlCol="0" anchor="ctr"/>
+          <a:lstStyle/>
+          <a:p>
+            <a:pPr algn="ctr"/>
+          </a:p>
+        </p:txBody>
+      </p:sp>
+      <p:sp>
+        <p:nvSpPr>
+          <p:cNvPr id="3" name="Rectangle 2"/>
+          <p:cNvSpPr/>
+          <p:nvPr/>
+        </p:nvSpPr>
+        <p:spPr>
+          <a:xfrm>
+            <a:off x="0" y="0"/>
+            <a:ext cx="6096000" cy="19050"/>
+          </a:xfrm>
+          <a:prstGeom prst="rect">
+            <a:avLst/>
+          </a:prstGeom>
           <a:solidFill>
-            <a:srgbClr val="1D4A3C"/>
+            <a:srgbClr val="8B5CF6"/>
           </a:solidFill>
           <a:ln>
             <a:noFill/>
@@ -6030,147 +6943,20 @@
       </p:sp>
       <p:sp>
         <p:nvSpPr>
-          <p:cNvPr id="3" name="TextBox 2"/>
-          <p:cNvSpPr txBox="1"/>
+          <p:cNvPr id="4" name="Rectangle 3"/>
+          <p:cNvSpPr/>
           <p:nvPr/>
         </p:nvSpPr>
         <p:spPr>
           <a:xfrm>
-            <a:off x="685800" y="514350"/>
-            <a:ext cx="1724025" cy="133350"/>
-          </a:xfrm>
-          <a:prstGeom prst="rect">
-            <a:avLst/>
-          </a:prstGeom>
-          <a:noFill/>
-        </p:spPr>
-        <p:txBody>
-          <a:bodyPr wrap="none" anchor="t" lIns="0" rIns="0" tIns="0" bIns="0">
-            <a:noAutofit/>
-          </a:bodyPr>
-          <a:lstStyle/>
-          <a:p>
-            <a:pPr algn="l"/>
-            <a:r>
-              <a:rPr sz="1200" b="1" i="0">
-                <a:solidFill>
-                  <a:srgbClr val="F45A3A"/>
-                </a:solidFill>
-                <a:latin typeface="Pretendard"/>
-              </a:rPr>
-              <a:t>03  /  MOMENTUM</a:t>
-            </a:r>
-          </a:p>
-        </p:txBody>
-      </p:sp>
-      <p:sp>
-        <p:nvSpPr>
-          <p:cNvPr id="4" name="TextBox 3"/>
-          <p:cNvSpPr txBox="1"/>
-          <p:nvPr/>
-        </p:nvSpPr>
-        <p:spPr>
-          <a:xfrm>
-            <a:off x="11287125" y="514350"/>
-            <a:ext cx="219075" cy="104775"/>
-          </a:xfrm>
-          <a:prstGeom prst="rect">
-            <a:avLst/>
-          </a:prstGeom>
-          <a:noFill/>
-        </p:spPr>
-        <p:txBody>
-          <a:bodyPr wrap="none" anchor="t" lIns="0" rIns="0" tIns="0" bIns="0">
-            <a:noAutofit/>
-          </a:bodyPr>
-          <a:lstStyle/>
-          <a:p>
-            <a:pPr algn="r"/>
-            <a:r>
-              <a:rPr sz="1125" b="1" i="0">
-                <a:solidFill>
-                  <a:srgbClr val="68716C"/>
-                </a:solidFill>
-                <a:latin typeface="Pretendard"/>
-              </a:rPr>
-              <a:t>04</a:t>
-            </a:r>
-          </a:p>
-        </p:txBody>
-      </p:sp>
-      <p:sp>
-        <p:nvSpPr>
-          <p:cNvPr id="5" name="TextBox 4"/>
-          <p:cNvSpPr txBox="1"/>
-          <p:nvPr/>
-        </p:nvSpPr>
-        <p:spPr>
-          <a:xfrm>
-            <a:off x="685800" y="1143000"/>
-            <a:ext cx="6410325" cy="1085850"/>
-          </a:xfrm>
-          <a:prstGeom prst="rect">
-            <a:avLst/>
-          </a:prstGeom>
-          <a:noFill/>
-        </p:spPr>
-        <p:txBody>
-          <a:bodyPr wrap="none" anchor="t" lIns="0" rIns="0" tIns="0" bIns="0">
-            <a:noAutofit/>
-          </a:bodyPr>
-          <a:lstStyle/>
-          <a:p>
-            <a:pPr algn="l">
-              <a:lnSpc>
-                <a:spcPts val="4575"/>
-              </a:lnSpc>
-            </a:pPr>
-            <a:r>
-              <a:rPr sz="4350" b="1" i="0">
-                <a:solidFill>
-                  <a:srgbClr val="FFFDF7"/>
-                </a:solidFill>
-                <a:latin typeface="Pretendard"/>
-              </a:rPr>
-              <a:t>사람들이 돌아오는 이유는</a:t>
-            </a:r>
-          </a:p>
-          <a:p>
-            <a:pPr algn="l">
-              <a:lnSpc>
-                <a:spcPts val="4575"/>
-              </a:lnSpc>
-            </a:pPr>
-            <a:r>
-              <a:rPr sz="4350" b="1" i="0">
-                <a:solidFill>
-                  <a:srgbClr val="FFFDF7"/>
-                </a:solidFill>
-                <a:latin typeface="Pretendard"/>
-              </a:rPr>
-              <a:t>절약이 눈에 보이기 때문입니다.</a:t>
-            </a:r>
-          </a:p>
-        </p:txBody>
-      </p:sp>
-      <p:sp>
-        <p:nvSpPr>
-          <p:cNvPr id="6" name="Rectangle 5"/>
-          <p:cNvSpPr/>
-          <p:nvPr/>
-        </p:nvSpPr>
-        <p:spPr>
-          <a:xfrm>
-            <a:off x="685800" y="3714750"/>
-            <a:ext cx="3314700" cy="9525"/>
+            <a:off x="6096000" y="0"/>
+            <a:ext cx="6096000" cy="19050"/>
           </a:xfrm>
           <a:prstGeom prst="rect">
             <a:avLst/>
           </a:prstGeom>
           <a:solidFill>
-            <a:srgbClr val="FFFFFF">
-              <a:alpha val="26666"/>
-            </a:srgbClr>
+            <a:srgbClr val="22D3EE"/>
           </a:solidFill>
           <a:ln>
             <a:noFill/>
@@ -6201,14 +6987,14 @@
       </p:sp>
       <p:sp>
         <p:nvSpPr>
-          <p:cNvPr id="7" name="TextBox 6"/>
+          <p:cNvPr id="5" name="TextBox 4"/>
           <p:cNvSpPr txBox="1"/>
           <p:nvPr/>
         </p:nvSpPr>
         <p:spPr>
           <a:xfrm>
-            <a:off x="685800" y="4114800"/>
-            <a:ext cx="1552575" cy="571500"/>
+            <a:off x="1219200" y="581025"/>
+            <a:ext cx="542925" cy="123825"/>
           </a:xfrm>
           <a:prstGeom prst="rect">
             <a:avLst/>
@@ -6223,27 +7009,27 @@
           <a:p>
             <a:pPr algn="l"/>
             <a:r>
-              <a:rPr sz="5175" b="1" i="0">
+              <a:rPr sz="1350" b="1" i="0">
                 <a:solidFill>
-                  <a:srgbClr val="FFFDF7"/>
+                  <a:srgbClr val="8B5CF6"/>
                 </a:solidFill>
-                <a:latin typeface="Pretendard"/>
+                <a:latin typeface="Roboto"/>
               </a:rPr>
-              <a:t>4.8만</a:t>
-            </a:r>
-          </a:p>
-        </p:txBody>
-      </p:sp>
-      <p:sp>
-        <p:nvSpPr>
-          <p:cNvPr id="8" name="TextBox 7"/>
+              <a:t>VELA</a:t>
+            </a:r>
+          </a:p>
+        </p:txBody>
+      </p:sp>
+      <p:sp>
+        <p:nvSpPr>
+          <p:cNvPr id="6" name="TextBox 5"/>
           <p:cNvSpPr txBox="1"/>
           <p:nvPr/>
         </p:nvSpPr>
         <p:spPr>
           <a:xfrm>
-            <a:off x="685800" y="5010150"/>
-            <a:ext cx="1304925" cy="180975"/>
+            <a:off x="6096000" y="581025"/>
+            <a:ext cx="1066800" cy="133350"/>
           </a:xfrm>
           <a:prstGeom prst="rect">
             <a:avLst/>
@@ -6258,35 +7044,373 @@
           <a:p>
             <a:pPr algn="l"/>
             <a:r>
-              <a:rPr sz="1575" b="0" i="0">
+              <a:rPr sz="1425" b="0" i="0">
                 <a:solidFill>
-                  <a:srgbClr val="B9D9C8"/>
+                  <a:srgbClr val="64748B"/>
                 </a:solidFill>
-                <a:latin typeface="Pretendard"/>
+                <a:latin typeface="Roboto"/>
               </a:rPr>
-              <a:t>월간 활성 사용자</a:t>
-            </a:r>
-          </a:p>
-        </p:txBody>
-      </p:sp>
-      <p:sp>
-        <p:nvSpPr>
-          <p:cNvPr id="9" name="Rectangle 8"/>
+              <a:t>TRACTION</a:t>
+            </a:r>
+          </a:p>
+        </p:txBody>
+      </p:sp>
+      <p:sp>
+        <p:nvSpPr>
+          <p:cNvPr id="7" name="TextBox 6"/>
+          <p:cNvSpPr txBox="1"/>
+          <p:nvPr/>
+        </p:nvSpPr>
+        <p:spPr>
+          <a:xfrm>
+            <a:off x="2819400" y="1123950"/>
+            <a:ext cx="6562725" cy="1266825"/>
+          </a:xfrm>
+          <a:prstGeom prst="rect">
+            <a:avLst/>
+          </a:prstGeom>
+          <a:noFill/>
+        </p:spPr>
+        <p:txBody>
+          <a:bodyPr wrap="none" anchor="t" lIns="0" rIns="0" tIns="0" bIns="0">
+            <a:noAutofit/>
+          </a:bodyPr>
+          <a:lstStyle/>
+          <a:p>
+            <a:pPr algn="ctr">
+              <a:lnSpc>
+                <a:spcPts val="5700"/>
+              </a:lnSpc>
+            </a:pPr>
+            <a:r>
+              <a:rPr sz="5400" b="1" i="0">
+                <a:gradFill rotWithShape="1">
+                  <a:gsLst>
+                    <a:gs pos="0">
+                      <a:srgbClr val="608CF2"/>
+                    </a:gs>
+                    <a:gs pos="100000">
+                      <a:srgbClr val="4CA2F1"/>
+                    </a:gs>
+                  </a:gsLst>
+                  <a:lin ang="5400000" scaled="0"/>
+                </a:gradFill>
+                <a:effectLst>
+                  <a:outerShdw blurRad="342900" dist="57150" dir="5400000" rotWithShape="0">
+                    <a:srgbClr val="000000">
+                      <a:alpha val="46666"/>
+                    </a:srgbClr>
+                  </a:outerShdw>
+                </a:effectLst>
+                <a:latin typeface="Noto Serif"/>
+              </a:rPr>
+              <a:t>Growing fast.</a:t>
+            </a:r>
+          </a:p>
+          <a:p>
+            <a:pPr algn="ctr">
+              <a:lnSpc>
+                <a:spcPts val="5700"/>
+              </a:lnSpc>
+            </a:pPr>
+            <a:r>
+              <a:rPr sz="5400" b="1" i="0">
+                <a:gradFill rotWithShape="1">
+                  <a:gsLst>
+                    <a:gs pos="0">
+                      <a:srgbClr val="608CF2"/>
+                    </a:gs>
+                    <a:gs pos="100000">
+                      <a:srgbClr val="4CA2F1"/>
+                    </a:gs>
+                  </a:gsLst>
+                  <a:lin ang="5400000" scaled="0"/>
+                </a:gradFill>
+                <a:effectLst>
+                  <a:outerShdw blurRad="342900" dist="57150" dir="5400000" rotWithShape="0">
+                    <a:srgbClr val="000000">
+                      <a:alpha val="46666"/>
+                    </a:srgbClr>
+                  </a:outerShdw>
+                </a:effectLst>
+                <a:latin typeface="Noto Serif"/>
+              </a:rPr>
+              <a:t>Customers love it.</a:t>
+            </a:r>
+          </a:p>
+        </p:txBody>
+      </p:sp>
+      <p:sp>
+        <p:nvSpPr>
+          <p:cNvPr id="8" name="TextBox 7"/>
+          <p:cNvSpPr txBox="1"/>
+          <p:nvPr/>
+        </p:nvSpPr>
+        <p:spPr>
+          <a:xfrm>
+            <a:off x="1666875" y="3133725"/>
+            <a:ext cx="2762250" cy="781050"/>
+          </a:xfrm>
+          <a:prstGeom prst="rect">
+            <a:avLst/>
+          </a:prstGeom>
+          <a:noFill/>
+        </p:spPr>
+        <p:txBody>
+          <a:bodyPr wrap="none" anchor="t" lIns="0" rIns="0" tIns="0" bIns="0">
+            <a:noAutofit/>
+          </a:bodyPr>
+          <a:lstStyle/>
+          <a:p>
+            <a:pPr algn="ctr"/>
+            <a:r>
+              <a:rPr sz="6900" b="1" i="0">
+                <a:gradFill rotWithShape="1">
+                  <a:gsLst>
+                    <a:gs pos="0">
+                      <a:srgbClr val="B99EF9"/>
+                    </a:gs>
+                    <a:gs pos="100000">
+                      <a:srgbClr val="DCD0FC"/>
+                    </a:gs>
+                  </a:gsLst>
+                  <a:lin ang="5400000" scaled="0"/>
+                </a:gradFill>
+                <a:effectLst>
+                  <a:outerShdw blurRad="342900" dist="57150" dir="5400000" rotWithShape="0">
+                    <a:srgbClr val="000000">
+                      <a:alpha val="46666"/>
+                    </a:srgbClr>
+                  </a:outerShdw>
+                </a:effectLst>
+                <a:latin typeface="Noto Serif"/>
+              </a:rPr>
+              <a:t>2,400+</a:t>
+            </a:r>
+          </a:p>
+        </p:txBody>
+      </p:sp>
+      <p:sp>
+        <p:nvSpPr>
+          <p:cNvPr id="9" name="TextBox 8"/>
+          <p:cNvSpPr txBox="1"/>
+          <p:nvPr/>
+        </p:nvSpPr>
+        <p:spPr>
+          <a:xfrm>
+            <a:off x="2314575" y="4848225"/>
+            <a:ext cx="1476375" cy="171450"/>
+          </a:xfrm>
+          <a:prstGeom prst="rect">
+            <a:avLst/>
+          </a:prstGeom>
+          <a:noFill/>
+        </p:spPr>
+        <p:txBody>
+          <a:bodyPr wrap="none" anchor="t" lIns="0" rIns="0" tIns="0" bIns="0">
+            <a:noAutofit/>
+          </a:bodyPr>
+          <a:lstStyle/>
+          <a:p>
+            <a:pPr algn="ctr"/>
+            <a:r>
+              <a:rPr sz="1875" b="0" i="0">
+                <a:solidFill>
+                  <a:srgbClr val="64748B"/>
+                </a:solidFill>
+                <a:latin typeface="Roboto"/>
+              </a:rPr>
+              <a:t>Active teams</a:t>
+            </a:r>
+          </a:p>
+        </p:txBody>
+      </p:sp>
+      <p:sp>
+        <p:nvSpPr>
+          <p:cNvPr id="10" name="TextBox 9"/>
+          <p:cNvSpPr txBox="1"/>
+          <p:nvPr/>
+        </p:nvSpPr>
+        <p:spPr>
+          <a:xfrm>
+            <a:off x="5200650" y="3133725"/>
+            <a:ext cx="1790700" cy="647700"/>
+          </a:xfrm>
+          <a:prstGeom prst="rect">
+            <a:avLst/>
+          </a:prstGeom>
+          <a:noFill/>
+        </p:spPr>
+        <p:txBody>
+          <a:bodyPr wrap="none" anchor="t" lIns="0" rIns="0" tIns="0" bIns="0">
+            <a:noAutofit/>
+          </a:bodyPr>
+          <a:lstStyle/>
+          <a:p>
+            <a:pPr algn="ctr"/>
+            <a:r>
+              <a:rPr sz="6900" b="1" i="0">
+                <a:gradFill rotWithShape="1">
+                  <a:gsLst>
+                    <a:gs pos="0">
+                      <a:srgbClr val="75E1F4"/>
+                    </a:gs>
+                    <a:gs pos="100000">
+                      <a:srgbClr val="CAF0FB"/>
+                    </a:gs>
+                  </a:gsLst>
+                  <a:lin ang="5400000" scaled="0"/>
+                </a:gradFill>
+                <a:effectLst>
+                  <a:outerShdw blurRad="342900" dist="57150" dir="5400000" rotWithShape="0">
+                    <a:srgbClr val="000000">
+                      <a:alpha val="46666"/>
+                    </a:srgbClr>
+                  </a:outerShdw>
+                </a:effectLst>
+                <a:latin typeface="Noto Serif"/>
+              </a:rPr>
+              <a:t>94%</a:t>
+            </a:r>
+          </a:p>
+        </p:txBody>
+      </p:sp>
+      <p:sp>
+        <p:nvSpPr>
+          <p:cNvPr id="11" name="TextBox 10"/>
+          <p:cNvSpPr txBox="1"/>
+          <p:nvPr/>
+        </p:nvSpPr>
+        <p:spPr>
+          <a:xfrm>
+            <a:off x="5295900" y="4848225"/>
+            <a:ext cx="1600200" cy="171450"/>
+          </a:xfrm>
+          <a:prstGeom prst="rect">
+            <a:avLst/>
+          </a:prstGeom>
+          <a:noFill/>
+        </p:spPr>
+        <p:txBody>
+          <a:bodyPr wrap="none" anchor="t" lIns="0" rIns="0" tIns="0" bIns="0">
+            <a:noAutofit/>
+          </a:bodyPr>
+          <a:lstStyle/>
+          <a:p>
+            <a:pPr algn="ctr"/>
+            <a:r>
+              <a:rPr sz="1875" b="0" i="0">
+                <a:solidFill>
+                  <a:srgbClr val="64748B"/>
+                </a:solidFill>
+                <a:latin typeface="Roboto"/>
+              </a:rPr>
+              <a:t>Retention rate</a:t>
+            </a:r>
+          </a:p>
+        </p:txBody>
+      </p:sp>
+      <p:sp>
+        <p:nvSpPr>
+          <p:cNvPr id="12" name="TextBox 11"/>
+          <p:cNvSpPr txBox="1"/>
+          <p:nvPr/>
+        </p:nvSpPr>
+        <p:spPr>
+          <a:xfrm>
+            <a:off x="7829550" y="3105150"/>
+            <a:ext cx="2619375" cy="742950"/>
+          </a:xfrm>
+          <a:prstGeom prst="rect">
+            <a:avLst/>
+          </a:prstGeom>
+          <a:noFill/>
+        </p:spPr>
+        <p:txBody>
+          <a:bodyPr wrap="none" anchor="t" lIns="0" rIns="0" tIns="0" bIns="0">
+            <a:noAutofit/>
+          </a:bodyPr>
+          <a:lstStyle/>
+          <a:p>
+            <a:pPr algn="ctr"/>
+            <a:r>
+              <a:rPr sz="6900" b="1" i="0">
+                <a:gradFill rotWithShape="1">
+                  <a:gsLst>
+                    <a:gs pos="0">
+                      <a:srgbClr val="73D3B6"/>
+                    </a:gs>
+                    <a:gs pos="100000">
+                      <a:srgbClr val="BDE8DF"/>
+                    </a:gs>
+                  </a:gsLst>
+                  <a:lin ang="5400000" scaled="0"/>
+                </a:gradFill>
+                <a:effectLst>
+                  <a:outerShdw blurRad="342900" dist="57150" dir="5400000" rotWithShape="0">
+                    <a:srgbClr val="000000">
+                      <a:alpha val="46666"/>
+                    </a:srgbClr>
+                  </a:outerShdw>
+                </a:effectLst>
+                <a:latin typeface="Noto Serif"/>
+              </a:rPr>
+              <a:t>$1.8M</a:t>
+            </a:r>
+          </a:p>
+        </p:txBody>
+      </p:sp>
+      <p:sp>
+        <p:nvSpPr>
+          <p:cNvPr id="13" name="TextBox 12"/>
+          <p:cNvSpPr txBox="1"/>
+          <p:nvPr/>
+        </p:nvSpPr>
+        <p:spPr>
+          <a:xfrm>
+            <a:off x="8915400" y="4848225"/>
+            <a:ext cx="457200" cy="171450"/>
+          </a:xfrm>
+          <a:prstGeom prst="rect">
+            <a:avLst/>
+          </a:prstGeom>
+          <a:noFill/>
+        </p:spPr>
+        <p:txBody>
+          <a:bodyPr wrap="none" anchor="t" lIns="0" rIns="0" tIns="0" bIns="0">
+            <a:noAutofit/>
+          </a:bodyPr>
+          <a:lstStyle/>
+          <a:p>
+            <a:pPr algn="ctr"/>
+            <a:r>
+              <a:rPr sz="1875" b="0" i="0">
+                <a:solidFill>
+                  <a:srgbClr val="64748B"/>
+                </a:solidFill>
+                <a:latin typeface="Roboto"/>
+              </a:rPr>
+              <a:t>ARR</a:t>
+            </a:r>
+          </a:p>
+        </p:txBody>
+      </p:sp>
+      <p:sp>
+        <p:nvSpPr>
+          <p:cNvPr id="14" name="Rectangle 13"/>
           <p:cNvSpPr/>
           <p:nvPr/>
         </p:nvSpPr>
         <p:spPr>
           <a:xfrm>
-            <a:off x="4362450" y="3714750"/>
-            <a:ext cx="3314700" cy="9525"/>
+            <a:off x="6096000" y="5753100"/>
+            <a:ext cx="9144000" cy="9525"/>
           </a:xfrm>
           <a:prstGeom prst="rect">
             <a:avLst/>
           </a:prstGeom>
           <a:solidFill>
-            <a:srgbClr val="FFFFFF">
-              <a:alpha val="26666"/>
-            </a:srgbClr>
+            <a:srgbClr val="1E1D2F"/>
           </a:solidFill>
           <a:ln>
             <a:noFill/>
@@ -6317,14 +7441,14 @@
       </p:sp>
       <p:sp>
         <p:nvSpPr>
-          <p:cNvPr id="10" name="TextBox 9"/>
+          <p:cNvPr id="15" name="TextBox 14"/>
           <p:cNvSpPr txBox="1"/>
           <p:nvPr/>
         </p:nvSpPr>
         <p:spPr>
           <a:xfrm>
-            <a:off x="4362450" y="4114800"/>
-            <a:ext cx="1266825" cy="495300"/>
+            <a:off x="2552700" y="6010275"/>
+            <a:ext cx="7077075" cy="200025"/>
           </a:xfrm>
           <a:prstGeom prst="rect">
             <a:avLst/>
@@ -6337,201 +7461,15 @@
           </a:bodyPr>
           <a:lstStyle/>
           <a:p>
-            <a:pPr algn="l"/>
-            <a:r>
-              <a:rPr sz="5175" b="1" i="0">
+            <a:pPr algn="ctr"/>
+            <a:r>
+              <a:rPr sz="1650" b="0" i="1">
                 <a:solidFill>
-                  <a:srgbClr val="FFFDF7"/>
+                  <a:srgbClr val="64748B"/>
                 </a:solidFill>
-                <a:latin typeface="Pretendard"/>
+                <a:latin typeface="Roboto"/>
               </a:rPr>
-              <a:t>71%</a:t>
-            </a:r>
-          </a:p>
-        </p:txBody>
-      </p:sp>
-      <p:sp>
-        <p:nvSpPr>
-          <p:cNvPr id="11" name="TextBox 10"/>
-          <p:cNvSpPr txBox="1"/>
-          <p:nvPr/>
-        </p:nvSpPr>
-        <p:spPr>
-          <a:xfrm>
-            <a:off x="4362450" y="5010150"/>
-            <a:ext cx="1028700" cy="180975"/>
-          </a:xfrm>
-          <a:prstGeom prst="rect">
-            <a:avLst/>
-          </a:prstGeom>
-          <a:noFill/>
-        </p:spPr>
-        <p:txBody>
-          <a:bodyPr wrap="none" anchor="t" lIns="0" rIns="0" tIns="0" bIns="0">
-            <a:noAutofit/>
-          </a:bodyPr>
-          <a:lstStyle/>
-          <a:p>
-            <a:pPr algn="l"/>
-            <a:r>
-              <a:rPr sz="1575" b="0" i="0">
-                <a:solidFill>
-                  <a:srgbClr val="B9D9C8"/>
-                </a:solidFill>
-                <a:latin typeface="Pretendard"/>
-              </a:rPr>
-              <a:t>8주차 잔존율</a:t>
-            </a:r>
-          </a:p>
-        </p:txBody>
-      </p:sp>
-      <p:sp>
-        <p:nvSpPr>
-          <p:cNvPr id="12" name="Rectangle 11"/>
-          <p:cNvSpPr/>
-          <p:nvPr/>
-        </p:nvSpPr>
-        <p:spPr>
-          <a:xfrm>
-            <a:off x="8039100" y="3714750"/>
-            <a:ext cx="3314700" cy="9525"/>
-          </a:xfrm>
-          <a:prstGeom prst="rect">
-            <a:avLst/>
-          </a:prstGeom>
-          <a:solidFill>
-            <a:srgbClr val="FFFFFF">
-              <a:alpha val="26666"/>
-            </a:srgbClr>
-          </a:solidFill>
-          <a:ln>
-            <a:noFill/>
-          </a:ln>
-          <a:effectLst/>
-        </p:spPr>
-        <p:style>
-          <a:lnRef idx="1">
-            <a:schemeClr val="accent1"/>
-          </a:lnRef>
-          <a:fillRef idx="3">
-            <a:schemeClr val="accent1"/>
-          </a:fillRef>
-          <a:effectRef idx="2">
-            <a:schemeClr val="accent1"/>
-          </a:effectRef>
-          <a:fontRef idx="minor">
-            <a:schemeClr val="lt1"/>
-          </a:fontRef>
-        </p:style>
-        <p:txBody>
-          <a:bodyPr rtlCol="0" anchor="ctr"/>
-          <a:lstStyle/>
-          <a:p>
-            <a:pPr algn="ctr"/>
-          </a:p>
-        </p:txBody>
-      </p:sp>
-      <p:sp>
-        <p:nvSpPr>
-          <p:cNvPr id="13" name="TextBox 12"/>
-          <p:cNvSpPr txBox="1"/>
-          <p:nvPr/>
-        </p:nvSpPr>
-        <p:spPr>
-          <a:xfrm>
-            <a:off x="8039100" y="4114800"/>
-            <a:ext cx="2819400" cy="609600"/>
-          </a:xfrm>
-          <a:prstGeom prst="rect">
-            <a:avLst/>
-          </a:prstGeom>
-          <a:noFill/>
-        </p:spPr>
-        <p:txBody>
-          <a:bodyPr wrap="none" anchor="t" lIns="0" rIns="0" tIns="0" bIns="0">
-            <a:noAutofit/>
-          </a:bodyPr>
-          <a:lstStyle/>
-          <a:p>
-            <a:pPr algn="l"/>
-            <a:r>
-              <a:rPr sz="5175" b="1" i="0">
-                <a:solidFill>
-                  <a:srgbClr val="F45A3A"/>
-                </a:solidFill>
-                <a:latin typeface="Pretendard"/>
-              </a:rPr>
-              <a:t>₩84,000</a:t>
-            </a:r>
-          </a:p>
-        </p:txBody>
-      </p:sp>
-      <p:sp>
-        <p:nvSpPr>
-          <p:cNvPr id="14" name="TextBox 13"/>
-          <p:cNvSpPr txBox="1"/>
-          <p:nvPr/>
-        </p:nvSpPr>
-        <p:spPr>
-          <a:xfrm>
-            <a:off x="8039100" y="5010150"/>
-            <a:ext cx="1076325" cy="180975"/>
-          </a:xfrm>
-          <a:prstGeom prst="rect">
-            <a:avLst/>
-          </a:prstGeom>
-          <a:noFill/>
-        </p:spPr>
-        <p:txBody>
-          <a:bodyPr wrap="none" anchor="t" lIns="0" rIns="0" tIns="0" bIns="0">
-            <a:noAutofit/>
-          </a:bodyPr>
-          <a:lstStyle/>
-          <a:p>
-            <a:pPr algn="l"/>
-            <a:r>
-              <a:rPr sz="1575" b="0" i="0">
-                <a:solidFill>
-                  <a:srgbClr val="B9D9C8"/>
-                </a:solidFill>
-                <a:latin typeface="Pretendard"/>
-              </a:rPr>
-              <a:t>월평균 절약액</a:t>
-            </a:r>
-          </a:p>
-        </p:txBody>
-      </p:sp>
-      <p:sp>
-        <p:nvSpPr>
-          <p:cNvPr id="15" name="TextBox 14"/>
-          <p:cNvSpPr txBox="1"/>
-          <p:nvPr/>
-        </p:nvSpPr>
-        <p:spPr>
-          <a:xfrm>
-            <a:off x="685800" y="6191250"/>
-            <a:ext cx="4829175" cy="180975"/>
-          </a:xfrm>
-          <a:prstGeom prst="rect">
-            <a:avLst/>
-          </a:prstGeom>
-          <a:noFill/>
-        </p:spPr>
-        <p:txBody>
-          <a:bodyPr wrap="none" anchor="t" lIns="0" rIns="0" tIns="0" bIns="0">
-            <a:noAutofit/>
-          </a:bodyPr>
-          <a:lstStyle/>
-          <a:p>
-            <a:pPr algn="l"/>
-            <a:r>
-              <a:rPr sz="1575" b="0" i="1">
-                <a:solidFill>
-                  <a:srgbClr val="E7F0EB"/>
-                </a:solidFill>
-                <a:latin typeface="Pretendard"/>
-              </a:rPr>
-              <a:t>“처음으로 다음 달이 덜 막막해졌어요.”  —  베타 사용자 인터뷰</a:t>
+              <a:t>"Vela cut our incident response time in half." — Head of Product, Series B fintech</a:t>
             </a:r>
           </a:p>
         </p:txBody>
@@ -6553,79 +7491,26 @@
               <p:cTn id="2" dur="indefinite" nodeType="mainSeq">
                 <p:childTnLst>
                   <p:par>
-                    <p:cTn id="9" fill="hold">
+                    <p:cTn id="13" fill="hold">
                       <p:stCondLst>
                         <p:cond delay="indefinite"/>
                       </p:stCondLst>
                       <p:childTnLst>
                         <p:par>
-                          <p:cTn id="10" fill="hold">
+                          <p:cTn id="14" fill="hold">
                             <p:stCondLst>
                               <p:cond delay="0"/>
                             </p:stCondLst>
                             <p:childTnLst>
                               <p:par>
-                                <p:cTn id="11" presetID="22" presetClass="entr" presetSubtype="0" fill="hold" grpId="0" nodeType="clickEffect">
+                                <p:cTn id="15" presetID="10" presetClass="entr" presetSubtype="0" fill="hold" grpId="0" nodeType="clickEffect">
                                   <p:stCondLst>
                                     <p:cond delay="0"/>
                                   </p:stCondLst>
                                   <p:childTnLst>
                                     <p:set>
                                       <p:cBhvr>
-                                        <p:cTn id="12" dur="1" fill="hold">
-                                          <p:stCondLst>
-                                            <p:cond delay="0"/>
-                                          </p:stCondLst>
-                                        </p:cTn>
-                                        <p:tgtEl>
-                                          <p:spTgt spid="5"/>
-                                        </p:tgtEl>
-                                        <p:attrNameLst>
-                                          <p:attrName>style.visibility</p:attrName>
-                                        </p:attrNameLst>
-                                      </p:cBhvr>
-                                      <p:to>
-                                        <p:strVal val="visible"/>
-                                      </p:to>
-                                    </p:set>
-                                    <p:animEffect transition="in" filter="wipe(up)">
-                                      <p:cBhvr>
-                                        <p:cTn id="13" dur="500"/>
-                                        <p:tgtEl>
-                                          <p:spTgt spid="5"/>
-                                        </p:tgtEl>
-                                      </p:cBhvr>
-                                    </p:animEffect>
-                                  </p:childTnLst>
-                                </p:cTn>
-                              </p:par>
-                            </p:childTnLst>
-                          </p:cTn>
-                        </p:par>
-                      </p:childTnLst>
-                    </p:cTn>
-                  </p:par>
-                  <p:par>
-                    <p:cTn id="14" fill="hold">
-                      <p:stCondLst>
-                        <p:cond delay="indefinite"/>
-                      </p:stCondLst>
-                      <p:childTnLst>
-                        <p:par>
-                          <p:cTn id="15" fill="hold">
-                            <p:stCondLst>
-                              <p:cond delay="0"/>
-                            </p:stCondLst>
-                            <p:childTnLst>
-                              <p:par>
-                                <p:cTn id="16" presetID="8" presetClass="entr" presetSubtype="0" fill="hold" grpId="0" nodeType="clickEffect">
-                                  <p:stCondLst>
-                                    <p:cond delay="0"/>
-                                  </p:stCondLst>
-                                  <p:childTnLst>
-                                    <p:set>
-                                      <p:cBhvr>
-                                        <p:cTn id="17" dur="1" fill="hold">
+                                        <p:cTn id="16" dur="1" fill="hold">
                                           <p:stCondLst>
                                             <p:cond delay="0"/>
                                           </p:stCondLst>
@@ -6641,9 +7526,9 @@
                                         <p:strVal val="visible"/>
                                       </p:to>
                                     </p:set>
-                                    <p:animEffect transition="in" filter="box(in)">
+                                    <p:animEffect transition="in" filter="fade">
                                       <p:cBhvr>
-                                        <p:cTn id="18" dur="400"/>
+                                        <p:cTn id="17" dur="500"/>
                                         <p:tgtEl>
                                           <p:spTgt spid="7"/>
                                         </p:tgtEl>
@@ -6659,26 +7544,114 @@
                     </p:cTn>
                   </p:par>
                   <p:par>
-                    <p:cTn id="19" fill="hold">
+                    <p:cTn id="18" fill="hold">
                       <p:stCondLst>
                         <p:cond delay="indefinite"/>
                       </p:stCondLst>
                       <p:childTnLst>
                         <p:par>
-                          <p:cTn id="20" fill="hold">
+                          <p:cTn id="19" fill="hold">
                             <p:stCondLst>
                               <p:cond delay="0"/>
                             </p:stCondLst>
                             <p:childTnLst>
                               <p:par>
-                                <p:cTn id="21" presetID="8" presetClass="entr" presetSubtype="0" fill="hold" grpId="0" nodeType="clickEffect">
+                                <p:cTn id="20" presetID="8" presetClass="entr" presetSubtype="0" fill="hold" grpId="0" nodeType="clickEffect">
                                   <p:stCondLst>
                                     <p:cond delay="0"/>
                                   </p:stCondLst>
                                   <p:childTnLst>
                                     <p:set>
                                       <p:cBhvr>
-                                        <p:cTn id="22" dur="1" fill="hold">
+                                        <p:cTn id="21" dur="1" fill="hold">
+                                          <p:stCondLst>
+                                            <p:cond delay="0"/>
+                                          </p:stCondLst>
+                                        </p:cTn>
+                                        <p:tgtEl>
+                                          <p:spTgt spid="8"/>
+                                        </p:tgtEl>
+                                        <p:attrNameLst>
+                                          <p:attrName>style.visibility</p:attrName>
+                                        </p:attrNameLst>
+                                      </p:cBhvr>
+                                      <p:to>
+                                        <p:strVal val="visible"/>
+                                      </p:to>
+                                    </p:set>
+                                    <p:animEffect transition="in" filter="box(in)">
+                                      <p:cBhvr>
+                                        <p:cTn id="22" dur="450"/>
+                                        <p:tgtEl>
+                                          <p:spTgt spid="8"/>
+                                        </p:tgtEl>
+                                      </p:cBhvr>
+                                    </p:animEffect>
+                                  </p:childTnLst>
+                                </p:cTn>
+                              </p:par>
+                              <p:par>
+                                <p:cTn id="23" presetID="10" presetClass="entr" presetSubtype="0" fill="hold" grpId="0" nodeType="afterEffect">
+                                  <p:stCondLst>
+                                    <p:cond delay="0"/>
+                                  </p:stCondLst>
+                                  <p:childTnLst>
+                                    <p:set>
+                                      <p:cBhvr>
+                                        <p:cTn id="24" dur="1" fill="hold">
+                                          <p:stCondLst>
+                                            <p:cond delay="0"/>
+                                          </p:stCondLst>
+                                        </p:cTn>
+                                        <p:tgtEl>
+                                          <p:spTgt spid="9"/>
+                                        </p:tgtEl>
+                                        <p:attrNameLst>
+                                          <p:attrName>style.visibility</p:attrName>
+                                        </p:attrNameLst>
+                                      </p:cBhvr>
+                                      <p:to>
+                                        <p:strVal val="visible"/>
+                                      </p:to>
+                                    </p:set>
+                                    <p:animEffect transition="in" filter="fade">
+                                      <p:cBhvr>
+                                        <p:cTn id="25" dur="300"/>
+                                        <p:tgtEl>
+                                          <p:spTgt spid="9"/>
+                                        </p:tgtEl>
+                                      </p:cBhvr>
+                                    </p:animEffect>
+                                  </p:childTnLst>
+                                </p:cTn>
+                              </p:par>
+                            </p:childTnLst>
+                          </p:cTn>
+                        </p:par>
+                      </p:childTnLst>
+                    </p:cTn>
+                  </p:par>
+                  <p:par>
+                    <p:cTn id="26" fill="hold">
+                      <p:stCondLst>
+                        <p:cond delay="indefinite"/>
+                      </p:stCondLst>
+                      <p:childTnLst>
+                        <p:par>
+                          <p:cTn id="27" fill="hold">
+                            <p:stCondLst>
+                              <p:cond delay="0"/>
+                            </p:stCondLst>
+                            <p:childTnLst>
+                              <p:par>
+                                <p:cTn id="28" presetID="8" presetClass="entr" presetSubtype="0" fill="hold" grpId="0" nodeType="clickEffect">
+                                  <p:stCondLst>
+                                    <p:cond delay="0"/>
+                                  </p:stCondLst>
+                                  <p:childTnLst>
+                                    <p:set>
+                                      <p:cBhvr>
+                                        <p:cTn id="29" dur="1" fill="hold">
                                           <p:stCondLst>
                                             <p:cond delay="0"/>
                                           </p:stCondLst>
@@ -6696,9 +7669,44 @@
                                     </p:set>
                                     <p:animEffect transition="in" filter="box(in)">
                                       <p:cBhvr>
-                                        <p:cTn id="23" dur="400"/>
+                                        <p:cTn id="30" dur="450"/>
                                         <p:tgtEl>
                                           <p:spTgt spid="10"/>
+                                        </p:tgtEl>
+                                      </p:cBhvr>
+                                    </p:animEffect>
+                                  </p:childTnLst>
+                                </p:cTn>
+                              </p:par>
+                              <p:par>
+                                <p:cTn id="31" presetID="10" presetClass="entr" presetSubtype="0" fill="hold" grpId="0" nodeType="afterEffect">
+                                  <p:stCondLst>
+                                    <p:cond delay="0"/>
+                                  </p:stCondLst>
+                                  <p:childTnLst>
+                                    <p:set>
+                                      <p:cBhvr>
+                                        <p:cTn id="32" dur="1" fill="hold">
+                                          <p:stCondLst>
+                                            <p:cond delay="0"/>
+                                          </p:stCondLst>
+                                        </p:cTn>
+                                        <p:tgtEl>
+                                          <p:spTgt spid="11"/>
+                                        </p:tgtEl>
+                                        <p:attrNameLst>
+                                          <p:attrName>style.visibility</p:attrName>
+                                        </p:attrNameLst>
+                                      </p:cBhvr>
+                                      <p:to>
+                                        <p:strVal val="visible"/>
+                                      </p:to>
+                                    </p:set>
+                                    <p:animEffect transition="in" filter="fade">
+                                      <p:cBhvr>
+                                        <p:cTn id="33" dur="300"/>
+                                        <p:tgtEl>
+                                          <p:spTgt spid="11"/>
                                         </p:tgtEl>
                                       </p:cBhvr>
                                     </p:animEffect>
@@ -6712,26 +7720,61 @@
                     </p:cTn>
                   </p:par>
                   <p:par>
-                    <p:cTn id="24" fill="hold">
+                    <p:cTn id="34" fill="hold">
                       <p:stCondLst>
                         <p:cond delay="indefinite"/>
                       </p:stCondLst>
                       <p:childTnLst>
                         <p:par>
-                          <p:cTn id="25" fill="hold">
+                          <p:cTn id="35" fill="hold">
                             <p:stCondLst>
                               <p:cond delay="0"/>
                             </p:stCondLst>
                             <p:childTnLst>
                               <p:par>
-                                <p:cTn id="26" presetID="8" presetClass="entr" presetSubtype="0" fill="hold" grpId="0" nodeType="clickEffect">
+                                <p:cTn id="36" presetID="8" presetClass="entr" presetSubtype="0" fill="hold" grpId="0" nodeType="clickEffect">
                                   <p:stCondLst>
                                     <p:cond delay="0"/>
                                   </p:stCondLst>
                                   <p:childTnLst>
                                     <p:set>
                                       <p:cBhvr>
-                                        <p:cTn id="27" dur="1" fill="hold">
+                                        <p:cTn id="37" dur="1" fill="hold">
+                                          <p:stCondLst>
+                                            <p:cond delay="0"/>
+                                          </p:stCondLst>
+                                        </p:cTn>
+                                        <p:tgtEl>
+                                          <p:spTgt spid="12"/>
+                                        </p:tgtEl>
+                                        <p:attrNameLst>
+                                          <p:attrName>style.visibility</p:attrName>
+                                        </p:attrNameLst>
+                                      </p:cBhvr>
+                                      <p:to>
+                                        <p:strVal val="visible"/>
+                                      </p:to>
+                                    </p:set>
+                                    <p:animEffect transition="in" filter="box(in)">
+                                      <p:cBhvr>
+                                        <p:cTn id="38" dur="450"/>
+                                        <p:tgtEl>
+                                          <p:spTgt spid="12"/>
+                                        </p:tgtEl>
+                                      </p:cBhvr>
+                                    </p:animEffect>
+                                  </p:childTnLst>
+                                </p:cTn>
+                              </p:par>
+                              <p:par>
+                                <p:cTn id="39" presetID="10" presetClass="entr" presetSubtype="0" fill="hold" grpId="0" nodeType="afterEffect">
+                                  <p:stCondLst>
+                                    <p:cond delay="0"/>
+                                  </p:stCondLst>
+                                  <p:childTnLst>
+                                    <p:set>
+                                      <p:cBhvr>
+                                        <p:cTn id="40" dur="1" fill="hold">
                                           <p:stCondLst>
                                             <p:cond delay="0"/>
                                           </p:stCondLst>
@@ -6747,9 +7790,9 @@
                                         <p:strVal val="visible"/>
                                       </p:to>
                                     </p:set>
-                                    <p:animEffect transition="in" filter="box(in)">
+                                    <p:animEffect transition="in" filter="fade">
                                       <p:cBhvr>
-                                        <p:cTn id="28" dur="400"/>
+                                        <p:cTn id="41" dur="300"/>
                                         <p:tgtEl>
                                           <p:spTgt spid="13"/>
                                         </p:tgtEl>
@@ -6759,14 +7802,49 @@
                                 </p:cTn>
                               </p:par>
                               <p:par>
-                                <p:cTn id="29" presetID="10" presetClass="entr" presetSubtype="0" fill="hold" grpId="0" nodeType="afterEffect">
+                                <p:cTn id="42" presetID="22" presetClass="entr" presetSubtype="0" fill="hold" grpId="0" nodeType="afterEffect">
                                   <p:stCondLst>
                                     <p:cond delay="0"/>
                                   </p:stCondLst>
                                   <p:childTnLst>
                                     <p:set>
                                       <p:cBhvr>
-                                        <p:cTn id="30" dur="1" fill="hold">
+                                        <p:cTn id="43" dur="1" fill="hold">
+                                          <p:stCondLst>
+                                            <p:cond delay="0"/>
+                                          </p:stCondLst>
+                                        </p:cTn>
+                                        <p:tgtEl>
+                                          <p:spTgt spid="14"/>
+                                        </p:tgtEl>
+                                        <p:attrNameLst>
+                                          <p:attrName>style.visibility</p:attrName>
+                                        </p:attrNameLst>
+                                      </p:cBhvr>
+                                      <p:to>
+                                        <p:strVal val="visible"/>
+                                      </p:to>
+                                    </p:set>
+                                    <p:animEffect transition="in" filter="wipe(right)">
+                                      <p:cBhvr>
+                                        <p:cTn id="44" dur="350"/>
+                                        <p:tgtEl>
+                                          <p:spTgt spid="14"/>
+                                        </p:tgtEl>
+                                      </p:cBhvr>
+                                    </p:animEffect>
+                                  </p:childTnLst>
+                                </p:cTn>
+                              </p:par>
+                              <p:par>
+                                <p:cTn id="45" presetID="10" presetClass="entr" presetSubtype="0" fill="hold" grpId="0" nodeType="afterEffect">
+                                  <p:stCondLst>
+                                    <p:cond delay="0"/>
+                                  </p:stCondLst>
+                                  <p:childTnLst>
+                                    <p:set>
+                                      <p:cBhvr>
+                                        <p:cTn id="46" dur="1" fill="hold">
                                           <p:stCondLst>
                                             <p:cond delay="0"/>
                                           </p:stCondLst>
@@ -6784,7 +7862,7 @@
                                     </p:set>
                                     <p:animEffect transition="in" filter="fade">
                                       <p:cBhvr>
-                                        <p:cTn id="31" dur="400"/>
+                                        <p:cTn id="47" dur="400"/>
                                         <p:tgtEl>
                                           <p:spTgt spid="15"/>
                                         </p:tgtEl>
@@ -6830,7 +7908,7 @@
                         </p:stCondLst>
                       </p:cTn>
                       <p:tgtEl>
-                        <p:spTgt spid="5"/>
+                        <p:spTgt spid="7"/>
                       </p:tgtEl>
                       <p:attrNameLst>
                         <p:attrName>style.visibility</p:attrName>
@@ -6848,7 +7926,7 @@
                         </p:stCondLst>
                       </p:cTn>
                       <p:tgtEl>
-                        <p:spTgt spid="7"/>
+                        <p:spTgt spid="8"/>
                       </p:tgtEl>
                       <p:attrNameLst>
                         <p:attrName>style.visibility</p:attrName>
@@ -6866,7 +7944,7 @@
                         </p:stCondLst>
                       </p:cTn>
                       <p:tgtEl>
-                        <p:spTgt spid="10"/>
+                        <p:spTgt spid="9"/>
                       </p:tgtEl>
                       <p:attrNameLst>
                         <p:attrName>style.visibility</p:attrName>
@@ -6884,6 +7962,60 @@
                         </p:stCondLst>
                       </p:cTn>
                       <p:tgtEl>
+                        <p:spTgt spid="10"/>
+                      </p:tgtEl>
+                      <p:attrNameLst>
+                        <p:attrName>style.visibility</p:attrName>
+                      </p:attrNameLst>
+                    </p:cBhvr>
+                    <p:to>
+                      <p:strVal val="hidden"/>
+                    </p:to>
+                  </p:set>
+                  <p:set>
+                    <p:cBhvr>
+                      <p:cTn id="8" dur="1" fill="hold">
+                        <p:stCondLst>
+                          <p:cond delay="0"/>
+                        </p:stCondLst>
+                      </p:cTn>
+                      <p:tgtEl>
+                        <p:spTgt spid="11"/>
+                      </p:tgtEl>
+                      <p:attrNameLst>
+                        <p:attrName>style.visibility</p:attrName>
+                      </p:attrNameLst>
+                    </p:cBhvr>
+                    <p:to>
+                      <p:strVal val="hidden"/>
+                    </p:to>
+                  </p:set>
+                  <p:set>
+                    <p:cBhvr>
+                      <p:cTn id="9" dur="1" fill="hold">
+                        <p:stCondLst>
+                          <p:cond delay="0"/>
+                        </p:stCondLst>
+                      </p:cTn>
+                      <p:tgtEl>
+                        <p:spTgt spid="12"/>
+                      </p:tgtEl>
+                      <p:attrNameLst>
+                        <p:attrName>style.visibility</p:attrName>
+                      </p:attrNameLst>
+                    </p:cBhvr>
+                    <p:to>
+                      <p:strVal val="hidden"/>
+                    </p:to>
+                  </p:set>
+                  <p:set>
+                    <p:cBhvr>
+                      <p:cTn id="10" dur="1" fill="hold">
+                        <p:stCondLst>
+                          <p:cond delay="0"/>
+                        </p:stCondLst>
+                      </p:cTn>
+                      <p:tgtEl>
                         <p:spTgt spid="13"/>
                       </p:tgtEl>
                       <p:attrNameLst>
@@ -6896,7 +8028,25 @@
                   </p:set>
                   <p:set>
                     <p:cBhvr>
-                      <p:cTn id="8" dur="1" fill="hold">
+                      <p:cTn id="11" dur="1" fill="hold">
+                        <p:stCondLst>
+                          <p:cond delay="0"/>
+                        </p:stCondLst>
+                      </p:cTn>
+                      <p:tgtEl>
+                        <p:spTgt spid="14"/>
+                      </p:tgtEl>
+                      <p:attrNameLst>
+                        <p:attrName>style.visibility</p:attrName>
+                      </p:attrNameLst>
+                    </p:cBhvr>
+                    <p:to>
+                      <p:strVal val="hidden"/>
+                    </p:to>
+                  </p:set>
+                  <p:set>
+                    <p:cBhvr>
+                      <p:cTn id="12" dur="1" fill="hold">
                         <p:stCondLst>
                           <p:cond delay="0"/>
                         </p:stCondLst>
@@ -6947,8 +8097,60 @@
           <a:prstGeom prst="rect">
             <a:avLst/>
           </a:prstGeom>
+          <a:gradFill rotWithShape="1">
+            <a:gsLst>
+              <a:gs pos="0">
+                <a:srgbClr val="8A5BF5"/>
+              </a:gs>
+              <a:gs pos="100000">
+                <a:srgbClr val="4338CA"/>
+              </a:gs>
+            </a:gsLst>
+            <a:lin ang="8400000" scaled="0"/>
+          </a:gradFill>
+          <a:ln>
+            <a:noFill/>
+          </a:ln>
+          <a:effectLst/>
+        </p:spPr>
+        <p:style>
+          <a:lnRef idx="1">
+            <a:schemeClr val="accent1"/>
+          </a:lnRef>
+          <a:fillRef idx="3">
+            <a:schemeClr val="accent1"/>
+          </a:fillRef>
+          <a:effectRef idx="2">
+            <a:schemeClr val="accent1"/>
+          </a:effectRef>
+          <a:fontRef idx="minor">
+            <a:schemeClr val="lt1"/>
+          </a:fontRef>
+        </p:style>
+        <p:txBody>
+          <a:bodyPr rtlCol="0" anchor="ctr"/>
+          <a:lstStyle/>
+          <a:p>
+            <a:pPr algn="ctr"/>
+          </a:p>
+        </p:txBody>
+      </p:sp>
+      <p:sp>
+        <p:nvSpPr>
+          <p:cNvPr id="3" name="Rectangle 2"/>
+          <p:cNvSpPr/>
+          <p:nvPr/>
+        </p:nvSpPr>
+        <p:spPr>
+          <a:xfrm>
+            <a:off x="0" y="0"/>
+            <a:ext cx="6096000" cy="19050"/>
+          </a:xfrm>
+          <a:prstGeom prst="rect">
+            <a:avLst/>
+          </a:prstGeom>
           <a:solidFill>
-            <a:srgbClr val="F45A3A"/>
+            <a:srgbClr val="8B5CF6"/>
           </a:solidFill>
           <a:ln>
             <a:noFill/>
@@ -6979,174 +8181,25 @@
       </p:sp>
       <p:sp>
         <p:nvSpPr>
-          <p:cNvPr id="3" name="TextBox 2"/>
-          <p:cNvSpPr txBox="1"/>
+          <p:cNvPr id="4" name="Rectangle 3"/>
+          <p:cNvSpPr/>
           <p:nvPr/>
         </p:nvSpPr>
         <p:spPr>
           <a:xfrm>
-            <a:off x="685800" y="514350"/>
-            <a:ext cx="1447800" cy="133350"/>
+            <a:off x="6096000" y="0"/>
+            <a:ext cx="6096000" cy="19050"/>
           </a:xfrm>
           <a:prstGeom prst="rect">
             <a:avLst/>
           </a:prstGeom>
-          <a:noFill/>
-        </p:spPr>
-        <p:txBody>
-          <a:bodyPr wrap="none" anchor="t" lIns="0" rIns="0" tIns="0" bIns="0">
-            <a:noAutofit/>
-          </a:bodyPr>
-          <a:lstStyle/>
-          <a:p>
-            <a:pPr algn="l"/>
-            <a:r>
-              <a:rPr sz="1200" b="1" i="0">
-                <a:solidFill>
-                  <a:srgbClr val="17211D"/>
-                </a:solidFill>
-                <a:latin typeface="Pretendard"/>
-              </a:rPr>
-              <a:t>04  /  THE ASK</a:t>
-            </a:r>
-          </a:p>
-        </p:txBody>
-      </p:sp>
-      <p:sp>
-        <p:nvSpPr>
-          <p:cNvPr id="4" name="TextBox 3"/>
-          <p:cNvSpPr txBox="1"/>
-          <p:nvPr/>
-        </p:nvSpPr>
-        <p:spPr>
-          <a:xfrm>
-            <a:off x="11306175" y="514350"/>
-            <a:ext cx="200025" cy="104775"/>
-          </a:xfrm>
-          <a:prstGeom prst="rect">
-            <a:avLst/>
-          </a:prstGeom>
-          <a:noFill/>
-        </p:spPr>
-        <p:txBody>
-          <a:bodyPr wrap="none" anchor="t" lIns="0" rIns="0" tIns="0" bIns="0">
-            <a:noAutofit/>
-          </a:bodyPr>
-          <a:lstStyle/>
-          <a:p>
-            <a:pPr algn="r"/>
-            <a:r>
-              <a:rPr sz="1125" b="1" i="0">
-                <a:solidFill>
-                  <a:srgbClr val="17211D"/>
-                </a:solidFill>
-                <a:latin typeface="Pretendard"/>
-              </a:rPr>
-              <a:t>05</a:t>
-            </a:r>
-          </a:p>
-        </p:txBody>
-      </p:sp>
-      <p:sp>
-        <p:nvSpPr>
-          <p:cNvPr id="5" name="TextBox 4"/>
-          <p:cNvSpPr txBox="1"/>
-          <p:nvPr/>
-        </p:nvSpPr>
-        <p:spPr>
-          <a:xfrm>
-            <a:off x="685800" y="1219200"/>
-            <a:ext cx="5095875" cy="2076450"/>
-          </a:xfrm>
-          <a:prstGeom prst="rect">
-            <a:avLst/>
-          </a:prstGeom>
-          <a:noFill/>
-        </p:spPr>
-        <p:txBody>
-          <a:bodyPr wrap="none" anchor="t" lIns="0" rIns="0" tIns="0" bIns="0">
-            <a:noAutofit/>
-          </a:bodyPr>
-          <a:lstStyle/>
-          <a:p>
-            <a:pPr algn="l">
-              <a:lnSpc>
-                <a:spcPts val="5625"/>
-              </a:lnSpc>
-            </a:pPr>
-            <a:r>
-              <a:rPr sz="5700" b="1" i="0">
-                <a:solidFill>
-                  <a:srgbClr val="17211D"/>
-                </a:solidFill>
-                <a:latin typeface="Pretendard"/>
-              </a:rPr>
-              <a:t>18개월 뒤,</a:t>
-            </a:r>
-          </a:p>
-          <a:p>
-            <a:pPr algn="l">
-              <a:lnSpc>
-                <a:spcPts val="5625"/>
-              </a:lnSpc>
-            </a:pPr>
-            <a:r>
-              <a:rPr sz="5700" b="1" i="0">
-                <a:solidFill>
-                  <a:srgbClr val="17211D"/>
-                </a:solidFill>
-                <a:latin typeface="Pretendard"/>
-              </a:rPr>
-              <a:t>100만 명의 내일을</a:t>
-            </a:r>
-          </a:p>
-          <a:p>
-            <a:pPr algn="l">
-              <a:lnSpc>
-                <a:spcPts val="5625"/>
-              </a:lnSpc>
-            </a:pPr>
-            <a:r>
-              <a:rPr sz="5700" b="1" i="0">
-                <a:solidFill>
-                  <a:srgbClr val="17211D"/>
-                </a:solidFill>
-                <a:latin typeface="Pretendard"/>
-              </a:rPr>
-              <a:t>조금 더 선명하게.</a:t>
-            </a:r>
-          </a:p>
-        </p:txBody>
-      </p:sp>
-      <p:sp>
-        <p:nvSpPr>
-          <p:cNvPr id="6" name="Rounded Rectangle 5"/>
-          <p:cNvSpPr/>
-          <p:nvPr/>
-        </p:nvSpPr>
-        <p:spPr>
-          <a:xfrm>
-            <a:off x="7791450" y="1257300"/>
-            <a:ext cx="3714750" cy="4095750"/>
-          </a:xfrm>
-          <a:prstGeom prst="roundRect">
-            <a:avLst>
-              <a:gd name="adj" fmla="val 2051"/>
-            </a:avLst>
-          </a:prstGeom>
           <a:solidFill>
-            <a:srgbClr val="17211D"/>
+            <a:srgbClr val="22D3EE"/>
           </a:solidFill>
           <a:ln>
             <a:noFill/>
           </a:ln>
-          <a:effectLst>
-            <a:outerShdw blurRad="533400" dist="152400" dir="5400000" rotWithShape="0">
-              <a:srgbClr val="0B1712">
-                <a:alpha val="25098"/>
-              </a:srgbClr>
-            </a:outerShdw>
-          </a:effectLst>
+          <a:effectLst/>
         </p:spPr>
         <p:style>
           <a:lnRef idx="1">
@@ -7172,91 +8225,21 @@
       </p:sp>
       <p:sp>
         <p:nvSpPr>
-          <p:cNvPr id="7" name="TextBox 6"/>
-          <p:cNvSpPr txBox="1"/>
+          <p:cNvPr id="5" name="Oval 4"/>
+          <p:cNvSpPr/>
           <p:nvPr/>
         </p:nvSpPr>
         <p:spPr>
           <a:xfrm>
-            <a:off x="8172450" y="1676400"/>
-            <a:ext cx="1200150" cy="114300"/>
+            <a:off x="7677150" y="-1819275"/>
+            <a:ext cx="6096000" cy="6096000"/>
           </a:xfrm>
-          <a:prstGeom prst="rect">
-            <a:avLst/>
-          </a:prstGeom>
-          <a:noFill/>
-        </p:spPr>
-        <p:txBody>
-          <a:bodyPr wrap="none" anchor="t" lIns="0" rIns="0" tIns="0" bIns="0">
-            <a:noAutofit/>
-          </a:bodyPr>
-          <a:lstStyle/>
-          <a:p>
-            <a:pPr algn="l"/>
-            <a:r>
-              <a:rPr sz="1200" b="1" i="0">
-                <a:solidFill>
-                  <a:srgbClr val="B9D9C8"/>
-                </a:solidFill>
-                <a:latin typeface="Pretendard"/>
-              </a:rPr>
-              <a:t>SEED ROUND</a:t>
-            </a:r>
-          </a:p>
-        </p:txBody>
-      </p:sp>
-      <p:sp>
-        <p:nvSpPr>
-          <p:cNvPr id="8" name="TextBox 7"/>
-          <p:cNvSpPr txBox="1"/>
-          <p:nvPr/>
-        </p:nvSpPr>
-        <p:spPr>
-          <a:xfrm>
-            <a:off x="8153400" y="2171700"/>
-            <a:ext cx="2009775" cy="552450"/>
-          </a:xfrm>
-          <a:prstGeom prst="rect">
-            <a:avLst/>
-          </a:prstGeom>
-          <a:noFill/>
-        </p:spPr>
-        <p:txBody>
-          <a:bodyPr wrap="none" anchor="t" lIns="0" rIns="0" tIns="0" bIns="0">
-            <a:noAutofit/>
-          </a:bodyPr>
-          <a:lstStyle/>
-          <a:p>
-            <a:pPr algn="l"/>
-            <a:r>
-              <a:rPr sz="4875" b="1" i="0">
-                <a:solidFill>
-                  <a:srgbClr val="FFFDF7"/>
-                </a:solidFill>
-                <a:latin typeface="Pretendard"/>
-              </a:rPr>
-              <a:t>30억 원</a:t>
-            </a:r>
-          </a:p>
-        </p:txBody>
-      </p:sp>
-      <p:sp>
-        <p:nvSpPr>
-          <p:cNvPr id="9" name="Rectangle 8"/>
-          <p:cNvSpPr/>
-          <p:nvPr/>
-        </p:nvSpPr>
-        <p:spPr>
-          <a:xfrm>
-            <a:off x="8172450" y="3086100"/>
-            <a:ext cx="2952750" cy="9525"/>
-          </a:xfrm>
-          <a:prstGeom prst="rect">
+          <a:prstGeom prst="ellipse">
             <a:avLst/>
           </a:prstGeom>
           <a:solidFill>
-            <a:srgbClr val="FFFFFF">
-              <a:alpha val="20000"/>
+            <a:srgbClr val="F8F8FF">
+              <a:alpha val="3921"/>
             </a:srgbClr>
           </a:solidFill>
           <a:ln>
@@ -7288,14 +8271,60 @@
       </p:sp>
       <p:sp>
         <p:nvSpPr>
-          <p:cNvPr id="10" name="TextBox 9"/>
+          <p:cNvPr id="6" name="Oval 5"/>
+          <p:cNvSpPr/>
+          <p:nvPr/>
+        </p:nvSpPr>
+        <p:spPr>
+          <a:xfrm>
+            <a:off x="-838200" y="3810000"/>
+            <a:ext cx="3619500" cy="3619500"/>
+          </a:xfrm>
+          <a:prstGeom prst="ellipse">
+            <a:avLst/>
+          </a:prstGeom>
+          <a:solidFill>
+            <a:srgbClr val="F8F8FF">
+              <a:alpha val="2745"/>
+            </a:srgbClr>
+          </a:solidFill>
+          <a:ln>
+            <a:noFill/>
+          </a:ln>
+          <a:effectLst/>
+        </p:spPr>
+        <p:style>
+          <a:lnRef idx="1">
+            <a:schemeClr val="accent1"/>
+          </a:lnRef>
+          <a:fillRef idx="3">
+            <a:schemeClr val="accent1"/>
+          </a:fillRef>
+          <a:effectRef idx="2">
+            <a:schemeClr val="accent1"/>
+          </a:effectRef>
+          <a:fontRef idx="minor">
+            <a:schemeClr val="lt1"/>
+          </a:fontRef>
+        </p:style>
+        <p:txBody>
+          <a:bodyPr rtlCol="0" anchor="ctr"/>
+          <a:lstStyle/>
+          <a:p>
+            <a:pPr algn="ctr"/>
+          </a:p>
+        </p:txBody>
+      </p:sp>
+      <p:sp>
+        <p:nvSpPr>
+          <p:cNvPr id="7" name="TextBox 6"/>
           <p:cNvSpPr txBox="1"/>
           <p:nvPr/>
         </p:nvSpPr>
         <p:spPr>
           <a:xfrm>
-            <a:off x="8172450" y="3409950"/>
-            <a:ext cx="1390650" cy="885825"/>
+            <a:off x="1219200" y="581025"/>
+            <a:ext cx="542925" cy="123825"/>
           </a:xfrm>
           <a:prstGeom prst="rect">
             <a:avLst/>
@@ -7308,65 +8337,29 @@
           </a:bodyPr>
           <a:lstStyle/>
           <a:p>
-            <a:pPr algn="l">
-              <a:lnSpc>
-                <a:spcPts val="2700"/>
-              </a:lnSpc>
-            </a:pPr>
-            <a:r>
-              <a:rPr sz="1725" b="0" i="0">
+            <a:pPr algn="l"/>
+            <a:r>
+              <a:rPr sz="1350" b="1" i="0">
                 <a:solidFill>
-                  <a:srgbClr val="D8E3DD"/>
+                  <a:srgbClr val="8B5CF6"/>
                 </a:solidFill>
-                <a:latin typeface="Pretendard"/>
+                <a:latin typeface="Roboto"/>
               </a:rPr>
-              <a:t>제품  45%</a:t>
-            </a:r>
-          </a:p>
-          <a:p>
-            <a:pPr algn="l">
-              <a:lnSpc>
-                <a:spcPts val="2700"/>
-              </a:lnSpc>
-            </a:pPr>
-            <a:r>
-              <a:rPr sz="1725" b="0" i="0">
-                <a:solidFill>
-                  <a:srgbClr val="D8E3DD"/>
-                </a:solidFill>
-                <a:latin typeface="Pretendard"/>
-              </a:rPr>
-              <a:t>데이터  35%</a:t>
-            </a:r>
-          </a:p>
-          <a:p>
-            <a:pPr algn="l">
-              <a:lnSpc>
-                <a:spcPts val="2700"/>
-              </a:lnSpc>
-            </a:pPr>
-            <a:r>
-              <a:rPr sz="1725" b="0" i="0">
-                <a:solidFill>
-                  <a:srgbClr val="D8E3DD"/>
-                </a:solidFill>
-                <a:latin typeface="Pretendard"/>
-              </a:rPr>
-              <a:t>시장 확장  20%</a:t>
-            </a:r>
-          </a:p>
-        </p:txBody>
-      </p:sp>
-      <p:sp>
-        <p:nvSpPr>
-          <p:cNvPr id="11" name="TextBox 10"/>
+              <a:t>VELA</a:t>
+            </a:r>
+          </a:p>
+        </p:txBody>
+      </p:sp>
+      <p:sp>
+        <p:nvSpPr>
+          <p:cNvPr id="8" name="TextBox 7"/>
           <p:cNvSpPr txBox="1"/>
           <p:nvPr/>
         </p:nvSpPr>
         <p:spPr>
           <a:xfrm>
-            <a:off x="685800" y="6191250"/>
-            <a:ext cx="3467100" cy="171450"/>
+            <a:off x="1552575" y="876300"/>
+            <a:ext cx="9086850" cy="2085975"/>
           </a:xfrm>
           <a:prstGeom prst="rect">
             <a:avLst/>
@@ -7379,15 +8372,119 @@
           </a:bodyPr>
           <a:lstStyle/>
           <a:p>
-            <a:pPr algn="l"/>
-            <a:r>
-              <a:rPr sz="1350" b="1" i="0">
+            <a:pPr algn="ctr">
+              <a:lnSpc>
+                <a:spcPts val="8175"/>
+              </a:lnSpc>
+            </a:pPr>
+            <a:r>
+              <a:rPr sz="8100" b="1" i="0">
                 <a:solidFill>
-                  <a:srgbClr val="17211D"/>
+                  <a:srgbClr val="F8F8FF"/>
                 </a:solidFill>
-                <a:latin typeface="Pretendard"/>
+                <a:effectLst>
+                  <a:outerShdw blurRad="342900" dist="57150" dir="5400000" rotWithShape="0">
+                    <a:srgbClr val="000000">
+                      <a:alpha val="46666"/>
+                    </a:srgbClr>
+                  </a:outerShdw>
+                </a:effectLst>
+                <a:latin typeface="Noto Serif"/>
               </a:rPr>
-              <a:t>hello@moa.money  ·  moa.money/deck</a:t>
+              <a:t>Ready to surface</a:t>
+            </a:r>
+          </a:p>
+          <a:p>
+            <a:pPr algn="ctr">
+              <a:lnSpc>
+                <a:spcPts val="8175"/>
+              </a:lnSpc>
+            </a:pPr>
+            <a:r>
+              <a:rPr sz="8100" b="1" i="0">
+                <a:solidFill>
+                  <a:srgbClr val="F8F8FF"/>
+                </a:solidFill>
+                <a:effectLst>
+                  <a:outerShdw blurRad="342900" dist="57150" dir="5400000" rotWithShape="0">
+                    <a:srgbClr val="000000">
+                      <a:alpha val="46666"/>
+                    </a:srgbClr>
+                  </a:outerShdw>
+                </a:effectLst>
+                <a:latin typeface="Noto Serif"/>
+              </a:rPr>
+              <a:t>the signal?</a:t>
+            </a:r>
+          </a:p>
+        </p:txBody>
+      </p:sp>
+      <p:sp>
+        <p:nvSpPr>
+          <p:cNvPr id="9" name="TextBox 8"/>
+          <p:cNvSpPr txBox="1"/>
+          <p:nvPr/>
+        </p:nvSpPr>
+        <p:spPr>
+          <a:xfrm>
+            <a:off x="3562350" y="4829175"/>
+            <a:ext cx="5076825" cy="219075"/>
+          </a:xfrm>
+          <a:prstGeom prst="rect">
+            <a:avLst/>
+          </a:prstGeom>
+          <a:noFill/>
+        </p:spPr>
+        <p:txBody>
+          <a:bodyPr wrap="none" anchor="t" lIns="0" rIns="0" tIns="0" bIns="0">
+            <a:noAutofit/>
+          </a:bodyPr>
+          <a:lstStyle/>
+          <a:p>
+            <a:pPr algn="ctr"/>
+            <a:r>
+              <a:rPr sz="2100" b="0" i="0">
+                <a:solidFill>
+                  <a:srgbClr val="DDD6FE"/>
+                </a:solidFill>
+                <a:latin typeface="Roboto"/>
+              </a:rPr>
+              <a:t>Book a 20-minute demo  ·  vela.so/demo</a:t>
+            </a:r>
+          </a:p>
+        </p:txBody>
+      </p:sp>
+      <p:sp>
+        <p:nvSpPr>
+          <p:cNvPr id="10" name="TextBox 9"/>
+          <p:cNvSpPr txBox="1"/>
+          <p:nvPr/>
+        </p:nvSpPr>
+        <p:spPr>
+          <a:xfrm>
+            <a:off x="5419725" y="5657850"/>
+            <a:ext cx="1352550" cy="200025"/>
+          </a:xfrm>
+          <a:prstGeom prst="rect">
+            <a:avLst/>
+          </a:prstGeom>
+          <a:noFill/>
+        </p:spPr>
+        <p:txBody>
+          <a:bodyPr wrap="none" anchor="t" lIns="0" rIns="0" tIns="0" bIns="0">
+            <a:noAutofit/>
+          </a:bodyPr>
+          <a:lstStyle/>
+          <a:p>
+            <a:pPr algn="ctr"/>
+            <a:r>
+              <a:rPr sz="1575" b="0" i="0">
+                <a:solidFill>
+                  <a:srgbClr val="A78BFA"/>
+                </a:solidFill>
+                <a:latin typeface="Roboto"/>
+              </a:rPr>
+              <a:t>hello@vela.so</a:t>
             </a:r>
           </a:p>
         </p:txBody>
@@ -7409,32 +8506,32 @@
               <p:cTn id="2" dur="indefinite" nodeType="mainSeq">
                 <p:childTnLst>
                   <p:par>
-                    <p:cTn id="6" fill="hold">
+                    <p:cTn id="7" fill="hold">
                       <p:stCondLst>
                         <p:cond delay="indefinite"/>
                       </p:stCondLst>
                       <p:childTnLst>
                         <p:par>
-                          <p:cTn id="7" fill="hold">
+                          <p:cTn id="8" fill="hold">
                             <p:stCondLst>
                               <p:cond delay="0"/>
                             </p:stCondLst>
                             <p:childTnLst>
                               <p:par>
-                                <p:cTn id="8" presetID="8" presetClass="entr" presetSubtype="0" fill="hold" grpId="0" nodeType="clickEffect">
+                                <p:cTn id="9" presetID="8" presetClass="entr" presetSubtype="0" fill="hold" grpId="0" nodeType="clickEffect">
                                   <p:stCondLst>
                                     <p:cond delay="0"/>
                                   </p:stCondLst>
                                   <p:childTnLst>
                                     <p:set>
                                       <p:cBhvr>
-                                        <p:cTn id="9" dur="1" fill="hold">
+                                        <p:cTn id="10" dur="1" fill="hold">
                                           <p:stCondLst>
                                             <p:cond delay="0"/>
                                           </p:stCondLst>
                                         </p:cTn>
                                         <p:tgtEl>
-                                          <p:spTgt spid="5"/>
+                                          <p:spTgt spid="8"/>
                                         </p:tgtEl>
                                         <p:attrNameLst>
                                           <p:attrName>style.visibility</p:attrName>
@@ -7446,9 +8543,9 @@
                                     </p:set>
                                     <p:animEffect transition="in" filter="box(in)">
                                       <p:cBhvr>
-                                        <p:cTn id="10" dur="550"/>
+                                        <p:cTn id="11" dur="550"/>
                                         <p:tgtEl>
-                                          <p:spTgt spid="5"/>
+                                          <p:spTgt spid="8"/>
                                         </p:tgtEl>
                                       </p:cBhvr>
                                     </p:animEffect>
@@ -7456,20 +8553,20 @@
                                 </p:cTn>
                               </p:par>
                               <p:par>
-                                <p:cTn id="11" presetID="10" presetClass="entr" presetSubtype="0" fill="hold" grpId="0" nodeType="afterEffect">
+                                <p:cTn id="12" presetID="10" presetClass="entr" presetSubtype="0" fill="hold" grpId="0" nodeType="afterEffect">
                                   <p:stCondLst>
                                     <p:cond delay="0"/>
                                   </p:stCondLst>
                                   <p:childTnLst>
                                     <p:set>
                                       <p:cBhvr>
-                                        <p:cTn id="12" dur="1" fill="hold">
+                                        <p:cTn id="13" dur="1" fill="hold">
                                           <p:stCondLst>
                                             <p:cond delay="0"/>
                                           </p:stCondLst>
                                         </p:cTn>
                                         <p:tgtEl>
-                                          <p:spTgt spid="11"/>
+                                          <p:spTgt spid="9"/>
                                         </p:tgtEl>
                                         <p:attrNameLst>
                                           <p:attrName>style.visibility</p:attrName>
@@ -7481,9 +8578,44 @@
                                     </p:set>
                                     <p:animEffect transition="in" filter="fade">
                                       <p:cBhvr>
-                                        <p:cTn id="13" dur="400"/>
+                                        <p:cTn id="14" dur="500"/>
                                         <p:tgtEl>
-                                          <p:spTgt spid="11"/>
+                                          <p:spTgt spid="9"/>
+                                        </p:tgtEl>
+                                      </p:cBhvr>
+                                    </p:animEffect>
+                                  </p:childTnLst>
+                                </p:cTn>
+                              </p:par>
+                              <p:par>
+                                <p:cTn id="15" presetID="10" presetClass="entr" presetSubtype="0" fill="hold" grpId="0" nodeType="afterEffect">
+                                  <p:stCondLst>
+                                    <p:cond delay="0"/>
+                                  </p:stCondLst>
+                                  <p:childTnLst>
+                                    <p:set>
+                                      <p:cBhvr>
+                                        <p:cTn id="16" dur="1" fill="hold">
+                                          <p:stCondLst>
+                                            <p:cond delay="0"/>
+                                          </p:stCondLst>
+                                        </p:cTn>
+                                        <p:tgtEl>
+                                          <p:spTgt spid="10"/>
+                                        </p:tgtEl>
+                                        <p:attrNameLst>
+                                          <p:attrName>style.visibility</p:attrName>
+                                        </p:attrNameLst>
+                                      </p:cBhvr>
+                                      <p:to>
+                                        <p:strVal val="visible"/>
+                                      </p:to>
+                                    </p:set>
+                                    <p:animEffect transition="in" filter="fade">
+                                      <p:cBhvr>
+                                        <p:cTn id="17" dur="400"/>
+                                        <p:tgtEl>
+                                          <p:spTgt spid="10"/>
                                         </p:tgtEl>
                                       </p:cBhvr>
                                     </p:animEffect>
@@ -7527,7 +8659,7 @@
                         </p:stCondLst>
                       </p:cTn>
                       <p:tgtEl>
-                        <p:spTgt spid="5"/>
+                        <p:spTgt spid="8"/>
                       </p:tgtEl>
                       <p:attrNameLst>
                         <p:attrName>style.visibility</p:attrName>
@@ -7545,7 +8677,25 @@
                         </p:stCondLst>
                       </p:cTn>
                       <p:tgtEl>
-                        <p:spTgt spid="11"/>
+                        <p:spTgt spid="9"/>
+                      </p:tgtEl>
+                      <p:attrNameLst>
+                        <p:attrName>style.visibility</p:attrName>
+                      </p:attrNameLst>
+                    </p:cBhvr>
+                    <p:to>
+                      <p:strVal val="hidden"/>
+                    </p:to>
+                  </p:set>
+                  <p:set>
+                    <p:cBhvr>
+                      <p:cTn id="6" dur="1" fill="hold">
+                        <p:stCondLst>
+                          <p:cond delay="0"/>
+                        </p:stCondLst>
+                      </p:cTn>
+                      <p:tgtEl>
+                        <p:spTgt spid="10"/>
                       </p:tgtEl>
                       <p:attrNameLst>
                         <p:attrName>style.visibility</p:attrName>

--- a/examples/investor_deck.pptx
+++ b/examples/investor_deck.pptx
@@ -3143,291 +3143,16 @@
       </p:sp>
       <p:sp>
         <p:nvSpPr>
-          <p:cNvPr id="3" name="TextBox 2"/>
-          <p:cNvSpPr txBox="1"/>
-          <p:nvPr/>
-        </p:nvSpPr>
-        <p:spPr>
-          <a:xfrm>
-            <a:off x="762000" y="523875"/>
-            <a:ext cx="542925" cy="123825"/>
-          </a:xfrm>
-          <a:prstGeom prst="rect">
-            <a:avLst/>
-          </a:prstGeom>
-          <a:noFill/>
-        </p:spPr>
-        <p:txBody>
-          <a:bodyPr wrap="none" anchor="t" lIns="0" rIns="0" tIns="0" bIns="0">
-            <a:noAutofit/>
-          </a:bodyPr>
-          <a:lstStyle/>
-          <a:p>
-            <a:pPr algn="l"/>
-            <a:r>
-              <a:rPr sz="1350" b="1" i="0">
-                <a:solidFill>
-                  <a:srgbClr val="0066CC"/>
-                </a:solidFill>
-                <a:latin typeface="Roboto"/>
-              </a:rPr>
-              <a:t>VELA</a:t>
-            </a:r>
-          </a:p>
-        </p:txBody>
-      </p:sp>
-      <p:sp>
-        <p:nvSpPr>
-          <p:cNvPr id="4" name="TextBox 3"/>
-          <p:cNvSpPr txBox="1"/>
-          <p:nvPr/>
-        </p:nvSpPr>
-        <p:spPr>
-          <a:xfrm>
-            <a:off x="5676900" y="552450"/>
-            <a:ext cx="838200" cy="123825"/>
-          </a:xfrm>
-          <a:prstGeom prst="rect">
-            <a:avLst/>
-          </a:prstGeom>
-          <a:noFill/>
-        </p:spPr>
-        <p:txBody>
-          <a:bodyPr wrap="none" anchor="t" lIns="0" rIns="0" tIns="0" bIns="0">
-            <a:noAutofit/>
-          </a:bodyPr>
-          <a:lstStyle/>
-          <a:p>
-            <a:pPr algn="ctr"/>
-            <a:r>
-              <a:rPr sz="1350" b="0" i="0">
-                <a:solidFill>
-                  <a:srgbClr val="6E6E73"/>
-                </a:solidFill>
-                <a:latin typeface="Roboto"/>
-              </a:rPr>
-              <a:t>SERIES A</a:t>
-            </a:r>
-          </a:p>
-        </p:txBody>
-      </p:sp>
-      <p:sp>
-        <p:nvSpPr>
-          <p:cNvPr id="5" name="TextBox 4"/>
-          <p:cNvSpPr txBox="1"/>
-          <p:nvPr/>
-        </p:nvSpPr>
-        <p:spPr>
-          <a:xfrm>
-            <a:off x="10848975" y="552450"/>
-            <a:ext cx="581025" cy="133350"/>
-          </a:xfrm>
-          <a:prstGeom prst="rect">
-            <a:avLst/>
-          </a:prstGeom>
-          <a:noFill/>
-        </p:spPr>
-        <p:txBody>
-          <a:bodyPr wrap="none" anchor="t" lIns="0" rIns="0" tIns="0" bIns="0">
-            <a:noAutofit/>
-          </a:bodyPr>
-          <a:lstStyle/>
-          <a:p>
-            <a:pPr algn="r"/>
-            <a:r>
-              <a:rPr sz="1350" b="0" i="0">
-                <a:solidFill>
-                  <a:srgbClr val="6E6E73"/>
-                </a:solidFill>
-                <a:latin typeface="Roboto"/>
-              </a:rPr>
-              <a:t>01 / 10</a:t>
-            </a:r>
-          </a:p>
-        </p:txBody>
-      </p:sp>
-      <p:sp>
-        <p:nvSpPr>
-          <p:cNvPr id="6" name="Rectangle 5"/>
+          <p:cNvPr id="3" name="Rectangle 2"/>
           <p:cNvSpPr/>
           <p:nvPr/>
         </p:nvSpPr>
         <p:spPr>
           <a:xfrm>
-            <a:off x="762000" y="914400"/>
-            <a:ext cx="10668000" cy="9525"/>
-          </a:xfrm>
-          <a:prstGeom prst="rect">
-            <a:avLst/>
-          </a:prstGeom>
-          <a:solidFill>
-            <a:srgbClr val="D2D2D7"/>
-          </a:solidFill>
-          <a:ln>
-            <a:noFill/>
-          </a:ln>
-          <a:effectLst/>
-        </p:spPr>
-        <p:style>
-          <a:lnRef idx="1">
-            <a:schemeClr val="accent1"/>
-          </a:lnRef>
-          <a:fillRef idx="3">
-            <a:schemeClr val="accent1"/>
-          </a:fillRef>
-          <a:effectRef idx="2">
-            <a:schemeClr val="accent1"/>
-          </a:effectRef>
-          <a:fontRef idx="minor">
-            <a:schemeClr val="lt1"/>
-          </a:fontRef>
-        </p:style>
-        <p:txBody>
-          <a:bodyPr rtlCol="0" anchor="ctr"/>
-          <a:lstStyle/>
-          <a:p>
-            <a:pPr algn="ctr"/>
-          </a:p>
-        </p:txBody>
-      </p:sp>
-      <p:sp>
-        <p:nvSpPr>
-          <p:cNvPr id="7" name="TextBox 6"/>
-          <p:cNvSpPr txBox="1"/>
-          <p:nvPr/>
-        </p:nvSpPr>
-        <p:spPr>
-          <a:xfrm>
-            <a:off x="914400" y="1714500"/>
-            <a:ext cx="6562725" cy="1981200"/>
-          </a:xfrm>
-          <a:prstGeom prst="rect">
-            <a:avLst/>
-          </a:prstGeom>
-          <a:noFill/>
-        </p:spPr>
-        <p:txBody>
-          <a:bodyPr wrap="none" anchor="t" lIns="0" rIns="0" tIns="0" bIns="0">
-            <a:noAutofit/>
-          </a:bodyPr>
-          <a:lstStyle/>
-          <a:p>
-            <a:pPr algn="l">
-              <a:lnSpc>
-                <a:spcPts val="5850"/>
-              </a:lnSpc>
-            </a:pPr>
-            <a:r>
-              <a:rPr sz="5850" b="0" i="0">
-                <a:solidFill>
-                  <a:srgbClr val="1D1D1F"/>
-                </a:solidFill>
-                <a:latin typeface="Roboto"/>
-              </a:rPr>
-              <a:t>Know what changed.</a:t>
-            </a:r>
-          </a:p>
-          <a:p>
-            <a:pPr algn="l">
-              <a:lnSpc>
-                <a:spcPts val="5850"/>
-              </a:lnSpc>
-            </a:pPr>
-            <a:r>
-              <a:rPr sz="5850" b="0" i="0">
-                <a:solidFill>
-                  <a:srgbClr val="1D1D1F"/>
-                </a:solidFill>
-                <a:latin typeface="Roboto"/>
-              </a:rPr>
-              <a:t>Decide what to do</a:t>
-            </a:r>
-          </a:p>
-          <a:p>
-            <a:pPr algn="l">
-              <a:lnSpc>
-                <a:spcPts val="5850"/>
-              </a:lnSpc>
-            </a:pPr>
-            <a:r>
-              <a:rPr sz="5850" b="0" i="0">
-                <a:solidFill>
-                  <a:srgbClr val="1D1D1F"/>
-                </a:solidFill>
-                <a:latin typeface="Roboto"/>
-              </a:rPr>
-              <a:t>next.</a:t>
-            </a:r>
-          </a:p>
-        </p:txBody>
-      </p:sp>
-      <p:sp>
-        <p:nvSpPr>
-          <p:cNvPr id="8" name="TextBox 7"/>
-          <p:cNvSpPr txBox="1"/>
-          <p:nvPr/>
-        </p:nvSpPr>
-        <p:spPr>
-          <a:xfrm>
-            <a:off x="952500" y="4095750"/>
-            <a:ext cx="5572125" cy="600075"/>
-          </a:xfrm>
-          <a:prstGeom prst="rect">
-            <a:avLst/>
-          </a:prstGeom>
-          <a:noFill/>
-        </p:spPr>
-        <p:txBody>
-          <a:bodyPr wrap="none" anchor="t" lIns="0" rIns="0" tIns="0" bIns="0">
-            <a:noAutofit/>
-          </a:bodyPr>
-          <a:lstStyle/>
-          <a:p>
-            <a:pPr algn="l">
-              <a:lnSpc>
-                <a:spcPts val="2775"/>
-              </a:lnSpc>
-            </a:pPr>
-            <a:r>
-              <a:rPr sz="2025" b="0" i="0">
-                <a:solidFill>
-                  <a:srgbClr val="6E6E73"/>
-                </a:solidFill>
-                <a:latin typeface="Roboto"/>
-              </a:rPr>
-              <a:t>Vela turns product data into an explained, owned</a:t>
-            </a:r>
-          </a:p>
-          <a:p>
-            <a:pPr algn="l">
-              <a:lnSpc>
-                <a:spcPts val="2775"/>
-              </a:lnSpc>
-            </a:pPr>
-            <a:r>
-              <a:rPr sz="2025" b="0" i="0">
-                <a:solidFill>
-                  <a:srgbClr val="6E6E73"/>
-                </a:solidFill>
-                <a:latin typeface="Roboto"/>
-              </a:rPr>
-              <a:t>decision — before the moment passes.</a:t>
-            </a:r>
-          </a:p>
-        </p:txBody>
-      </p:sp>
-      <p:sp>
-        <p:nvSpPr>
-          <p:cNvPr id="9" name="Oval 8"/>
-          <p:cNvSpPr/>
-          <p:nvPr/>
-        </p:nvSpPr>
-        <p:spPr>
-          <a:xfrm>
-            <a:off x="7648575" y="1143000"/>
-            <a:ext cx="4476750" cy="4476750"/>
-          </a:xfrm>
-          <a:prstGeom prst="ellipse">
+            <a:off x="8953500" y="0"/>
+            <a:ext cx="3238500" cy="6858000"/>
+          </a:xfrm>
+          <a:prstGeom prst="rect">
             <a:avLst/>
           </a:prstGeom>
           <a:solidFill>
@@ -3462,14 +3187,229 @@
       </p:sp>
       <p:sp>
         <p:nvSpPr>
-          <p:cNvPr id="10" name="Rectangle 9"/>
+          <p:cNvPr id="4" name="TextBox 3"/>
+          <p:cNvSpPr txBox="1"/>
+          <p:nvPr/>
+        </p:nvSpPr>
+        <p:spPr>
+          <a:xfrm>
+            <a:off x="762000" y="523875"/>
+            <a:ext cx="542925" cy="123825"/>
+          </a:xfrm>
+          <a:prstGeom prst="rect">
+            <a:avLst/>
+          </a:prstGeom>
+          <a:noFill/>
+        </p:spPr>
+        <p:txBody>
+          <a:bodyPr wrap="none" anchor="t" lIns="0" rIns="0" tIns="0" bIns="0">
+            <a:noAutofit/>
+          </a:bodyPr>
+          <a:lstStyle/>
+          <a:p>
+            <a:pPr algn="l"/>
+            <a:r>
+              <a:rPr sz="1350" b="1" i="0">
+                <a:solidFill>
+                  <a:srgbClr val="0066CC"/>
+                </a:solidFill>
+                <a:latin typeface="Roboto"/>
+              </a:rPr>
+              <a:t>VELA</a:t>
+            </a:r>
+          </a:p>
+        </p:txBody>
+      </p:sp>
+      <p:sp>
+        <p:nvSpPr>
+          <p:cNvPr id="5" name="TextBox 4"/>
+          <p:cNvSpPr txBox="1"/>
+          <p:nvPr/>
+        </p:nvSpPr>
+        <p:spPr>
+          <a:xfrm>
+            <a:off x="6600825" y="552450"/>
+            <a:ext cx="1590675" cy="123825"/>
+          </a:xfrm>
+          <a:prstGeom prst="rect">
+            <a:avLst/>
+          </a:prstGeom>
+          <a:noFill/>
+        </p:spPr>
+        <p:txBody>
+          <a:bodyPr wrap="none" anchor="t" lIns="0" rIns="0" tIns="0" bIns="0">
+            <a:noAutofit/>
+          </a:bodyPr>
+          <a:lstStyle/>
+          <a:p>
+            <a:pPr algn="r"/>
+            <a:r>
+              <a:rPr sz="1350" b="0" i="0">
+                <a:solidFill>
+                  <a:srgbClr val="6E6E73"/>
+                </a:solidFill>
+                <a:latin typeface="Roboto"/>
+              </a:rPr>
+              <a:t>SERIES A  ·  2026</a:t>
+            </a:r>
+          </a:p>
+        </p:txBody>
+      </p:sp>
+      <p:sp>
+        <p:nvSpPr>
+          <p:cNvPr id="6" name="TextBox 5"/>
+          <p:cNvSpPr txBox="1"/>
+          <p:nvPr/>
+        </p:nvSpPr>
+        <p:spPr>
+          <a:xfrm>
+            <a:off x="762000" y="1381125"/>
+            <a:ext cx="4010025" cy="1657350"/>
+          </a:xfrm>
+          <a:prstGeom prst="rect">
+            <a:avLst/>
+          </a:prstGeom>
+          <a:noFill/>
+        </p:spPr>
+        <p:txBody>
+          <a:bodyPr wrap="none" anchor="t" lIns="0" rIns="0" tIns="0" bIns="0">
+            <a:noAutofit/>
+          </a:bodyPr>
+          <a:lstStyle/>
+          <a:p>
+            <a:pPr algn="l">
+              <a:lnSpc>
+                <a:spcPts val="6450"/>
+              </a:lnSpc>
+            </a:pPr>
+            <a:r>
+              <a:rPr sz="6900" b="0" i="0">
+                <a:solidFill>
+                  <a:srgbClr val="1D1D1F"/>
+                </a:solidFill>
+                <a:latin typeface="Roboto"/>
+              </a:rPr>
+              <a:t>Know what</a:t>
+            </a:r>
+          </a:p>
+          <a:p>
+            <a:pPr algn="l">
+              <a:lnSpc>
+                <a:spcPts val="6450"/>
+              </a:lnSpc>
+            </a:pPr>
+            <a:r>
+              <a:rPr sz="6900" b="0" i="0">
+                <a:solidFill>
+                  <a:srgbClr val="1D1D1F"/>
+                </a:solidFill>
+                <a:latin typeface="Roboto"/>
+              </a:rPr>
+              <a:t>changed.</a:t>
+            </a:r>
+          </a:p>
+        </p:txBody>
+      </p:sp>
+      <p:sp>
+        <p:nvSpPr>
+          <p:cNvPr id="7" name="TextBox 6"/>
+          <p:cNvSpPr txBox="1"/>
+          <p:nvPr/>
+        </p:nvSpPr>
+        <p:spPr>
+          <a:xfrm>
+            <a:off x="819150" y="3476625"/>
+            <a:ext cx="4257675" cy="352425"/>
+          </a:xfrm>
+          <a:prstGeom prst="rect">
+            <a:avLst/>
+          </a:prstGeom>
+          <a:noFill/>
+        </p:spPr>
+        <p:txBody>
+          <a:bodyPr wrap="none" anchor="t" lIns="0" rIns="0" tIns="0" bIns="0">
+            <a:noAutofit/>
+          </a:bodyPr>
+          <a:lstStyle/>
+          <a:p>
+            <a:pPr algn="l"/>
+            <a:r>
+              <a:rPr sz="2925" b="0" i="0">
+                <a:solidFill>
+                  <a:srgbClr val="0066CC"/>
+                </a:solidFill>
+                <a:latin typeface="Roboto"/>
+              </a:rPr>
+              <a:t>Decide what happens next.</a:t>
+            </a:r>
+          </a:p>
+        </p:txBody>
+      </p:sp>
+      <p:sp>
+        <p:nvSpPr>
+          <p:cNvPr id="8" name="TextBox 7"/>
+          <p:cNvSpPr txBox="1"/>
+          <p:nvPr/>
+        </p:nvSpPr>
+        <p:spPr>
+          <a:xfrm>
+            <a:off x="819150" y="4333875"/>
+            <a:ext cx="6124575" cy="523875"/>
+          </a:xfrm>
+          <a:prstGeom prst="rect">
+            <a:avLst/>
+          </a:prstGeom>
+          <a:noFill/>
+        </p:spPr>
+        <p:txBody>
+          <a:bodyPr wrap="none" anchor="t" lIns="0" rIns="0" tIns="0" bIns="0">
+            <a:noAutofit/>
+          </a:bodyPr>
+          <a:lstStyle/>
+          <a:p>
+            <a:pPr algn="l">
+              <a:lnSpc>
+                <a:spcPts val="2400"/>
+              </a:lnSpc>
+            </a:pPr>
+            <a:r>
+              <a:rPr sz="1800" b="0" i="0">
+                <a:solidFill>
+                  <a:srgbClr val="6E6E73"/>
+                </a:solidFill>
+                <a:latin typeface="Roboto"/>
+              </a:rPr>
+              <a:t>Vela turns product data into an explained, owned decision —</a:t>
+            </a:r>
+          </a:p>
+          <a:p>
+            <a:pPr algn="l">
+              <a:lnSpc>
+                <a:spcPts val="2400"/>
+              </a:lnSpc>
+            </a:pPr>
+            <a:r>
+              <a:rPr sz="1800" b="0" i="0">
+                <a:solidFill>
+                  <a:srgbClr val="6E6E73"/>
+                </a:solidFill>
+                <a:latin typeface="Roboto"/>
+              </a:rPr>
+              <a:t>before the moment passes.</a:t>
+            </a:r>
+          </a:p>
+        </p:txBody>
+      </p:sp>
+      <p:sp>
+        <p:nvSpPr>
+          <p:cNvPr id="9" name="Rectangle 8"/>
           <p:cNvSpPr/>
           <p:nvPr/>
         </p:nvSpPr>
         <p:spPr>
           <a:xfrm>
-            <a:off x="9239250" y="2381250"/>
-            <a:ext cx="1714500" cy="76200"/>
+            <a:off x="9334500" y="1619250"/>
+            <a:ext cx="1123950" cy="57150"/>
           </a:xfrm>
           <a:prstGeom prst="rect">
             <a:avLst/>
@@ -3506,14 +3446,14 @@
       </p:sp>
       <p:sp>
         <p:nvSpPr>
-          <p:cNvPr id="11" name="Rectangle 10"/>
+          <p:cNvPr id="10" name="Rectangle 9"/>
           <p:cNvSpPr/>
           <p:nvPr/>
         </p:nvSpPr>
         <p:spPr>
           <a:xfrm>
-            <a:off x="9239250" y="3048000"/>
-            <a:ext cx="1104900" cy="47625"/>
+            <a:off x="9334500" y="2257425"/>
+            <a:ext cx="1809750" cy="57150"/>
           </a:xfrm>
           <a:prstGeom prst="rect">
             <a:avLst/>
@@ -3550,14 +3490,14 @@
       </p:sp>
       <p:sp>
         <p:nvSpPr>
-          <p:cNvPr id="12" name="Rectangle 11"/>
+          <p:cNvPr id="11" name="Rectangle 10"/>
           <p:cNvSpPr/>
           <p:nvPr/>
         </p:nvSpPr>
         <p:spPr>
           <a:xfrm>
-            <a:off x="9239250" y="3714750"/>
-            <a:ext cx="2133600" cy="47625"/>
+            <a:off x="9334500" y="2895600"/>
+            <a:ext cx="819150" cy="57150"/>
           </a:xfrm>
           <a:prstGeom prst="rect">
             <a:avLst/>
@@ -3594,14 +3534,14 @@
       </p:sp>
       <p:sp>
         <p:nvSpPr>
-          <p:cNvPr id="13" name="Rectangle 12"/>
+          <p:cNvPr id="12" name="Rectangle 11"/>
           <p:cNvSpPr/>
           <p:nvPr/>
         </p:nvSpPr>
         <p:spPr>
           <a:xfrm>
-            <a:off x="9239250" y="4381500"/>
-            <a:ext cx="1409700" cy="47625"/>
+            <a:off x="9334500" y="3533775"/>
+            <a:ext cx="2190750" cy="57150"/>
           </a:xfrm>
           <a:prstGeom prst="rect">
             <a:avLst/>
@@ -3638,14 +3578,58 @@
       </p:sp>
       <p:sp>
         <p:nvSpPr>
+          <p:cNvPr id="13" name="Rectangle 12"/>
+          <p:cNvSpPr/>
+          <p:nvPr/>
+        </p:nvSpPr>
+        <p:spPr>
+          <a:xfrm>
+            <a:off x="9334500" y="4171950"/>
+            <a:ext cx="1466850" cy="57150"/>
+          </a:xfrm>
+          <a:prstGeom prst="rect">
+            <a:avLst/>
+          </a:prstGeom>
+          <a:solidFill>
+            <a:srgbClr val="FFFFFF"/>
+          </a:solidFill>
+          <a:ln>
+            <a:noFill/>
+          </a:ln>
+          <a:effectLst/>
+        </p:spPr>
+        <p:style>
+          <a:lnRef idx="1">
+            <a:schemeClr val="accent1"/>
+          </a:lnRef>
+          <a:fillRef idx="3">
+            <a:schemeClr val="accent1"/>
+          </a:fillRef>
+          <a:effectRef idx="2">
+            <a:schemeClr val="accent1"/>
+          </a:effectRef>
+          <a:fontRef idx="minor">
+            <a:schemeClr val="lt1"/>
+          </a:fontRef>
+        </p:style>
+        <p:txBody>
+          <a:bodyPr rtlCol="0" anchor="ctr"/>
+          <a:lstStyle/>
+          <a:p>
+            <a:pPr algn="ctr"/>
+          </a:p>
+        </p:txBody>
+      </p:sp>
+      <p:sp>
+        <p:nvSpPr>
           <p:cNvPr id="14" name="TextBox 13"/>
           <p:cNvSpPr txBox="1"/>
           <p:nvPr/>
         </p:nvSpPr>
         <p:spPr>
           <a:xfrm>
-            <a:off x="952500" y="5953125"/>
-            <a:ext cx="3314700" cy="190500"/>
+            <a:off x="10086975" y="5095875"/>
+            <a:ext cx="1076325" cy="723900"/>
           </a:xfrm>
           <a:prstGeom prst="rect">
             <a:avLst/>
@@ -3658,15 +3642,15 @@
           </a:bodyPr>
           <a:lstStyle/>
           <a:p>
-            <a:pPr algn="l"/>
-            <a:r>
-              <a:rPr sz="1500" b="0" i="0">
-                <a:solidFill>
-                  <a:srgbClr val="6E6E73"/>
-                </a:solidFill>
-                <a:latin typeface="Roboto"/>
-              </a:rPr>
-              <a:t>Decision intelligence for product teams</a:t>
+            <a:pPr algn="r"/>
+            <a:r>
+              <a:rPr sz="7800" b="0" i="0">
+                <a:solidFill>
+                  <a:srgbClr val="FFFFFF"/>
+                </a:solidFill>
+                <a:latin typeface="Roboto"/>
+              </a:rPr>
+              <a:t>01</a:t>
             </a:r>
           </a:p>
         </p:txBody>
@@ -3679,8 +3663,8 @@
         </p:nvSpPr>
         <p:spPr>
           <a:xfrm>
-            <a:off x="7000875" y="5953125"/>
-            <a:ext cx="4276725" cy="123825"/>
+            <a:off x="762000" y="6096000"/>
+            <a:ext cx="5638800" cy="123825"/>
           </a:xfrm>
           <a:prstGeom prst="rect">
             <a:avLst/>
@@ -3693,7 +3677,7 @@
           </a:bodyPr>
           <a:lstStyle/>
           <a:p>
-            <a:pPr algn="r"/>
+            <a:pPr algn="l"/>
             <a:r>
               <a:rPr sz="1350" b="0" i="0">
                 <a:solidFill>
@@ -3701,7 +3685,7 @@
                 </a:solidFill>
                 <a:latin typeface="Roboto"/>
               </a:rPr>
-              <a:t>CONFIDENTIAL  ·  ILLUSTRATIVE COMPANY DATA</a:t>
+              <a:t>DECISION INTELLIGENCE FOR PRODUCT TEAMS  ·  CONFIDENTIAL</a:t>
             </a:r>
           </a:p>
         </p:txBody>
@@ -3720,26 +3704,114 @@
               <p:cTn id="2" dur="indefinite" nodeType="mainSeq">
                 <p:childTnLst>
                   <p:par>
-                    <p:cTn id="10" fill="hold">
+                    <p:cTn id="12" fill="hold">
                       <p:stCondLst>
                         <p:cond delay="indefinite"/>
                       </p:stCondLst>
                       <p:childTnLst>
                         <p:par>
-                          <p:cTn id="11" fill="hold">
+                          <p:cTn id="13" fill="hold">
                             <p:stCondLst>
                               <p:cond delay="0"/>
                             </p:stCondLst>
                             <p:childTnLst>
                               <p:par>
-                                <p:cTn id="12" presetID="10" presetClass="entr" presetSubtype="0" fill="hold" grpId="0" nodeType="clickEffect">
+                                <p:cTn id="14" presetID="22" presetClass="entr" presetSubtype="0" fill="hold" grpId="0" nodeType="clickEffect">
                                   <p:stCondLst>
                                     <p:cond delay="0"/>
                                   </p:stCondLst>
                                   <p:childTnLst>
                                     <p:set>
                                       <p:cBhvr>
-                                        <p:cTn id="13" dur="1" fill="hold">
+                                        <p:cTn id="15" dur="1" fill="hold">
+                                          <p:stCondLst>
+                                            <p:cond delay="0"/>
+                                          </p:stCondLst>
+                                        </p:cTn>
+                                        <p:tgtEl>
+                                          <p:spTgt spid="3"/>
+                                        </p:tgtEl>
+                                        <p:attrNameLst>
+                                          <p:attrName>style.visibility</p:attrName>
+                                        </p:attrNameLst>
+                                      </p:cBhvr>
+                                      <p:to>
+                                        <p:strVal val="visible"/>
+                                      </p:to>
+                                    </p:set>
+                                    <p:animEffect transition="in" filter="wipe(left)">
+                                      <p:cBhvr>
+                                        <p:cTn id="16" dur="450"/>
+                                        <p:tgtEl>
+                                          <p:spTgt spid="3"/>
+                                        </p:tgtEl>
+                                      </p:cBhvr>
+                                    </p:animEffect>
+                                  </p:childTnLst>
+                                </p:cTn>
+                              </p:par>
+                            </p:childTnLst>
+                          </p:cTn>
+                        </p:par>
+                      </p:childTnLst>
+                    </p:cTn>
+                  </p:par>
+                  <p:par>
+                    <p:cTn id="17" fill="hold">
+                      <p:stCondLst>
+                        <p:cond delay="indefinite"/>
+                      </p:stCondLst>
+                      <p:childTnLst>
+                        <p:par>
+                          <p:cTn id="18" fill="hold">
+                            <p:stCondLst>
+                              <p:cond delay="0"/>
+                            </p:stCondLst>
+                            <p:childTnLst>
+                              <p:par>
+                                <p:cTn id="19" presetID="10" presetClass="entr" presetSubtype="0" fill="hold" grpId="0" nodeType="clickEffect">
+                                  <p:stCondLst>
+                                    <p:cond delay="0"/>
+                                  </p:stCondLst>
+                                  <p:childTnLst>
+                                    <p:set>
+                                      <p:cBhvr>
+                                        <p:cTn id="20" dur="1" fill="hold">
+                                          <p:stCondLst>
+                                            <p:cond delay="0"/>
+                                          </p:stCondLst>
+                                        </p:cTn>
+                                        <p:tgtEl>
+                                          <p:spTgt spid="6"/>
+                                        </p:tgtEl>
+                                        <p:attrNameLst>
+                                          <p:attrName>style.visibility</p:attrName>
+                                        </p:attrNameLst>
+                                      </p:cBhvr>
+                                      <p:to>
+                                        <p:strVal val="visible"/>
+                                      </p:to>
+                                    </p:set>
+                                    <p:animEffect transition="in" filter="fade">
+                                      <p:cBhvr>
+                                        <p:cTn id="21" dur="450"/>
+                                        <p:tgtEl>
+                                          <p:spTgt spid="6"/>
+                                        </p:tgtEl>
+                                      </p:cBhvr>
+                                    </p:animEffect>
+                                  </p:childTnLst>
+                                </p:cTn>
+                              </p:par>
+                              <p:par>
+                                <p:cTn id="22" presetID="10" presetClass="entr" presetSubtype="0" fill="hold" grpId="0" nodeType="afterEffect">
+                                  <p:stCondLst>
+                                    <p:cond delay="0"/>
+                                  </p:stCondLst>
+                                  <p:childTnLst>
+                                    <p:set>
+                                      <p:cBhvr>
+                                        <p:cTn id="23" dur="1" fill="hold">
                                           <p:stCondLst>
                                             <p:cond delay="0"/>
                                           </p:stCondLst>
@@ -3757,7 +3829,7 @@
                                     </p:set>
                                     <p:animEffect transition="in" filter="fade">
                                       <p:cBhvr>
-                                        <p:cTn id="14" dur="450"/>
+                                        <p:cTn id="24" dur="350"/>
                                         <p:tgtEl>
                                           <p:spTgt spid="7"/>
                                         </p:tgtEl>
@@ -3767,20 +3839,20 @@
                                 </p:cTn>
                               </p:par>
                               <p:par>
-                                <p:cTn id="15" presetID="10" presetClass="entr" presetSubtype="0" fill="hold" grpId="0" nodeType="afterEffect">
+                                <p:cTn id="25" presetID="22" presetClass="entr" presetSubtype="0" fill="hold" grpId="0" nodeType="withEffect">
                                   <p:stCondLst>
                                     <p:cond delay="0"/>
                                   </p:stCondLst>
                                   <p:childTnLst>
                                     <p:set>
                                       <p:cBhvr>
-                                        <p:cTn id="16" dur="1" fill="hold">
+                                        <p:cTn id="26" dur="1" fill="hold">
                                           <p:stCondLst>
                                             <p:cond delay="0"/>
                                           </p:stCondLst>
                                         </p:cTn>
                                         <p:tgtEl>
-                                          <p:spTgt spid="8"/>
+                                          <p:spTgt spid="9"/>
                                         </p:tgtEl>
                                         <p:attrNameLst>
                                           <p:attrName>style.visibility</p:attrName>
@@ -3790,11 +3862,11 @@
                                         <p:strVal val="visible"/>
                                       </p:to>
                                     </p:set>
-                                    <p:animEffect transition="in" filter="fade">
+                                    <p:animEffect transition="in" filter="wipe(right)">
                                       <p:cBhvr>
-                                        <p:cTn id="17" dur="350"/>
+                                        <p:cTn id="27" dur="320"/>
                                         <p:tgtEl>
-                                          <p:spTgt spid="8"/>
+                                          <p:spTgt spid="9"/>
                                         </p:tgtEl>
                                       </p:cBhvr>
                                     </p:animEffect>
@@ -3802,14 +3874,14 @@
                                 </p:cTn>
                               </p:par>
                               <p:par>
-                                <p:cTn id="18" presetID="22" presetClass="entr" presetSubtype="0" fill="hold" grpId="0" nodeType="withEffect">
+                                <p:cTn id="28" presetID="22" presetClass="entr" presetSubtype="0" fill="hold" grpId="0" nodeType="withEffect">
                                   <p:stCondLst>
                                     <p:cond delay="0"/>
                                   </p:stCondLst>
                                   <p:childTnLst>
                                     <p:set>
                                       <p:cBhvr>
-                                        <p:cTn id="19" dur="1" fill="hold">
+                                        <p:cTn id="29" dur="1" fill="hold">
                                           <p:stCondLst>
                                             <p:cond delay="0"/>
                                           </p:stCondLst>
@@ -3827,7 +3899,7 @@
                                     </p:set>
                                     <p:animEffect transition="in" filter="wipe(right)">
                                       <p:cBhvr>
-                                        <p:cTn id="20" dur="320"/>
+                                        <p:cTn id="30" dur="320"/>
                                         <p:tgtEl>
                                           <p:spTgt spid="10"/>
                                         </p:tgtEl>
@@ -3837,14 +3909,14 @@
                                 </p:cTn>
                               </p:par>
                               <p:par>
-                                <p:cTn id="21" presetID="22" presetClass="entr" presetSubtype="0" fill="hold" grpId="0" nodeType="withEffect">
+                                <p:cTn id="31" presetID="22" presetClass="entr" presetSubtype="0" fill="hold" grpId="0" nodeType="withEffect">
                                   <p:stCondLst>
                                     <p:cond delay="0"/>
                                   </p:stCondLst>
                                   <p:childTnLst>
                                     <p:set>
                                       <p:cBhvr>
-                                        <p:cTn id="22" dur="1" fill="hold">
+                                        <p:cTn id="32" dur="1" fill="hold">
                                           <p:stCondLst>
                                             <p:cond delay="0"/>
                                           </p:stCondLst>
@@ -3862,7 +3934,7 @@
                                     </p:set>
                                     <p:animEffect transition="in" filter="wipe(right)">
                                       <p:cBhvr>
-                                        <p:cTn id="23" dur="320"/>
+                                        <p:cTn id="33" dur="320"/>
                                         <p:tgtEl>
                                           <p:spTgt spid="11"/>
                                         </p:tgtEl>
@@ -3872,14 +3944,14 @@
                                 </p:cTn>
                               </p:par>
                               <p:par>
-                                <p:cTn id="24" presetID="22" presetClass="entr" presetSubtype="0" fill="hold" grpId="0" nodeType="withEffect">
+                                <p:cTn id="34" presetID="22" presetClass="entr" presetSubtype="0" fill="hold" grpId="0" nodeType="withEffect">
                                   <p:stCondLst>
                                     <p:cond delay="0"/>
                                   </p:stCondLst>
                                   <p:childTnLst>
                                     <p:set>
                                       <p:cBhvr>
-                                        <p:cTn id="25" dur="1" fill="hold">
+                                        <p:cTn id="35" dur="1" fill="hold">
                                           <p:stCondLst>
                                             <p:cond delay="0"/>
                                           </p:stCondLst>
@@ -3897,7 +3969,7 @@
                                     </p:set>
                                     <p:animEffect transition="in" filter="wipe(right)">
                                       <p:cBhvr>
-                                        <p:cTn id="26" dur="320"/>
+                                        <p:cTn id="36" dur="320"/>
                                         <p:tgtEl>
                                           <p:spTgt spid="12"/>
                                         </p:tgtEl>
@@ -3907,14 +3979,14 @@
                                 </p:cTn>
                               </p:par>
                               <p:par>
-                                <p:cTn id="27" presetID="22" presetClass="entr" presetSubtype="0" fill="hold" grpId="0" nodeType="withEffect">
+                                <p:cTn id="37" presetID="22" presetClass="entr" presetSubtype="0" fill="hold" grpId="0" nodeType="withEffect">
                                   <p:stCondLst>
                                     <p:cond delay="0"/>
                                   </p:stCondLst>
                                   <p:childTnLst>
                                     <p:set>
                                       <p:cBhvr>
-                                        <p:cTn id="28" dur="1" fill="hold">
+                                        <p:cTn id="38" dur="1" fill="hold">
                                           <p:stCondLst>
                                             <p:cond delay="0"/>
                                           </p:stCondLst>
@@ -3932,7 +4004,7 @@
                                     </p:set>
                                     <p:animEffect transition="in" filter="wipe(right)">
                                       <p:cBhvr>
-                                        <p:cTn id="29" dur="320"/>
+                                        <p:cTn id="39" dur="320"/>
                                         <p:tgtEl>
                                           <p:spTgt spid="13"/>
                                         </p:tgtEl>
@@ -3978,7 +4050,7 @@
                         </p:stCondLst>
                       </p:cTn>
                       <p:tgtEl>
-                        <p:spTgt spid="7"/>
+                        <p:spTgt spid="3"/>
                       </p:tgtEl>
                       <p:attrNameLst>
                         <p:attrName>style.visibility</p:attrName>
@@ -3996,7 +4068,7 @@
                         </p:stCondLst>
                       </p:cTn>
                       <p:tgtEl>
-                        <p:spTgt spid="8"/>
+                        <p:spTgt spid="6"/>
                       </p:tgtEl>
                       <p:attrNameLst>
                         <p:attrName>style.visibility</p:attrName>
@@ -4014,7 +4086,7 @@
                         </p:stCondLst>
                       </p:cTn>
                       <p:tgtEl>
-                        <p:spTgt spid="10"/>
+                        <p:spTgt spid="7"/>
                       </p:tgtEl>
                       <p:attrNameLst>
                         <p:attrName>style.visibility</p:attrName>
@@ -4032,7 +4104,7 @@
                         </p:stCondLst>
                       </p:cTn>
                       <p:tgtEl>
-                        <p:spTgt spid="11"/>
+                        <p:spTgt spid="9"/>
                       </p:tgtEl>
                       <p:attrNameLst>
                         <p:attrName>style.visibility</p:attrName>
@@ -4050,6 +4122,42 @@
                         </p:stCondLst>
                       </p:cTn>
                       <p:tgtEl>
+                        <p:spTgt spid="10"/>
+                      </p:tgtEl>
+                      <p:attrNameLst>
+                        <p:attrName>style.visibility</p:attrName>
+                      </p:attrNameLst>
+                    </p:cBhvr>
+                    <p:to>
+                      <p:strVal val="hidden"/>
+                    </p:to>
+                  </p:set>
+                  <p:set>
+                    <p:cBhvr>
+                      <p:cTn id="9" dur="1" fill="hold">
+                        <p:stCondLst>
+                          <p:cond delay="0"/>
+                        </p:stCondLst>
+                      </p:cTn>
+                      <p:tgtEl>
+                        <p:spTgt spid="11"/>
+                      </p:tgtEl>
+                      <p:attrNameLst>
+                        <p:attrName>style.visibility</p:attrName>
+                      </p:attrNameLst>
+                    </p:cBhvr>
+                    <p:to>
+                      <p:strVal val="hidden"/>
+                    </p:to>
+                  </p:set>
+                  <p:set>
+                    <p:cBhvr>
+                      <p:cTn id="10" dur="1" fill="hold">
+                        <p:stCondLst>
+                          <p:cond delay="0"/>
+                        </p:stCondLst>
+                      </p:cTn>
+                      <p:tgtEl>
                         <p:spTgt spid="12"/>
                       </p:tgtEl>
                       <p:attrNameLst>
@@ -4062,7 +4170,7 @@
                   </p:set>
                   <p:set>
                     <p:cBhvr>
-                      <p:cTn id="9" dur="1" fill="hold">
+                      <p:cTn id="11" dur="1" fill="hold">
                         <p:stCondLst>
                           <p:cond delay="0"/>
                         </p:stCondLst>
@@ -4114,7 +4222,7 @@
             <a:avLst/>
           </a:prstGeom>
           <a:solidFill>
-            <a:srgbClr val="F5F5F7"/>
+            <a:srgbClr val="1D1D1F"/>
           </a:solidFill>
           <a:ln>
             <a:noFill/>
@@ -4145,125 +4253,20 @@
       </p:sp>
       <p:sp>
         <p:nvSpPr>
-          <p:cNvPr id="3" name="TextBox 2"/>
-          <p:cNvSpPr txBox="1"/>
-          <p:nvPr/>
-        </p:nvSpPr>
-        <p:spPr>
-          <a:xfrm>
-            <a:off x="762000" y="523875"/>
-            <a:ext cx="542925" cy="123825"/>
-          </a:xfrm>
-          <a:prstGeom prst="rect">
-            <a:avLst/>
-          </a:prstGeom>
-          <a:noFill/>
-        </p:spPr>
-        <p:txBody>
-          <a:bodyPr wrap="none" anchor="t" lIns="0" rIns="0" tIns="0" bIns="0">
-            <a:noAutofit/>
-          </a:bodyPr>
-          <a:lstStyle/>
-          <a:p>
-            <a:pPr algn="l"/>
-            <a:r>
-              <a:rPr sz="1350" b="1" i="0">
-                <a:solidFill>
-                  <a:srgbClr val="0066CC"/>
-                </a:solidFill>
-                <a:latin typeface="Roboto"/>
-              </a:rPr>
-              <a:t>VELA</a:t>
-            </a:r>
-          </a:p>
-        </p:txBody>
-      </p:sp>
-      <p:sp>
-        <p:nvSpPr>
-          <p:cNvPr id="4" name="TextBox 3"/>
-          <p:cNvSpPr txBox="1"/>
-          <p:nvPr/>
-        </p:nvSpPr>
-        <p:spPr>
-          <a:xfrm>
-            <a:off x="5524500" y="552450"/>
-            <a:ext cx="1143000" cy="123825"/>
-          </a:xfrm>
-          <a:prstGeom prst="rect">
-            <a:avLst/>
-          </a:prstGeom>
-          <a:noFill/>
-        </p:spPr>
-        <p:txBody>
-          <a:bodyPr wrap="none" anchor="t" lIns="0" rIns="0" tIns="0" bIns="0">
-            <a:noAutofit/>
-          </a:bodyPr>
-          <a:lstStyle/>
-          <a:p>
-            <a:pPr algn="ctr"/>
-            <a:r>
-              <a:rPr sz="1350" b="0" i="0">
-                <a:solidFill>
-                  <a:srgbClr val="6E6E73"/>
-                </a:solidFill>
-                <a:latin typeface="Roboto"/>
-              </a:rPr>
-              <a:t>TEAM + ASK</a:t>
-            </a:r>
-          </a:p>
-        </p:txBody>
-      </p:sp>
-      <p:sp>
-        <p:nvSpPr>
-          <p:cNvPr id="5" name="TextBox 4"/>
-          <p:cNvSpPr txBox="1"/>
-          <p:nvPr/>
-        </p:nvSpPr>
-        <p:spPr>
-          <a:xfrm>
-            <a:off x="10848975" y="552450"/>
-            <a:ext cx="581025" cy="133350"/>
-          </a:xfrm>
-          <a:prstGeom prst="rect">
-            <a:avLst/>
-          </a:prstGeom>
-          <a:noFill/>
-        </p:spPr>
-        <p:txBody>
-          <a:bodyPr wrap="none" anchor="t" lIns="0" rIns="0" tIns="0" bIns="0">
-            <a:noAutofit/>
-          </a:bodyPr>
-          <a:lstStyle/>
-          <a:p>
-            <a:pPr algn="r"/>
-            <a:r>
-              <a:rPr sz="1350" b="0" i="0">
-                <a:solidFill>
-                  <a:srgbClr val="6E6E73"/>
-                </a:solidFill>
-                <a:latin typeface="Roboto"/>
-              </a:rPr>
-              <a:t>10 / 10</a:t>
-            </a:r>
-          </a:p>
-        </p:txBody>
-      </p:sp>
-      <p:sp>
-        <p:nvSpPr>
-          <p:cNvPr id="6" name="Rectangle 5"/>
+          <p:cNvPr id="3" name="Rectangle 2"/>
           <p:cNvSpPr/>
           <p:nvPr/>
         </p:nvSpPr>
         <p:spPr>
           <a:xfrm>
-            <a:off x="762000" y="914400"/>
-            <a:ext cx="10668000" cy="9525"/>
+            <a:off x="0" y="0"/>
+            <a:ext cx="4953000" cy="6858000"/>
           </a:xfrm>
           <a:prstGeom prst="rect">
             <a:avLst/>
           </a:prstGeom>
           <a:solidFill>
-            <a:srgbClr val="D2D2D7"/>
+            <a:srgbClr val="0066CC"/>
           </a:solidFill>
           <a:ln>
             <a:noFill/>
@@ -4294,14 +4297,14 @@
       </p:sp>
       <p:sp>
         <p:nvSpPr>
-          <p:cNvPr id="7" name="TextBox 6"/>
+          <p:cNvPr id="4" name="TextBox 3"/>
           <p:cNvSpPr txBox="1"/>
           <p:nvPr/>
         </p:nvSpPr>
         <p:spPr>
           <a:xfrm>
-            <a:off x="914400" y="1571625"/>
-            <a:ext cx="3933825" cy="1276350"/>
+            <a:off x="762000" y="523875"/>
+            <a:ext cx="542925" cy="123825"/>
           </a:xfrm>
           <a:prstGeom prst="rect">
             <a:avLst/>
@@ -4314,49 +4317,29 @@
           </a:bodyPr>
           <a:lstStyle/>
           <a:p>
-            <a:pPr algn="l">
-              <a:lnSpc>
-                <a:spcPts val="5700"/>
-              </a:lnSpc>
-            </a:pPr>
-            <a:r>
-              <a:rPr sz="5850" b="0" i="0">
-                <a:solidFill>
-                  <a:srgbClr val="1D1D1F"/>
-                </a:solidFill>
-                <a:latin typeface="Roboto"/>
-              </a:rPr>
-              <a:t>Raising $8M</a:t>
-            </a:r>
-          </a:p>
-          <a:p>
-            <a:pPr algn="l">
-              <a:lnSpc>
-                <a:spcPts val="5700"/>
-              </a:lnSpc>
-            </a:pPr>
-            <a:r>
-              <a:rPr sz="5850" b="0" i="0">
-                <a:solidFill>
-                  <a:srgbClr val="1D1D1F"/>
-                </a:solidFill>
-                <a:latin typeface="Roboto"/>
-              </a:rPr>
-              <a:t>Series A.</a:t>
-            </a:r>
-          </a:p>
-        </p:txBody>
-      </p:sp>
-      <p:sp>
-        <p:nvSpPr>
-          <p:cNvPr id="8" name="TextBox 7"/>
+            <a:pPr algn="l"/>
+            <a:r>
+              <a:rPr sz="1350" b="1" i="0">
+                <a:solidFill>
+                  <a:srgbClr val="FFFFFF"/>
+                </a:solidFill>
+                <a:latin typeface="Roboto"/>
+              </a:rPr>
+              <a:t>VELA</a:t>
+            </a:r>
+          </a:p>
+        </p:txBody>
+      </p:sp>
+      <p:sp>
+        <p:nvSpPr>
+          <p:cNvPr id="5" name="TextBox 4"/>
           <p:cNvSpPr txBox="1"/>
           <p:nvPr/>
         </p:nvSpPr>
         <p:spPr>
           <a:xfrm>
-            <a:off x="952500" y="3476625"/>
-            <a:ext cx="5162550" cy="447675"/>
+            <a:off x="666750" y="1428750"/>
+            <a:ext cx="2933700" cy="1428750"/>
           </a:xfrm>
           <a:prstGeom prst="rect">
             <a:avLst/>
@@ -4369,49 +4352,29 @@
           </a:bodyPr>
           <a:lstStyle/>
           <a:p>
-            <a:pPr algn="l">
-              <a:lnSpc>
-                <a:spcPts val="2100"/>
-              </a:lnSpc>
-            </a:pPr>
-            <a:r>
-              <a:rPr sz="1875" b="0" i="0">
-                <a:solidFill>
-                  <a:srgbClr val="6E6E73"/>
-                </a:solidFill>
-                <a:latin typeface="Roboto"/>
-              </a:rPr>
-              <a:t>24 months to $8M ARR and repeatable enterprise</a:t>
-            </a:r>
-          </a:p>
-          <a:p>
-            <a:pPr algn="l">
-              <a:lnSpc>
-                <a:spcPts val="2100"/>
-              </a:lnSpc>
-            </a:pPr>
-            <a:r>
-              <a:rPr sz="1875" b="0" i="0">
-                <a:solidFill>
-                  <a:srgbClr val="6E6E73"/>
-                </a:solidFill>
-                <a:latin typeface="Roboto"/>
-              </a:rPr>
-              <a:t>distribution.</a:t>
-            </a:r>
-          </a:p>
-        </p:txBody>
-      </p:sp>
-      <p:sp>
-        <p:nvSpPr>
-          <p:cNvPr id="9" name="TextBox 8"/>
+            <a:pPr algn="l"/>
+            <a:r>
+              <a:rPr sz="12000" b="0" i="0">
+                <a:solidFill>
+                  <a:srgbClr val="FFFFFF"/>
+                </a:solidFill>
+                <a:latin typeface="Roboto"/>
+              </a:rPr>
+              <a:t>$8M</a:t>
+            </a:r>
+          </a:p>
+        </p:txBody>
+      </p:sp>
+      <p:sp>
+        <p:nvSpPr>
+          <p:cNvPr id="6" name="TextBox 5"/>
           <p:cNvSpPr txBox="1"/>
           <p:nvPr/>
         </p:nvSpPr>
         <p:spPr>
           <a:xfrm>
-            <a:off x="952500" y="4333875"/>
-            <a:ext cx="1362075" cy="123825"/>
+            <a:off x="781050" y="3286125"/>
+            <a:ext cx="1323975" cy="190500"/>
           </a:xfrm>
           <a:prstGeom prst="rect">
             <a:avLst/>
@@ -4426,27 +4389,27 @@
           <a:p>
             <a:pPr algn="l"/>
             <a:r>
-              <a:rPr sz="1350" b="1" i="0">
-                <a:solidFill>
-                  <a:srgbClr val="0066CC"/>
-                </a:solidFill>
-                <a:latin typeface="Roboto"/>
-              </a:rPr>
-              <a:t>USE OF FUNDS</a:t>
-            </a:r>
-          </a:p>
-        </p:txBody>
-      </p:sp>
-      <p:sp>
-        <p:nvSpPr>
-          <p:cNvPr id="10" name="TextBox 9"/>
+              <a:rPr sz="2100" b="1" i="0">
+                <a:solidFill>
+                  <a:srgbClr val="FFFFFF"/>
+                </a:solidFill>
+                <a:latin typeface="Roboto"/>
+              </a:rPr>
+              <a:t>SERIES A</a:t>
+            </a:r>
+          </a:p>
+        </p:txBody>
+      </p:sp>
+      <p:sp>
+        <p:nvSpPr>
+          <p:cNvPr id="7" name="TextBox 6"/>
           <p:cNvSpPr txBox="1"/>
           <p:nvPr/>
         </p:nvSpPr>
         <p:spPr>
           <a:xfrm>
-            <a:off x="952500" y="4762500"/>
-            <a:ext cx="2609850" cy="914400"/>
+            <a:off x="781050" y="4048125"/>
+            <a:ext cx="2676525" cy="790575"/>
           </a:xfrm>
           <a:prstGeom prst="rect">
             <a:avLst/>
@@ -4461,107 +4424,63 @@
           <a:p>
             <a:pPr algn="l">
               <a:lnSpc>
-                <a:spcPts val="2775"/>
+                <a:spcPts val="2400"/>
               </a:lnSpc>
             </a:pPr>
             <a:r>
-              <a:rPr sz="1725" b="0" i="0">
-                <a:solidFill>
-                  <a:srgbClr val="1D1D1F"/>
-                </a:solidFill>
-                <a:latin typeface="Roboto"/>
-              </a:rPr>
-              <a:t>45%  Product + AI</a:t>
+              <a:rPr sz="1875" b="0" i="0">
+                <a:solidFill>
+                  <a:srgbClr val="D7E9FF"/>
+                </a:solidFill>
+                <a:latin typeface="Roboto"/>
+              </a:rPr>
+              <a:t>24 months to $8M ARR</a:t>
             </a:r>
           </a:p>
           <a:p>
             <a:pPr algn="l">
               <a:lnSpc>
-                <a:spcPts val="2775"/>
+                <a:spcPts val="2400"/>
               </a:lnSpc>
             </a:pPr>
             <a:r>
-              <a:rPr sz="1725" b="0" i="0">
-                <a:solidFill>
-                  <a:srgbClr val="1D1D1F"/>
-                </a:solidFill>
-                <a:latin typeface="Roboto"/>
-              </a:rPr>
-              <a:t>35%  Enterprise GTM</a:t>
+              <a:rPr sz="1875" b="0" i="0">
+                <a:solidFill>
+                  <a:srgbClr val="D7E9FF"/>
+                </a:solidFill>
+                <a:latin typeface="Roboto"/>
+              </a:rPr>
+              <a:t>and repeatable enterprise</a:t>
             </a:r>
           </a:p>
           <a:p>
             <a:pPr algn="l">
               <a:lnSpc>
-                <a:spcPts val="2775"/>
+                <a:spcPts val="2400"/>
               </a:lnSpc>
             </a:pPr>
             <a:r>
-              <a:rPr sz="1725" b="0" i="0">
-                <a:solidFill>
-                  <a:srgbClr val="1D1D1F"/>
-                </a:solidFill>
-                <a:latin typeface="Roboto"/>
-              </a:rPr>
-              <a:t>20%  Security + operations</a:t>
-            </a:r>
-          </a:p>
-        </p:txBody>
-      </p:sp>
-      <p:sp>
-        <p:nvSpPr>
-          <p:cNvPr id="11" name="Rectangle 10"/>
-          <p:cNvSpPr/>
-          <p:nvPr/>
-        </p:nvSpPr>
-        <p:spPr>
-          <a:xfrm>
-            <a:off x="6572250" y="1571625"/>
-            <a:ext cx="9525" cy="4191000"/>
-          </a:xfrm>
-          <a:prstGeom prst="rect">
-            <a:avLst/>
-          </a:prstGeom>
-          <a:solidFill>
-            <a:srgbClr val="D2D2D7"/>
-          </a:solidFill>
-          <a:ln>
-            <a:noFill/>
-          </a:ln>
-          <a:effectLst/>
-        </p:spPr>
-        <p:style>
-          <a:lnRef idx="1">
-            <a:schemeClr val="accent1"/>
-          </a:lnRef>
-          <a:fillRef idx="3">
-            <a:schemeClr val="accent1"/>
-          </a:fillRef>
-          <a:effectRef idx="2">
-            <a:schemeClr val="accent1"/>
-          </a:effectRef>
-          <a:fontRef idx="minor">
-            <a:schemeClr val="lt1"/>
-          </a:fontRef>
-        </p:style>
-        <p:txBody>
-          <a:bodyPr rtlCol="0" anchor="ctr"/>
-          <a:lstStyle/>
-          <a:p>
-            <a:pPr algn="ctr"/>
-          </a:p>
-        </p:txBody>
-      </p:sp>
-      <p:sp>
-        <p:nvSpPr>
-          <p:cNvPr id="12" name="TextBox 11"/>
+              <a:rPr sz="1875" b="0" i="0">
+                <a:solidFill>
+                  <a:srgbClr val="D7E9FF"/>
+                </a:solidFill>
+                <a:latin typeface="Roboto"/>
+              </a:rPr>
+              <a:t>distribution.</a:t>
+            </a:r>
+          </a:p>
+        </p:txBody>
+      </p:sp>
+      <p:sp>
+        <p:nvSpPr>
+          <p:cNvPr id="8" name="TextBox 7"/>
           <p:cNvSpPr txBox="1"/>
           <p:nvPr/>
         </p:nvSpPr>
         <p:spPr>
           <a:xfrm>
-            <a:off x="7143750" y="1666875"/>
-            <a:ext cx="1590675" cy="123825"/>
+            <a:off x="781050" y="5000625"/>
+            <a:ext cx="1362075" cy="123825"/>
           </a:xfrm>
           <a:prstGeom prst="rect">
             <a:avLst/>
@@ -4578,25 +4497,25 @@
             <a:r>
               <a:rPr sz="1350" b="1" i="0">
                 <a:solidFill>
-                  <a:srgbClr val="0066CC"/>
-                </a:solidFill>
-                <a:latin typeface="Roboto"/>
-              </a:rPr>
-              <a:t>FOUNDING TEAM</a:t>
-            </a:r>
-          </a:p>
-        </p:txBody>
-      </p:sp>
-      <p:sp>
-        <p:nvSpPr>
-          <p:cNvPr id="13" name="TextBox 12"/>
+                  <a:srgbClr val="D7E9FF"/>
+                </a:solidFill>
+                <a:latin typeface="Roboto"/>
+              </a:rPr>
+              <a:t>USE OF FUNDS</a:t>
+            </a:r>
+          </a:p>
+        </p:txBody>
+      </p:sp>
+      <p:sp>
+        <p:nvSpPr>
+          <p:cNvPr id="9" name="TextBox 8"/>
           <p:cNvSpPr txBox="1"/>
           <p:nvPr/>
         </p:nvSpPr>
         <p:spPr>
           <a:xfrm>
-            <a:off x="7143750" y="2333625"/>
-            <a:ext cx="1428750" cy="276225"/>
+            <a:off x="781050" y="5286375"/>
+            <a:ext cx="2352675" cy="819150"/>
           </a:xfrm>
           <a:prstGeom prst="rect">
             <a:avLst/>
@@ -4609,29 +4528,65 @@
           </a:bodyPr>
           <a:lstStyle/>
           <a:p>
-            <a:pPr algn="l"/>
-            <a:r>
-              <a:rPr sz="2250" b="0" i="0">
-                <a:solidFill>
-                  <a:srgbClr val="1D1D1F"/>
-                </a:solidFill>
-                <a:latin typeface="Roboto"/>
-              </a:rPr>
-              <a:t>Maya Chen</a:t>
-            </a:r>
-          </a:p>
-        </p:txBody>
-      </p:sp>
-      <p:sp>
-        <p:nvSpPr>
-          <p:cNvPr id="14" name="TextBox 13"/>
+            <a:pPr algn="l">
+              <a:lnSpc>
+                <a:spcPts val="2475"/>
+              </a:lnSpc>
+            </a:pPr>
+            <a:r>
+              <a:rPr sz="1575" b="0" i="0">
+                <a:solidFill>
+                  <a:srgbClr val="FFFFFF"/>
+                </a:solidFill>
+                <a:latin typeface="Roboto"/>
+              </a:rPr>
+              <a:t>45%  Product + AI</a:t>
+            </a:r>
+          </a:p>
+          <a:p>
+            <a:pPr algn="l">
+              <a:lnSpc>
+                <a:spcPts val="2475"/>
+              </a:lnSpc>
+            </a:pPr>
+            <a:r>
+              <a:rPr sz="1575" b="0" i="0">
+                <a:solidFill>
+                  <a:srgbClr val="FFFFFF"/>
+                </a:solidFill>
+                <a:latin typeface="Roboto"/>
+              </a:rPr>
+              <a:t>35%  Enterprise GTM</a:t>
+            </a:r>
+          </a:p>
+          <a:p>
+            <a:pPr algn="l">
+              <a:lnSpc>
+                <a:spcPts val="2475"/>
+              </a:lnSpc>
+            </a:pPr>
+            <a:r>
+              <a:rPr sz="1575" b="0" i="0">
+                <a:solidFill>
+                  <a:srgbClr val="FFFFFF"/>
+                </a:solidFill>
+                <a:latin typeface="Roboto"/>
+              </a:rPr>
+              <a:t>20%  Security + operations</a:t>
+            </a:r>
+          </a:p>
+        </p:txBody>
+      </p:sp>
+      <p:sp>
+        <p:nvSpPr>
+          <p:cNvPr id="10" name="TextBox 9"/>
           <p:cNvSpPr txBox="1"/>
           <p:nvPr/>
         </p:nvSpPr>
         <p:spPr>
           <a:xfrm>
-            <a:off x="7143750" y="2762250"/>
-            <a:ext cx="2609850" cy="171450"/>
+            <a:off x="5715000" y="1000125"/>
+            <a:ext cx="1590675" cy="123825"/>
           </a:xfrm>
           <a:prstGeom prst="rect">
             <a:avLst/>
@@ -4646,27 +4601,27 @@
           <a:p>
             <a:pPr algn="l"/>
             <a:r>
-              <a:rPr sz="1425" b="0" i="0">
-                <a:solidFill>
-                  <a:srgbClr val="6E6E73"/>
-                </a:solidFill>
-                <a:latin typeface="Roboto"/>
-              </a:rPr>
-              <a:t>CEO · Product analytics, ex-Atlas</a:t>
-            </a:r>
-          </a:p>
-        </p:txBody>
-      </p:sp>
-      <p:sp>
-        <p:nvSpPr>
-          <p:cNvPr id="15" name="TextBox 14"/>
+              <a:rPr sz="1350" b="1" i="0">
+                <a:solidFill>
+                  <a:srgbClr val="80BFFF"/>
+                </a:solidFill>
+                <a:latin typeface="Roboto"/>
+              </a:rPr>
+              <a:t>FOUNDING TEAM</a:t>
+            </a:r>
+          </a:p>
+        </p:txBody>
+      </p:sp>
+      <p:sp>
+        <p:nvSpPr>
+          <p:cNvPr id="11" name="TextBox 10"/>
           <p:cNvSpPr txBox="1"/>
           <p:nvPr/>
         </p:nvSpPr>
         <p:spPr>
           <a:xfrm>
-            <a:off x="7143750" y="3333750"/>
-            <a:ext cx="1038225" cy="219075"/>
+            <a:off x="5715000" y="1714500"/>
+            <a:ext cx="1428750" cy="276225"/>
           </a:xfrm>
           <a:prstGeom prst="rect">
             <a:avLst/>
@@ -4683,25 +4638,25 @@
             <a:r>
               <a:rPr sz="2250" b="0" i="0">
                 <a:solidFill>
-                  <a:srgbClr val="1D1D1F"/>
-                </a:solidFill>
-                <a:latin typeface="Roboto"/>
-              </a:rPr>
-              <a:t>Jon Bell</a:t>
-            </a:r>
-          </a:p>
-        </p:txBody>
-      </p:sp>
-      <p:sp>
-        <p:nvSpPr>
-          <p:cNvPr id="16" name="TextBox 15"/>
+                  <a:srgbClr val="FFFFFF"/>
+                </a:solidFill>
+                <a:latin typeface="Roboto"/>
+              </a:rPr>
+              <a:t>Maya Chen</a:t>
+            </a:r>
+          </a:p>
+        </p:txBody>
+      </p:sp>
+      <p:sp>
+        <p:nvSpPr>
+          <p:cNvPr id="12" name="TextBox 11"/>
           <p:cNvSpPr txBox="1"/>
           <p:nvPr/>
         </p:nvSpPr>
         <p:spPr>
           <a:xfrm>
-            <a:off x="7143750" y="3762375"/>
-            <a:ext cx="2428875" cy="171450"/>
+            <a:off x="5715000" y="2143125"/>
+            <a:ext cx="2609850" cy="171450"/>
           </a:xfrm>
           <a:prstGeom prst="rect">
             <a:avLst/>
@@ -4718,25 +4673,25 @@
             <a:r>
               <a:rPr sz="1425" b="0" i="0">
                 <a:solidFill>
-                  <a:srgbClr val="6E6E73"/>
-                </a:solidFill>
-                <a:latin typeface="Roboto"/>
-              </a:rPr>
-              <a:t>CTO · Data systems, ex-Vector</a:t>
-            </a:r>
-          </a:p>
-        </p:txBody>
-      </p:sp>
-      <p:sp>
-        <p:nvSpPr>
-          <p:cNvPr id="17" name="TextBox 16"/>
+                  <a:srgbClr val="A7A7AD"/>
+                </a:solidFill>
+                <a:latin typeface="Roboto"/>
+              </a:rPr>
+              <a:t>CEO · Product analytics, ex-Atlas</a:t>
+            </a:r>
+          </a:p>
+        </p:txBody>
+      </p:sp>
+      <p:sp>
+        <p:nvSpPr>
+          <p:cNvPr id="13" name="TextBox 12"/>
           <p:cNvSpPr txBox="1"/>
           <p:nvPr/>
         </p:nvSpPr>
         <p:spPr>
           <a:xfrm>
-            <a:off x="7143750" y="4333875"/>
-            <a:ext cx="1371600" cy="276225"/>
+            <a:off x="5715000" y="2857500"/>
+            <a:ext cx="1038225" cy="219075"/>
           </a:xfrm>
           <a:prstGeom prst="rect">
             <a:avLst/>
@@ -4753,25 +4708,25 @@
             <a:r>
               <a:rPr sz="2250" b="0" i="0">
                 <a:solidFill>
-                  <a:srgbClr val="1D1D1F"/>
-                </a:solidFill>
-                <a:latin typeface="Roboto"/>
-              </a:rPr>
-              <a:t>Priya Shah</a:t>
-            </a:r>
-          </a:p>
-        </p:txBody>
-      </p:sp>
-      <p:sp>
-        <p:nvSpPr>
-          <p:cNvPr id="18" name="TextBox 17"/>
+                  <a:srgbClr val="FFFFFF"/>
+                </a:solidFill>
+                <a:latin typeface="Roboto"/>
+              </a:rPr>
+              <a:t>Jon Bell</a:t>
+            </a:r>
+          </a:p>
+        </p:txBody>
+      </p:sp>
+      <p:sp>
+        <p:nvSpPr>
+          <p:cNvPr id="14" name="TextBox 13"/>
           <p:cNvSpPr txBox="1"/>
           <p:nvPr/>
         </p:nvSpPr>
         <p:spPr>
           <a:xfrm>
-            <a:off x="7143750" y="4762500"/>
-            <a:ext cx="2838450" cy="171450"/>
+            <a:off x="5715000" y="3286125"/>
+            <a:ext cx="2428875" cy="171450"/>
           </a:xfrm>
           <a:prstGeom prst="rect">
             <a:avLst/>
@@ -4788,25 +4743,25 @@
             <a:r>
               <a:rPr sz="1425" b="0" i="0">
                 <a:solidFill>
-                  <a:srgbClr val="6E6E73"/>
-                </a:solidFill>
-                <a:latin typeface="Roboto"/>
-              </a:rPr>
-              <a:t>VP GTM · Enterprise SaaS, ex-North</a:t>
-            </a:r>
-          </a:p>
-        </p:txBody>
-      </p:sp>
-      <p:sp>
-        <p:nvSpPr>
-          <p:cNvPr id="19" name="TextBox 18"/>
+                  <a:srgbClr val="A7A7AD"/>
+                </a:solidFill>
+                <a:latin typeface="Roboto"/>
+              </a:rPr>
+              <a:t>CTO · Data systems, ex-Vector</a:t>
+            </a:r>
+          </a:p>
+        </p:txBody>
+      </p:sp>
+      <p:sp>
+        <p:nvSpPr>
+          <p:cNvPr id="15" name="TextBox 14"/>
           <p:cNvSpPr txBox="1"/>
           <p:nvPr/>
         </p:nvSpPr>
         <p:spPr>
           <a:xfrm>
-            <a:off x="7143750" y="5572125"/>
-            <a:ext cx="3276600" cy="171450"/>
+            <a:off x="5715000" y="4000500"/>
+            <a:ext cx="1371600" cy="276225"/>
           </a:xfrm>
           <a:prstGeom prst="rect">
             <a:avLst/>
@@ -4821,27 +4776,27 @@
           <a:p>
             <a:pPr algn="l"/>
             <a:r>
-              <a:rPr sz="1350" b="0" i="0">
-                <a:solidFill>
-                  <a:srgbClr val="6E6E73"/>
-                </a:solidFill>
-                <a:latin typeface="Roboto"/>
-              </a:rPr>
-              <a:t>Illustrative names, roles, and financing data</a:t>
-            </a:r>
-          </a:p>
-        </p:txBody>
-      </p:sp>
-      <p:sp>
-        <p:nvSpPr>
-          <p:cNvPr id="20" name="TextBox 19"/>
+              <a:rPr sz="2250" b="0" i="0">
+                <a:solidFill>
+                  <a:srgbClr val="FFFFFF"/>
+                </a:solidFill>
+                <a:latin typeface="Roboto"/>
+              </a:rPr>
+              <a:t>Priya Shah</a:t>
+            </a:r>
+          </a:p>
+        </p:txBody>
+      </p:sp>
+      <p:sp>
+        <p:nvSpPr>
+          <p:cNvPr id="16" name="TextBox 15"/>
           <p:cNvSpPr txBox="1"/>
           <p:nvPr/>
         </p:nvSpPr>
         <p:spPr>
           <a:xfrm>
-            <a:off x="9896475" y="6191250"/>
-            <a:ext cx="1381125" cy="200025"/>
+            <a:off x="5715000" y="4429125"/>
+            <a:ext cx="2838450" cy="171450"/>
           </a:xfrm>
           <a:prstGeom prst="rect">
             <a:avLst/>
@@ -4854,11 +4809,81 @@
           </a:bodyPr>
           <a:lstStyle/>
           <a:p>
+            <a:pPr algn="l"/>
+            <a:r>
+              <a:rPr sz="1425" b="0" i="0">
+                <a:solidFill>
+                  <a:srgbClr val="A7A7AD"/>
+                </a:solidFill>
+                <a:latin typeface="Roboto"/>
+              </a:rPr>
+              <a:t>VP GTM · Enterprise SaaS, ex-North</a:t>
+            </a:r>
+          </a:p>
+        </p:txBody>
+      </p:sp>
+      <p:sp>
+        <p:nvSpPr>
+          <p:cNvPr id="17" name="TextBox 16"/>
+          <p:cNvSpPr txBox="1"/>
+          <p:nvPr/>
+        </p:nvSpPr>
+        <p:spPr>
+          <a:xfrm>
+            <a:off x="5715000" y="5476875"/>
+            <a:ext cx="3276600" cy="171450"/>
+          </a:xfrm>
+          <a:prstGeom prst="rect">
+            <a:avLst/>
+          </a:prstGeom>
+          <a:noFill/>
+        </p:spPr>
+        <p:txBody>
+          <a:bodyPr wrap="none" anchor="t" lIns="0" rIns="0" tIns="0" bIns="0">
+            <a:noAutofit/>
+          </a:bodyPr>
+          <a:lstStyle/>
+          <a:p>
+            <a:pPr algn="l"/>
+            <a:r>
+              <a:rPr sz="1350" b="0" i="0">
+                <a:solidFill>
+                  <a:srgbClr val="8E8E93"/>
+                </a:solidFill>
+                <a:latin typeface="Roboto"/>
+              </a:rPr>
+              <a:t>Illustrative names, roles, and financing data</a:t>
+            </a:r>
+          </a:p>
+        </p:txBody>
+      </p:sp>
+      <p:sp>
+        <p:nvSpPr>
+          <p:cNvPr id="18" name="TextBox 17"/>
+          <p:cNvSpPr txBox="1"/>
+          <p:nvPr/>
+        </p:nvSpPr>
+        <p:spPr>
+          <a:xfrm>
+            <a:off x="9896475" y="6143625"/>
+            <a:ext cx="1381125" cy="200025"/>
+          </a:xfrm>
+          <a:prstGeom prst="rect">
+            <a:avLst/>
+          </a:prstGeom>
+          <a:noFill/>
+        </p:spPr>
+        <p:txBody>
+          <a:bodyPr wrap="none" anchor="t" lIns="0" rIns="0" tIns="0" bIns="0">
+            <a:noAutofit/>
+          </a:bodyPr>
+          <a:lstStyle/>
+          <a:p>
             <a:pPr algn="r"/>
             <a:r>
               <a:rPr sz="1575" b="1" i="0">
                 <a:solidFill>
-                  <a:srgbClr val="0066CC"/>
+                  <a:srgbClr val="80BFFF"/>
                 </a:solidFill>
                 <a:latin typeface="Roboto"/>
               </a:rPr>
@@ -4884,32 +4909,85 @@
               <p:cTn id="2" dur="indefinite" nodeType="mainSeq">
                 <p:childTnLst>
                   <p:par>
-                    <p:cTn id="5" fill="hold">
+                    <p:cTn id="6" fill="hold">
                       <p:stCondLst>
                         <p:cond delay="indefinite"/>
                       </p:stCondLst>
                       <p:childTnLst>
                         <p:par>
-                          <p:cTn id="6" fill="hold">
+                          <p:cTn id="7" fill="hold">
                             <p:stCondLst>
                               <p:cond delay="0"/>
                             </p:stCondLst>
                             <p:childTnLst>
                               <p:par>
-                                <p:cTn id="7" presetID="10" presetClass="entr" presetSubtype="0" fill="hold" grpId="0" nodeType="clickEffect">
+                                <p:cTn id="8" presetID="22" presetClass="entr" presetSubtype="0" fill="hold" grpId="0" nodeType="clickEffect">
                                   <p:stCondLst>
                                     <p:cond delay="0"/>
                                   </p:stCondLst>
                                   <p:childTnLst>
                                     <p:set>
                                       <p:cBhvr>
-                                        <p:cTn id="8" dur="1" fill="hold">
+                                        <p:cTn id="9" dur="1" fill="hold">
                                           <p:stCondLst>
                                             <p:cond delay="0"/>
                                           </p:stCondLst>
                                         </p:cTn>
                                         <p:tgtEl>
-                                          <p:spTgt spid="7"/>
+                                          <p:spTgt spid="3"/>
+                                        </p:tgtEl>
+                                        <p:attrNameLst>
+                                          <p:attrName>style.visibility</p:attrName>
+                                        </p:attrNameLst>
+                                      </p:cBhvr>
+                                      <p:to>
+                                        <p:strVal val="visible"/>
+                                      </p:to>
+                                    </p:set>
+                                    <p:animEffect transition="in" filter="wipe(right)">
+                                      <p:cBhvr>
+                                        <p:cTn id="10" dur="400"/>
+                                        <p:tgtEl>
+                                          <p:spTgt spid="3"/>
+                                        </p:tgtEl>
+                                      </p:cBhvr>
+                                    </p:animEffect>
+                                  </p:childTnLst>
+                                </p:cTn>
+                              </p:par>
+                            </p:childTnLst>
+                          </p:cTn>
+                        </p:par>
+                      </p:childTnLst>
+                    </p:cTn>
+                  </p:par>
+                  <p:par>
+                    <p:cTn id="11" fill="hold">
+                      <p:stCondLst>
+                        <p:cond delay="indefinite"/>
+                      </p:stCondLst>
+                      <p:childTnLst>
+                        <p:par>
+                          <p:cTn id="12" fill="hold">
+                            <p:stCondLst>
+                              <p:cond delay="0"/>
+                            </p:stCondLst>
+                            <p:childTnLst>
+                              <p:par>
+                                <p:cTn id="13" presetID="10" presetClass="entr" presetSubtype="0" fill="hold" grpId="0" nodeType="clickEffect">
+                                  <p:stCondLst>
+                                    <p:cond delay="0"/>
+                                  </p:stCondLst>
+                                  <p:childTnLst>
+                                    <p:set>
+                                      <p:cBhvr>
+                                        <p:cTn id="14" dur="1" fill="hold">
+                                          <p:stCondLst>
+                                            <p:cond delay="0"/>
+                                          </p:stCondLst>
+                                        </p:cTn>
+                                        <p:tgtEl>
+                                          <p:spTgt spid="5"/>
                                         </p:tgtEl>
                                         <p:attrNameLst>
                                           <p:attrName>style.visibility</p:attrName>
@@ -4921,9 +4999,9 @@
                                     </p:set>
                                     <p:animEffect transition="in" filter="fade">
                                       <p:cBhvr>
-                                        <p:cTn id="9" dur="400"/>
+                                        <p:cTn id="15" dur="400"/>
                                         <p:tgtEl>
-                                          <p:spTgt spid="7"/>
+                                          <p:spTgt spid="5"/>
                                         </p:tgtEl>
                                       </p:cBhvr>
                                     </p:animEffect>
@@ -4967,7 +5045,25 @@
                         </p:stCondLst>
                       </p:cTn>
                       <p:tgtEl>
-                        <p:spTgt spid="7"/>
+                        <p:spTgt spid="3"/>
+                      </p:tgtEl>
+                      <p:attrNameLst>
+                        <p:attrName>style.visibility</p:attrName>
+                      </p:attrNameLst>
+                    </p:cBhvr>
+                    <p:to>
+                      <p:strVal val="hidden"/>
+                    </p:to>
+                  </p:set>
+                  <p:set>
+                    <p:cBhvr>
+                      <p:cTn id="5" dur="1" fill="hold">
+                        <p:stCondLst>
+                          <p:cond delay="0"/>
+                        </p:stCondLst>
+                      </p:cTn>
+                      <p:tgtEl>
+                        <p:spTgt spid="5"/>
                       </p:tgtEl>
                       <p:attrNameLst>
                         <p:attrName>style.visibility</p:attrName>
@@ -5200,7 +5296,7 @@
         <p:spPr>
           <a:xfrm>
             <a:off x="914400" y="1428750"/>
-            <a:ext cx="4962525" cy="942975"/>
+            <a:ext cx="4629150" cy="942975"/>
           </a:xfrm>
           <a:prstGeom prst="rect">
             <a:avLst/>
@@ -5225,7 +5321,7 @@
                 </a:solidFill>
                 <a:latin typeface="Roboto"/>
               </a:rPr>
-              <a:t>Teams find the signal</a:t>
+              <a:t>The decision arrives</a:t>
             </a:r>
           </a:p>
           <a:p>
@@ -5241,7 +5337,7 @@
                 </a:solidFill>
                 <a:latin typeface="Roboto"/>
               </a:rPr>
-              <a:t>after the decision.</a:t>
+              <a:t>before the context.</a:t>
             </a:r>
           </a:p>
         </p:txBody>
@@ -5254,8 +5350,8 @@
         </p:nvSpPr>
         <p:spPr>
           <a:xfrm>
-            <a:off x="914400" y="2857500"/>
-            <a:ext cx="3362325" cy="1304925"/>
+            <a:off x="838200" y="2524125"/>
+            <a:ext cx="4124325" cy="1590675"/>
           </a:xfrm>
           <a:prstGeom prst="rect">
             <a:avLst/>
@@ -5270,7 +5366,7 @@
           <a:p>
             <a:pPr algn="l"/>
             <a:r>
-              <a:rPr sz="14250" b="0" i="0">
+              <a:rPr sz="17250" b="0" i="0">
                 <a:solidFill>
                   <a:srgbClr val="0066CC"/>
                 </a:solidFill>
@@ -5289,7 +5385,7 @@
         </p:nvSpPr>
         <p:spPr>
           <a:xfrm>
-            <a:off x="1047750" y="4905375"/>
+            <a:off x="990600" y="5048250"/>
             <a:ext cx="1800225" cy="171450"/>
           </a:xfrm>
           <a:prstGeom prst="rect">
@@ -5324,8 +5420,8 @@
         </p:nvSpPr>
         <p:spPr>
           <a:xfrm>
-            <a:off x="4476750" y="3190875"/>
-            <a:ext cx="6096000" cy="600075"/>
+            <a:off x="5429250" y="3048000"/>
+            <a:ext cx="4686300" cy="904875"/>
           </a:xfrm>
           <a:prstGeom prst="rect">
             <a:avLst/>
@@ -5350,7 +5446,7 @@
                 </a:solidFill>
                 <a:latin typeface="Roboto"/>
               </a:rPr>
-              <a:t>spent reconciling dashboards, alerts, and stakeholder</a:t>
+              <a:t>spent reconciling dashboards, alerts, and</a:t>
             </a:r>
           </a:p>
           <a:p>
@@ -5366,7 +5462,23 @@
                 </a:solidFill>
                 <a:latin typeface="Roboto"/>
               </a:rPr>
-              <a:t>context before a product decision can be made.</a:t>
+              <a:t>stakeholder context before a product</a:t>
+            </a:r>
+          </a:p>
+          <a:p>
+            <a:pPr algn="l">
+              <a:lnSpc>
+                <a:spcPts val="2775"/>
+              </a:lnSpc>
+            </a:pPr>
+            <a:r>
+              <a:rPr sz="2025" b="0" i="0">
+                <a:solidFill>
+                  <a:srgbClr val="6E6E73"/>
+                </a:solidFill>
+                <a:latin typeface="Roboto"/>
+              </a:rPr>
+              <a:t>decision can be made.</a:t>
             </a:r>
           </a:p>
         </p:txBody>
@@ -6047,7 +6159,7 @@
         <p:spPr>
           <a:xfrm>
             <a:off x="914400" y="1428750"/>
-            <a:ext cx="6172200" cy="1028700"/>
+            <a:ext cx="5800725" cy="1028700"/>
           </a:xfrm>
           <a:prstGeom prst="rect">
             <a:avLst/>
@@ -6072,7 +6184,7 @@
                 </a:solidFill>
                 <a:latin typeface="Roboto"/>
               </a:rPr>
-              <a:t>The cost of finding context</a:t>
+              <a:t>Three forces converge.</a:t>
             </a:r>
           </a:p>
           <a:p>
@@ -6088,7 +6200,7 @@
                 </a:solidFill>
                 <a:latin typeface="Roboto"/>
               </a:rPr>
-              <a:t>is collapsing.</a:t>
+              <a:t>The category opens now.</a:t>
             </a:r>
           </a:p>
         </p:txBody>
@@ -6101,193 +6213,8 @@
         </p:nvSpPr>
         <p:spPr>
           <a:xfrm>
-            <a:off x="914400" y="3429000"/>
-            <a:ext cx="3143250" cy="38100"/>
-          </a:xfrm>
-          <a:prstGeom prst="rect">
-            <a:avLst/>
-          </a:prstGeom>
-          <a:solidFill>
-            <a:srgbClr val="D2D2D7"/>
-          </a:solidFill>
-          <a:ln>
-            <a:noFill/>
-          </a:ln>
-          <a:effectLst/>
-        </p:spPr>
-        <p:style>
-          <a:lnRef idx="1">
-            <a:schemeClr val="accent1"/>
-          </a:lnRef>
-          <a:fillRef idx="3">
-            <a:schemeClr val="accent1"/>
-          </a:fillRef>
-          <a:effectRef idx="2">
-            <a:schemeClr val="accent1"/>
-          </a:effectRef>
-          <a:fontRef idx="minor">
-            <a:schemeClr val="lt1"/>
-          </a:fontRef>
-        </p:style>
-        <p:txBody>
-          <a:bodyPr rtlCol="0" anchor="ctr"/>
-          <a:lstStyle/>
-          <a:p>
-            <a:pPr algn="ctr"/>
-          </a:p>
-        </p:txBody>
-      </p:sp>
-      <p:sp>
-        <p:nvSpPr>
-          <p:cNvPr id="9" name="TextBox 8"/>
-          <p:cNvSpPr txBox="1"/>
-          <p:nvPr/>
-        </p:nvSpPr>
-        <p:spPr>
-          <a:xfrm>
-            <a:off x="914400" y="3714750"/>
-            <a:ext cx="209550" cy="133350"/>
-          </a:xfrm>
-          <a:prstGeom prst="rect">
-            <a:avLst/>
-          </a:prstGeom>
-          <a:noFill/>
-        </p:spPr>
-        <p:txBody>
-          <a:bodyPr wrap="none" anchor="t" lIns="0" rIns="0" tIns="0" bIns="0">
-            <a:noAutofit/>
-          </a:bodyPr>
-          <a:lstStyle/>
-          <a:p>
-            <a:pPr algn="l"/>
-            <a:r>
-              <a:rPr sz="1500" b="1" i="0">
-                <a:solidFill>
-                  <a:srgbClr val="0066CC"/>
-                </a:solidFill>
-                <a:latin typeface="Roboto"/>
-              </a:rPr>
-              <a:t>01</a:t>
-            </a:r>
-          </a:p>
-        </p:txBody>
-      </p:sp>
-      <p:sp>
-        <p:nvSpPr>
-          <p:cNvPr id="10" name="TextBox 9"/>
-          <p:cNvSpPr txBox="1"/>
-          <p:nvPr/>
-        </p:nvSpPr>
-        <p:spPr>
-          <a:xfrm>
-            <a:off x="914400" y="4143375"/>
-            <a:ext cx="1924050" cy="209550"/>
-          </a:xfrm>
-          <a:prstGeom prst="rect">
-            <a:avLst/>
-          </a:prstGeom>
-          <a:noFill/>
-        </p:spPr>
-        <p:txBody>
-          <a:bodyPr wrap="none" anchor="t" lIns="0" rIns="0" tIns="0" bIns="0">
-            <a:noAutofit/>
-          </a:bodyPr>
-          <a:lstStyle/>
-          <a:p>
-            <a:pPr algn="l"/>
-            <a:r>
-              <a:rPr sz="2325" b="1" i="0">
-                <a:solidFill>
-                  <a:srgbClr val="1D1D1F"/>
-                </a:solidFill>
-                <a:latin typeface="Roboto"/>
-              </a:rPr>
-              <a:t>MORE SIGNAL</a:t>
-            </a:r>
-          </a:p>
-        </p:txBody>
-      </p:sp>
-      <p:sp>
-        <p:nvSpPr>
-          <p:cNvPr id="11" name="TextBox 10"/>
-          <p:cNvSpPr txBox="1"/>
-          <p:nvPr/>
-        </p:nvSpPr>
-        <p:spPr>
-          <a:xfrm>
-            <a:off x="914400" y="4762500"/>
-            <a:ext cx="2571750" cy="685800"/>
-          </a:xfrm>
-          <a:prstGeom prst="rect">
-            <a:avLst/>
-          </a:prstGeom>
-          <a:noFill/>
-        </p:spPr>
-        <p:txBody>
-          <a:bodyPr wrap="none" anchor="t" lIns="0" rIns="0" tIns="0" bIns="0">
-            <a:noAutofit/>
-          </a:bodyPr>
-          <a:lstStyle/>
-          <a:p>
-            <a:pPr algn="l">
-              <a:lnSpc>
-                <a:spcPts val="2250"/>
-              </a:lnSpc>
-            </a:pPr>
-            <a:r>
-              <a:rPr sz="1650" b="0" i="0">
-                <a:solidFill>
-                  <a:srgbClr val="6E6E73"/>
-                </a:solidFill>
-                <a:latin typeface="Roboto"/>
-              </a:rPr>
-              <a:t>Product teams now operate</a:t>
-            </a:r>
-          </a:p>
-          <a:p>
-            <a:pPr algn="l">
-              <a:lnSpc>
-                <a:spcPts val="2250"/>
-              </a:lnSpc>
-            </a:pPr>
-            <a:r>
-              <a:rPr sz="1650" b="0" i="0">
-                <a:solidFill>
-                  <a:srgbClr val="6E6E73"/>
-                </a:solidFill>
-                <a:latin typeface="Roboto"/>
-              </a:rPr>
-              <a:t>across dozens of live data</a:t>
-            </a:r>
-          </a:p>
-          <a:p>
-            <a:pPr algn="l">
-              <a:lnSpc>
-                <a:spcPts val="2250"/>
-              </a:lnSpc>
-            </a:pPr>
-            <a:r>
-              <a:rPr sz="1650" b="0" i="0">
-                <a:solidFill>
-                  <a:srgbClr val="6E6E73"/>
-                </a:solidFill>
-                <a:latin typeface="Roboto"/>
-              </a:rPr>
-              <a:t>sources.</a:t>
-            </a:r>
-          </a:p>
-        </p:txBody>
-      </p:sp>
-      <p:sp>
-        <p:nvSpPr>
-          <p:cNvPr id="12" name="Rectangle 11"/>
-          <p:cNvSpPr/>
-          <p:nvPr/>
-        </p:nvSpPr>
-        <p:spPr>
-          <a:xfrm>
-            <a:off x="4629150" y="3429000"/>
-            <a:ext cx="3143250" cy="38100"/>
+            <a:off x="914400" y="3286125"/>
+            <a:ext cx="2857500" cy="66675"/>
           </a:xfrm>
           <a:prstGeom prst="rect">
             <a:avLst/>
@@ -6324,13 +6251,13 @@
       </p:sp>
       <p:sp>
         <p:nvSpPr>
-          <p:cNvPr id="13" name="TextBox 12"/>
+          <p:cNvPr id="9" name="TextBox 8"/>
           <p:cNvSpPr txBox="1"/>
           <p:nvPr/>
         </p:nvSpPr>
         <p:spPr>
           <a:xfrm>
-            <a:off x="4629150" y="3714750"/>
+            <a:off x="914400" y="3552825"/>
             <a:ext cx="209550" cy="133350"/>
           </a:xfrm>
           <a:prstGeom prst="rect">
@@ -6352,21 +6279,21 @@
                 </a:solidFill>
                 <a:latin typeface="Roboto"/>
               </a:rPr>
-              <a:t>02</a:t>
-            </a:r>
-          </a:p>
-        </p:txBody>
-      </p:sp>
-      <p:sp>
-        <p:nvSpPr>
-          <p:cNvPr id="14" name="TextBox 13"/>
+              <a:t>01</a:t>
+            </a:r>
+          </a:p>
+        </p:txBody>
+      </p:sp>
+      <p:sp>
+        <p:nvSpPr>
+          <p:cNvPr id="10" name="TextBox 9"/>
           <p:cNvSpPr txBox="1"/>
           <p:nvPr/>
         </p:nvSpPr>
         <p:spPr>
           <a:xfrm>
-            <a:off x="4629150" y="4143375"/>
-            <a:ext cx="1800225" cy="209550"/>
+            <a:off x="914400" y="3933825"/>
+            <a:ext cx="1924050" cy="209550"/>
           </a:xfrm>
           <a:prstGeom prst="rect">
             <a:avLst/>
@@ -6387,21 +6314,21 @@
                 </a:solidFill>
                 <a:latin typeface="Roboto"/>
               </a:rPr>
-              <a:t>LOWER COST</a:t>
-            </a:r>
-          </a:p>
-        </p:txBody>
-      </p:sp>
-      <p:sp>
-        <p:nvSpPr>
-          <p:cNvPr id="15" name="TextBox 14"/>
+              <a:t>MORE SIGNAL</a:t>
+            </a:r>
+          </a:p>
+        </p:txBody>
+      </p:sp>
+      <p:sp>
+        <p:nvSpPr>
+          <p:cNvPr id="11" name="TextBox 10"/>
           <p:cNvSpPr txBox="1"/>
           <p:nvPr/>
         </p:nvSpPr>
         <p:spPr>
           <a:xfrm>
-            <a:off x="4629150" y="4762500"/>
-            <a:ext cx="3000375" cy="485775"/>
+            <a:off x="914400" y="4410075"/>
+            <a:ext cx="2571750" cy="685800"/>
           </a:xfrm>
           <a:prstGeom prst="rect">
             <a:avLst/>
@@ -6426,7 +6353,7 @@
                 </a:solidFill>
                 <a:latin typeface="Roboto"/>
               </a:rPr>
-              <a:t>Models can explain anomalies in</a:t>
+              <a:t>Product teams now operate</a:t>
             </a:r>
           </a:p>
           <a:p>
@@ -6442,27 +6369,43 @@
                 </a:solidFill>
                 <a:latin typeface="Roboto"/>
               </a:rPr>
-              <a:t>seconds, not analyst-days.</a:t>
-            </a:r>
-          </a:p>
-        </p:txBody>
-      </p:sp>
-      <p:sp>
-        <p:nvSpPr>
-          <p:cNvPr id="16" name="Rectangle 15"/>
+              <a:t>across dozens of live data</a:t>
+            </a:r>
+          </a:p>
+          <a:p>
+            <a:pPr algn="l">
+              <a:lnSpc>
+                <a:spcPts val="2250"/>
+              </a:lnSpc>
+            </a:pPr>
+            <a:r>
+              <a:rPr sz="1650" b="0" i="0">
+                <a:solidFill>
+                  <a:srgbClr val="6E6E73"/>
+                </a:solidFill>
+                <a:latin typeface="Roboto"/>
+              </a:rPr>
+              <a:t>sources.</a:t>
+            </a:r>
+          </a:p>
+        </p:txBody>
+      </p:sp>
+      <p:sp>
+        <p:nvSpPr>
+          <p:cNvPr id="12" name="Rectangle 11"/>
           <p:cNvSpPr/>
           <p:nvPr/>
         </p:nvSpPr>
         <p:spPr>
           <a:xfrm>
-            <a:off x="8343900" y="3429000"/>
-            <a:ext cx="3143250" cy="38100"/>
+            <a:off x="4438650" y="3781425"/>
+            <a:ext cx="2857500" cy="66675"/>
           </a:xfrm>
           <a:prstGeom prst="rect">
             <a:avLst/>
           </a:prstGeom>
           <a:solidFill>
-            <a:srgbClr val="D2D2D7"/>
+            <a:srgbClr val="0066CC"/>
           </a:solidFill>
           <a:ln>
             <a:noFill/>
@@ -6493,13 +6436,13 @@
       </p:sp>
       <p:sp>
         <p:nvSpPr>
-          <p:cNvPr id="17" name="TextBox 16"/>
+          <p:cNvPr id="13" name="TextBox 12"/>
           <p:cNvSpPr txBox="1"/>
           <p:nvPr/>
         </p:nvSpPr>
         <p:spPr>
           <a:xfrm>
-            <a:off x="8343900" y="3714750"/>
+            <a:off x="4438650" y="4048125"/>
             <a:ext cx="209550" cy="133350"/>
           </a:xfrm>
           <a:prstGeom prst="rect">
@@ -6521,21 +6464,21 @@
                 </a:solidFill>
                 <a:latin typeface="Roboto"/>
               </a:rPr>
-              <a:t>03</a:t>
-            </a:r>
-          </a:p>
-        </p:txBody>
-      </p:sp>
-      <p:sp>
-        <p:nvSpPr>
-          <p:cNvPr id="18" name="TextBox 17"/>
+              <a:t>02</a:t>
+            </a:r>
+          </a:p>
+        </p:txBody>
+      </p:sp>
+      <p:sp>
+        <p:nvSpPr>
+          <p:cNvPr id="14" name="TextBox 13"/>
           <p:cNvSpPr txBox="1"/>
           <p:nvPr/>
         </p:nvSpPr>
         <p:spPr>
           <a:xfrm>
-            <a:off x="8343900" y="4143375"/>
-            <a:ext cx="2466975" cy="209550"/>
+            <a:off x="4438650" y="4429125"/>
+            <a:ext cx="1800225" cy="209550"/>
           </a:xfrm>
           <a:prstGeom prst="rect">
             <a:avLst/>
@@ -6556,21 +6499,21 @@
                 </a:solidFill>
                 <a:latin typeface="Roboto"/>
               </a:rPr>
-              <a:t>HIGHER URGENCY</a:t>
-            </a:r>
-          </a:p>
-        </p:txBody>
-      </p:sp>
-      <p:sp>
-        <p:nvSpPr>
-          <p:cNvPr id="19" name="TextBox 18"/>
+              <a:t>LOWER COST</a:t>
+            </a:r>
+          </a:p>
+        </p:txBody>
+      </p:sp>
+      <p:sp>
+        <p:nvSpPr>
+          <p:cNvPr id="15" name="TextBox 14"/>
           <p:cNvSpPr txBox="1"/>
           <p:nvPr/>
         </p:nvSpPr>
         <p:spPr>
           <a:xfrm>
-            <a:off x="8343900" y="4762500"/>
-            <a:ext cx="2962275" cy="447675"/>
+            <a:off x="4438650" y="4905375"/>
+            <a:ext cx="2790825" cy="485775"/>
           </a:xfrm>
           <a:prstGeom prst="rect">
             <a:avLst/>
@@ -6595,7 +6538,7 @@
                 </a:solidFill>
                 <a:latin typeface="Roboto"/>
               </a:rPr>
-              <a:t>Shorter shipping cycles leave no</a:t>
+              <a:t>Models can explain anomalies</a:t>
             </a:r>
           </a:p>
           <a:p>
@@ -6611,7 +6554,192 @@
                 </a:solidFill>
                 <a:latin typeface="Roboto"/>
               </a:rPr>
-              <a:t>room for manual reconciliation.</a:t>
+              <a:t>in seconds, not analyst-days.</a:t>
+            </a:r>
+          </a:p>
+        </p:txBody>
+      </p:sp>
+      <p:sp>
+        <p:nvSpPr>
+          <p:cNvPr id="16" name="Rectangle 15"/>
+          <p:cNvSpPr/>
+          <p:nvPr/>
+        </p:nvSpPr>
+        <p:spPr>
+          <a:xfrm>
+            <a:off x="7962900" y="4276725"/>
+            <a:ext cx="2857500" cy="66675"/>
+          </a:xfrm>
+          <a:prstGeom prst="rect">
+            <a:avLst/>
+          </a:prstGeom>
+          <a:solidFill>
+            <a:srgbClr val="0066CC"/>
+          </a:solidFill>
+          <a:ln>
+            <a:noFill/>
+          </a:ln>
+          <a:effectLst/>
+        </p:spPr>
+        <p:style>
+          <a:lnRef idx="1">
+            <a:schemeClr val="accent1"/>
+          </a:lnRef>
+          <a:fillRef idx="3">
+            <a:schemeClr val="accent1"/>
+          </a:fillRef>
+          <a:effectRef idx="2">
+            <a:schemeClr val="accent1"/>
+          </a:effectRef>
+          <a:fontRef idx="minor">
+            <a:schemeClr val="lt1"/>
+          </a:fontRef>
+        </p:style>
+        <p:txBody>
+          <a:bodyPr rtlCol="0" anchor="ctr"/>
+          <a:lstStyle/>
+          <a:p>
+            <a:pPr algn="ctr"/>
+          </a:p>
+        </p:txBody>
+      </p:sp>
+      <p:sp>
+        <p:nvSpPr>
+          <p:cNvPr id="17" name="TextBox 16"/>
+          <p:cNvSpPr txBox="1"/>
+          <p:nvPr/>
+        </p:nvSpPr>
+        <p:spPr>
+          <a:xfrm>
+            <a:off x="7962900" y="4543425"/>
+            <a:ext cx="209550" cy="133350"/>
+          </a:xfrm>
+          <a:prstGeom prst="rect">
+            <a:avLst/>
+          </a:prstGeom>
+          <a:noFill/>
+        </p:spPr>
+        <p:txBody>
+          <a:bodyPr wrap="none" anchor="t" lIns="0" rIns="0" tIns="0" bIns="0">
+            <a:noAutofit/>
+          </a:bodyPr>
+          <a:lstStyle/>
+          <a:p>
+            <a:pPr algn="l"/>
+            <a:r>
+              <a:rPr sz="1500" b="1" i="0">
+                <a:solidFill>
+                  <a:srgbClr val="0066CC"/>
+                </a:solidFill>
+                <a:latin typeface="Roboto"/>
+              </a:rPr>
+              <a:t>03</a:t>
+            </a:r>
+          </a:p>
+        </p:txBody>
+      </p:sp>
+      <p:sp>
+        <p:nvSpPr>
+          <p:cNvPr id="18" name="TextBox 17"/>
+          <p:cNvSpPr txBox="1"/>
+          <p:nvPr/>
+        </p:nvSpPr>
+        <p:spPr>
+          <a:xfrm>
+            <a:off x="7962900" y="4924425"/>
+            <a:ext cx="2466975" cy="209550"/>
+          </a:xfrm>
+          <a:prstGeom prst="rect">
+            <a:avLst/>
+          </a:prstGeom>
+          <a:noFill/>
+        </p:spPr>
+        <p:txBody>
+          <a:bodyPr wrap="none" anchor="t" lIns="0" rIns="0" tIns="0" bIns="0">
+            <a:noAutofit/>
+          </a:bodyPr>
+          <a:lstStyle/>
+          <a:p>
+            <a:pPr algn="l"/>
+            <a:r>
+              <a:rPr sz="2325" b="1" i="0">
+                <a:solidFill>
+                  <a:srgbClr val="1D1D1F"/>
+                </a:solidFill>
+                <a:latin typeface="Roboto"/>
+              </a:rPr>
+              <a:t>HIGHER URGENCY</a:t>
+            </a:r>
+          </a:p>
+        </p:txBody>
+      </p:sp>
+      <p:sp>
+        <p:nvSpPr>
+          <p:cNvPr id="19" name="TextBox 18"/>
+          <p:cNvSpPr txBox="1"/>
+          <p:nvPr/>
+        </p:nvSpPr>
+        <p:spPr>
+          <a:xfrm>
+            <a:off x="7962900" y="5400675"/>
+            <a:ext cx="2676525" cy="733425"/>
+          </a:xfrm>
+          <a:prstGeom prst="rect">
+            <a:avLst/>
+          </a:prstGeom>
+          <a:noFill/>
+        </p:spPr>
+        <p:txBody>
+          <a:bodyPr wrap="none" anchor="t" lIns="0" rIns="0" tIns="0" bIns="0">
+            <a:noAutofit/>
+          </a:bodyPr>
+          <a:lstStyle/>
+          <a:p>
+            <a:pPr algn="l">
+              <a:lnSpc>
+                <a:spcPts val="2250"/>
+              </a:lnSpc>
+            </a:pPr>
+            <a:r>
+              <a:rPr sz="1650" b="0" i="0">
+                <a:solidFill>
+                  <a:srgbClr val="6E6E73"/>
+                </a:solidFill>
+                <a:latin typeface="Roboto"/>
+              </a:rPr>
+              <a:t>Shorter shipping cycles leave</a:t>
+            </a:r>
+          </a:p>
+          <a:p>
+            <a:pPr algn="l">
+              <a:lnSpc>
+                <a:spcPts val="2250"/>
+              </a:lnSpc>
+            </a:pPr>
+            <a:r>
+              <a:rPr sz="1650" b="0" i="0">
+                <a:solidFill>
+                  <a:srgbClr val="6E6E73"/>
+                </a:solidFill>
+                <a:latin typeface="Roboto"/>
+              </a:rPr>
+              <a:t>no room for manual</a:t>
+            </a:r>
+          </a:p>
+          <a:p>
+            <a:pPr algn="l">
+              <a:lnSpc>
+                <a:spcPts val="2250"/>
+              </a:lnSpc>
+            </a:pPr>
+            <a:r>
+              <a:rPr sz="1650" b="0" i="0">
+                <a:solidFill>
+                  <a:srgbClr val="6E6E73"/>
+                </a:solidFill>
+                <a:latin typeface="Roboto"/>
+              </a:rPr>
+              <a:t>reconciliation.</a:t>
             </a:r>
           </a:p>
         </p:txBody>
@@ -7197,7 +7325,7 @@
         <p:spPr>
           <a:xfrm>
             <a:off x="914400" y="1428750"/>
-            <a:ext cx="7781925" cy="504825"/>
+            <a:ext cx="6067425" cy="933450"/>
           </a:xfrm>
           <a:prstGeom prst="rect">
             <a:avLst/>
@@ -7210,7 +7338,11 @@
           </a:bodyPr>
           <a:lstStyle/>
           <a:p>
-            <a:pPr algn="l"/>
+            <a:pPr algn="l">
+              <a:lnSpc>
+                <a:spcPts val="4125"/>
+              </a:lnSpc>
+            </a:pPr>
             <a:r>
               <a:rPr sz="4200" b="0" i="0">
                 <a:solidFill>
@@ -7218,7 +7350,23 @@
                 </a:solidFill>
                 <a:latin typeface="Roboto"/>
               </a:rPr>
-              <a:t>From anomaly to owned decision.</a:t>
+              <a:t>One signal.</a:t>
+            </a:r>
+          </a:p>
+          <a:p>
+            <a:pPr algn="l">
+              <a:lnSpc>
+                <a:spcPts val="4125"/>
+              </a:lnSpc>
+            </a:pPr>
+            <a:r>
+              <a:rPr sz="4200" b="0" i="0">
+                <a:solidFill>
+                  <a:srgbClr val="1D1D1F"/>
+                </a:solidFill>
+                <a:latin typeface="Roboto"/>
+              </a:rPr>
+              <a:t>One accountable decision.</a:t>
             </a:r>
           </a:p>
         </p:txBody>
@@ -7231,17 +7379,19 @@
         </p:nvSpPr>
         <p:spPr>
           <a:xfrm>
-            <a:off x="1285875" y="3810000"/>
-            <a:ext cx="9334500" cy="28575"/>
+            <a:off x="762000" y="3524250"/>
+            <a:ext cx="2667000" cy="1952625"/>
           </a:xfrm>
           <a:prstGeom prst="rect">
             <a:avLst/>
           </a:prstGeom>
           <a:solidFill>
-            <a:srgbClr val="D2D2D7"/>
+            <a:srgbClr val="FFFFFF"/>
           </a:solidFill>
-          <a:ln>
-            <a:noFill/>
+          <a:ln w="9525">
+            <a:solidFill>
+              <a:srgbClr val="D2D2D7"/>
+            </a:solidFill>
           </a:ln>
           <a:effectLst/>
         </p:spPr>
@@ -7275,8 +7425,8 @@
         </p:nvSpPr>
         <p:spPr>
           <a:xfrm>
-            <a:off x="1333500" y="3733800"/>
-            <a:ext cx="190500" cy="190500"/>
+            <a:off x="1009650" y="3800475"/>
+            <a:ext cx="114300" cy="114300"/>
           </a:xfrm>
           <a:prstGeom prst="ellipse">
             <a:avLst/>
@@ -7319,7 +7469,7 @@
         </p:nvSpPr>
         <p:spPr>
           <a:xfrm>
-            <a:off x="1038225" y="4238625"/>
+            <a:off x="1285875" y="3752850"/>
             <a:ext cx="781050" cy="133350"/>
           </a:xfrm>
           <a:prstGeom prst="rect">
@@ -7333,7 +7483,7 @@
           </a:bodyPr>
           <a:lstStyle/>
           <a:p>
-            <a:pPr algn="ctr"/>
+            <a:pPr algn="l"/>
             <a:r>
               <a:rPr sz="1500" b="1" i="0">
                 <a:solidFill>
@@ -7354,8 +7504,8 @@
         </p:nvSpPr>
         <p:spPr>
           <a:xfrm>
-            <a:off x="361950" y="4810125"/>
-            <a:ext cx="2143125" cy="200025"/>
+            <a:off x="1028700" y="4429125"/>
+            <a:ext cx="1381125" cy="533400"/>
           </a:xfrm>
           <a:prstGeom prst="rect">
             <a:avLst/>
@@ -7368,33 +7518,95 @@
           </a:bodyPr>
           <a:lstStyle/>
           <a:p>
-            <a:pPr algn="ctr">
+            <a:pPr algn="l">
               <a:lnSpc>
-                <a:spcPts val="2400"/>
+                <a:spcPts val="2625"/>
               </a:lnSpc>
             </a:pPr>
             <a:r>
-              <a:rPr sz="2025" b="0" i="0">
+              <a:rPr sz="2175" b="0" i="0">
                 <a:solidFill>
                   <a:srgbClr val="1D1D1F"/>
                 </a:solidFill>
                 <a:latin typeface="Roboto"/>
               </a:rPr>
-              <a:t>Conversion -18.4%</a:t>
-            </a:r>
-          </a:p>
-        </p:txBody>
-      </p:sp>
-      <p:sp>
-        <p:nvSpPr>
-          <p:cNvPr id="12" name="Oval 11"/>
+              <a:t>Conversion</a:t>
+            </a:r>
+          </a:p>
+          <a:p>
+            <a:pPr algn="l">
+              <a:lnSpc>
+                <a:spcPts val="2625"/>
+              </a:lnSpc>
+            </a:pPr>
+            <a:r>
+              <a:rPr sz="2175" b="0" i="0">
+                <a:solidFill>
+                  <a:srgbClr val="1D1D1F"/>
+                </a:solidFill>
+                <a:latin typeface="Roboto"/>
+              </a:rPr>
+              <a:t>-18.4%</a:t>
+            </a:r>
+          </a:p>
+        </p:txBody>
+      </p:sp>
+      <p:sp>
+        <p:nvSpPr>
+          <p:cNvPr id="12" name="Rectangle 11"/>
           <p:cNvSpPr/>
           <p:nvPr/>
         </p:nvSpPr>
         <p:spPr>
           <a:xfrm>
-            <a:off x="4191000" y="3733800"/>
-            <a:ext cx="190500" cy="190500"/>
+            <a:off x="3619500" y="3524250"/>
+            <a:ext cx="2667000" cy="1952625"/>
+          </a:xfrm>
+          <a:prstGeom prst="rect">
+            <a:avLst/>
+          </a:prstGeom>
+          <a:solidFill>
+            <a:srgbClr val="FFFFFF"/>
+          </a:solidFill>
+          <a:ln w="9525">
+            <a:solidFill>
+              <a:srgbClr val="D2D2D7"/>
+            </a:solidFill>
+          </a:ln>
+          <a:effectLst/>
+        </p:spPr>
+        <p:style>
+          <a:lnRef idx="1">
+            <a:schemeClr val="accent1"/>
+          </a:lnRef>
+          <a:fillRef idx="3">
+            <a:schemeClr val="accent1"/>
+          </a:fillRef>
+          <a:effectRef idx="2">
+            <a:schemeClr val="accent1"/>
+          </a:effectRef>
+          <a:fontRef idx="minor">
+            <a:schemeClr val="lt1"/>
+          </a:fontRef>
+        </p:style>
+        <p:txBody>
+          <a:bodyPr rtlCol="0" anchor="ctr"/>
+          <a:lstStyle/>
+          <a:p>
+            <a:pPr algn="ctr"/>
+          </a:p>
+        </p:txBody>
+      </p:sp>
+      <p:sp>
+        <p:nvSpPr>
+          <p:cNvPr id="13" name="Oval 12"/>
+          <p:cNvSpPr/>
+          <p:nvPr/>
+        </p:nvSpPr>
+        <p:spPr>
+          <a:xfrm>
+            <a:off x="3867150" y="3800475"/>
+            <a:ext cx="114300" cy="114300"/>
           </a:xfrm>
           <a:prstGeom prst="ellipse">
             <a:avLst/>
@@ -7431,13 +7643,13 @@
       </p:sp>
       <p:sp>
         <p:nvSpPr>
-          <p:cNvPr id="13" name="TextBox 12"/>
+          <p:cNvPr id="14" name="TextBox 13"/>
           <p:cNvSpPr txBox="1"/>
           <p:nvPr/>
         </p:nvSpPr>
         <p:spPr>
           <a:xfrm>
-            <a:off x="3838575" y="4238625"/>
+            <a:off x="4143375" y="3752850"/>
             <a:ext cx="895350" cy="133350"/>
           </a:xfrm>
           <a:prstGeom prst="rect">
@@ -7451,7 +7663,7 @@
           </a:bodyPr>
           <a:lstStyle/>
           <a:p>
-            <a:pPr algn="ctr"/>
+            <a:pPr algn="l"/>
             <a:r>
               <a:rPr sz="1500" b="1" i="0">
                 <a:solidFill>
@@ -7466,14 +7678,14 @@
       </p:sp>
       <p:sp>
         <p:nvSpPr>
-          <p:cNvPr id="14" name="TextBox 13"/>
+          <p:cNvPr id="15" name="TextBox 14"/>
           <p:cNvSpPr txBox="1"/>
           <p:nvPr/>
         </p:nvSpPr>
         <p:spPr>
           <a:xfrm>
-            <a:off x="3305175" y="4810125"/>
-            <a:ext cx="1971675" cy="247650"/>
+            <a:off x="3886200" y="4429125"/>
+            <a:ext cx="1104900" cy="542925"/>
           </a:xfrm>
           <a:prstGeom prst="rect">
             <a:avLst/>
@@ -7486,33 +7698,95 @@
           </a:bodyPr>
           <a:lstStyle/>
           <a:p>
-            <a:pPr algn="ctr">
+            <a:pPr algn="l">
               <a:lnSpc>
-                <a:spcPts val="2400"/>
+                <a:spcPts val="2625"/>
               </a:lnSpc>
             </a:pPr>
             <a:r>
-              <a:rPr sz="2025" b="0" i="0">
+              <a:rPr sz="2175" b="0" i="0">
                 <a:solidFill>
                   <a:srgbClr val="1D1D1F"/>
                 </a:solidFill>
                 <a:latin typeface="Roboto"/>
               </a:rPr>
-              <a:t>Payment timeout</a:t>
-            </a:r>
-          </a:p>
-        </p:txBody>
-      </p:sp>
-      <p:sp>
-        <p:nvSpPr>
-          <p:cNvPr id="15" name="Oval 14"/>
+              <a:t>Payment</a:t>
+            </a:r>
+          </a:p>
+          <a:p>
+            <a:pPr algn="l">
+              <a:lnSpc>
+                <a:spcPts val="2625"/>
+              </a:lnSpc>
+            </a:pPr>
+            <a:r>
+              <a:rPr sz="2175" b="0" i="0">
+                <a:solidFill>
+                  <a:srgbClr val="1D1D1F"/>
+                </a:solidFill>
+                <a:latin typeface="Roboto"/>
+              </a:rPr>
+              <a:t>timeout</a:t>
+            </a:r>
+          </a:p>
+        </p:txBody>
+      </p:sp>
+      <p:sp>
+        <p:nvSpPr>
+          <p:cNvPr id="16" name="Rectangle 15"/>
           <p:cNvSpPr/>
           <p:nvPr/>
         </p:nvSpPr>
         <p:spPr>
           <a:xfrm>
-            <a:off x="7048500" y="3733800"/>
-            <a:ext cx="190500" cy="190500"/>
+            <a:off x="6477000" y="3524250"/>
+            <a:ext cx="2667000" cy="1952625"/>
+          </a:xfrm>
+          <a:prstGeom prst="rect">
+            <a:avLst/>
+          </a:prstGeom>
+          <a:solidFill>
+            <a:srgbClr val="FFFFFF"/>
+          </a:solidFill>
+          <a:ln w="9525">
+            <a:solidFill>
+              <a:srgbClr val="D2D2D7"/>
+            </a:solidFill>
+          </a:ln>
+          <a:effectLst/>
+        </p:spPr>
+        <p:style>
+          <a:lnRef idx="1">
+            <a:schemeClr val="accent1"/>
+          </a:lnRef>
+          <a:fillRef idx="3">
+            <a:schemeClr val="accent1"/>
+          </a:fillRef>
+          <a:effectRef idx="2">
+            <a:schemeClr val="accent1"/>
+          </a:effectRef>
+          <a:fontRef idx="minor">
+            <a:schemeClr val="lt1"/>
+          </a:fontRef>
+        </p:style>
+        <p:txBody>
+          <a:bodyPr rtlCol="0" anchor="ctr"/>
+          <a:lstStyle/>
+          <a:p>
+            <a:pPr algn="ctr"/>
+          </a:p>
+        </p:txBody>
+      </p:sp>
+      <p:sp>
+        <p:nvSpPr>
+          <p:cNvPr id="17" name="Oval 16"/>
+          <p:cNvSpPr/>
+          <p:nvPr/>
+        </p:nvSpPr>
+        <p:spPr>
+          <a:xfrm>
+            <a:off x="6724650" y="3800475"/>
+            <a:ext cx="114300" cy="114300"/>
           </a:xfrm>
           <a:prstGeom prst="ellipse">
             <a:avLst/>
@@ -7549,13 +7823,13 @@
       </p:sp>
       <p:sp>
         <p:nvSpPr>
-          <p:cNvPr id="16" name="TextBox 15"/>
+          <p:cNvPr id="18" name="TextBox 17"/>
           <p:cNvSpPr txBox="1"/>
           <p:nvPr/>
         </p:nvSpPr>
         <p:spPr>
           <a:xfrm>
-            <a:off x="6810375" y="4238625"/>
+            <a:off x="7000875" y="3752850"/>
             <a:ext cx="676275" cy="133350"/>
           </a:xfrm>
           <a:prstGeom prst="rect">
@@ -7569,7 +7843,7 @@
           </a:bodyPr>
           <a:lstStyle/>
           <a:p>
-            <a:pPr algn="ctr"/>
+            <a:pPr algn="l"/>
             <a:r>
               <a:rPr sz="1500" b="1" i="0">
                 <a:solidFill>
@@ -7584,14 +7858,14 @@
       </p:sp>
       <p:sp>
         <p:nvSpPr>
-          <p:cNvPr id="17" name="TextBox 16"/>
+          <p:cNvPr id="19" name="TextBox 18"/>
           <p:cNvSpPr txBox="1"/>
           <p:nvPr/>
         </p:nvSpPr>
         <p:spPr>
           <a:xfrm>
-            <a:off x="6162675" y="4810125"/>
-            <a:ext cx="1962150" cy="200025"/>
+            <a:off x="6743700" y="4429125"/>
+            <a:ext cx="1171575" cy="542925"/>
           </a:xfrm>
           <a:prstGeom prst="rect">
             <a:avLst/>
@@ -7604,33 +7878,95 @@
           </a:bodyPr>
           <a:lstStyle/>
           <a:p>
-            <a:pPr algn="ctr">
+            <a:pPr algn="l">
               <a:lnSpc>
-                <a:spcPts val="2400"/>
+                <a:spcPts val="2625"/>
               </a:lnSpc>
             </a:pPr>
             <a:r>
-              <a:rPr sz="2025" b="0" i="0">
+              <a:rPr sz="2175" b="0" i="0">
                 <a:solidFill>
                   <a:srgbClr val="1D1D1F"/>
                 </a:solidFill>
                 <a:latin typeface="Roboto"/>
               </a:rPr>
-              <a:t>Owner: Checkout</a:t>
-            </a:r>
-          </a:p>
-        </p:txBody>
-      </p:sp>
-      <p:sp>
-        <p:nvSpPr>
-          <p:cNvPr id="18" name="Oval 17"/>
+              <a:t>Owner:</a:t>
+            </a:r>
+          </a:p>
+          <a:p>
+            <a:pPr algn="l">
+              <a:lnSpc>
+                <a:spcPts val="2625"/>
+              </a:lnSpc>
+            </a:pPr>
+            <a:r>
+              <a:rPr sz="2175" b="0" i="0">
+                <a:solidFill>
+                  <a:srgbClr val="1D1D1F"/>
+                </a:solidFill>
+                <a:latin typeface="Roboto"/>
+              </a:rPr>
+              <a:t>Checkout</a:t>
+            </a:r>
+          </a:p>
+        </p:txBody>
+      </p:sp>
+      <p:sp>
+        <p:nvSpPr>
+          <p:cNvPr id="20" name="Rectangle 19"/>
           <p:cNvSpPr/>
           <p:nvPr/>
         </p:nvSpPr>
         <p:spPr>
           <a:xfrm>
-            <a:off x="9906000" y="3733800"/>
-            <a:ext cx="190500" cy="190500"/>
+            <a:off x="9334500" y="3524250"/>
+            <a:ext cx="2667000" cy="1952625"/>
+          </a:xfrm>
+          <a:prstGeom prst="rect">
+            <a:avLst/>
+          </a:prstGeom>
+          <a:solidFill>
+            <a:srgbClr val="E8F5EF"/>
+          </a:solidFill>
+          <a:ln w="9525">
+            <a:solidFill>
+              <a:srgbClr val="D2D2D7"/>
+            </a:solidFill>
+          </a:ln>
+          <a:effectLst/>
+        </p:spPr>
+        <p:style>
+          <a:lnRef idx="1">
+            <a:schemeClr val="accent1"/>
+          </a:lnRef>
+          <a:fillRef idx="3">
+            <a:schemeClr val="accent1"/>
+          </a:fillRef>
+          <a:effectRef idx="2">
+            <a:schemeClr val="accent1"/>
+          </a:effectRef>
+          <a:fontRef idx="minor">
+            <a:schemeClr val="lt1"/>
+          </a:fontRef>
+        </p:style>
+        <p:txBody>
+          <a:bodyPr rtlCol="0" anchor="ctr"/>
+          <a:lstStyle/>
+          <a:p>
+            <a:pPr algn="ctr"/>
+          </a:p>
+        </p:txBody>
+      </p:sp>
+      <p:sp>
+        <p:nvSpPr>
+          <p:cNvPr id="21" name="Oval 20"/>
+          <p:cNvSpPr/>
+          <p:nvPr/>
+        </p:nvSpPr>
+        <p:spPr>
+          <a:xfrm>
+            <a:off x="9582150" y="3800475"/>
+            <a:ext cx="114300" cy="114300"/>
           </a:xfrm>
           <a:prstGeom prst="ellipse">
             <a:avLst/>
@@ -7667,13 +8003,13 @@
       </p:sp>
       <p:sp>
         <p:nvSpPr>
-          <p:cNvPr id="19" name="TextBox 18"/>
+          <p:cNvPr id="22" name="TextBox 21"/>
           <p:cNvSpPr txBox="1"/>
           <p:nvPr/>
         </p:nvSpPr>
         <p:spPr>
           <a:xfrm>
-            <a:off x="9639300" y="4238625"/>
+            <a:off x="9858375" y="3752850"/>
             <a:ext cx="733425" cy="133350"/>
           </a:xfrm>
           <a:prstGeom prst="rect">
@@ -7687,11 +8023,11 @@
           </a:bodyPr>
           <a:lstStyle/>
           <a:p>
-            <a:pPr algn="ctr"/>
+            <a:pPr algn="l"/>
             <a:r>
               <a:rPr sz="1500" b="1" i="0">
                 <a:solidFill>
-                  <a:srgbClr val="0066CC"/>
+                  <a:srgbClr val="197A55"/>
                 </a:solidFill>
                 <a:latin typeface="Roboto"/>
               </a:rPr>
@@ -7702,14 +8038,14 @@
       </p:sp>
       <p:sp>
         <p:nvSpPr>
-          <p:cNvPr id="20" name="TextBox 19"/>
+          <p:cNvPr id="23" name="TextBox 22"/>
           <p:cNvSpPr txBox="1"/>
           <p:nvPr/>
         </p:nvSpPr>
         <p:spPr>
           <a:xfrm>
-            <a:off x="8963025" y="4810125"/>
-            <a:ext cx="2076450" cy="200025"/>
+            <a:off x="9601200" y="4429125"/>
+            <a:ext cx="1095375" cy="542925"/>
           </a:xfrm>
           <a:prstGeom prst="rect">
             <a:avLst/>
@@ -7722,26 +8058,42 @@
           </a:bodyPr>
           <a:lstStyle/>
           <a:p>
-            <a:pPr algn="ctr">
+            <a:pPr algn="l">
               <a:lnSpc>
-                <a:spcPts val="2400"/>
+                <a:spcPts val="2625"/>
               </a:lnSpc>
             </a:pPr>
             <a:r>
-              <a:rPr sz="2025" b="0" i="0">
+              <a:rPr sz="2175" b="0" i="0">
                 <a:solidFill>
                   <a:srgbClr val="1D1D1F"/>
                 </a:solidFill>
                 <a:latin typeface="Roboto"/>
               </a:rPr>
-              <a:t>Rollback recorded</a:t>
-            </a:r>
-          </a:p>
-        </p:txBody>
-      </p:sp>
-      <p:sp>
-        <p:nvSpPr>
-          <p:cNvPr id="21" name="TextBox 20"/>
+              <a:t>Rollback</a:t>
+            </a:r>
+          </a:p>
+          <a:p>
+            <a:pPr algn="l">
+              <a:lnSpc>
+                <a:spcPts val="2625"/>
+              </a:lnSpc>
+            </a:pPr>
+            <a:r>
+              <a:rPr sz="2175" b="0" i="0">
+                <a:solidFill>
+                  <a:srgbClr val="1D1D1F"/>
+                </a:solidFill>
+                <a:latin typeface="Roboto"/>
+              </a:rPr>
+              <a:t>recorded</a:t>
+            </a:r>
+          </a:p>
+        </p:txBody>
+      </p:sp>
+      <p:sp>
+        <p:nvSpPr>
+          <p:cNvPr id="24" name="TextBox 23"/>
           <p:cNvSpPr txBox="1"/>
           <p:nvPr/>
         </p:nvSpPr>
@@ -7837,39 +8189,21 @@
                                   </p:childTnLst>
                                 </p:cTn>
                               </p:par>
-                            </p:childTnLst>
-                          </p:cTn>
-                        </p:par>
-                      </p:childTnLst>
-                    </p:cTn>
-                  </p:par>
-                  <p:par>
-                    <p:cTn id="14" fill="hold">
-                      <p:stCondLst>
-                        <p:cond delay="indefinite"/>
-                      </p:stCondLst>
-                      <p:childTnLst>
-                        <p:par>
-                          <p:cTn id="15" fill="hold">
-                            <p:stCondLst>
-                              <p:cond delay="0"/>
-                            </p:stCondLst>
-                            <p:childTnLst>
                               <p:par>
-                                <p:cTn id="16" presetID="10" presetClass="entr" presetSubtype="0" fill="hold" grpId="0" nodeType="clickEffect">
+                                <p:cTn id="14" presetID="10" presetClass="entr" presetSubtype="0" fill="hold" grpId="0" nodeType="afterEffect">
                                   <p:stCondLst>
                                     <p:cond delay="0"/>
                                   </p:stCondLst>
                                   <p:childTnLst>
                                     <p:set>
                                       <p:cBhvr>
-                                        <p:cTn id="17" dur="1" fill="hold">
+                                        <p:cTn id="15" dur="1" fill="hold">
                                           <p:stCondLst>
                                             <p:cond delay="0"/>
                                           </p:stCondLst>
                                         </p:cTn>
                                         <p:tgtEl>
-                                          <p:spTgt spid="9"/>
+                                          <p:spTgt spid="8"/>
                                         </p:tgtEl>
                                         <p:attrNameLst>
                                           <p:attrName>style.visibility</p:attrName>
@@ -7881,9 +8215,9 @@
                                     </p:set>
                                     <p:animEffect transition="in" filter="fade">
                                       <p:cBhvr>
-                                        <p:cTn id="18" dur="300"/>
+                                        <p:cTn id="16" dur="300"/>
                                         <p:tgtEl>
-                                          <p:spTgt spid="9"/>
+                                          <p:spTgt spid="8"/>
                                         </p:tgtEl>
                                       </p:cBhvr>
                                     </p:animEffect>
@@ -7891,14 +8225,14 @@
                                 </p:cTn>
                               </p:par>
                               <p:par>
-                                <p:cTn id="19" presetID="10" presetClass="entr" presetSubtype="0" fill="hold" grpId="0" nodeType="afterEffect">
+                                <p:cTn id="17" presetID="10" presetClass="entr" presetSubtype="0" fill="hold" grpId="0" nodeType="afterEffect">
                                   <p:stCondLst>
                                     <p:cond delay="0"/>
                                   </p:stCondLst>
                                   <p:childTnLst>
                                     <p:set>
                                       <p:cBhvr>
-                                        <p:cTn id="20" dur="1" fill="hold">
+                                        <p:cTn id="18" dur="1" fill="hold">
                                           <p:stCondLst>
                                             <p:cond delay="0"/>
                                           </p:stCondLst>
@@ -7916,7 +8250,7 @@
                                     </p:set>
                                     <p:animEffect transition="in" filter="fade">
                                       <p:cBhvr>
-                                        <p:cTn id="21" dur="300"/>
+                                        <p:cTn id="19" dur="300"/>
                                         <p:tgtEl>
                                           <p:spTgt spid="12"/>
                                         </p:tgtEl>
@@ -7926,20 +8260,20 @@
                                 </p:cTn>
                               </p:par>
                               <p:par>
-                                <p:cTn id="22" presetID="10" presetClass="entr" presetSubtype="0" fill="hold" grpId="0" nodeType="afterEffect">
+                                <p:cTn id="20" presetID="10" presetClass="entr" presetSubtype="0" fill="hold" grpId="0" nodeType="afterEffect">
                                   <p:stCondLst>
                                     <p:cond delay="0"/>
                                   </p:stCondLst>
                                   <p:childTnLst>
                                     <p:set>
                                       <p:cBhvr>
-                                        <p:cTn id="23" dur="1" fill="hold">
+                                        <p:cTn id="21" dur="1" fill="hold">
                                           <p:stCondLst>
                                             <p:cond delay="0"/>
                                           </p:stCondLst>
                                         </p:cTn>
                                         <p:tgtEl>
-                                          <p:spTgt spid="15"/>
+                                          <p:spTgt spid="16"/>
                                         </p:tgtEl>
                                         <p:attrNameLst>
                                           <p:attrName>style.visibility</p:attrName>
@@ -7951,9 +8285,9 @@
                                     </p:set>
                                     <p:animEffect transition="in" filter="fade">
                                       <p:cBhvr>
-                                        <p:cTn id="24" dur="300"/>
+                                        <p:cTn id="22" dur="300"/>
                                         <p:tgtEl>
-                                          <p:spTgt spid="15"/>
+                                          <p:spTgt spid="16"/>
                                         </p:tgtEl>
                                       </p:cBhvr>
                                     </p:animEffect>
@@ -7961,20 +8295,20 @@
                                 </p:cTn>
                               </p:par>
                               <p:par>
-                                <p:cTn id="25" presetID="10" presetClass="entr" presetSubtype="0" fill="hold" grpId="0" nodeType="afterEffect">
+                                <p:cTn id="23" presetID="10" presetClass="entr" presetSubtype="0" fill="hold" grpId="0" nodeType="afterEffect">
                                   <p:stCondLst>
                                     <p:cond delay="0"/>
                                   </p:stCondLst>
                                   <p:childTnLst>
                                     <p:set>
                                       <p:cBhvr>
-                                        <p:cTn id="26" dur="1" fill="hold">
+                                        <p:cTn id="24" dur="1" fill="hold">
                                           <p:stCondLst>
                                             <p:cond delay="0"/>
                                           </p:stCondLst>
                                         </p:cTn>
                                         <p:tgtEl>
-                                          <p:spTgt spid="18"/>
+                                          <p:spTgt spid="20"/>
                                         </p:tgtEl>
                                         <p:attrNameLst>
                                           <p:attrName>style.visibility</p:attrName>
@@ -7986,9 +8320,9 @@
                                     </p:set>
                                     <p:animEffect transition="in" filter="fade">
                                       <p:cBhvr>
-                                        <p:cTn id="27" dur="300"/>
+                                        <p:cTn id="25" dur="300"/>
                                         <p:tgtEl>
-                                          <p:spTgt spid="18"/>
+                                          <p:spTgt spid="20"/>
                                         </p:tgtEl>
                                       </p:cBhvr>
                                     </p:animEffect>
@@ -8050,7 +8384,7 @@
                         </p:stCondLst>
                       </p:cTn>
                       <p:tgtEl>
-                        <p:spTgt spid="9"/>
+                        <p:spTgt spid="8"/>
                       </p:tgtEl>
                       <p:attrNameLst>
                         <p:attrName>style.visibility</p:attrName>
@@ -8086,7 +8420,7 @@
                         </p:stCondLst>
                       </p:cTn>
                       <p:tgtEl>
-                        <p:spTgt spid="15"/>
+                        <p:spTgt spid="16"/>
                       </p:tgtEl>
                       <p:attrNameLst>
                         <p:attrName>style.visibility</p:attrName>
@@ -8104,7 +8438,7 @@
                         </p:stCondLst>
                       </p:cTn>
                       <p:tgtEl>
-                        <p:spTgt spid="18"/>
+                        <p:spTgt spid="20"/>
                       </p:tgtEl>
                       <p:attrNameLst>
                         <p:attrName>style.visibility</p:attrName>
@@ -9814,8 +10148,8 @@
         </p:nvSpPr>
         <p:spPr>
           <a:xfrm>
-            <a:off x="914400" y="1428750"/>
-            <a:ext cx="4524375" cy="1019175"/>
+            <a:off x="838200" y="1190625"/>
+            <a:ext cx="3362325" cy="1181100"/>
           </a:xfrm>
           <a:prstGeom prst="rect">
             <a:avLst/>
@@ -9828,49 +10162,99 @@
           </a:bodyPr>
           <a:lstStyle/>
           <a:p>
-            <a:pPr algn="l">
-              <a:lnSpc>
-                <a:spcPts val="4125"/>
-              </a:lnSpc>
-            </a:pPr>
-            <a:r>
-              <a:rPr sz="4200" b="0" i="0">
+            <a:pPr algn="l"/>
+            <a:r>
+              <a:rPr sz="9900" b="0" i="0">
                 <a:solidFill>
                   <a:srgbClr val="1D1D1F"/>
                 </a:solidFill>
                 <a:latin typeface="Roboto"/>
               </a:rPr>
-              <a:t>$1.8M ARR.</a:t>
-            </a:r>
-          </a:p>
-          <a:p>
-            <a:pPr algn="l">
-              <a:lnSpc>
-                <a:spcPts val="4125"/>
-              </a:lnSpc>
-            </a:pPr>
-            <a:r>
-              <a:rPr sz="4200" b="0" i="0">
-                <a:solidFill>
-                  <a:srgbClr val="1D1D1F"/>
-                </a:solidFill>
-                <a:latin typeface="Roboto"/>
-              </a:rPr>
-              <a:t>3.1× year over year.</a:t>
-            </a:r>
-          </a:p>
-        </p:txBody>
-      </p:sp>
-      <p:sp>
-        <p:nvSpPr>
-          <p:cNvPr id="8" name="Rectangle 7"/>
+              <a:t>$1.8M</a:t>
+            </a:r>
+          </a:p>
+        </p:txBody>
+      </p:sp>
+      <p:sp>
+        <p:nvSpPr>
+          <p:cNvPr id="8" name="TextBox 7"/>
+          <p:cNvSpPr txBox="1"/>
+          <p:nvPr/>
+        </p:nvSpPr>
+        <p:spPr>
+          <a:xfrm>
+            <a:off x="971550" y="2714625"/>
+            <a:ext cx="504825" cy="171450"/>
+          </a:xfrm>
+          <a:prstGeom prst="rect">
+            <a:avLst/>
+          </a:prstGeom>
+          <a:noFill/>
+        </p:spPr>
+        <p:txBody>
+          <a:bodyPr wrap="none" anchor="t" lIns="0" rIns="0" tIns="0" bIns="0">
+            <a:noAutofit/>
+          </a:bodyPr>
+          <a:lstStyle/>
+          <a:p>
+            <a:pPr algn="l"/>
+            <a:r>
+              <a:rPr sz="1875" b="1" i="0">
+                <a:solidFill>
+                  <a:srgbClr val="6E6E73"/>
+                </a:solidFill>
+                <a:latin typeface="Roboto"/>
+              </a:rPr>
+              <a:t>ARR</a:t>
+            </a:r>
+          </a:p>
+        </p:txBody>
+      </p:sp>
+      <p:sp>
+        <p:nvSpPr>
+          <p:cNvPr id="9" name="TextBox 8"/>
+          <p:cNvSpPr txBox="1"/>
+          <p:nvPr/>
+        </p:nvSpPr>
+        <p:spPr>
+          <a:xfrm>
+            <a:off x="3143250" y="2524125"/>
+            <a:ext cx="1352550" cy="247650"/>
+          </a:xfrm>
+          <a:prstGeom prst="rect">
+            <a:avLst/>
+          </a:prstGeom>
+          <a:noFill/>
+        </p:spPr>
+        <p:txBody>
+          <a:bodyPr wrap="none" anchor="t" lIns="0" rIns="0" tIns="0" bIns="0">
+            <a:noAutofit/>
+          </a:bodyPr>
+          <a:lstStyle/>
+          <a:p>
+            <a:pPr algn="l"/>
+            <a:r>
+              <a:rPr sz="2700" b="0" i="0">
+                <a:solidFill>
+                  <a:srgbClr val="0066CC"/>
+                </a:solidFill>
+                <a:latin typeface="Roboto"/>
+              </a:rPr>
+              <a:t>3.1× YoY</a:t>
+            </a:r>
+          </a:p>
+        </p:txBody>
+      </p:sp>
+      <p:sp>
+        <p:nvSpPr>
+          <p:cNvPr id="10" name="Rectangle 9"/>
           <p:cNvSpPr/>
           <p:nvPr/>
         </p:nvSpPr>
         <p:spPr>
           <a:xfrm>
-            <a:off x="952500" y="5381625"/>
-            <a:ext cx="476250" cy="428625"/>
+            <a:off x="876300" y="5381625"/>
+            <a:ext cx="590550" cy="428625"/>
           </a:xfrm>
           <a:prstGeom prst="rect">
             <a:avLst/>
@@ -9907,13 +10291,13 @@
       </p:sp>
       <p:sp>
         <p:nvSpPr>
-          <p:cNvPr id="9" name="TextBox 8"/>
+          <p:cNvPr id="11" name="TextBox 10"/>
           <p:cNvSpPr txBox="1"/>
           <p:nvPr/>
         </p:nvSpPr>
         <p:spPr>
           <a:xfrm>
-            <a:off x="971550" y="5953125"/>
+            <a:off x="952500" y="5953125"/>
             <a:ext cx="428625" cy="152400"/>
           </a:xfrm>
           <a:prstGeom prst="rect">
@@ -9942,14 +10326,14 @@
       </p:sp>
       <p:sp>
         <p:nvSpPr>
-          <p:cNvPr id="10" name="Rectangle 9"/>
+          <p:cNvPr id="12" name="Rectangle 11"/>
           <p:cNvSpPr/>
           <p:nvPr/>
         </p:nvSpPr>
         <p:spPr>
           <a:xfrm>
-            <a:off x="1790700" y="5191125"/>
-            <a:ext cx="476250" cy="619125"/>
+            <a:off x="1771650" y="5191125"/>
+            <a:ext cx="590550" cy="619125"/>
           </a:xfrm>
           <a:prstGeom prst="rect">
             <a:avLst/>
@@ -9986,13 +10370,13 @@
       </p:sp>
       <p:sp>
         <p:nvSpPr>
-          <p:cNvPr id="11" name="TextBox 10"/>
+          <p:cNvPr id="13" name="TextBox 12"/>
           <p:cNvSpPr txBox="1"/>
           <p:nvPr/>
         </p:nvSpPr>
         <p:spPr>
           <a:xfrm>
-            <a:off x="1924050" y="5953125"/>
+            <a:off x="1962150" y="5953125"/>
             <a:ext cx="209550" cy="142875"/>
           </a:xfrm>
           <a:prstGeom prst="rect">
@@ -10021,14 +10405,14 @@
       </p:sp>
       <p:sp>
         <p:nvSpPr>
-          <p:cNvPr id="12" name="Rectangle 11"/>
+          <p:cNvPr id="14" name="Rectangle 13"/>
           <p:cNvSpPr/>
           <p:nvPr/>
         </p:nvSpPr>
         <p:spPr>
           <a:xfrm>
-            <a:off x="2628900" y="4905375"/>
-            <a:ext cx="476250" cy="904875"/>
+            <a:off x="2667000" y="4905375"/>
+            <a:ext cx="590550" cy="904875"/>
           </a:xfrm>
           <a:prstGeom prst="rect">
             <a:avLst/>
@@ -10065,13 +10449,13 @@
       </p:sp>
       <p:sp>
         <p:nvSpPr>
-          <p:cNvPr id="13" name="TextBox 12"/>
+          <p:cNvPr id="15" name="TextBox 14"/>
           <p:cNvSpPr txBox="1"/>
           <p:nvPr/>
         </p:nvSpPr>
         <p:spPr>
           <a:xfrm>
-            <a:off x="2762250" y="5953125"/>
+            <a:off x="2857500" y="5953125"/>
             <a:ext cx="209550" cy="142875"/>
           </a:xfrm>
           <a:prstGeom prst="rect">
@@ -10100,14 +10484,14 @@
       </p:sp>
       <p:sp>
         <p:nvSpPr>
-          <p:cNvPr id="14" name="Rectangle 13"/>
+          <p:cNvPr id="16" name="Rectangle 15"/>
           <p:cNvSpPr/>
           <p:nvPr/>
         </p:nvSpPr>
         <p:spPr>
           <a:xfrm>
-            <a:off x="3467100" y="4524375"/>
-            <a:ext cx="476250" cy="1285875"/>
+            <a:off x="3562350" y="4524375"/>
+            <a:ext cx="590550" cy="1285875"/>
           </a:xfrm>
           <a:prstGeom prst="rect">
             <a:avLst/>
@@ -10144,13 +10528,13 @@
       </p:sp>
       <p:sp>
         <p:nvSpPr>
-          <p:cNvPr id="15" name="TextBox 14"/>
+          <p:cNvPr id="17" name="TextBox 16"/>
           <p:cNvSpPr txBox="1"/>
           <p:nvPr/>
         </p:nvSpPr>
         <p:spPr>
           <a:xfrm>
-            <a:off x="3600450" y="5953125"/>
+            <a:off x="3752850" y="5953125"/>
             <a:ext cx="209550" cy="142875"/>
           </a:xfrm>
           <a:prstGeom prst="rect">
@@ -10179,14 +10563,14 @@
       </p:sp>
       <p:sp>
         <p:nvSpPr>
-          <p:cNvPr id="16" name="Rectangle 15"/>
+          <p:cNvPr id="18" name="Rectangle 17"/>
           <p:cNvSpPr/>
           <p:nvPr/>
         </p:nvSpPr>
         <p:spPr>
           <a:xfrm>
-            <a:off x="4305300" y="3952875"/>
-            <a:ext cx="476250" cy="1857375"/>
+            <a:off x="4457700" y="3952875"/>
+            <a:ext cx="590550" cy="1857375"/>
           </a:xfrm>
           <a:prstGeom prst="rect">
             <a:avLst/>
@@ -10223,13 +10607,13 @@
       </p:sp>
       <p:sp>
         <p:nvSpPr>
-          <p:cNvPr id="17" name="TextBox 16"/>
+          <p:cNvPr id="19" name="TextBox 18"/>
           <p:cNvSpPr txBox="1"/>
           <p:nvPr/>
         </p:nvSpPr>
         <p:spPr>
           <a:xfrm>
-            <a:off x="4324350" y="5953125"/>
+            <a:off x="4533900" y="5953125"/>
             <a:ext cx="428625" cy="152400"/>
           </a:xfrm>
           <a:prstGeom prst="rect">
@@ -10258,14 +10642,14 @@
       </p:sp>
       <p:sp>
         <p:nvSpPr>
-          <p:cNvPr id="18" name="Rectangle 17"/>
+          <p:cNvPr id="20" name="Rectangle 19"/>
           <p:cNvSpPr/>
           <p:nvPr/>
         </p:nvSpPr>
         <p:spPr>
           <a:xfrm>
-            <a:off x="5143500" y="3238500"/>
-            <a:ext cx="476250" cy="2571750"/>
+            <a:off x="5353050" y="3238500"/>
+            <a:ext cx="590550" cy="2571750"/>
           </a:xfrm>
           <a:prstGeom prst="rect">
             <a:avLst/>
@@ -10302,13 +10686,13 @@
       </p:sp>
       <p:sp>
         <p:nvSpPr>
-          <p:cNvPr id="19" name="TextBox 18"/>
+          <p:cNvPr id="21" name="TextBox 20"/>
           <p:cNvSpPr txBox="1"/>
           <p:nvPr/>
         </p:nvSpPr>
         <p:spPr>
           <a:xfrm>
-            <a:off x="5276850" y="5953125"/>
+            <a:off x="5543550" y="5953125"/>
             <a:ext cx="209550" cy="142875"/>
           </a:xfrm>
           <a:prstGeom prst="rect">
@@ -10337,14 +10721,58 @@
       </p:sp>
       <p:sp>
         <p:nvSpPr>
-          <p:cNvPr id="20" name="TextBox 19"/>
+          <p:cNvPr id="22" name="Rectangle 21"/>
+          <p:cNvSpPr/>
+          <p:nvPr/>
+        </p:nvSpPr>
+        <p:spPr>
+          <a:xfrm>
+            <a:off x="7000875" y="1743075"/>
+            <a:ext cx="4238625" cy="9525"/>
+          </a:xfrm>
+          <a:prstGeom prst="rect">
+            <a:avLst/>
+          </a:prstGeom>
+          <a:solidFill>
+            <a:srgbClr val="D2D2D7"/>
+          </a:solidFill>
+          <a:ln>
+            <a:noFill/>
+          </a:ln>
+          <a:effectLst/>
+        </p:spPr>
+        <p:style>
+          <a:lnRef idx="1">
+            <a:schemeClr val="accent1"/>
+          </a:lnRef>
+          <a:fillRef idx="3">
+            <a:schemeClr val="accent1"/>
+          </a:fillRef>
+          <a:effectRef idx="2">
+            <a:schemeClr val="accent1"/>
+          </a:effectRef>
+          <a:fontRef idx="minor">
+            <a:schemeClr val="lt1"/>
+          </a:fontRef>
+        </p:style>
+        <p:txBody>
+          <a:bodyPr rtlCol="0" anchor="ctr"/>
+          <a:lstStyle/>
+          <a:p>
+            <a:pPr algn="ctr"/>
+          </a:p>
+        </p:txBody>
+      </p:sp>
+      <p:sp>
+        <p:nvSpPr>
+          <p:cNvPr id="23" name="TextBox 22"/>
           <p:cNvSpPr txBox="1"/>
           <p:nvPr/>
         </p:nvSpPr>
         <p:spPr>
           <a:xfrm>
-            <a:off x="6667500" y="2857500"/>
-            <a:ext cx="1000125" cy="409575"/>
+            <a:off x="7000875" y="1952625"/>
+            <a:ext cx="847725" cy="342900"/>
           </a:xfrm>
           <a:prstGeom prst="rect">
             <a:avLst/>
@@ -10359,7 +10787,7 @@
           <a:p>
             <a:pPr algn="l"/>
             <a:r>
-              <a:rPr sz="4350" b="0" i="0">
+              <a:rPr sz="3750" b="0" i="0">
                 <a:solidFill>
                   <a:srgbClr val="197A55"/>
                 </a:solidFill>
@@ -10372,13 +10800,13 @@
       </p:sp>
       <p:sp>
         <p:nvSpPr>
-          <p:cNvPr id="21" name="TextBox 20"/>
+          <p:cNvPr id="24" name="TextBox 23"/>
           <p:cNvSpPr txBox="1"/>
           <p:nvPr/>
         </p:nvSpPr>
         <p:spPr>
           <a:xfrm>
-            <a:off x="6667500" y="3571875"/>
+            <a:off x="8715375" y="2000250"/>
             <a:ext cx="2171700" cy="123825"/>
           </a:xfrm>
           <a:prstGeom prst="rect">
@@ -10407,13 +10835,13 @@
       </p:sp>
       <p:sp>
         <p:nvSpPr>
-          <p:cNvPr id="22" name="TextBox 21"/>
+          <p:cNvPr id="25" name="TextBox 24"/>
           <p:cNvSpPr txBox="1"/>
           <p:nvPr/>
         </p:nvSpPr>
         <p:spPr>
           <a:xfrm>
-            <a:off x="6667500" y="3905250"/>
+            <a:off x="8715375" y="2314575"/>
             <a:ext cx="1409700" cy="171450"/>
           </a:xfrm>
           <a:prstGeom prst="rect">
@@ -10442,14 +10870,58 @@
       </p:sp>
       <p:sp>
         <p:nvSpPr>
-          <p:cNvPr id="23" name="TextBox 22"/>
+          <p:cNvPr id="26" name="Rectangle 25"/>
+          <p:cNvSpPr/>
+          <p:nvPr/>
+        </p:nvSpPr>
+        <p:spPr>
+          <a:xfrm>
+            <a:off x="7000875" y="3028950"/>
+            <a:ext cx="4238625" cy="9525"/>
+          </a:xfrm>
+          <a:prstGeom prst="rect">
+            <a:avLst/>
+          </a:prstGeom>
+          <a:solidFill>
+            <a:srgbClr val="D2D2D7"/>
+          </a:solidFill>
+          <a:ln>
+            <a:noFill/>
+          </a:ln>
+          <a:effectLst/>
+        </p:spPr>
+        <p:style>
+          <a:lnRef idx="1">
+            <a:schemeClr val="accent1"/>
+          </a:lnRef>
+          <a:fillRef idx="3">
+            <a:schemeClr val="accent1"/>
+          </a:fillRef>
+          <a:effectRef idx="2">
+            <a:schemeClr val="accent1"/>
+          </a:effectRef>
+          <a:fontRef idx="minor">
+            <a:schemeClr val="lt1"/>
+          </a:fontRef>
+        </p:style>
+        <p:txBody>
+          <a:bodyPr rtlCol="0" anchor="ctr"/>
+          <a:lstStyle/>
+          <a:p>
+            <a:pPr algn="ctr"/>
+          </a:p>
+        </p:txBody>
+      </p:sp>
+      <p:sp>
+        <p:nvSpPr>
+          <p:cNvPr id="27" name="TextBox 26"/>
           <p:cNvSpPr txBox="1"/>
           <p:nvPr/>
         </p:nvSpPr>
         <p:spPr>
           <a:xfrm>
-            <a:off x="9239250" y="2857500"/>
-            <a:ext cx="1304925" cy="485775"/>
+            <a:off x="7000875" y="3238500"/>
+            <a:ext cx="1095375" cy="419100"/>
           </a:xfrm>
           <a:prstGeom prst="rect">
             <a:avLst/>
@@ -10464,7 +10936,7 @@
           <a:p>
             <a:pPr algn="l"/>
             <a:r>
-              <a:rPr sz="4350" b="0" i="0">
+              <a:rPr sz="3750" b="0" i="0">
                 <a:solidFill>
                   <a:srgbClr val="1D1D1F"/>
                 </a:solidFill>
@@ -10477,13 +10949,13 @@
       </p:sp>
       <p:sp>
         <p:nvSpPr>
-          <p:cNvPr id="24" name="TextBox 23"/>
+          <p:cNvPr id="28" name="TextBox 27"/>
           <p:cNvSpPr txBox="1"/>
           <p:nvPr/>
         </p:nvSpPr>
         <p:spPr>
           <a:xfrm>
-            <a:off x="9239250" y="3571875"/>
+            <a:off x="8715375" y="3286125"/>
             <a:ext cx="2095500" cy="123825"/>
           </a:xfrm>
           <a:prstGeom prst="rect">
@@ -10512,13 +10984,13 @@
       </p:sp>
       <p:sp>
         <p:nvSpPr>
-          <p:cNvPr id="25" name="TextBox 24"/>
+          <p:cNvPr id="29" name="TextBox 28"/>
           <p:cNvSpPr txBox="1"/>
           <p:nvPr/>
         </p:nvSpPr>
         <p:spPr>
           <a:xfrm>
-            <a:off x="9239250" y="3905250"/>
+            <a:off x="8715375" y="3600450"/>
             <a:ext cx="1457325" cy="171450"/>
           </a:xfrm>
           <a:prstGeom prst="rect">
@@ -10547,14 +11019,58 @@
       </p:sp>
       <p:sp>
         <p:nvSpPr>
-          <p:cNvPr id="26" name="TextBox 25"/>
+          <p:cNvPr id="30" name="Rectangle 29"/>
+          <p:cNvSpPr/>
+          <p:nvPr/>
+        </p:nvSpPr>
+        <p:spPr>
+          <a:xfrm>
+            <a:off x="7000875" y="4314825"/>
+            <a:ext cx="4238625" cy="9525"/>
+          </a:xfrm>
+          <a:prstGeom prst="rect">
+            <a:avLst/>
+          </a:prstGeom>
+          <a:solidFill>
+            <a:srgbClr val="D2D2D7"/>
+          </a:solidFill>
+          <a:ln>
+            <a:noFill/>
+          </a:ln>
+          <a:effectLst/>
+        </p:spPr>
+        <p:style>
+          <a:lnRef idx="1">
+            <a:schemeClr val="accent1"/>
+          </a:lnRef>
+          <a:fillRef idx="3">
+            <a:schemeClr val="accent1"/>
+          </a:fillRef>
+          <a:effectRef idx="2">
+            <a:schemeClr val="accent1"/>
+          </a:effectRef>
+          <a:fontRef idx="minor">
+            <a:schemeClr val="lt1"/>
+          </a:fontRef>
+        </p:style>
+        <p:txBody>
+          <a:bodyPr rtlCol="0" anchor="ctr"/>
+          <a:lstStyle/>
+          <a:p>
+            <a:pPr algn="ctr"/>
+          </a:p>
+        </p:txBody>
+      </p:sp>
+      <p:sp>
+        <p:nvSpPr>
+          <p:cNvPr id="31" name="TextBox 30"/>
           <p:cNvSpPr txBox="1"/>
           <p:nvPr/>
         </p:nvSpPr>
         <p:spPr>
           <a:xfrm>
-            <a:off x="6667500" y="4619625"/>
-            <a:ext cx="1838325" cy="409575"/>
+            <a:off x="7000875" y="4524375"/>
+            <a:ext cx="1562100" cy="342900"/>
           </a:xfrm>
           <a:prstGeom prst="rect">
             <a:avLst/>
@@ -10569,7 +11085,7 @@
           <a:p>
             <a:pPr algn="l"/>
             <a:r>
-              <a:rPr sz="4350" b="0" i="0">
+              <a:rPr sz="3750" b="0" i="0">
                 <a:solidFill>
                   <a:srgbClr val="1D1D1F"/>
                 </a:solidFill>
@@ -10582,13 +11098,13 @@
       </p:sp>
       <p:sp>
         <p:nvSpPr>
-          <p:cNvPr id="27" name="TextBox 26"/>
+          <p:cNvPr id="32" name="TextBox 31"/>
           <p:cNvSpPr txBox="1"/>
           <p:nvPr/>
         </p:nvSpPr>
         <p:spPr>
           <a:xfrm>
-            <a:off x="6667500" y="5334000"/>
+            <a:off x="8715375" y="4572000"/>
             <a:ext cx="1190625" cy="123825"/>
           </a:xfrm>
           <a:prstGeom prst="rect">
@@ -10617,13 +11133,13 @@
       </p:sp>
       <p:sp>
         <p:nvSpPr>
-          <p:cNvPr id="28" name="TextBox 27"/>
+          <p:cNvPr id="33" name="TextBox 32"/>
           <p:cNvSpPr txBox="1"/>
           <p:nvPr/>
         </p:nvSpPr>
         <p:spPr>
           <a:xfrm>
-            <a:off x="6667500" y="5667375"/>
+            <a:off x="8715375" y="4886325"/>
             <a:ext cx="1514475" cy="152400"/>
           </a:xfrm>
           <a:prstGeom prst="rect">
@@ -10652,7 +11168,7 @@
       </p:sp>
       <p:sp>
         <p:nvSpPr>
-          <p:cNvPr id="29" name="TextBox 28"/>
+          <p:cNvPr id="34" name="TextBox 33"/>
           <p:cNvSpPr txBox="1"/>
           <p:nvPr/>
         </p:nvSpPr>
@@ -10762,7 +11278,7 @@
                                           </p:stCondLst>
                                         </p:cTn>
                                         <p:tgtEl>
-                                          <p:spTgt spid="8"/>
+                                          <p:spTgt spid="10"/>
                                         </p:tgtEl>
                                         <p:attrNameLst>
                                           <p:attrName>style.visibility</p:attrName>
@@ -10776,7 +11292,7 @@
                                       <p:cBhvr>
                                         <p:cTn id="18" dur="300"/>
                                         <p:tgtEl>
-                                          <p:spTgt spid="8"/>
+                                          <p:spTgt spid="10"/>
                                         </p:tgtEl>
                                       </p:cBhvr>
                                     </p:animEffect>
@@ -10797,7 +11313,7 @@
                                           </p:stCondLst>
                                         </p:cTn>
                                         <p:tgtEl>
-                                          <p:spTgt spid="10"/>
+                                          <p:spTgt spid="12"/>
                                         </p:tgtEl>
                                         <p:attrNameLst>
                                           <p:attrName>style.visibility</p:attrName>
@@ -10811,7 +11327,7 @@
                                       <p:cBhvr>
                                         <p:cTn id="21" dur="300"/>
                                         <p:tgtEl>
-                                          <p:spTgt spid="10"/>
+                                          <p:spTgt spid="12"/>
                                         </p:tgtEl>
                                       </p:cBhvr>
                                     </p:animEffect>
@@ -10832,7 +11348,7 @@
                                           </p:stCondLst>
                                         </p:cTn>
                                         <p:tgtEl>
-                                          <p:spTgt spid="12"/>
+                                          <p:spTgt spid="14"/>
                                         </p:tgtEl>
                                         <p:attrNameLst>
                                           <p:attrName>style.visibility</p:attrName>
@@ -10846,7 +11362,7 @@
                                       <p:cBhvr>
                                         <p:cTn id="24" dur="300"/>
                                         <p:tgtEl>
-                                          <p:spTgt spid="12"/>
+                                          <p:spTgt spid="14"/>
                                         </p:tgtEl>
                                       </p:cBhvr>
                                     </p:animEffect>
@@ -10867,7 +11383,7 @@
                                           </p:stCondLst>
                                         </p:cTn>
                                         <p:tgtEl>
-                                          <p:spTgt spid="14"/>
+                                          <p:spTgt spid="16"/>
                                         </p:tgtEl>
                                         <p:attrNameLst>
                                           <p:attrName>style.visibility</p:attrName>
@@ -10881,7 +11397,7 @@
                                       <p:cBhvr>
                                         <p:cTn id="27" dur="300"/>
                                         <p:tgtEl>
-                                          <p:spTgt spid="14"/>
+                                          <p:spTgt spid="16"/>
                                         </p:tgtEl>
                                       </p:cBhvr>
                                     </p:animEffect>
@@ -10902,7 +11418,7 @@
                                           </p:stCondLst>
                                         </p:cTn>
                                         <p:tgtEl>
-                                          <p:spTgt spid="16"/>
+                                          <p:spTgt spid="18"/>
                                         </p:tgtEl>
                                         <p:attrNameLst>
                                           <p:attrName>style.visibility</p:attrName>
@@ -10916,7 +11432,7 @@
                                       <p:cBhvr>
                                         <p:cTn id="30" dur="300"/>
                                         <p:tgtEl>
-                                          <p:spTgt spid="16"/>
+                                          <p:spTgt spid="18"/>
                                         </p:tgtEl>
                                       </p:cBhvr>
                                     </p:animEffect>
@@ -10937,7 +11453,7 @@
                                           </p:stCondLst>
                                         </p:cTn>
                                         <p:tgtEl>
-                                          <p:spTgt spid="18"/>
+                                          <p:spTgt spid="20"/>
                                         </p:tgtEl>
                                         <p:attrNameLst>
                                           <p:attrName>style.visibility</p:attrName>
@@ -10951,7 +11467,1141 @@
                                       <p:cBhvr>
                                         <p:cTn id="33" dur="300"/>
                                         <p:tgtEl>
-                                          <p:spTgt spid="18"/>
+                                          <p:spTgt spid="20"/>
+                                        </p:tgtEl>
+                                      </p:cBhvr>
+                                    </p:animEffect>
+                                  </p:childTnLst>
+                                </p:cTn>
+                              </p:par>
+                            </p:childTnLst>
+                          </p:cTn>
+                        </p:par>
+                      </p:childTnLst>
+                    </p:cTn>
+                  </p:par>
+                </p:childTnLst>
+              </p:cTn>
+              <p:prevCondLst>
+                <p:cond evt="onPrev" delay="0">
+                  <p:tgtEl>
+                    <p:sldTgt/>
+                  </p:tgtEl>
+                </p:cond>
+              </p:prevCondLst>
+              <p:nextCondLst>
+                <p:cond evt="onNext" delay="0">
+                  <p:tgtEl>
+                    <p:sldTgt/>
+                  </p:tgtEl>
+                </p:cond>
+              </p:nextCondLst>
+            </p:seq>
+            <p:par>
+              <p:cTn id="3" fill="hold">
+                <p:stCondLst>
+                  <p:cond delay="0"/>
+                </p:stCondLst>
+                <p:childTnLst>
+                  <p:set>
+                    <p:cBhvr>
+                      <p:cTn id="4" dur="1" fill="hold">
+                        <p:stCondLst>
+                          <p:cond delay="0"/>
+                        </p:stCondLst>
+                      </p:cTn>
+                      <p:tgtEl>
+                        <p:spTgt spid="7"/>
+                      </p:tgtEl>
+                      <p:attrNameLst>
+                        <p:attrName>style.visibility</p:attrName>
+                      </p:attrNameLst>
+                    </p:cBhvr>
+                    <p:to>
+                      <p:strVal val="hidden"/>
+                    </p:to>
+                  </p:set>
+                  <p:set>
+                    <p:cBhvr>
+                      <p:cTn id="5" dur="1" fill="hold">
+                        <p:stCondLst>
+                          <p:cond delay="0"/>
+                        </p:stCondLst>
+                      </p:cTn>
+                      <p:tgtEl>
+                        <p:spTgt spid="10"/>
+                      </p:tgtEl>
+                      <p:attrNameLst>
+                        <p:attrName>style.visibility</p:attrName>
+                      </p:attrNameLst>
+                    </p:cBhvr>
+                    <p:to>
+                      <p:strVal val="hidden"/>
+                    </p:to>
+                  </p:set>
+                  <p:set>
+                    <p:cBhvr>
+                      <p:cTn id="6" dur="1" fill="hold">
+                        <p:stCondLst>
+                          <p:cond delay="0"/>
+                        </p:stCondLst>
+                      </p:cTn>
+                      <p:tgtEl>
+                        <p:spTgt spid="12"/>
+                      </p:tgtEl>
+                      <p:attrNameLst>
+                        <p:attrName>style.visibility</p:attrName>
+                      </p:attrNameLst>
+                    </p:cBhvr>
+                    <p:to>
+                      <p:strVal val="hidden"/>
+                    </p:to>
+                  </p:set>
+                  <p:set>
+                    <p:cBhvr>
+                      <p:cTn id="7" dur="1" fill="hold">
+                        <p:stCondLst>
+                          <p:cond delay="0"/>
+                        </p:stCondLst>
+                      </p:cTn>
+                      <p:tgtEl>
+                        <p:spTgt spid="14"/>
+                      </p:tgtEl>
+                      <p:attrNameLst>
+                        <p:attrName>style.visibility</p:attrName>
+                      </p:attrNameLst>
+                    </p:cBhvr>
+                    <p:to>
+                      <p:strVal val="hidden"/>
+                    </p:to>
+                  </p:set>
+                  <p:set>
+                    <p:cBhvr>
+                      <p:cTn id="8" dur="1" fill="hold">
+                        <p:stCondLst>
+                          <p:cond delay="0"/>
+                        </p:stCondLst>
+                      </p:cTn>
+                      <p:tgtEl>
+                        <p:spTgt spid="16"/>
+                      </p:tgtEl>
+                      <p:attrNameLst>
+                        <p:attrName>style.visibility</p:attrName>
+                      </p:attrNameLst>
+                    </p:cBhvr>
+                    <p:to>
+                      <p:strVal val="hidden"/>
+                    </p:to>
+                  </p:set>
+                  <p:set>
+                    <p:cBhvr>
+                      <p:cTn id="9" dur="1" fill="hold">
+                        <p:stCondLst>
+                          <p:cond delay="0"/>
+                        </p:stCondLst>
+                      </p:cTn>
+                      <p:tgtEl>
+                        <p:spTgt spid="18"/>
+                      </p:tgtEl>
+                      <p:attrNameLst>
+                        <p:attrName>style.visibility</p:attrName>
+                      </p:attrNameLst>
+                    </p:cBhvr>
+                    <p:to>
+                      <p:strVal val="hidden"/>
+                    </p:to>
+                  </p:set>
+                  <p:set>
+                    <p:cBhvr>
+                      <p:cTn id="10" dur="1" fill="hold">
+                        <p:stCondLst>
+                          <p:cond delay="0"/>
+                        </p:stCondLst>
+                      </p:cTn>
+                      <p:tgtEl>
+                        <p:spTgt spid="20"/>
+                      </p:tgtEl>
+                      <p:attrNameLst>
+                        <p:attrName>style.visibility</p:attrName>
+                      </p:attrNameLst>
+                    </p:cBhvr>
+                    <p:to>
+                      <p:strVal val="hidden"/>
+                    </p:to>
+                  </p:set>
+                </p:childTnLst>
+              </p:cTn>
+            </p:par>
+          </p:childTnLst>
+        </p:cTn>
+      </p:par>
+    </p:tnLst>
+  </p:timing>
+</p:sld>
+</file>
+
+<file path=ppt/slides/slide7.xml><?xml version="1.0" encoding="utf-8"?>
+<p:sld xmlns:a="http://schemas.openxmlformats.org/drawingml/2006/main" xmlns:p="http://schemas.openxmlformats.org/presentationml/2006/main" xmlns:r="http://schemas.openxmlformats.org/officeDocument/2006/relationships">
+  <p:cSld>
+    <p:spTree>
+      <p:nvGrpSpPr>
+        <p:cNvPr id="1" name=""/>
+        <p:cNvGrpSpPr/>
+        <p:nvPr/>
+      </p:nvGrpSpPr>
+      <p:grpSpPr/>
+      <p:sp>
+        <p:nvSpPr>
+          <p:cNvPr id="2" name="Rectangle 1"/>
+          <p:cNvSpPr/>
+          <p:nvPr/>
+        </p:nvSpPr>
+        <p:spPr>
+          <a:xfrm>
+            <a:off x="0" y="0"/>
+            <a:ext cx="12192000" cy="6858000"/>
+          </a:xfrm>
+          <a:prstGeom prst="rect">
+            <a:avLst/>
+          </a:prstGeom>
+          <a:solidFill>
+            <a:srgbClr val="F5F5F7"/>
+          </a:solidFill>
+          <a:ln>
+            <a:noFill/>
+          </a:ln>
+          <a:effectLst/>
+        </p:spPr>
+        <p:style>
+          <a:lnRef idx="1">
+            <a:schemeClr val="accent1"/>
+          </a:lnRef>
+          <a:fillRef idx="3">
+            <a:schemeClr val="accent1"/>
+          </a:fillRef>
+          <a:effectRef idx="2">
+            <a:schemeClr val="accent1"/>
+          </a:effectRef>
+          <a:fontRef idx="minor">
+            <a:schemeClr val="lt1"/>
+          </a:fontRef>
+        </p:style>
+        <p:txBody>
+          <a:bodyPr rtlCol="0" anchor="ctr"/>
+          <a:lstStyle/>
+          <a:p>
+            <a:pPr algn="ctr"/>
+          </a:p>
+        </p:txBody>
+      </p:sp>
+      <p:sp>
+        <p:nvSpPr>
+          <p:cNvPr id="3" name="TextBox 2"/>
+          <p:cNvSpPr txBox="1"/>
+          <p:nvPr/>
+        </p:nvSpPr>
+        <p:spPr>
+          <a:xfrm>
+            <a:off x="762000" y="523875"/>
+            <a:ext cx="542925" cy="123825"/>
+          </a:xfrm>
+          <a:prstGeom prst="rect">
+            <a:avLst/>
+          </a:prstGeom>
+          <a:noFill/>
+        </p:spPr>
+        <p:txBody>
+          <a:bodyPr wrap="none" anchor="t" lIns="0" rIns="0" tIns="0" bIns="0">
+            <a:noAutofit/>
+          </a:bodyPr>
+          <a:lstStyle/>
+          <a:p>
+            <a:pPr algn="l"/>
+            <a:r>
+              <a:rPr sz="1350" b="1" i="0">
+                <a:solidFill>
+                  <a:srgbClr val="0066CC"/>
+                </a:solidFill>
+                <a:latin typeface="Roboto"/>
+              </a:rPr>
+              <a:t>VELA</a:t>
+            </a:r>
+          </a:p>
+        </p:txBody>
+      </p:sp>
+      <p:sp>
+        <p:nvSpPr>
+          <p:cNvPr id="4" name="TextBox 3"/>
+          <p:cNvSpPr txBox="1"/>
+          <p:nvPr/>
+        </p:nvSpPr>
+        <p:spPr>
+          <a:xfrm>
+            <a:off x="5267325" y="552450"/>
+            <a:ext cx="1657350" cy="123825"/>
+          </a:xfrm>
+          <a:prstGeom prst="rect">
+            <a:avLst/>
+          </a:prstGeom>
+          <a:noFill/>
+        </p:spPr>
+        <p:txBody>
+          <a:bodyPr wrap="none" anchor="t" lIns="0" rIns="0" tIns="0" bIns="0">
+            <a:noAutofit/>
+          </a:bodyPr>
+          <a:lstStyle/>
+          <a:p>
+            <a:pPr algn="ctr"/>
+            <a:r>
+              <a:rPr sz="1350" b="0" i="0">
+                <a:solidFill>
+                  <a:srgbClr val="6E6E73"/>
+                </a:solidFill>
+                <a:latin typeface="Roboto"/>
+              </a:rPr>
+              <a:t>BUSINESS MODEL</a:t>
+            </a:r>
+          </a:p>
+        </p:txBody>
+      </p:sp>
+      <p:sp>
+        <p:nvSpPr>
+          <p:cNvPr id="5" name="TextBox 4"/>
+          <p:cNvSpPr txBox="1"/>
+          <p:nvPr/>
+        </p:nvSpPr>
+        <p:spPr>
+          <a:xfrm>
+            <a:off x="10848975" y="552450"/>
+            <a:ext cx="581025" cy="133350"/>
+          </a:xfrm>
+          <a:prstGeom prst="rect">
+            <a:avLst/>
+          </a:prstGeom>
+          <a:noFill/>
+        </p:spPr>
+        <p:txBody>
+          <a:bodyPr wrap="none" anchor="t" lIns="0" rIns="0" tIns="0" bIns="0">
+            <a:noAutofit/>
+          </a:bodyPr>
+          <a:lstStyle/>
+          <a:p>
+            <a:pPr algn="r"/>
+            <a:r>
+              <a:rPr sz="1350" b="0" i="0">
+                <a:solidFill>
+                  <a:srgbClr val="6E6E73"/>
+                </a:solidFill>
+                <a:latin typeface="Roboto"/>
+              </a:rPr>
+              <a:t>07 / 10</a:t>
+            </a:r>
+          </a:p>
+        </p:txBody>
+      </p:sp>
+      <p:sp>
+        <p:nvSpPr>
+          <p:cNvPr id="6" name="Rectangle 5"/>
+          <p:cNvSpPr/>
+          <p:nvPr/>
+        </p:nvSpPr>
+        <p:spPr>
+          <a:xfrm>
+            <a:off x="762000" y="914400"/>
+            <a:ext cx="10668000" cy="9525"/>
+          </a:xfrm>
+          <a:prstGeom prst="rect">
+            <a:avLst/>
+          </a:prstGeom>
+          <a:solidFill>
+            <a:srgbClr val="D2D2D7"/>
+          </a:solidFill>
+          <a:ln>
+            <a:noFill/>
+          </a:ln>
+          <a:effectLst/>
+        </p:spPr>
+        <p:style>
+          <a:lnRef idx="1">
+            <a:schemeClr val="accent1"/>
+          </a:lnRef>
+          <a:fillRef idx="3">
+            <a:schemeClr val="accent1"/>
+          </a:fillRef>
+          <a:effectRef idx="2">
+            <a:schemeClr val="accent1"/>
+          </a:effectRef>
+          <a:fontRef idx="minor">
+            <a:schemeClr val="lt1"/>
+          </a:fontRef>
+        </p:style>
+        <p:txBody>
+          <a:bodyPr rtlCol="0" anchor="ctr"/>
+          <a:lstStyle/>
+          <a:p>
+            <a:pPr algn="ctr"/>
+          </a:p>
+        </p:txBody>
+      </p:sp>
+      <p:sp>
+        <p:nvSpPr>
+          <p:cNvPr id="7" name="TextBox 6"/>
+          <p:cNvSpPr txBox="1"/>
+          <p:nvPr/>
+        </p:nvSpPr>
+        <p:spPr>
+          <a:xfrm>
+            <a:off x="914400" y="1428750"/>
+            <a:ext cx="6496050" cy="1028700"/>
+          </a:xfrm>
+          <a:prstGeom prst="rect">
+            <a:avLst/>
+          </a:prstGeom>
+          <a:noFill/>
+        </p:spPr>
+        <p:txBody>
+          <a:bodyPr wrap="none" anchor="t" lIns="0" rIns="0" tIns="0" bIns="0">
+            <a:noAutofit/>
+          </a:bodyPr>
+          <a:lstStyle/>
+          <a:p>
+            <a:pPr algn="l">
+              <a:lnSpc>
+                <a:spcPts val="4125"/>
+              </a:lnSpc>
+            </a:pPr>
+            <a:r>
+              <a:rPr sz="4200" b="0" i="0">
+                <a:solidFill>
+                  <a:srgbClr val="1D1D1F"/>
+                </a:solidFill>
+                <a:latin typeface="Roboto"/>
+              </a:rPr>
+              <a:t>Land with one team.</a:t>
+            </a:r>
+          </a:p>
+          <a:p>
+            <a:pPr algn="l">
+              <a:lnSpc>
+                <a:spcPts val="4125"/>
+              </a:lnSpc>
+            </a:pPr>
+            <a:r>
+              <a:rPr sz="4200" b="0" i="0">
+                <a:solidFill>
+                  <a:srgbClr val="1D1D1F"/>
+                </a:solidFill>
+                <a:latin typeface="Roboto"/>
+              </a:rPr>
+              <a:t>Expand with shared context.</a:t>
+            </a:r>
+          </a:p>
+        </p:txBody>
+      </p:sp>
+      <p:sp>
+        <p:nvSpPr>
+          <p:cNvPr id="8" name="Oval 7"/>
+          <p:cNvSpPr/>
+          <p:nvPr/>
+        </p:nvSpPr>
+        <p:spPr>
+          <a:xfrm>
+            <a:off x="904875" y="3810000"/>
+            <a:ext cx="1428750" cy="1428750"/>
+          </a:xfrm>
+          <a:prstGeom prst="ellipse">
+            <a:avLst/>
+          </a:prstGeom>
+          <a:solidFill>
+            <a:srgbClr val="E8F2FF"/>
+          </a:solidFill>
+          <a:ln>
+            <a:noFill/>
+          </a:ln>
+          <a:effectLst/>
+        </p:spPr>
+        <p:style>
+          <a:lnRef idx="1">
+            <a:schemeClr val="accent1"/>
+          </a:lnRef>
+          <a:fillRef idx="3">
+            <a:schemeClr val="accent1"/>
+          </a:fillRef>
+          <a:effectRef idx="2">
+            <a:schemeClr val="accent1"/>
+          </a:effectRef>
+          <a:fontRef idx="minor">
+            <a:schemeClr val="lt1"/>
+          </a:fontRef>
+        </p:style>
+        <p:txBody>
+          <a:bodyPr rtlCol="0" anchor="ctr"/>
+          <a:lstStyle/>
+          <a:p>
+            <a:pPr algn="ctr"/>
+          </a:p>
+        </p:txBody>
+      </p:sp>
+      <p:sp>
+        <p:nvSpPr>
+          <p:cNvPr id="9" name="TextBox 8"/>
+          <p:cNvSpPr txBox="1"/>
+          <p:nvPr/>
+        </p:nvSpPr>
+        <p:spPr>
+          <a:xfrm>
+            <a:off x="1362075" y="3448050"/>
+            <a:ext cx="514350" cy="123825"/>
+          </a:xfrm>
+          <a:prstGeom prst="rect">
+            <a:avLst/>
+          </a:prstGeom>
+          <a:noFill/>
+        </p:spPr>
+        <p:txBody>
+          <a:bodyPr wrap="none" anchor="t" lIns="0" rIns="0" tIns="0" bIns="0">
+            <a:noAutofit/>
+          </a:bodyPr>
+          <a:lstStyle/>
+          <a:p>
+            <a:pPr algn="ctr"/>
+            <a:r>
+              <a:rPr sz="1350" b="1" i="0">
+                <a:solidFill>
+                  <a:srgbClr val="0066CC"/>
+                </a:solidFill>
+                <a:latin typeface="Roboto"/>
+              </a:rPr>
+              <a:t>LAND</a:t>
+            </a:r>
+          </a:p>
+        </p:txBody>
+      </p:sp>
+      <p:sp>
+        <p:nvSpPr>
+          <p:cNvPr id="10" name="TextBox 9"/>
+          <p:cNvSpPr txBox="1"/>
+          <p:nvPr/>
+        </p:nvSpPr>
+        <p:spPr>
+          <a:xfrm>
+            <a:off x="819150" y="4124325"/>
+            <a:ext cx="1609725" cy="676275"/>
+          </a:xfrm>
+          <a:prstGeom prst="rect">
+            <a:avLst/>
+          </a:prstGeom>
+          <a:noFill/>
+        </p:spPr>
+        <p:txBody>
+          <a:bodyPr wrap="none" anchor="t" lIns="0" rIns="0" tIns="0" bIns="0">
+            <a:noAutofit/>
+          </a:bodyPr>
+          <a:lstStyle/>
+          <a:p>
+            <a:pPr algn="ctr"/>
+            <a:r>
+              <a:rPr sz="5700" b="0" i="0">
+                <a:solidFill>
+                  <a:srgbClr val="1D1D1F"/>
+                </a:solidFill>
+                <a:latin typeface="Roboto"/>
+              </a:rPr>
+              <a:t>$24K</a:t>
+            </a:r>
+          </a:p>
+        </p:txBody>
+      </p:sp>
+      <p:sp>
+        <p:nvSpPr>
+          <p:cNvPr id="11" name="TextBox 10"/>
+          <p:cNvSpPr txBox="1"/>
+          <p:nvPr/>
+        </p:nvSpPr>
+        <p:spPr>
+          <a:xfrm>
+            <a:off x="923925" y="4953000"/>
+            <a:ext cx="1400175" cy="476250"/>
+          </a:xfrm>
+          <a:prstGeom prst="rect">
+            <a:avLst/>
+          </a:prstGeom>
+          <a:noFill/>
+        </p:spPr>
+        <p:txBody>
+          <a:bodyPr wrap="none" anchor="t" lIns="0" rIns="0" tIns="0" bIns="0">
+            <a:noAutofit/>
+          </a:bodyPr>
+          <a:lstStyle/>
+          <a:p>
+            <a:pPr algn="ctr">
+              <a:lnSpc>
+                <a:spcPts val="2175"/>
+              </a:lnSpc>
+            </a:pPr>
+            <a:r>
+              <a:rPr sz="1650" b="0" i="0">
+                <a:solidFill>
+                  <a:srgbClr val="6E6E73"/>
+                </a:solidFill>
+                <a:latin typeface="Roboto"/>
+              </a:rPr>
+              <a:t>Starting ACV</a:t>
+            </a:r>
+          </a:p>
+          <a:p>
+            <a:pPr algn="ctr">
+              <a:lnSpc>
+                <a:spcPts val="2175"/>
+              </a:lnSpc>
+            </a:pPr>
+            <a:r>
+              <a:rPr sz="1650" b="0" i="0">
+                <a:solidFill>
+                  <a:srgbClr val="6E6E73"/>
+                </a:solidFill>
+                <a:latin typeface="Roboto"/>
+              </a:rPr>
+              <a:t>1 product team</a:t>
+            </a:r>
+          </a:p>
+        </p:txBody>
+      </p:sp>
+      <p:sp>
+        <p:nvSpPr>
+          <p:cNvPr id="12" name="Oval 11"/>
+          <p:cNvSpPr/>
+          <p:nvPr/>
+        </p:nvSpPr>
+        <p:spPr>
+          <a:xfrm>
+            <a:off x="4286250" y="3476625"/>
+            <a:ext cx="2095500" cy="2095500"/>
+          </a:xfrm>
+          <a:prstGeom prst="ellipse">
+            <a:avLst/>
+          </a:prstGeom>
+          <a:solidFill>
+            <a:srgbClr val="CFE5FF"/>
+          </a:solidFill>
+          <a:ln>
+            <a:noFill/>
+          </a:ln>
+          <a:effectLst/>
+        </p:spPr>
+        <p:style>
+          <a:lnRef idx="1">
+            <a:schemeClr val="accent1"/>
+          </a:lnRef>
+          <a:fillRef idx="3">
+            <a:schemeClr val="accent1"/>
+          </a:fillRef>
+          <a:effectRef idx="2">
+            <a:schemeClr val="accent1"/>
+          </a:effectRef>
+          <a:fontRef idx="minor">
+            <a:schemeClr val="lt1"/>
+          </a:fontRef>
+        </p:style>
+        <p:txBody>
+          <a:bodyPr rtlCol="0" anchor="ctr"/>
+          <a:lstStyle/>
+          <a:p>
+            <a:pPr algn="ctr"/>
+          </a:p>
+        </p:txBody>
+      </p:sp>
+      <p:sp>
+        <p:nvSpPr>
+          <p:cNvPr id="13" name="TextBox 12"/>
+          <p:cNvSpPr txBox="1"/>
+          <p:nvPr/>
+        </p:nvSpPr>
+        <p:spPr>
+          <a:xfrm>
+            <a:off x="4943475" y="3448050"/>
+            <a:ext cx="781050" cy="123825"/>
+          </a:xfrm>
+          <a:prstGeom prst="rect">
+            <a:avLst/>
+          </a:prstGeom>
+          <a:noFill/>
+        </p:spPr>
+        <p:txBody>
+          <a:bodyPr wrap="none" anchor="t" lIns="0" rIns="0" tIns="0" bIns="0">
+            <a:noAutofit/>
+          </a:bodyPr>
+          <a:lstStyle/>
+          <a:p>
+            <a:pPr algn="ctr"/>
+            <a:r>
+              <a:rPr sz="1350" b="1" i="0">
+                <a:solidFill>
+                  <a:srgbClr val="0066CC"/>
+                </a:solidFill>
+                <a:latin typeface="Roboto"/>
+              </a:rPr>
+              <a:t>EXPAND</a:t>
+            </a:r>
+          </a:p>
+        </p:txBody>
+      </p:sp>
+      <p:sp>
+        <p:nvSpPr>
+          <p:cNvPr id="14" name="TextBox 13"/>
+          <p:cNvSpPr txBox="1"/>
+          <p:nvPr/>
+        </p:nvSpPr>
+        <p:spPr>
+          <a:xfrm>
+            <a:off x="4533900" y="4124325"/>
+            <a:ext cx="1609725" cy="676275"/>
+          </a:xfrm>
+          <a:prstGeom prst="rect">
+            <a:avLst/>
+          </a:prstGeom>
+          <a:noFill/>
+        </p:spPr>
+        <p:txBody>
+          <a:bodyPr wrap="none" anchor="t" lIns="0" rIns="0" tIns="0" bIns="0">
+            <a:noAutofit/>
+          </a:bodyPr>
+          <a:lstStyle/>
+          <a:p>
+            <a:pPr algn="ctr"/>
+            <a:r>
+              <a:rPr sz="5700" b="0" i="0">
+                <a:solidFill>
+                  <a:srgbClr val="1D1D1F"/>
+                </a:solidFill>
+                <a:latin typeface="Roboto"/>
+              </a:rPr>
+              <a:t>$72K</a:t>
+            </a:r>
+          </a:p>
+        </p:txBody>
+      </p:sp>
+      <p:sp>
+        <p:nvSpPr>
+          <p:cNvPr id="15" name="TextBox 14"/>
+          <p:cNvSpPr txBox="1"/>
+          <p:nvPr/>
+        </p:nvSpPr>
+        <p:spPr>
+          <a:xfrm>
+            <a:off x="4343400" y="4953000"/>
+            <a:ext cx="1981200" cy="438150"/>
+          </a:xfrm>
+          <a:prstGeom prst="rect">
+            <a:avLst/>
+          </a:prstGeom>
+          <a:noFill/>
+        </p:spPr>
+        <p:txBody>
+          <a:bodyPr wrap="none" anchor="t" lIns="0" rIns="0" tIns="0" bIns="0">
+            <a:noAutofit/>
+          </a:bodyPr>
+          <a:lstStyle/>
+          <a:p>
+            <a:pPr algn="ctr">
+              <a:lnSpc>
+                <a:spcPts val="2175"/>
+              </a:lnSpc>
+            </a:pPr>
+            <a:r>
+              <a:rPr sz="1650" b="0" i="0">
+                <a:solidFill>
+                  <a:srgbClr val="6E6E73"/>
+                </a:solidFill>
+                <a:latin typeface="Roboto"/>
+              </a:rPr>
+              <a:t>Median year-two ACV</a:t>
+            </a:r>
+          </a:p>
+          <a:p>
+            <a:pPr algn="ctr">
+              <a:lnSpc>
+                <a:spcPts val="2175"/>
+              </a:lnSpc>
+            </a:pPr>
+            <a:r>
+              <a:rPr sz="1650" b="0" i="0">
+                <a:solidFill>
+                  <a:srgbClr val="6E6E73"/>
+                </a:solidFill>
+                <a:latin typeface="Roboto"/>
+              </a:rPr>
+              <a:t>3 connected teams</a:t>
+            </a:r>
+          </a:p>
+        </p:txBody>
+      </p:sp>
+      <p:sp>
+        <p:nvSpPr>
+          <p:cNvPr id="16" name="Oval 15"/>
+          <p:cNvSpPr/>
+          <p:nvPr/>
+        </p:nvSpPr>
+        <p:spPr>
+          <a:xfrm>
+            <a:off x="7667625" y="3143250"/>
+            <a:ext cx="2762250" cy="2762250"/>
+          </a:xfrm>
+          <a:prstGeom prst="ellipse">
+            <a:avLst/>
+          </a:prstGeom>
+          <a:solidFill>
+            <a:srgbClr val="0066CC"/>
+          </a:solidFill>
+          <a:ln>
+            <a:noFill/>
+          </a:ln>
+          <a:effectLst/>
+        </p:spPr>
+        <p:style>
+          <a:lnRef idx="1">
+            <a:schemeClr val="accent1"/>
+          </a:lnRef>
+          <a:fillRef idx="3">
+            <a:schemeClr val="accent1"/>
+          </a:fillRef>
+          <a:effectRef idx="2">
+            <a:schemeClr val="accent1"/>
+          </a:effectRef>
+          <a:fontRef idx="minor">
+            <a:schemeClr val="lt1"/>
+          </a:fontRef>
+        </p:style>
+        <p:txBody>
+          <a:bodyPr rtlCol="0" anchor="ctr"/>
+          <a:lstStyle/>
+          <a:p>
+            <a:pPr algn="ctr"/>
+          </a:p>
+        </p:txBody>
+      </p:sp>
+      <p:sp>
+        <p:nvSpPr>
+          <p:cNvPr id="17" name="TextBox 16"/>
+          <p:cNvSpPr txBox="1"/>
+          <p:nvPr/>
+        </p:nvSpPr>
+        <p:spPr>
+          <a:xfrm>
+            <a:off x="8505825" y="3448050"/>
+            <a:ext cx="1095375" cy="123825"/>
+          </a:xfrm>
+          <a:prstGeom prst="rect">
+            <a:avLst/>
+          </a:prstGeom>
+          <a:noFill/>
+        </p:spPr>
+        <p:txBody>
+          <a:bodyPr wrap="none" anchor="t" lIns="0" rIns="0" tIns="0" bIns="0">
+            <a:noAutofit/>
+          </a:bodyPr>
+          <a:lstStyle/>
+          <a:p>
+            <a:pPr algn="ctr"/>
+            <a:r>
+              <a:rPr sz="1350" b="1" i="0">
+                <a:solidFill>
+                  <a:srgbClr val="0066CC"/>
+                </a:solidFill>
+                <a:latin typeface="Roboto"/>
+              </a:rPr>
+              <a:t>COMPOUND</a:t>
+            </a:r>
+          </a:p>
+        </p:txBody>
+      </p:sp>
+      <p:sp>
+        <p:nvSpPr>
+          <p:cNvPr id="18" name="TextBox 17"/>
+          <p:cNvSpPr txBox="1"/>
+          <p:nvPr/>
+        </p:nvSpPr>
+        <p:spPr>
+          <a:xfrm>
+            <a:off x="8210550" y="4124325"/>
+            <a:ext cx="1676400" cy="533400"/>
+          </a:xfrm>
+          <a:prstGeom prst="rect">
+            <a:avLst/>
+          </a:prstGeom>
+          <a:noFill/>
+        </p:spPr>
+        <p:txBody>
+          <a:bodyPr wrap="none" anchor="t" lIns="0" rIns="0" tIns="0" bIns="0">
+            <a:noAutofit/>
+          </a:bodyPr>
+          <a:lstStyle/>
+          <a:p>
+            <a:pPr algn="ctr"/>
+            <a:r>
+              <a:rPr sz="5700" b="0" i="0">
+                <a:solidFill>
+                  <a:srgbClr val="FFFFFF"/>
+                </a:solidFill>
+                <a:latin typeface="Roboto"/>
+              </a:rPr>
+              <a:t>118%</a:t>
+            </a:r>
+          </a:p>
+        </p:txBody>
+      </p:sp>
+      <p:sp>
+        <p:nvSpPr>
+          <p:cNvPr id="19" name="TextBox 18"/>
+          <p:cNvSpPr txBox="1"/>
+          <p:nvPr/>
+        </p:nvSpPr>
+        <p:spPr>
+          <a:xfrm>
+            <a:off x="8048625" y="4953000"/>
+            <a:ext cx="2000250" cy="476250"/>
+          </a:xfrm>
+          <a:prstGeom prst="rect">
+            <a:avLst/>
+          </a:prstGeom>
+          <a:noFill/>
+        </p:spPr>
+        <p:txBody>
+          <a:bodyPr wrap="none" anchor="t" lIns="0" rIns="0" tIns="0" bIns="0">
+            <a:noAutofit/>
+          </a:bodyPr>
+          <a:lstStyle/>
+          <a:p>
+            <a:pPr algn="ctr">
+              <a:lnSpc>
+                <a:spcPts val="2175"/>
+              </a:lnSpc>
+            </a:pPr>
+            <a:r>
+              <a:rPr sz="1650" b="0" i="0">
+                <a:solidFill>
+                  <a:srgbClr val="FFFFFF"/>
+                </a:solidFill>
+                <a:latin typeface="Roboto"/>
+              </a:rPr>
+              <a:t>Net revenue retention</a:t>
+            </a:r>
+          </a:p>
+          <a:p>
+            <a:pPr algn="ctr">
+              <a:lnSpc>
+                <a:spcPts val="2175"/>
+              </a:lnSpc>
+            </a:pPr>
+            <a:r>
+              <a:rPr sz="1650" b="0" i="0">
+                <a:solidFill>
+                  <a:srgbClr val="FFFFFF"/>
+                </a:solidFill>
+                <a:latin typeface="Roboto"/>
+              </a:rPr>
+              <a:t>Trailing 12 months</a:t>
+            </a:r>
+          </a:p>
+        </p:txBody>
+      </p:sp>
+      <p:sp>
+        <p:nvSpPr>
+          <p:cNvPr id="20" name="TextBox 19"/>
+          <p:cNvSpPr txBox="1"/>
+          <p:nvPr/>
+        </p:nvSpPr>
+        <p:spPr>
+          <a:xfrm>
+            <a:off x="914400" y="6343650"/>
+            <a:ext cx="3743325" cy="171450"/>
+          </a:xfrm>
+          <a:prstGeom prst="rect">
+            <a:avLst/>
+          </a:prstGeom>
+          <a:noFill/>
+        </p:spPr>
+        <p:txBody>
+          <a:bodyPr wrap="none" anchor="t" lIns="0" rIns="0" tIns="0" bIns="0">
+            <a:noAutofit/>
+          </a:bodyPr>
+          <a:lstStyle/>
+          <a:p>
+            <a:pPr algn="l"/>
+            <a:r>
+              <a:rPr sz="1350" b="0" i="0">
+                <a:solidFill>
+                  <a:srgbClr val="6E6E73"/>
+                </a:solidFill>
+                <a:latin typeface="Roboto"/>
+              </a:rPr>
+              <a:t>Illustrative pricing and retention metrics · Q2 2026</a:t>
+            </a:r>
+          </a:p>
+        </p:txBody>
+      </p:sp>
+    </p:spTree>
+  </p:cSld>
+  <p:clrMapOvr>
+    <a:masterClrMapping/>
+  </p:clrMapOvr>
+  <p:transition xmlns:p14="http://schemas.microsoft.com/office/powerpoint/2010/main" spd="fast" advClick="1" p14:dur="350">
+    <p:fade/>
+  </p:transition>
+  <p:timing>
+    <p:tnLst>
+      <p:par>
+        <p:cTn id="1" dur="indefinite" restart="never" nodeType="tmRoot">
+          <p:childTnLst>
+            <p:seq concurrent="1" nextAc="seek">
+              <p:cTn id="2" dur="indefinite" nodeType="mainSeq">
+                <p:childTnLst>
+                  <p:par>
+                    <p:cTn id="8" fill="hold">
+                      <p:stCondLst>
+                        <p:cond delay="indefinite"/>
+                      </p:stCondLst>
+                      <p:childTnLst>
+                        <p:par>
+                          <p:cTn id="9" fill="hold">
+                            <p:stCondLst>
+                              <p:cond delay="0"/>
+                            </p:stCondLst>
+                            <p:childTnLst>
+                              <p:par>
+                                <p:cTn id="10" presetID="10" presetClass="entr" presetSubtype="0" fill="hold" grpId="0" nodeType="clickEffect">
+                                  <p:stCondLst>
+                                    <p:cond delay="0"/>
+                                  </p:stCondLst>
+                                  <p:childTnLst>
+                                    <p:set>
+                                      <p:cBhvr>
+                                        <p:cTn id="11" dur="1" fill="hold">
+                                          <p:stCondLst>
+                                            <p:cond delay="0"/>
+                                          </p:stCondLst>
+                                        </p:cTn>
+                                        <p:tgtEl>
+                                          <p:spTgt spid="7"/>
+                                        </p:tgtEl>
+                                        <p:attrNameLst>
+                                          <p:attrName>style.visibility</p:attrName>
+                                        </p:attrNameLst>
+                                      </p:cBhvr>
+                                      <p:to>
+                                        <p:strVal val="visible"/>
+                                      </p:to>
+                                    </p:set>
+                                    <p:animEffect transition="in" filter="fade">
+                                      <p:cBhvr>
+                                        <p:cTn id="12" dur="400"/>
+                                        <p:tgtEl>
+                                          <p:spTgt spid="7"/>
+                                        </p:tgtEl>
+                                      </p:cBhvr>
+                                    </p:animEffect>
+                                  </p:childTnLst>
+                                </p:cTn>
+                              </p:par>
+                              <p:par>
+                                <p:cTn id="13" presetID="10" presetClass="entr" presetSubtype="0" fill="hold" grpId="0" nodeType="afterEffect">
+                                  <p:stCondLst>
+                                    <p:cond delay="0"/>
+                                  </p:stCondLst>
+                                  <p:childTnLst>
+                                    <p:set>
+                                      <p:cBhvr>
+                                        <p:cTn id="14" dur="1" fill="hold">
+                                          <p:stCondLst>
+                                            <p:cond delay="0"/>
+                                          </p:stCondLst>
+                                        </p:cTn>
+                                        <p:tgtEl>
+                                          <p:spTgt spid="8"/>
+                                        </p:tgtEl>
+                                        <p:attrNameLst>
+                                          <p:attrName>style.visibility</p:attrName>
+                                        </p:attrNameLst>
+                                      </p:cBhvr>
+                                      <p:to>
+                                        <p:strVal val="visible"/>
+                                      </p:to>
+                                    </p:set>
+                                    <p:animEffect transition="in" filter="fade">
+                                      <p:cBhvr>
+                                        <p:cTn id="15" dur="320"/>
+                                        <p:tgtEl>
+                                          <p:spTgt spid="8"/>
+                                        </p:tgtEl>
+                                      </p:cBhvr>
+                                    </p:animEffect>
+                                  </p:childTnLst>
+                                </p:cTn>
+                              </p:par>
+                              <p:par>
+                                <p:cTn id="16" presetID="10" presetClass="entr" presetSubtype="0" fill="hold" grpId="0" nodeType="afterEffect">
+                                  <p:stCondLst>
+                                    <p:cond delay="0"/>
+                                  </p:stCondLst>
+                                  <p:childTnLst>
+                                    <p:set>
+                                      <p:cBhvr>
+                                        <p:cTn id="17" dur="1" fill="hold">
+                                          <p:stCondLst>
+                                            <p:cond delay="0"/>
+                                          </p:stCondLst>
+                                        </p:cTn>
+                                        <p:tgtEl>
+                                          <p:spTgt spid="12"/>
+                                        </p:tgtEl>
+                                        <p:attrNameLst>
+                                          <p:attrName>style.visibility</p:attrName>
+                                        </p:attrNameLst>
+                                      </p:cBhvr>
+                                      <p:to>
+                                        <p:strVal val="visible"/>
+                                      </p:to>
+                                    </p:set>
+                                    <p:animEffect transition="in" filter="fade">
+                                      <p:cBhvr>
+                                        <p:cTn id="18" dur="320"/>
+                                        <p:tgtEl>
+                                          <p:spTgt spid="12"/>
+                                        </p:tgtEl>
+                                      </p:cBhvr>
+                                    </p:animEffect>
+                                  </p:childTnLst>
+                                </p:cTn>
+                              </p:par>
+                              <p:par>
+                                <p:cTn id="19" presetID="10" presetClass="entr" presetSubtype="0" fill="hold" grpId="0" nodeType="afterEffect">
+                                  <p:stCondLst>
+                                    <p:cond delay="0"/>
+                                  </p:stCondLst>
+                                  <p:childTnLst>
+                                    <p:set>
+                                      <p:cBhvr>
+                                        <p:cTn id="20" dur="1" fill="hold">
+                                          <p:stCondLst>
+                                            <p:cond delay="0"/>
+                                          </p:stCondLst>
+                                        </p:cTn>
+                                        <p:tgtEl>
+                                          <p:spTgt spid="16"/>
+                                        </p:tgtEl>
+                                        <p:attrNameLst>
+                                          <p:attrName>style.visibility</p:attrName>
+                                        </p:attrNameLst>
+                                      </p:cBhvr>
+                                      <p:to>
+                                        <p:strVal val="visible"/>
+                                      </p:to>
+                                    </p:set>
+                                    <p:animEffect transition="in" filter="fade">
+                                      <p:cBhvr>
+                                        <p:cTn id="21" dur="320"/>
+                                        <p:tgtEl>
+                                          <p:spTgt spid="16"/>
                                         </p:tgtEl>
                                       </p:cBhvr>
                                     </p:animEffect>
@@ -11031,7 +12681,7 @@
                         </p:stCondLst>
                       </p:cTn>
                       <p:tgtEl>
-                        <p:spTgt spid="10"/>
+                        <p:spTgt spid="12"/>
                       </p:tgtEl>
                       <p:attrNameLst>
                         <p:attrName>style.visibility</p:attrName>
@@ -11049,1026 +12699,7 @@
                         </p:stCondLst>
                       </p:cTn>
                       <p:tgtEl>
-                        <p:spTgt spid="12"/>
-                      </p:tgtEl>
-                      <p:attrNameLst>
-                        <p:attrName>style.visibility</p:attrName>
-                      </p:attrNameLst>
-                    </p:cBhvr>
-                    <p:to>
-                      <p:strVal val="hidden"/>
-                    </p:to>
-                  </p:set>
-                  <p:set>
-                    <p:cBhvr>
-                      <p:cTn id="8" dur="1" fill="hold">
-                        <p:stCondLst>
-                          <p:cond delay="0"/>
-                        </p:stCondLst>
-                      </p:cTn>
-                      <p:tgtEl>
-                        <p:spTgt spid="14"/>
-                      </p:tgtEl>
-                      <p:attrNameLst>
-                        <p:attrName>style.visibility</p:attrName>
-                      </p:attrNameLst>
-                    </p:cBhvr>
-                    <p:to>
-                      <p:strVal val="hidden"/>
-                    </p:to>
-                  </p:set>
-                  <p:set>
-                    <p:cBhvr>
-                      <p:cTn id="9" dur="1" fill="hold">
-                        <p:stCondLst>
-                          <p:cond delay="0"/>
-                        </p:stCondLst>
-                      </p:cTn>
-                      <p:tgtEl>
                         <p:spTgt spid="16"/>
-                      </p:tgtEl>
-                      <p:attrNameLst>
-                        <p:attrName>style.visibility</p:attrName>
-                      </p:attrNameLst>
-                    </p:cBhvr>
-                    <p:to>
-                      <p:strVal val="hidden"/>
-                    </p:to>
-                  </p:set>
-                  <p:set>
-                    <p:cBhvr>
-                      <p:cTn id="10" dur="1" fill="hold">
-                        <p:stCondLst>
-                          <p:cond delay="0"/>
-                        </p:stCondLst>
-                      </p:cTn>
-                      <p:tgtEl>
-                        <p:spTgt spid="18"/>
-                      </p:tgtEl>
-                      <p:attrNameLst>
-                        <p:attrName>style.visibility</p:attrName>
-                      </p:attrNameLst>
-                    </p:cBhvr>
-                    <p:to>
-                      <p:strVal val="hidden"/>
-                    </p:to>
-                  </p:set>
-                </p:childTnLst>
-              </p:cTn>
-            </p:par>
-          </p:childTnLst>
-        </p:cTn>
-      </p:par>
-    </p:tnLst>
-  </p:timing>
-</p:sld>
-</file>
-
-<file path=ppt/slides/slide7.xml><?xml version="1.0" encoding="utf-8"?>
-<p:sld xmlns:a="http://schemas.openxmlformats.org/drawingml/2006/main" xmlns:p="http://schemas.openxmlformats.org/presentationml/2006/main" xmlns:r="http://schemas.openxmlformats.org/officeDocument/2006/relationships">
-  <p:cSld>
-    <p:spTree>
-      <p:nvGrpSpPr>
-        <p:cNvPr id="1" name=""/>
-        <p:cNvGrpSpPr/>
-        <p:nvPr/>
-      </p:nvGrpSpPr>
-      <p:grpSpPr/>
-      <p:sp>
-        <p:nvSpPr>
-          <p:cNvPr id="2" name="Rectangle 1"/>
-          <p:cNvSpPr/>
-          <p:nvPr/>
-        </p:nvSpPr>
-        <p:spPr>
-          <a:xfrm>
-            <a:off x="0" y="0"/>
-            <a:ext cx="12192000" cy="6858000"/>
-          </a:xfrm>
-          <a:prstGeom prst="rect">
-            <a:avLst/>
-          </a:prstGeom>
-          <a:solidFill>
-            <a:srgbClr val="F5F5F7"/>
-          </a:solidFill>
-          <a:ln>
-            <a:noFill/>
-          </a:ln>
-          <a:effectLst/>
-        </p:spPr>
-        <p:style>
-          <a:lnRef idx="1">
-            <a:schemeClr val="accent1"/>
-          </a:lnRef>
-          <a:fillRef idx="3">
-            <a:schemeClr val="accent1"/>
-          </a:fillRef>
-          <a:effectRef idx="2">
-            <a:schemeClr val="accent1"/>
-          </a:effectRef>
-          <a:fontRef idx="minor">
-            <a:schemeClr val="lt1"/>
-          </a:fontRef>
-        </p:style>
-        <p:txBody>
-          <a:bodyPr rtlCol="0" anchor="ctr"/>
-          <a:lstStyle/>
-          <a:p>
-            <a:pPr algn="ctr"/>
-          </a:p>
-        </p:txBody>
-      </p:sp>
-      <p:sp>
-        <p:nvSpPr>
-          <p:cNvPr id="3" name="TextBox 2"/>
-          <p:cNvSpPr txBox="1"/>
-          <p:nvPr/>
-        </p:nvSpPr>
-        <p:spPr>
-          <a:xfrm>
-            <a:off x="762000" y="523875"/>
-            <a:ext cx="542925" cy="123825"/>
-          </a:xfrm>
-          <a:prstGeom prst="rect">
-            <a:avLst/>
-          </a:prstGeom>
-          <a:noFill/>
-        </p:spPr>
-        <p:txBody>
-          <a:bodyPr wrap="none" anchor="t" lIns="0" rIns="0" tIns="0" bIns="0">
-            <a:noAutofit/>
-          </a:bodyPr>
-          <a:lstStyle/>
-          <a:p>
-            <a:pPr algn="l"/>
-            <a:r>
-              <a:rPr sz="1350" b="1" i="0">
-                <a:solidFill>
-                  <a:srgbClr val="0066CC"/>
-                </a:solidFill>
-                <a:latin typeface="Roboto"/>
-              </a:rPr>
-              <a:t>VELA</a:t>
-            </a:r>
-          </a:p>
-        </p:txBody>
-      </p:sp>
-      <p:sp>
-        <p:nvSpPr>
-          <p:cNvPr id="4" name="TextBox 3"/>
-          <p:cNvSpPr txBox="1"/>
-          <p:nvPr/>
-        </p:nvSpPr>
-        <p:spPr>
-          <a:xfrm>
-            <a:off x="5267325" y="552450"/>
-            <a:ext cx="1657350" cy="123825"/>
-          </a:xfrm>
-          <a:prstGeom prst="rect">
-            <a:avLst/>
-          </a:prstGeom>
-          <a:noFill/>
-        </p:spPr>
-        <p:txBody>
-          <a:bodyPr wrap="none" anchor="t" lIns="0" rIns="0" tIns="0" bIns="0">
-            <a:noAutofit/>
-          </a:bodyPr>
-          <a:lstStyle/>
-          <a:p>
-            <a:pPr algn="ctr"/>
-            <a:r>
-              <a:rPr sz="1350" b="0" i="0">
-                <a:solidFill>
-                  <a:srgbClr val="6E6E73"/>
-                </a:solidFill>
-                <a:latin typeface="Roboto"/>
-              </a:rPr>
-              <a:t>BUSINESS MODEL</a:t>
-            </a:r>
-          </a:p>
-        </p:txBody>
-      </p:sp>
-      <p:sp>
-        <p:nvSpPr>
-          <p:cNvPr id="5" name="TextBox 4"/>
-          <p:cNvSpPr txBox="1"/>
-          <p:nvPr/>
-        </p:nvSpPr>
-        <p:spPr>
-          <a:xfrm>
-            <a:off x="10848975" y="552450"/>
-            <a:ext cx="581025" cy="133350"/>
-          </a:xfrm>
-          <a:prstGeom prst="rect">
-            <a:avLst/>
-          </a:prstGeom>
-          <a:noFill/>
-        </p:spPr>
-        <p:txBody>
-          <a:bodyPr wrap="none" anchor="t" lIns="0" rIns="0" tIns="0" bIns="0">
-            <a:noAutofit/>
-          </a:bodyPr>
-          <a:lstStyle/>
-          <a:p>
-            <a:pPr algn="r"/>
-            <a:r>
-              <a:rPr sz="1350" b="0" i="0">
-                <a:solidFill>
-                  <a:srgbClr val="6E6E73"/>
-                </a:solidFill>
-                <a:latin typeface="Roboto"/>
-              </a:rPr>
-              <a:t>07 / 10</a:t>
-            </a:r>
-          </a:p>
-        </p:txBody>
-      </p:sp>
-      <p:sp>
-        <p:nvSpPr>
-          <p:cNvPr id="6" name="Rectangle 5"/>
-          <p:cNvSpPr/>
-          <p:nvPr/>
-        </p:nvSpPr>
-        <p:spPr>
-          <a:xfrm>
-            <a:off x="762000" y="914400"/>
-            <a:ext cx="10668000" cy="9525"/>
-          </a:xfrm>
-          <a:prstGeom prst="rect">
-            <a:avLst/>
-          </a:prstGeom>
-          <a:solidFill>
-            <a:srgbClr val="D2D2D7"/>
-          </a:solidFill>
-          <a:ln>
-            <a:noFill/>
-          </a:ln>
-          <a:effectLst/>
-        </p:spPr>
-        <p:style>
-          <a:lnRef idx="1">
-            <a:schemeClr val="accent1"/>
-          </a:lnRef>
-          <a:fillRef idx="3">
-            <a:schemeClr val="accent1"/>
-          </a:fillRef>
-          <a:effectRef idx="2">
-            <a:schemeClr val="accent1"/>
-          </a:effectRef>
-          <a:fontRef idx="minor">
-            <a:schemeClr val="lt1"/>
-          </a:fontRef>
-        </p:style>
-        <p:txBody>
-          <a:bodyPr rtlCol="0" anchor="ctr"/>
-          <a:lstStyle/>
-          <a:p>
-            <a:pPr algn="ctr"/>
-          </a:p>
-        </p:txBody>
-      </p:sp>
-      <p:sp>
-        <p:nvSpPr>
-          <p:cNvPr id="7" name="TextBox 6"/>
-          <p:cNvSpPr txBox="1"/>
-          <p:nvPr/>
-        </p:nvSpPr>
-        <p:spPr>
-          <a:xfrm>
-            <a:off x="914400" y="1428750"/>
-            <a:ext cx="6496050" cy="1028700"/>
-          </a:xfrm>
-          <a:prstGeom prst="rect">
-            <a:avLst/>
-          </a:prstGeom>
-          <a:noFill/>
-        </p:spPr>
-        <p:txBody>
-          <a:bodyPr wrap="none" anchor="t" lIns="0" rIns="0" tIns="0" bIns="0">
-            <a:noAutofit/>
-          </a:bodyPr>
-          <a:lstStyle/>
-          <a:p>
-            <a:pPr algn="l">
-              <a:lnSpc>
-                <a:spcPts val="4125"/>
-              </a:lnSpc>
-            </a:pPr>
-            <a:r>
-              <a:rPr sz="4200" b="0" i="0">
-                <a:solidFill>
-                  <a:srgbClr val="1D1D1F"/>
-                </a:solidFill>
-                <a:latin typeface="Roboto"/>
-              </a:rPr>
-              <a:t>Land with one team.</a:t>
-            </a:r>
-          </a:p>
-          <a:p>
-            <a:pPr algn="l">
-              <a:lnSpc>
-                <a:spcPts val="4125"/>
-              </a:lnSpc>
-            </a:pPr>
-            <a:r>
-              <a:rPr sz="4200" b="0" i="0">
-                <a:solidFill>
-                  <a:srgbClr val="1D1D1F"/>
-                </a:solidFill>
-                <a:latin typeface="Roboto"/>
-              </a:rPr>
-              <a:t>Expand with shared context.</a:t>
-            </a:r>
-          </a:p>
-        </p:txBody>
-      </p:sp>
-      <p:sp>
-        <p:nvSpPr>
-          <p:cNvPr id="8" name="TextBox 7"/>
-          <p:cNvSpPr txBox="1"/>
-          <p:nvPr/>
-        </p:nvSpPr>
-        <p:spPr>
-          <a:xfrm>
-            <a:off x="914400" y="3429000"/>
-            <a:ext cx="514350" cy="123825"/>
-          </a:xfrm>
-          <a:prstGeom prst="rect">
-            <a:avLst/>
-          </a:prstGeom>
-          <a:noFill/>
-        </p:spPr>
-        <p:txBody>
-          <a:bodyPr wrap="none" anchor="t" lIns="0" rIns="0" tIns="0" bIns="0">
-            <a:noAutofit/>
-          </a:bodyPr>
-          <a:lstStyle/>
-          <a:p>
-            <a:pPr algn="l"/>
-            <a:r>
-              <a:rPr sz="1350" b="1" i="0">
-                <a:solidFill>
-                  <a:srgbClr val="0066CC"/>
-                </a:solidFill>
-                <a:latin typeface="Roboto"/>
-              </a:rPr>
-              <a:t>LAND</a:t>
-            </a:r>
-          </a:p>
-        </p:txBody>
-      </p:sp>
-      <p:sp>
-        <p:nvSpPr>
-          <p:cNvPr id="9" name="TextBox 8"/>
-          <p:cNvSpPr txBox="1"/>
-          <p:nvPr/>
-        </p:nvSpPr>
-        <p:spPr>
-          <a:xfrm>
-            <a:off x="914400" y="3857625"/>
-            <a:ext cx="1609725" cy="676275"/>
-          </a:xfrm>
-          <a:prstGeom prst="rect">
-            <a:avLst/>
-          </a:prstGeom>
-          <a:noFill/>
-        </p:spPr>
-        <p:txBody>
-          <a:bodyPr wrap="none" anchor="t" lIns="0" rIns="0" tIns="0" bIns="0">
-            <a:noAutofit/>
-          </a:bodyPr>
-          <a:lstStyle/>
-          <a:p>
-            <a:pPr algn="l"/>
-            <a:r>
-              <a:rPr sz="5700" b="0" i="0">
-                <a:solidFill>
-                  <a:srgbClr val="1D1D1F"/>
-                </a:solidFill>
-                <a:latin typeface="Roboto"/>
-              </a:rPr>
-              <a:t>$24K</a:t>
-            </a:r>
-          </a:p>
-        </p:txBody>
-      </p:sp>
-      <p:sp>
-        <p:nvSpPr>
-          <p:cNvPr id="10" name="TextBox 9"/>
-          <p:cNvSpPr txBox="1"/>
-          <p:nvPr/>
-        </p:nvSpPr>
-        <p:spPr>
-          <a:xfrm>
-            <a:off x="914400" y="4857750"/>
-            <a:ext cx="1400175" cy="476250"/>
-          </a:xfrm>
-          <a:prstGeom prst="rect">
-            <a:avLst/>
-          </a:prstGeom>
-          <a:noFill/>
-        </p:spPr>
-        <p:txBody>
-          <a:bodyPr wrap="none" anchor="t" lIns="0" rIns="0" tIns="0" bIns="0">
-            <a:noAutofit/>
-          </a:bodyPr>
-          <a:lstStyle/>
-          <a:p>
-            <a:pPr algn="l">
-              <a:lnSpc>
-                <a:spcPts val="2175"/>
-              </a:lnSpc>
-            </a:pPr>
-            <a:r>
-              <a:rPr sz="1650" b="0" i="0">
-                <a:solidFill>
-                  <a:srgbClr val="6E6E73"/>
-                </a:solidFill>
-                <a:latin typeface="Roboto"/>
-              </a:rPr>
-              <a:t>Starting ACV</a:t>
-            </a:r>
-          </a:p>
-          <a:p>
-            <a:pPr algn="l">
-              <a:lnSpc>
-                <a:spcPts val="2175"/>
-              </a:lnSpc>
-            </a:pPr>
-            <a:r>
-              <a:rPr sz="1650" b="0" i="0">
-                <a:solidFill>
-                  <a:srgbClr val="6E6E73"/>
-                </a:solidFill>
-                <a:latin typeface="Roboto"/>
-              </a:rPr>
-              <a:t>1 product team</a:t>
-            </a:r>
-          </a:p>
-        </p:txBody>
-      </p:sp>
-      <p:sp>
-        <p:nvSpPr>
-          <p:cNvPr id="11" name="Rectangle 10"/>
-          <p:cNvSpPr/>
-          <p:nvPr/>
-        </p:nvSpPr>
-        <p:spPr>
-          <a:xfrm>
-            <a:off x="3867150" y="4333875"/>
-            <a:ext cx="400050" cy="19050"/>
-          </a:xfrm>
-          <a:prstGeom prst="rect">
-            <a:avLst/>
-          </a:prstGeom>
-          <a:solidFill>
-            <a:srgbClr val="D2D2D7"/>
-          </a:solidFill>
-          <a:ln>
-            <a:noFill/>
-          </a:ln>
-          <a:effectLst/>
-        </p:spPr>
-        <p:style>
-          <a:lnRef idx="1">
-            <a:schemeClr val="accent1"/>
-          </a:lnRef>
-          <a:fillRef idx="3">
-            <a:schemeClr val="accent1"/>
-          </a:fillRef>
-          <a:effectRef idx="2">
-            <a:schemeClr val="accent1"/>
-          </a:effectRef>
-          <a:fontRef idx="minor">
-            <a:schemeClr val="lt1"/>
-          </a:fontRef>
-        </p:style>
-        <p:txBody>
-          <a:bodyPr rtlCol="0" anchor="ctr"/>
-          <a:lstStyle/>
-          <a:p>
-            <a:pPr algn="ctr"/>
-          </a:p>
-        </p:txBody>
-      </p:sp>
-      <p:sp>
-        <p:nvSpPr>
-          <p:cNvPr id="12" name="Oval 11"/>
-          <p:cNvSpPr/>
-          <p:nvPr/>
-        </p:nvSpPr>
-        <p:spPr>
-          <a:xfrm>
-            <a:off x="4210050" y="4305300"/>
-            <a:ext cx="76200" cy="76200"/>
-          </a:xfrm>
-          <a:prstGeom prst="ellipse">
-            <a:avLst/>
-          </a:prstGeom>
-          <a:solidFill>
-            <a:srgbClr val="0066CC"/>
-          </a:solidFill>
-          <a:ln>
-            <a:noFill/>
-          </a:ln>
-          <a:effectLst/>
-        </p:spPr>
-        <p:style>
-          <a:lnRef idx="1">
-            <a:schemeClr val="accent1"/>
-          </a:lnRef>
-          <a:fillRef idx="3">
-            <a:schemeClr val="accent1"/>
-          </a:fillRef>
-          <a:effectRef idx="2">
-            <a:schemeClr val="accent1"/>
-          </a:effectRef>
-          <a:fontRef idx="minor">
-            <a:schemeClr val="lt1"/>
-          </a:fontRef>
-        </p:style>
-        <p:txBody>
-          <a:bodyPr rtlCol="0" anchor="ctr"/>
-          <a:lstStyle/>
-          <a:p>
-            <a:pPr algn="ctr"/>
-          </a:p>
-        </p:txBody>
-      </p:sp>
-      <p:sp>
-        <p:nvSpPr>
-          <p:cNvPr id="13" name="TextBox 12"/>
-          <p:cNvSpPr txBox="1"/>
-          <p:nvPr/>
-        </p:nvSpPr>
-        <p:spPr>
-          <a:xfrm>
-            <a:off x="4629150" y="3429000"/>
-            <a:ext cx="781050" cy="123825"/>
-          </a:xfrm>
-          <a:prstGeom prst="rect">
-            <a:avLst/>
-          </a:prstGeom>
-          <a:noFill/>
-        </p:spPr>
-        <p:txBody>
-          <a:bodyPr wrap="none" anchor="t" lIns="0" rIns="0" tIns="0" bIns="0">
-            <a:noAutofit/>
-          </a:bodyPr>
-          <a:lstStyle/>
-          <a:p>
-            <a:pPr algn="l"/>
-            <a:r>
-              <a:rPr sz="1350" b="1" i="0">
-                <a:solidFill>
-                  <a:srgbClr val="0066CC"/>
-                </a:solidFill>
-                <a:latin typeface="Roboto"/>
-              </a:rPr>
-              <a:t>EXPAND</a:t>
-            </a:r>
-          </a:p>
-        </p:txBody>
-      </p:sp>
-      <p:sp>
-        <p:nvSpPr>
-          <p:cNvPr id="14" name="TextBox 13"/>
-          <p:cNvSpPr txBox="1"/>
-          <p:nvPr/>
-        </p:nvSpPr>
-        <p:spPr>
-          <a:xfrm>
-            <a:off x="4629150" y="3857625"/>
-            <a:ext cx="1609725" cy="676275"/>
-          </a:xfrm>
-          <a:prstGeom prst="rect">
-            <a:avLst/>
-          </a:prstGeom>
-          <a:noFill/>
-        </p:spPr>
-        <p:txBody>
-          <a:bodyPr wrap="none" anchor="t" lIns="0" rIns="0" tIns="0" bIns="0">
-            <a:noAutofit/>
-          </a:bodyPr>
-          <a:lstStyle/>
-          <a:p>
-            <a:pPr algn="l"/>
-            <a:r>
-              <a:rPr sz="5700" b="0" i="0">
-                <a:solidFill>
-                  <a:srgbClr val="1D1D1F"/>
-                </a:solidFill>
-                <a:latin typeface="Roboto"/>
-              </a:rPr>
-              <a:t>$72K</a:t>
-            </a:r>
-          </a:p>
-        </p:txBody>
-      </p:sp>
-      <p:sp>
-        <p:nvSpPr>
-          <p:cNvPr id="15" name="TextBox 14"/>
-          <p:cNvSpPr txBox="1"/>
-          <p:nvPr/>
-        </p:nvSpPr>
-        <p:spPr>
-          <a:xfrm>
-            <a:off x="4629150" y="4857750"/>
-            <a:ext cx="1981200" cy="438150"/>
-          </a:xfrm>
-          <a:prstGeom prst="rect">
-            <a:avLst/>
-          </a:prstGeom>
-          <a:noFill/>
-        </p:spPr>
-        <p:txBody>
-          <a:bodyPr wrap="none" anchor="t" lIns="0" rIns="0" tIns="0" bIns="0">
-            <a:noAutofit/>
-          </a:bodyPr>
-          <a:lstStyle/>
-          <a:p>
-            <a:pPr algn="l">
-              <a:lnSpc>
-                <a:spcPts val="2175"/>
-              </a:lnSpc>
-            </a:pPr>
-            <a:r>
-              <a:rPr sz="1650" b="0" i="0">
-                <a:solidFill>
-                  <a:srgbClr val="6E6E73"/>
-                </a:solidFill>
-                <a:latin typeface="Roboto"/>
-              </a:rPr>
-              <a:t>Median year-two ACV</a:t>
-            </a:r>
-          </a:p>
-          <a:p>
-            <a:pPr algn="l">
-              <a:lnSpc>
-                <a:spcPts val="2175"/>
-              </a:lnSpc>
-            </a:pPr>
-            <a:r>
-              <a:rPr sz="1650" b="0" i="0">
-                <a:solidFill>
-                  <a:srgbClr val="6E6E73"/>
-                </a:solidFill>
-                <a:latin typeface="Roboto"/>
-              </a:rPr>
-              <a:t>3 connected teams</a:t>
-            </a:r>
-          </a:p>
-        </p:txBody>
-      </p:sp>
-      <p:sp>
-        <p:nvSpPr>
-          <p:cNvPr id="16" name="Rectangle 15"/>
-          <p:cNvSpPr/>
-          <p:nvPr/>
-        </p:nvSpPr>
-        <p:spPr>
-          <a:xfrm>
-            <a:off x="7581900" y="4333875"/>
-            <a:ext cx="400050" cy="19050"/>
-          </a:xfrm>
-          <a:prstGeom prst="rect">
-            <a:avLst/>
-          </a:prstGeom>
-          <a:solidFill>
-            <a:srgbClr val="D2D2D7"/>
-          </a:solidFill>
-          <a:ln>
-            <a:noFill/>
-          </a:ln>
-          <a:effectLst/>
-        </p:spPr>
-        <p:style>
-          <a:lnRef idx="1">
-            <a:schemeClr val="accent1"/>
-          </a:lnRef>
-          <a:fillRef idx="3">
-            <a:schemeClr val="accent1"/>
-          </a:fillRef>
-          <a:effectRef idx="2">
-            <a:schemeClr val="accent1"/>
-          </a:effectRef>
-          <a:fontRef idx="minor">
-            <a:schemeClr val="lt1"/>
-          </a:fontRef>
-        </p:style>
-        <p:txBody>
-          <a:bodyPr rtlCol="0" anchor="ctr"/>
-          <a:lstStyle/>
-          <a:p>
-            <a:pPr algn="ctr"/>
-          </a:p>
-        </p:txBody>
-      </p:sp>
-      <p:sp>
-        <p:nvSpPr>
-          <p:cNvPr id="17" name="Oval 16"/>
-          <p:cNvSpPr/>
-          <p:nvPr/>
-        </p:nvSpPr>
-        <p:spPr>
-          <a:xfrm>
-            <a:off x="7924800" y="4305300"/>
-            <a:ext cx="76200" cy="76200"/>
-          </a:xfrm>
-          <a:prstGeom prst="ellipse">
-            <a:avLst/>
-          </a:prstGeom>
-          <a:solidFill>
-            <a:srgbClr val="0066CC"/>
-          </a:solidFill>
-          <a:ln>
-            <a:noFill/>
-          </a:ln>
-          <a:effectLst/>
-        </p:spPr>
-        <p:style>
-          <a:lnRef idx="1">
-            <a:schemeClr val="accent1"/>
-          </a:lnRef>
-          <a:fillRef idx="3">
-            <a:schemeClr val="accent1"/>
-          </a:fillRef>
-          <a:effectRef idx="2">
-            <a:schemeClr val="accent1"/>
-          </a:effectRef>
-          <a:fontRef idx="minor">
-            <a:schemeClr val="lt1"/>
-          </a:fontRef>
-        </p:style>
-        <p:txBody>
-          <a:bodyPr rtlCol="0" anchor="ctr"/>
-          <a:lstStyle/>
-          <a:p>
-            <a:pPr algn="ctr"/>
-          </a:p>
-        </p:txBody>
-      </p:sp>
-      <p:sp>
-        <p:nvSpPr>
-          <p:cNvPr id="18" name="TextBox 17"/>
-          <p:cNvSpPr txBox="1"/>
-          <p:nvPr/>
-        </p:nvSpPr>
-        <p:spPr>
-          <a:xfrm>
-            <a:off x="8343900" y="3429000"/>
-            <a:ext cx="1095375" cy="123825"/>
-          </a:xfrm>
-          <a:prstGeom prst="rect">
-            <a:avLst/>
-          </a:prstGeom>
-          <a:noFill/>
-        </p:spPr>
-        <p:txBody>
-          <a:bodyPr wrap="none" anchor="t" lIns="0" rIns="0" tIns="0" bIns="0">
-            <a:noAutofit/>
-          </a:bodyPr>
-          <a:lstStyle/>
-          <a:p>
-            <a:pPr algn="l"/>
-            <a:r>
-              <a:rPr sz="1350" b="1" i="0">
-                <a:solidFill>
-                  <a:srgbClr val="0066CC"/>
-                </a:solidFill>
-                <a:latin typeface="Roboto"/>
-              </a:rPr>
-              <a:t>COMPOUND</a:t>
-            </a:r>
-          </a:p>
-        </p:txBody>
-      </p:sp>
-      <p:sp>
-        <p:nvSpPr>
-          <p:cNvPr id="19" name="TextBox 18"/>
-          <p:cNvSpPr txBox="1"/>
-          <p:nvPr/>
-        </p:nvSpPr>
-        <p:spPr>
-          <a:xfrm>
-            <a:off x="8343900" y="3857625"/>
-            <a:ext cx="1676400" cy="533400"/>
-          </a:xfrm>
-          <a:prstGeom prst="rect">
-            <a:avLst/>
-          </a:prstGeom>
-          <a:noFill/>
-        </p:spPr>
-        <p:txBody>
-          <a:bodyPr wrap="none" anchor="t" lIns="0" rIns="0" tIns="0" bIns="0">
-            <a:noAutofit/>
-          </a:bodyPr>
-          <a:lstStyle/>
-          <a:p>
-            <a:pPr algn="l"/>
-            <a:r>
-              <a:rPr sz="5700" b="0" i="0">
-                <a:solidFill>
-                  <a:srgbClr val="1D1D1F"/>
-                </a:solidFill>
-                <a:latin typeface="Roboto"/>
-              </a:rPr>
-              <a:t>118%</a:t>
-            </a:r>
-          </a:p>
-        </p:txBody>
-      </p:sp>
-      <p:sp>
-        <p:nvSpPr>
-          <p:cNvPr id="20" name="TextBox 19"/>
-          <p:cNvSpPr txBox="1"/>
-          <p:nvPr/>
-        </p:nvSpPr>
-        <p:spPr>
-          <a:xfrm>
-            <a:off x="8343900" y="4857750"/>
-            <a:ext cx="2000250" cy="476250"/>
-          </a:xfrm>
-          <a:prstGeom prst="rect">
-            <a:avLst/>
-          </a:prstGeom>
-          <a:noFill/>
-        </p:spPr>
-        <p:txBody>
-          <a:bodyPr wrap="none" anchor="t" lIns="0" rIns="0" tIns="0" bIns="0">
-            <a:noAutofit/>
-          </a:bodyPr>
-          <a:lstStyle/>
-          <a:p>
-            <a:pPr algn="l">
-              <a:lnSpc>
-                <a:spcPts val="2175"/>
-              </a:lnSpc>
-            </a:pPr>
-            <a:r>
-              <a:rPr sz="1650" b="0" i="0">
-                <a:solidFill>
-                  <a:srgbClr val="6E6E73"/>
-                </a:solidFill>
-                <a:latin typeface="Roboto"/>
-              </a:rPr>
-              <a:t>Net revenue retention</a:t>
-            </a:r>
-          </a:p>
-          <a:p>
-            <a:pPr algn="l">
-              <a:lnSpc>
-                <a:spcPts val="2175"/>
-              </a:lnSpc>
-            </a:pPr>
-            <a:r>
-              <a:rPr sz="1650" b="0" i="0">
-                <a:solidFill>
-                  <a:srgbClr val="6E6E73"/>
-                </a:solidFill>
-                <a:latin typeface="Roboto"/>
-              </a:rPr>
-              <a:t>Trailing 12 months</a:t>
-            </a:r>
-          </a:p>
-        </p:txBody>
-      </p:sp>
-      <p:sp>
-        <p:nvSpPr>
-          <p:cNvPr id="21" name="TextBox 20"/>
-          <p:cNvSpPr txBox="1"/>
-          <p:nvPr/>
-        </p:nvSpPr>
-        <p:spPr>
-          <a:xfrm>
-            <a:off x="914400" y="6343650"/>
-            <a:ext cx="3743325" cy="171450"/>
-          </a:xfrm>
-          <a:prstGeom prst="rect">
-            <a:avLst/>
-          </a:prstGeom>
-          <a:noFill/>
-        </p:spPr>
-        <p:txBody>
-          <a:bodyPr wrap="none" anchor="t" lIns="0" rIns="0" tIns="0" bIns="0">
-            <a:noAutofit/>
-          </a:bodyPr>
-          <a:lstStyle/>
-          <a:p>
-            <a:pPr algn="l"/>
-            <a:r>
-              <a:rPr sz="1350" b="0" i="0">
-                <a:solidFill>
-                  <a:srgbClr val="6E6E73"/>
-                </a:solidFill>
-                <a:latin typeface="Roboto"/>
-              </a:rPr>
-              <a:t>Illustrative pricing and retention metrics · Q2 2026</a:t>
-            </a:r>
-          </a:p>
-        </p:txBody>
-      </p:sp>
-    </p:spTree>
-  </p:cSld>
-  <p:clrMapOvr>
-    <a:masterClrMapping/>
-  </p:clrMapOvr>
-  <p:transition xmlns:p14="http://schemas.microsoft.com/office/powerpoint/2010/main" spd="fast" advClick="1" p14:dur="350">
-    <p:fade/>
-  </p:transition>
-  <p:timing>
-    <p:tnLst>
-      <p:par>
-        <p:cTn id="1" dur="indefinite" restart="never" nodeType="tmRoot">
-          <p:childTnLst>
-            <p:seq concurrent="1" nextAc="seek">
-              <p:cTn id="2" dur="indefinite" nodeType="mainSeq">
-                <p:childTnLst>
-                  <p:par>
-                    <p:cTn id="5" fill="hold">
-                      <p:stCondLst>
-                        <p:cond delay="indefinite"/>
-                      </p:stCondLst>
-                      <p:childTnLst>
-                        <p:par>
-                          <p:cTn id="6" fill="hold">
-                            <p:stCondLst>
-                              <p:cond delay="0"/>
-                            </p:stCondLst>
-                            <p:childTnLst>
-                              <p:par>
-                                <p:cTn id="7" presetID="10" presetClass="entr" presetSubtype="0" fill="hold" grpId="0" nodeType="clickEffect">
-                                  <p:stCondLst>
-                                    <p:cond delay="0"/>
-                                  </p:stCondLst>
-                                  <p:childTnLst>
-                                    <p:set>
-                                      <p:cBhvr>
-                                        <p:cTn id="8" dur="1" fill="hold">
-                                          <p:stCondLst>
-                                            <p:cond delay="0"/>
-                                          </p:stCondLst>
-                                        </p:cTn>
-                                        <p:tgtEl>
-                                          <p:spTgt spid="7"/>
-                                        </p:tgtEl>
-                                        <p:attrNameLst>
-                                          <p:attrName>style.visibility</p:attrName>
-                                        </p:attrNameLst>
-                                      </p:cBhvr>
-                                      <p:to>
-                                        <p:strVal val="visible"/>
-                                      </p:to>
-                                    </p:set>
-                                    <p:animEffect transition="in" filter="fade">
-                                      <p:cBhvr>
-                                        <p:cTn id="9" dur="400"/>
-                                        <p:tgtEl>
-                                          <p:spTgt spid="7"/>
-                                        </p:tgtEl>
-                                      </p:cBhvr>
-                                    </p:animEffect>
-                                  </p:childTnLst>
-                                </p:cTn>
-                              </p:par>
-                            </p:childTnLst>
-                          </p:cTn>
-                        </p:par>
-                      </p:childTnLst>
-                    </p:cTn>
-                  </p:par>
-                </p:childTnLst>
-              </p:cTn>
-              <p:prevCondLst>
-                <p:cond evt="onPrev" delay="0">
-                  <p:tgtEl>
-                    <p:sldTgt/>
-                  </p:tgtEl>
-                </p:cond>
-              </p:prevCondLst>
-              <p:nextCondLst>
-                <p:cond evt="onNext" delay="0">
-                  <p:tgtEl>
-                    <p:sldTgt/>
-                  </p:tgtEl>
-                </p:cond>
-              </p:nextCondLst>
-            </p:seq>
-            <p:par>
-              <p:cTn id="3" fill="hold">
-                <p:stCondLst>
-                  <p:cond delay="0"/>
-                </p:stCondLst>
-                <p:childTnLst>
-                  <p:set>
-                    <p:cBhvr>
-                      <p:cTn id="4" dur="1" fill="hold">
-                        <p:stCondLst>
-                          <p:cond delay="0"/>
-                        </p:stCondLst>
-                      </p:cTn>
-                      <p:tgtEl>
-                        <p:spTgt spid="7"/>
                       </p:tgtEl>
                       <p:attrNameLst>
                         <p:attrName>style.visibility</p:attrName>
@@ -13253,8 +13884,54 @@
         </p:nvSpPr>
         <p:spPr>
           <a:xfrm>
-            <a:off x="1143000" y="3476625"/>
-            <a:ext cx="4762500" cy="9525"/>
+            <a:off x="876300" y="2857500"/>
+            <a:ext cx="5429250" cy="3048000"/>
+          </a:xfrm>
+          <a:prstGeom prst="rect">
+            <a:avLst/>
+          </a:prstGeom>
+          <a:solidFill>
+            <a:srgbClr val="FFFFFF"/>
+          </a:solidFill>
+          <a:ln w="9525">
+            <a:solidFill>
+              <a:srgbClr val="D2D2D7"/>
+            </a:solidFill>
+          </a:ln>
+          <a:effectLst/>
+        </p:spPr>
+        <p:style>
+          <a:lnRef idx="1">
+            <a:schemeClr val="accent1"/>
+          </a:lnRef>
+          <a:fillRef idx="3">
+            <a:schemeClr val="accent1"/>
+          </a:fillRef>
+          <a:effectRef idx="2">
+            <a:schemeClr val="accent1"/>
+          </a:effectRef>
+          <a:fontRef idx="minor">
+            <a:schemeClr val="lt1"/>
+          </a:fontRef>
+        </p:style>
+        <p:txBody>
+          <a:bodyPr rtlCol="0" anchor="ctr"/>
+          <a:lstStyle/>
+          <a:p>
+            <a:pPr algn="ctr"/>
+          </a:p>
+        </p:txBody>
+      </p:sp>
+      <p:sp>
+        <p:nvSpPr>
+          <p:cNvPr id="9" name="Rectangle 8"/>
+          <p:cNvSpPr/>
+          <p:nvPr/>
+        </p:nvSpPr>
+        <p:spPr>
+          <a:xfrm>
+            <a:off x="1143000" y="4333875"/>
+            <a:ext cx="4857750" cy="9525"/>
           </a:xfrm>
           <a:prstGeom prst="rect">
             <a:avLst/>
@@ -13291,14 +13968,14 @@
       </p:sp>
       <p:sp>
         <p:nvSpPr>
-          <p:cNvPr id="9" name="Rectangle 8"/>
+          <p:cNvPr id="10" name="Rectangle 9"/>
           <p:cNvSpPr/>
           <p:nvPr/>
         </p:nvSpPr>
         <p:spPr>
           <a:xfrm>
-            <a:off x="3524250" y="2619375"/>
-            <a:ext cx="9525" cy="2857500"/>
+            <a:off x="3571875" y="3095625"/>
+            <a:ext cx="9525" cy="2524125"/>
           </a:xfrm>
           <a:prstGeom prst="rect">
             <a:avLst/>
@@ -13335,13 +14012,13 @@
       </p:sp>
       <p:sp>
         <p:nvSpPr>
-          <p:cNvPr id="10" name="Oval 9"/>
+          <p:cNvPr id="11" name="Oval 10"/>
           <p:cNvSpPr/>
           <p:nvPr/>
         </p:nvSpPr>
         <p:spPr>
           <a:xfrm>
-            <a:off x="2028825" y="4267200"/>
+            <a:off x="1743075" y="5029200"/>
             <a:ext cx="133350" cy="133350"/>
           </a:xfrm>
           <a:prstGeom prst="ellipse">
@@ -13379,13 +14056,13 @@
       </p:sp>
       <p:sp>
         <p:nvSpPr>
-          <p:cNvPr id="11" name="TextBox 10"/>
+          <p:cNvPr id="12" name="TextBox 11"/>
           <p:cNvSpPr txBox="1"/>
           <p:nvPr/>
         </p:nvSpPr>
         <p:spPr>
           <a:xfrm>
-            <a:off x="2238375" y="4219575"/>
+            <a:off x="1952625" y="4981575"/>
             <a:ext cx="152400" cy="123825"/>
           </a:xfrm>
           <a:prstGeom prst="rect">
@@ -13414,13 +14091,13 @@
       </p:sp>
       <p:sp>
         <p:nvSpPr>
-          <p:cNvPr id="12" name="Oval 11"/>
+          <p:cNvPr id="13" name="Oval 12"/>
           <p:cNvSpPr/>
           <p:nvPr/>
         </p:nvSpPr>
         <p:spPr>
           <a:xfrm>
-            <a:off x="4267200" y="4410075"/>
+            <a:off x="4410075" y="5029200"/>
             <a:ext cx="133350" cy="133350"/>
           </a:xfrm>
           <a:prstGeom prst="ellipse">
@@ -13458,13 +14135,13 @@
       </p:sp>
       <p:sp>
         <p:nvSpPr>
-          <p:cNvPr id="13" name="TextBox 12"/>
+          <p:cNvPr id="14" name="TextBox 13"/>
           <p:cNvSpPr txBox="1"/>
           <p:nvPr/>
         </p:nvSpPr>
         <p:spPr>
           <a:xfrm>
-            <a:off x="4476750" y="4362450"/>
+            <a:off x="4619625" y="4981575"/>
             <a:ext cx="809625" cy="123825"/>
           </a:xfrm>
           <a:prstGeom prst="rect">
@@ -13493,13 +14170,13 @@
       </p:sp>
       <p:sp>
         <p:nvSpPr>
-          <p:cNvPr id="14" name="Oval 13"/>
+          <p:cNvPr id="15" name="Oval 14"/>
           <p:cNvSpPr/>
           <p:nvPr/>
         </p:nvSpPr>
         <p:spPr>
           <a:xfrm>
-            <a:off x="4410075" y="2981325"/>
+            <a:off x="4457700" y="3648075"/>
             <a:ext cx="133350" cy="133350"/>
           </a:xfrm>
           <a:prstGeom prst="ellipse">
@@ -13537,13 +14214,13 @@
       </p:sp>
       <p:sp>
         <p:nvSpPr>
-          <p:cNvPr id="15" name="TextBox 14"/>
+          <p:cNvPr id="16" name="TextBox 15"/>
           <p:cNvSpPr txBox="1"/>
           <p:nvPr/>
         </p:nvSpPr>
         <p:spPr>
           <a:xfrm>
-            <a:off x="4619625" y="2933700"/>
+            <a:off x="4667250" y="3600450"/>
             <a:ext cx="809625" cy="123825"/>
           </a:xfrm>
           <a:prstGeom prst="rect">
@@ -13572,14 +14249,14 @@
       </p:sp>
       <p:sp>
         <p:nvSpPr>
-          <p:cNvPr id="16" name="Oval 15"/>
+          <p:cNvPr id="17" name="Oval 16"/>
           <p:cNvSpPr/>
           <p:nvPr/>
         </p:nvSpPr>
         <p:spPr>
           <a:xfrm>
-            <a:off x="5133975" y="2705100"/>
-            <a:ext cx="209550" cy="209550"/>
+            <a:off x="5438775" y="3152775"/>
+            <a:ext cx="266700" cy="266700"/>
           </a:xfrm>
           <a:prstGeom prst="ellipse">
             <a:avLst/>
@@ -13616,13 +14293,13 @@
       </p:sp>
       <p:sp>
         <p:nvSpPr>
-          <p:cNvPr id="17" name="TextBox 16"/>
+          <p:cNvPr id="18" name="TextBox 17"/>
           <p:cNvSpPr txBox="1"/>
           <p:nvPr/>
         </p:nvSpPr>
         <p:spPr>
           <a:xfrm>
-            <a:off x="5381625" y="2695575"/>
+            <a:off x="5715000" y="3171825"/>
             <a:ext cx="428625" cy="123825"/>
           </a:xfrm>
           <a:prstGeom prst="rect">
@@ -13651,13 +14328,13 @@
       </p:sp>
       <p:sp>
         <p:nvSpPr>
-          <p:cNvPr id="18" name="TextBox 17"/>
+          <p:cNvPr id="19" name="TextBox 18"/>
           <p:cNvSpPr txBox="1"/>
           <p:nvPr/>
         </p:nvSpPr>
         <p:spPr>
           <a:xfrm>
-            <a:off x="4333875" y="5572125"/>
+            <a:off x="4619625" y="5638800"/>
             <a:ext cx="1381125" cy="123825"/>
           </a:xfrm>
           <a:prstGeom prst="rect">
@@ -13686,13 +14363,13 @@
       </p:sp>
       <p:sp>
         <p:nvSpPr>
-          <p:cNvPr id="19" name="TextBox 18"/>
+          <p:cNvPr id="20" name="TextBox 19"/>
           <p:cNvSpPr txBox="1"/>
           <p:nvPr/>
         </p:nvSpPr>
         <p:spPr>
           <a:xfrm>
-            <a:off x="1000125" y="2619375"/>
+            <a:off x="1028700" y="3048000"/>
             <a:ext cx="1219200" cy="123825"/>
           </a:xfrm>
           <a:prstGeom prst="rect">
@@ -13721,13 +14398,13 @@
       </p:sp>
       <p:sp>
         <p:nvSpPr>
-          <p:cNvPr id="20" name="TextBox 19"/>
+          <p:cNvPr id="21" name="TextBox 20"/>
           <p:cNvSpPr txBox="1"/>
           <p:nvPr/>
         </p:nvSpPr>
         <p:spPr>
           <a:xfrm>
-            <a:off x="7000875" y="3333750"/>
+            <a:off x="7239000" y="3143250"/>
             <a:ext cx="1857375" cy="123825"/>
           </a:xfrm>
           <a:prstGeom prst="rect">
@@ -13756,13 +14433,13 @@
       </p:sp>
       <p:sp>
         <p:nvSpPr>
-          <p:cNvPr id="21" name="TextBox 20"/>
+          <p:cNvPr id="22" name="TextBox 21"/>
           <p:cNvSpPr txBox="1"/>
           <p:nvPr/>
         </p:nvSpPr>
         <p:spPr>
           <a:xfrm>
-            <a:off x="7000875" y="3905250"/>
+            <a:off x="7239000" y="3714750"/>
             <a:ext cx="190500" cy="123825"/>
           </a:xfrm>
           <a:prstGeom prst="rect">
@@ -13791,13 +14468,13 @@
       </p:sp>
       <p:sp>
         <p:nvSpPr>
-          <p:cNvPr id="22" name="TextBox 21"/>
+          <p:cNvPr id="23" name="TextBox 22"/>
           <p:cNvSpPr txBox="1"/>
           <p:nvPr/>
         </p:nvSpPr>
         <p:spPr>
           <a:xfrm>
-            <a:off x="7524750" y="3857625"/>
+            <a:off x="7762875" y="3667125"/>
             <a:ext cx="3219450" cy="438150"/>
           </a:xfrm>
           <a:prstGeom prst="rect">
@@ -13846,13 +14523,13 @@
       </p:sp>
       <p:sp>
         <p:nvSpPr>
-          <p:cNvPr id="23" name="TextBox 22"/>
+          <p:cNvPr id="24" name="TextBox 23"/>
           <p:cNvSpPr txBox="1"/>
           <p:nvPr/>
         </p:nvSpPr>
         <p:spPr>
           <a:xfrm>
-            <a:off x="7000875" y="4572000"/>
+            <a:off x="7239000" y="4438650"/>
             <a:ext cx="190500" cy="123825"/>
           </a:xfrm>
           <a:prstGeom prst="rect">
@@ -13881,13 +14558,13 @@
       </p:sp>
       <p:sp>
         <p:nvSpPr>
-          <p:cNvPr id="24" name="TextBox 23"/>
+          <p:cNvPr id="25" name="TextBox 24"/>
           <p:cNvSpPr txBox="1"/>
           <p:nvPr/>
         </p:nvSpPr>
         <p:spPr>
           <a:xfrm>
-            <a:off x="7524750" y="4524375"/>
+            <a:off x="7762875" y="4391025"/>
             <a:ext cx="3362325" cy="438150"/>
           </a:xfrm>
           <a:prstGeom prst="rect">
@@ -13936,13 +14613,13 @@
       </p:sp>
       <p:sp>
         <p:nvSpPr>
-          <p:cNvPr id="25" name="TextBox 24"/>
+          <p:cNvPr id="26" name="TextBox 25"/>
           <p:cNvSpPr txBox="1"/>
           <p:nvPr/>
         </p:nvSpPr>
         <p:spPr>
           <a:xfrm>
-            <a:off x="7000875" y="5238750"/>
+            <a:off x="7239000" y="5162550"/>
             <a:ext cx="190500" cy="123825"/>
           </a:xfrm>
           <a:prstGeom prst="rect">
@@ -13971,13 +14648,13 @@
       </p:sp>
       <p:sp>
         <p:nvSpPr>
-          <p:cNvPr id="26" name="TextBox 25"/>
+          <p:cNvPr id="27" name="TextBox 26"/>
           <p:cNvSpPr txBox="1"/>
           <p:nvPr/>
         </p:nvSpPr>
         <p:spPr>
           <a:xfrm>
-            <a:off x="7524750" y="5191125"/>
+            <a:off x="7762875" y="5114925"/>
             <a:ext cx="3390900" cy="400050"/>
           </a:xfrm>
           <a:prstGeom prst="rect">
@@ -14026,7 +14703,7 @@
       </p:sp>
       <p:sp>
         <p:nvSpPr>
-          <p:cNvPr id="27" name="TextBox 26"/>
+          <p:cNvPr id="28" name="TextBox 27"/>
           <p:cNvSpPr txBox="1"/>
           <p:nvPr/>
         </p:nvSpPr>
